--- a/K-JAMDS_효과척도_발표정리본.pptx
+++ b/K-JAMDS_효과척도_발표정리본.pptx
@@ -315,7 +315,7 @@
                 <a:latin typeface="Malgun Gothic"/>
                 <a:ea typeface="Malgun Gothic"/>
               </a:rPr>
-              <a:t>176 → 194</a:t>
+              <a:t>178 → 192</a:t>
             </a:r>
           </a:p>
         </p:txBody>
@@ -428,7 +428,7 @@
                 <a:latin typeface="Malgun Gothic"/>
                 <a:ea typeface="Malgun Gothic"/>
               </a:rPr>
-              <a:t>198 → 180초</a:t>
+              <a:t>222 → 215초</a:t>
             </a:r>
           </a:p>
         </p:txBody>
@@ -541,7 +541,7 @@
                 <a:latin typeface="Malgun Gothic"/>
                 <a:ea typeface="Malgun Gothic"/>
               </a:rPr>
-              <a:t>52 → 20초</a:t>
+              <a:t>58 → 20초</a:t>
             </a:r>
           </a:p>
         </p:txBody>
@@ -654,7 +654,7 @@
                 <a:latin typeface="Malgun Gothic"/>
                 <a:ea typeface="Malgun Gothic"/>
               </a:rPr>
-              <a:t>6~9 → 4~5</a:t>
+              <a:t>6~9 → 4~6</a:t>
             </a:r>
           </a:p>
         </p:txBody>
@@ -739,7 +739,7 @@
                 <a:latin typeface="Malgun Gothic"/>
                 <a:ea typeface="Malgun Gothic"/>
               </a:rPr>
-              <a:t>조건: SC3 복합 동시 포화 · 한반도 본 배치(지휘소 96 · 포대 84) · 위협 228개(탄도탄 53 · 방사포 90 · 순항 16 · 전투기 16 · 소형 무인기 53) · 생성 1800초 / 관측 3600초 · seed 29(재현성 30·31) · 표준 절차(대기 지시는 준비만 · 발사는 지휘소 명령 · 예외는 자위권 발사) · 결과서 5판(2026-10-03) 기준 · 모든 수치는 공개자료 기반 정책연구용 개념값</a:t>
+              <a:t>조건: SC3 복합 동시 포화 · 한반도 본 배치(지휘소 96 · 포대 84) · 위협 228개(탄도탄 53 · 방사포 90 · 순항 16 · 전투기 16 · 소형 무인기 53) · 생성 1800초 / 관측 3600초 · seed 29(재현성 30·31) · 표준 절차(대기 지시는 준비만 · 발사는 지휘소 명령 · 예외는 자위권 발사) · 탄도·공중 위협 모두 발사·이륙 원점에서 생성 · 결과서 6판(2026-10-04) 기준 · 모든 수치는 공개자료 기반 정책연구용 개념값</a:t>
             </a:r>
           </a:p>
         </p:txBody>
@@ -885,7 +885,7 @@
                 <a:latin typeface="Malgun Gothic"/>
                 <a:ea typeface="Malgun Gothic"/>
               </a:rPr>
-              <a:t>176 → 194</a:t>
+              <a:t>178 → 192</a:t>
             </a:r>
           </a:p>
         </p:txBody>
@@ -929,7 +929,7 @@
                 <a:latin typeface="Malgun Gothic"/>
                 <a:ea typeface="Malgun Gothic"/>
               </a:rPr>
-              <a:t>격추(228개 중) · seed 3개 평균 187 → 201 · +18·+19·+6</a:t>
+              <a:t>격추(228개 중) · seed 3개 평균 185 → 198 · +14·+14·+13</a:t>
             </a:r>
           </a:p>
         </p:txBody>
@@ -1001,7 +1001,7 @@
                 <a:latin typeface="Malgun Gothic"/>
                 <a:ea typeface="Malgun Gothic"/>
               </a:rPr>
-              <a:t>198 → 180초</a:t>
+              <a:t>222 → 215초</a:t>
             </a:r>
           </a:p>
         </p:txBody>
@@ -1045,7 +1045,7 @@
                 <a:latin typeface="Malgun Gothic"/>
                 <a:ea typeface="Malgun Gothic"/>
               </a:rPr>
-              <a:t>교전 시작까지 평균 · 결심 52→20 · 77→17초</a:t>
+              <a:t>교전 시작까지 평균 · 결심 58→20 · 84→16초</a:t>
             </a:r>
           </a:p>
         </p:txBody>
@@ -1117,7 +1117,7 @@
                 <a:latin typeface="Malgun Gothic"/>
                 <a:ea typeface="Malgun Gothic"/>
               </a:rPr>
-              <a:t>6~9 → 4~5</a:t>
+              <a:t>6~9 → 4~6</a:t>
             </a:r>
           </a:p>
         </p:txBody>
@@ -1161,7 +1161,7 @@
                 <a:latin typeface="Malgun Gothic"/>
                 <a:ea typeface="Malgun Gothic"/>
               </a:rPr>
-              <a:t>소형 무인기 노드 수 · 순항 7 → 4~7 · 음성 0</a:t>
+              <a:t>소형 무인기 노드 수 · 전투기 7~9 → 6~7 · 음성 0</a:t>
             </a:r>
           </a:p>
         </p:txBody>
@@ -1233,7 +1233,7 @@
                 <a:latin typeface="Malgun Gothic"/>
                 <a:ea typeface="Malgun Gothic"/>
               </a:rPr>
-              <a:t>7 → 17건</a:t>
+              <a:t>8 → 12건</a:t>
             </a:r>
           </a:p>
         </p:txBody>
@@ -1277,7 +1277,7 @@
                 <a:latin typeface="Malgun Gothic"/>
                 <a:ea typeface="Malgun Gothic"/>
               </a:rPr>
-              <a:t>한미 중복 발사(As-Is 음성 엇갈림 · To-Be 협조 고리 밖 천마)</a:t>
+              <a:t>한미 중복 발사(As-Is 음성 엇갈림 · To-Be 군단 방공이 협조 고리 밖)</a:t>
             </a:r>
           </a:p>
         </p:txBody>
@@ -1362,7 +1362,7 @@
                 <a:latin typeface="Malgun Gothic"/>
                 <a:ea typeface="Malgun Gothic"/>
               </a:rPr>
-              <a:t>방사포 54 → 63, 미군 없는 탄도탄. 요격 창이 넓은 위협(순항·전투기·소형 무인기)과 THAAD가 맡는 탄도탄에서는 시간·노드 수로만 나타난다.</a:t>
+              <a:t>방사포 51 → 64 — 두 체계 격추 차이의 거의 전부. 요격 창이 넓은 위협(순항·전투기·소형 무인기)과 THAAD가 맡는 탄도탄에서는 시간·노드 수로만 나타난다.</a:t>
             </a:r>
           </a:p>
         </p:txBody>
@@ -1617,7 +1617,7 @@
                 <a:latin typeface="Malgun Gothic"/>
                 <a:ea typeface="Malgun Gothic"/>
               </a:rPr>
-              <a:t>군단 방공이 한미 협조 고리 밖에 있어 순항미사일에서 Patriot과 천마의 중복 발사 17건 — 교전 현황 공유 계선이 모델에 없음.</a:t>
+              <a:t>군단 방공이 한미 협조 고리 밖에 있어 생기는 중복 발사 12건과, 공중 위협이 발사 원점에서 즉시 보이는 센서 모델(지형 차폐 없음) — 순항미사일의 사수(Patriot 대 천마)가 이 가정에 달려 있다.</a:t>
             </a:r>
           </a:p>
         </p:txBody>
@@ -1773,7 +1773,7 @@
                 <a:latin typeface="Malgun Gothic"/>
                 <a:ea typeface="Malgun Gothic"/>
               </a:rPr>
-              <a:t>K-JAMDS 효과척도 분석 결과서 5판(2026-10-03) · SC3 복합 동시 포화 · 한반도 본 배치(지휘소 96 · 포대 84) · 위협 228개 · seed 29 · 모든 수치는 공개자료 기반 정책연구용 개념값</a:t>
+              <a:t>K-JAMDS 효과척도 분석 결과서 6판(2026-10-04) · SC3 복합 동시 포화 · 한반도 본 배치(지휘소 96 · 포대 84) · 위협 228개 · seed 29 · 모든 수치는 공개자료 기반 정책연구용 개념값</a:t>
             </a:r>
           </a:p>
         </p:txBody>
@@ -2250,7 +2250,7 @@
                 <a:latin typeface="Malgun Gothic"/>
                 <a:ea typeface="Malgun Gothic"/>
               </a:rPr>
-              <a:t>동시 추적 수·빔 자원·갱신 주기 제한이 없어 「레이더가 바빠서 늦게 본다」는 효과가 어떤 수치에도 없다. 강도 3배 이상에서 레이더 포화가 지휘소보다 먼저 올 수 있다.</a:t>
+              <a:t>동시 추적 수·빔 자원 제한과 지형 차폐가 없어 「레이더가 바빠서·가려서 늦게 본다」는 효과가 어떤 수치에도 없다. 공중 위협을 발사 원점에서 생성해도 생성→탐지가 0~2초인 이유이며, 순항미사일의 사수(Patriot 대 천마)가 여기에 달려 있다.</a:t>
             </a:r>
           </a:p>
         </p:txBody>
@@ -2409,7 +2409,7 @@
                 <a:latin typeface="Malgun Gothic"/>
                 <a:ea typeface="Malgun Gothic"/>
               </a:rPr>
-              <a:t>음성 회선에 전문이 몰려도 각각 20초 뒤 따로 닿는다 — 실제 음성 회선은 한 번에 한 통화이므로 As-Is에 유리한 가정. 교전 현황 공유 채널만 용량이 있다(As-Is 148건 손실).</a:t>
+              <a:t>음성 회선에 전문이 몰려도 각각 20초 뒤 따로 닿는다 — 실제 음성 회선은 한 번에 한 통화이므로 As-Is에 유리한 가정. 교전 현황 공유 채널만 용량이 있다(As-Is 121건 손실).</a:t>
             </a:r>
           </a:p>
         </p:txBody>
@@ -2883,7 +2883,7 @@
                 <a:latin typeface="Malgun Gothic"/>
                 <a:ea typeface="Malgun Gothic"/>
               </a:rPr>
-              <a:t>K-JAMDS 효과척도 분석 결과서 5판(2026-10-03) · SC3 복합 동시 포화 · 한반도 본 배치(지휘소 96 · 포대 84) · 위협 228개 · seed 29 · 모든 수치는 공개자료 기반 정책연구용 개념값</a:t>
+              <a:t>K-JAMDS 효과척도 분석 결과서 6판(2026-10-04) · SC3 복합 동시 포화 · 한반도 본 배치(지휘소 96 · 포대 84) · 위협 228개 · seed 29 · 모든 수치는 공개자료 기반 정책연구용 개념값</a:t>
             </a:r>
           </a:p>
         </p:txBody>
@@ -3776,7 +3776,7 @@
                 <a:latin typeface="Malgun Gothic"/>
                 <a:ea typeface="Malgun Gothic"/>
               </a:rPr>
-              <a:t>예측 준비 시각 + 30초가 지나도 못 쏘면 포대가 CANTCO 회신, 지휘소가 1초 뒤 다른 사수 지정(seed 29 · As-Is 52건 · To-Be 35건)</a:t>
+              <a:t>예측 준비 시각 + 30초가 지나도 못 쏘면 포대가 CANTCO 회신, 지휘소가 1초 뒤 다른 사수 지정(seed 29 · As-Is 70건 · To-Be 37건)</a:t>
             </a:r>
           </a:p>
         </p:txBody>
@@ -3861,7 +3861,7 @@
                 <a:latin typeface="Malgun Gothic"/>
                 <a:ea typeface="Malgun Gothic"/>
               </a:rPr>
-              <a:t>사수 지정을 받지 못한 포대가 발사 마감이 닥친 위협에 「내가 맞을 것 같다」고 자체 판단해 쏜다(명령 없음). seed 29에서 자위권 결심 As-Is 12건 · To-Be 9건 중 실제 발사 2·3건, 나머지는 발사 직전 재검증에서 발사 불가. 화면에서는 붉은 점선 고리 + 「자위권 ③」 표식.</a:t>
+              <a:t>사수 지정을 받지 못한 포대가 발사 마감이 닥친 위협에 「내가 맞을 것 같다」고 자체 판단해 쏜다(명령 없음). seed 29에서 자위권 결심 As-Is 10건 · To-Be 11건 중 실제 발사 1·2건, 나머지는 발사 직전 재검증에서 발사 불가. 화면에서는 붉은 점선 고리 + 「자위권 ③」 표식.</a:t>
             </a:r>
           </a:p>
         </p:txBody>
@@ -3946,7 +3946,7 @@
                 <a:latin typeface="Malgun Gothic"/>
                 <a:ea typeface="Malgun Gothic"/>
               </a:rPr>
-              <a:t>4판까지는 ②의 대기 지시가 발사 권한을 겸해 포대가 조건이 갖춰지면 명령 없이 쏘는 「긴급발사」가 방사포의 5분의 4였다. 표준 절차(C2 명령 → 포대 요격 → 결과 보고)로 고치자 명령 경로의 차이가 그대로 드러나, 비슷하던 격추 수(211 대 205)가 176 대 194로 갈라졌다.</a:t>
+              <a:t>4판까지는 ②의 대기 지시가 발사 권한을 겸해 포대가 조건이 갖춰지면 명령 없이 쏘는 「긴급발사」가 방사포의 5분의 4였다. 표준 절차(C2 명령 → 포대 요격 → 결과 보고)로 고치자 명령 경로의 차이가 그대로 드러나, 비슷하던 격추 수(211 대 205)가 176 대 194로 갈라졌다. 6판은 공중 위협의 생성 기준까지 탄도와 같게(발사·이륙 원점) 맞춘 조건이며 178 대 192다.</a:t>
             </a:r>
           </a:p>
         </p:txBody>
@@ -4102,7 +4102,7 @@
                 <a:latin typeface="Malgun Gothic"/>
                 <a:ea typeface="Malgun Gothic"/>
               </a:rPr>
-              <a:t>K-JAMDS 효과척도 분석 결과서 5판(2026-10-03) · SC3 복합 동시 포화 · 한반도 본 배치(지휘소 96 · 포대 84) · 위협 228개 · seed 29 · 모든 수치는 공개자료 기반 정책연구용 개념값</a:t>
+              <a:t>K-JAMDS 효과척도 분석 결과서 6판(2026-10-04) · SC3 복합 동시 포화 · 한반도 본 배치(지휘소 96 · 포대 84) · 위협 228개 · seed 29 · 모든 수치는 공개자료 기반 정책연구용 개념값</a:t>
             </a:r>
           </a:p>
         </p:txBody>
@@ -4277,7 +4277,7 @@
                           <a:latin typeface="Malgun Gothic"/>
                           <a:ea typeface="Malgun Gothic"/>
                         </a:rPr>
-                        <a:t>탄도탄 ① THAAD가 쏘는 경우(가장 흔함 · 20·27건)</a:t>
+                        <a:t>탄도탄 ① THAAD가 쏘는 경우(가장 흔함 · 22·29건)</a:t>
                       </a:r>
                     </a:p>
                   </a:txBody>
@@ -4679,7 +4679,7 @@
                           <a:latin typeface="Malgun Gothic"/>
                           <a:ea typeface="Malgun Gothic"/>
                         </a:rPr>
-                        <a:t>방사포 ① 협조 없이 바로 명령(가장 흔함 · 23·33건)</a:t>
+                        <a:t>방사포 ① 협조 없이 바로 명령(가장 흔함 · 35·35건)</a:t>
                       </a:r>
                     </a:p>
                   </a:txBody>
@@ -4813,7 +4813,7 @@
                           <a:latin typeface="Malgun Gothic"/>
                           <a:ea typeface="Malgun Gothic"/>
                         </a:rPr>
-                        <a:t>방사포 ② Patriot 지휘소와 협조(16·23건)</a:t>
+                        <a:t>방사포 ② Patriot 지휘소와 협조(23·29건)</a:t>
                       </a:r>
                     </a:p>
                   </a:txBody>
@@ -4991,7 +4991,7 @@
                           <a:latin typeface="Malgun Gothic"/>
                           <a:ea typeface="Malgun Gothic"/>
                         </a:rPr>
-                        <a:t>Patriot 레이더 → Patriot 사격통제소 → Patriot 지휘소 → Patriot 사격통제소 → 발사 · 자위권 2건(대기 지시 → 사격통제소 … 포대 자체 판단)</a:t>
+                        <a:t>Patriot 레이더 → Patriot 사격통제소 → Patriot 지휘소 → Patriot 사격통제소 → 발사 · 자위권 1건(대기 지시 → 사격통제소 … 포대 자체 판단)</a:t>
                       </a:r>
                     </a:p>
                   </a:txBody>
@@ -5035,7 +5035,7 @@
                           <a:latin typeface="Malgun Gothic"/>
                           <a:ea typeface="Malgun Gothic"/>
                         </a:rPr>
-                        <a:t>같음 · 자위권 3건</a:t>
+                        <a:t>같음 · 자위권 2건</a:t>
                       </a:r>
                     </a:p>
                   </a:txBody>
@@ -5205,7 +5205,7 @@
                 <a:latin typeface="Malgun Gothic"/>
                 <a:ea typeface="Malgun Gothic"/>
               </a:rPr>
-              <a:t>방사포: 전부 지휘소 명령으로 쏘므로(자위권 2·3건 제외) As-Is 방공여단 중계 한 칸이 모든 경우에 들어가고, Patriot 협조가 붙은 항적(16·23건)에서는 음성 21초 왕복까지 더해진다 — 방사포 격추 54 대 63의 차이가 여기서 난다.</a:t>
+              <a:t>방사포: 전부 지휘소 명령으로 쏘므로(자위권 1·2건 제외) As-Is 방공여단 중계 한 칸이 모든 경우에 들어가고, Patriot 협조가 붙은 항적(23·29건)에서는 음성 21초 왕복까지 더해진다 — 방사포 격추 51 대 64의 차이가 여기서 난다.</a:t>
             </a:r>
           </a:p>
         </p:txBody>
@@ -5361,7 +5361,7 @@
                 <a:latin typeface="Malgun Gothic"/>
                 <a:ea typeface="Malgun Gothic"/>
               </a:rPr>
-              <a:t>K-JAMDS 효과척도 분석 결과서 5판(2026-10-03) · SC3 복합 동시 포화 · 한반도 본 배치(지휘소 96 · 포대 84) · 위협 228개 · seed 29 · 모든 수치는 공개자료 기반 정책연구용 개념값</a:t>
+              <a:t>K-JAMDS 효과척도 분석 결과서 6판(2026-10-04) · SC3 복합 동시 포화 · 한반도 본 배치(지휘소 96 · 포대 84) · 위협 228개 · seed 29 · 모든 수치는 공개자료 기반 정책연구용 개념값</a:t>
             </a:r>
           </a:p>
         </p:txBody>
@@ -5536,7 +5536,7 @@
                           <a:latin typeface="Malgun Gothic"/>
                           <a:ea typeface="Malgun Gothic"/>
                         </a:rPr>
-                        <a:t>순항미사일 ① 가장 흔함(12건 · 8+5건)</a:t>
+                        <a:t>순항미사일 ① 미군 Patriot 케이시가 쏘는 경우(가장 흔함 · 8·14건)</a:t>
                       </a:r>
                     </a:p>
                   </a:txBody>
@@ -5580,7 +5580,7 @@
                           <a:latin typeface="Malgun Gothic"/>
                           <a:ea typeface="Malgun Gothic"/>
                         </a:rPr>
-                        <a:t>Patriot 레이더 → Patriot 사격통제소 → Patriot 지휘소 →(음성 제안) 중앙방공통제소 → 방공여단 통제소 → 천궁-II·PAC-3 사격통제소 → 발사  [7칸]</a:t>
+                        <a:t>Patriot 레이더 → Patriot 사격통제소 → Patriot 지휘소 ⇄ 음성 협조 중앙방공통제소 → Patriot 사격통제소 → 발사  [7칸] · FPS-117이 먼저 보면 중앙방공통제소 →(음성) Patriot 지휘소 → … [5칸]</a:t>
                       </a:r>
                     </a:p>
                   </a:txBody>
@@ -5624,7 +5624,7 @@
                           <a:latin typeface="Malgun Gothic"/>
                           <a:ea typeface="Malgun Gothic"/>
                         </a:rPr>
-                        <a:t>TPS-880K → 군단 방공 지휘소 → 천마 사격통제소 → 천마  [4칸] · 상층 레이더가 본 경우 L-SAM 레이더 → 통합공중작전통제소 → 군단 방공 → 천마 [5칸]</a:t>
+                        <a:t>Patriot 레이더 → Patriot 사격통제소 → Patriot 지휘소 ⇄ 데이터링크 협조 통합공중작전통제소 → Patriot 사격통제소 → 발사  [7칸] · FPS-117이 먼저 보면 통합공중작전통제소 → Patriot 지휘소 → … [5칸]</a:t>
                       </a:r>
                     </a:p>
                   </a:txBody>
@@ -5670,7 +5670,7 @@
                           <a:latin typeface="Malgun Gothic"/>
                           <a:ea typeface="Malgun Gothic"/>
                         </a:rPr>
-                        <a:t>순항미사일 ② 미군 Patriot이 쏘는 경우</a:t>
+                        <a:t>순항미사일 ② 한국군 천궁-II · 천마가 쏘는 경우</a:t>
                       </a:r>
                     </a:p>
                   </a:txBody>
@@ -5714,7 +5714,7 @@
                           <a:latin typeface="Malgun Gothic"/>
                           <a:ea typeface="Malgun Gothic"/>
                         </a:rPr>
-                        <a:t>L-SAM 레이더 → 사격통제소 → 방공여단 → 중앙방공통제소 ⇄ 음성 Patriot 지휘소 → Patriot 사격통제소 → 발사</a:t>
+                        <a:t>Patriot 지휘소 →(음성 제안) 중앙방공통제소 → 방공여단 통제소 → 천궁-II 연천·충주 사격통제소 → 발사 (7건)</a:t>
                       </a:r>
                     </a:p>
                   </a:txBody>
@@ -5758,7 +5758,7 @@
                           <a:latin typeface="Malgun Gothic"/>
                           <a:ea typeface="Malgun Gothic"/>
                         </a:rPr>
-                        <a:t>L-SAM 레이더 → 통합공중작전통제소 → Patriot 지휘소 → Patriot 사격통제소 → 발사 (천마와 중복 발사)</a:t>
+                        <a:t>FPS-117 → 통합공중작전통제소 → 군단 방공 지휘소 → 천마 사격통제소 → 천마 (2건)</a:t>
                       </a:r>
                     </a:p>
                   </a:txBody>
@@ -5804,7 +5804,7 @@
                           <a:latin typeface="Malgun Gothic"/>
                           <a:ea typeface="Malgun Gothic"/>
                         </a:rPr>
-                        <a:t>전투기 ① Patriot 레이더가 본 경우(9·10건)</a:t>
+                        <a:t>전투기 ① L-SAM 레이더가 본 경우(10·12건)</a:t>
                       </a:r>
                     </a:p>
                   </a:txBody>
@@ -5848,7 +5848,7 @@
                           <a:latin typeface="Malgun Gothic"/>
                           <a:ea typeface="Malgun Gothic"/>
                         </a:rPr>
-                        <a:t>Patriot 레이더 → Patriot 사격통제소 → Patriot 지휘소 →(음성) 중앙방공통제소 → 방공여단 통제소 → PAC-3 사격통제소 → 발사  [7칸]</a:t>
+                        <a:t>L-SAM 레이더 → L-SAM 사격통제소 → 방공여단 → 중앙방공통제소 ⇄ 음성 Patriot 지휘소 → 방공여단 → 천궁-II·L-SAM 사격통제소 → 발사  [9칸]</a:t>
                       </a:r>
                     </a:p>
                   </a:txBody>
@@ -5892,7 +5892,7 @@
                           <a:latin typeface="Malgun Gothic"/>
                           <a:ea typeface="Malgun Gothic"/>
                         </a:rPr>
-                        <a:t>Patriot 레이더 → Patriot 사격통제소 → Patriot 지휘소 ⇄ 데이터링크 통합공중작전통제소 → Patriot·L-SAM 사격통제소 → 발사  [6~7칸]</a:t>
+                        <a:t>L-SAM 레이더 → 통합공중작전통제소 ⇄ 데이터링크 Patriot 지휘소 → 통합공중작전통제소 → L-SAM·천궁-II 사격통제소 → 발사  [6칸]</a:t>
                       </a:r>
                     </a:p>
                   </a:txBody>
@@ -5938,7 +5938,7 @@
                           <a:latin typeface="Malgun Gothic"/>
                           <a:ea typeface="Malgun Gothic"/>
                         </a:rPr>
-                        <a:t>전투기 ② L-SAM 레이더가 본 경우(7·6건)</a:t>
+                        <a:t>전투기 ② Patriot 레이더가 본 경우(6·4건)</a:t>
                       </a:r>
                     </a:p>
                   </a:txBody>
@@ -5982,7 +5982,7 @@
                           <a:latin typeface="Malgun Gothic"/>
                           <a:ea typeface="Malgun Gothic"/>
                         </a:rPr>
-                        <a:t>L-SAM 레이더 → L-SAM 사격통제소 → 방공여단 → 중앙방공통제소 ⇄ 음성 Patriot 지휘소 → 방공여단 → 천궁-II 사격통제소 → 발사  [9칸]</a:t>
+                        <a:t>Patriot 레이더 → Patriot 사격통제소 → Patriot 지휘소 →(음성) 중앙방공통제소 → 방공여단 통제소 → L-SAM 사격통제소 → 발사  [7칸]</a:t>
                       </a:r>
                     </a:p>
                   </a:txBody>
@@ -6026,7 +6026,7 @@
                           <a:latin typeface="Malgun Gothic"/>
                           <a:ea typeface="Malgun Gothic"/>
                         </a:rPr>
-                        <a:t>L-SAM 레이더 → 통합공중작전통제소 (⇄ 데이터링크 Patriot 지휘소) → 천궁-II 사격통제소 → 발사  [4~6칸]</a:t>
+                        <a:t>Patriot 레이더 → Patriot 사격통제소 → Patriot 지휘소 ⇄ 데이터링크 통합공중작전통제소 → Patriot 사격통제소 → 발사  [7칸]</a:t>
                       </a:r>
                     </a:p>
                   </a:txBody>
@@ -6072,7 +6072,7 @@
                           <a:latin typeface="Malgun Gothic"/>
                           <a:ea typeface="Malgun Gothic"/>
                         </a:rPr>
-                        <a:t>소형 무인기 ① 천궁-II 레이더가 본 경우(43·28건)</a:t>
+                        <a:t>소형 무인기 ① 천궁-II 레이더가 본 경우(34·26건)</a:t>
                       </a:r>
                     </a:p>
                   </a:txBody>
@@ -6116,7 +6116,7 @@
                           <a:latin typeface="Malgun Gothic"/>
                           <a:ea typeface="Malgun Gothic"/>
                         </a:rPr>
-                        <a:t>천궁-II 레이더 → 사격통제소 → 방공여단 → 중앙방공통제소 →(채팅) 군단 방공 →(음성 요청) 중앙방공통제소 →(음성 승인) 군단 방공 → 천마 사격통제소 → 천마  [9칸]</a:t>
+                        <a:t>천궁-II 백령·김포 레이더 → 사격통제소 → 방공여단 → 중앙방공통제소 →(채팅) 군단 방공 →(음성 요청) 중앙방공통제소 →(음성 승인) 군단 방공 → 천마 사격통제소 → 천마  [9칸]</a:t>
                       </a:r>
                     </a:p>
                   </a:txBody>
@@ -6206,7 +6206,7 @@
                           <a:latin typeface="Malgun Gothic"/>
                           <a:ea typeface="Malgun Gothic"/>
                         </a:rPr>
-                        <a:t>소형 무인기 ② TPS-880K가 본 경우(1·17건)</a:t>
+                        <a:t>소형 무인기 ② TPS-880K가 본 경우(11·24건)</a:t>
                       </a:r>
                     </a:p>
                   </a:txBody>
@@ -6250,7 +6250,7 @@
                           <a:latin typeface="Malgun Gothic"/>
                           <a:ea typeface="Malgun Gothic"/>
                         </a:rPr>
-                        <a:t>TPS-880K → 군단 방공 ⇄ 음성 중앙방공통제소 → 군단 방공 → 천마 사격통제소 → 천마  [6칸]</a:t>
+                        <a:t>TPS-880K → 군단 방공 →(음성 요청) 중앙방공통제소 →(음성 승인) 군단 방공 → 천마 사격통제소 → 천마  [6칸]</a:t>
                       </a:r>
                     </a:p>
                   </a:txBody>
@@ -6443,7 +6443,7 @@
                 <a:latin typeface="Malgun Gothic"/>
                 <a:ea typeface="Malgun Gothic"/>
               </a:rPr>
-              <a:t>순항·소형 무인기는 길이 짧아진 것이 아니라 사수와 길 자체가 바뀐다 — To-Be는 군단 방공 웹이 자기 레이더(TPS-880K)로 보고 자기 안에서 결심한다(천마 직접 교전 · 사용자 가정). 노드 −3~−4, 음성·채팅 0.</a:t>
+              <a:t>순항미사일은 발사 원점부터 생성되는 6판에서 두 체계 모두 Patriot 케이시가 쏜다(발사 직후 Patriot 레이더·FPS-117이 잡고, 결심 지휘소가 요격 창이 먼저 열리는 포대를 고름). 노드 수는 같고(5~7) 매체만 음성 → 데이터링크. 5판의 「천마 직접 교전」은 2건으로 줄었다.</a:t>
             </a:r>
           </a:p>
           <a:p>
@@ -6464,7 +6464,7 @@
                 <a:latin typeface="Malgun Gothic"/>
                 <a:ea typeface="Malgun Gothic"/>
               </a:rPr>
-              <a:t>전투기는 방공여단 통제소를 「올라갔다 내려오는」 두 칸과 음성 협조가 빠져 9 → 4~6. Patriot이 쏘는 항적은 협조 왕복이 남아 7로 같다. 순항에서 To-Be의 한미 중복(케이시 12발 · 천마 14발)은 군단 방공이 협조 고리 밖에 있어서다.</a:t>
+              <a:t>전투기·소형 무인기는 방공여단 중계와 중앙방공통제소 ⇄ 군단 방공의 채팅·음성 왕복이 빠져 9 → 6 · 9 → 5. TPS-880K가 먼저 보는 경우 As-Is도 승인 왕복만 남아 6칸이다.</a:t>
             </a:r>
           </a:p>
         </p:txBody>
@@ -6620,7 +6620,7 @@
                 <a:latin typeface="Malgun Gothic"/>
                 <a:ea typeface="Malgun Gothic"/>
               </a:rPr>
-              <a:t>K-JAMDS 효과척도 분석 결과서 5판(2026-10-03) · SC3 복합 동시 포화 · 한반도 본 배치(지휘소 96 · 포대 84) · 위협 228개 · seed 29 · 모든 수치는 공개자료 기반 정책연구용 개념값</a:t>
+              <a:t>K-JAMDS 효과척도 분석 결과서 6판(2026-10-04) · SC3 복합 동시 포화 · 한반도 본 배치(지휘소 96 · 포대 84) · 위협 228개 · seed 29 · 모든 수치는 공개자료 기반 정책연구용 개념값</a:t>
             </a:r>
           </a:p>
         </p:txBody>
@@ -7018,7 +7018,7 @@
                           <a:latin typeface="Malgun Gothic"/>
                           <a:ea typeface="Malgun Gothic"/>
                         </a:rPr>
-                        <a:t>5: 4 · 7: 41 · 9: 8</a:t>
+                        <a:t>5: 6 · 7: 39 · 9: 8</a:t>
                       </a:r>
                     </a:p>
                   </a:txBody>
@@ -7062,7 +7062,7 @@
                           <a:latin typeface="Malgun Gothic"/>
                           <a:ea typeface="Malgun Gothic"/>
                         </a:rPr>
-                        <a:t>5~9</a:t>
+                        <a:t>6~9</a:t>
                       </a:r>
                     </a:p>
                   </a:txBody>
@@ -7106,7 +7106,7 @@
                           <a:latin typeface="Malgun Gothic"/>
                           <a:ea typeface="Malgun Gothic"/>
                         </a:rPr>
-                        <a:t>5: 2 · 6: 13 · 7: 28 · 8: 6 · 9: 4</a:t>
+                        <a:t>6: 12 · 7: 30 · 8: 8 · 9: 3</a:t>
                       </a:r>
                     </a:p>
                   </a:txBody>
@@ -7284,7 +7284,7 @@
                           <a:latin typeface="Malgun Gothic"/>
                           <a:ea typeface="Malgun Gothic"/>
                         </a:rPr>
-                        <a:t>5: 36 · 7: 23</a:t>
+                        <a:t>5: 35 · 7: 23</a:t>
                       </a:r>
                     </a:p>
                   </a:txBody>
@@ -7372,7 +7372,7 @@
                           <a:latin typeface="Malgun Gothic"/>
                           <a:ea typeface="Malgun Gothic"/>
                         </a:rPr>
-                        <a:t>4: 36 · 5: 3 · 6: 26 · 7: 4</a:t>
+                        <a:t>4: 35 · 5: 3 · 6: 29 · 7: 1</a:t>
                       </a:r>
                     </a:p>
                   </a:txBody>
@@ -7506,7 +7506,7 @@
                           <a:latin typeface="Malgun Gothic"/>
                           <a:ea typeface="Malgun Gothic"/>
                         </a:rPr>
-                        <a:t>7</a:t>
+                        <a:t>5~7</a:t>
                       </a:r>
                     </a:p>
                   </a:txBody>
@@ -7550,7 +7550,7 @@
                           <a:latin typeface="Malgun Gothic"/>
                           <a:ea typeface="Malgun Gothic"/>
                         </a:rPr>
-                        <a:t>7: 16</a:t>
+                        <a:t>5: 4 · 7: 12</a:t>
                       </a:r>
                     </a:p>
                   </a:txBody>
@@ -7589,12 +7589,12 @@
                       <a:r>
                         <a:rPr lang="ko-KR" sz="1050" b="1" i="0" dirty="0">
                           <a:solidFill>
-                            <a:srgbClr val="1B7F3B"/>
-                          </a:solidFill>
-                          <a:latin typeface="Malgun Gothic"/>
-                          <a:ea typeface="Malgun Gothic"/>
-                        </a:rPr>
-                        <a:t>4~7</a:t>
+                            <a:srgbClr val="1D2A35"/>
+                          </a:solidFill>
+                          <a:latin typeface="Malgun Gothic"/>
+                          <a:ea typeface="Malgun Gothic"/>
+                        </a:rPr>
+                        <a:t>5~7</a:t>
                       </a:r>
                     </a:p>
                   </a:txBody>
@@ -7638,7 +7638,7 @@
                           <a:latin typeface="Malgun Gothic"/>
                           <a:ea typeface="Malgun Gothic"/>
                         </a:rPr>
-                        <a:t>4: 8 · 5: 6 · 6: 1 · 7: 1</a:t>
+                        <a:t>5: 5 · 7: 11</a:t>
                       </a:r>
                     </a:p>
                   </a:txBody>
@@ -7682,7 +7682,7 @@
                           <a:latin typeface="Malgun Gothic"/>
                           <a:ea typeface="Malgun Gothic"/>
                         </a:rPr>
-                        <a:t>사수가 바뀜 — Patriot·중앙방공통제소 7칸 → TPS-880K·군단 방공·천마 4칸(−3)</a:t>
+                        <a:t>같음 — 두 체계 모두 Patriot이 쏘고 협조 왕복이 남음(매체만 바뀜)</a:t>
                       </a:r>
                     </a:p>
                   </a:txBody>
@@ -7816,7 +7816,7 @@
                           <a:latin typeface="Malgun Gothic"/>
                           <a:ea typeface="Malgun Gothic"/>
                         </a:rPr>
-                        <a:t>7: 11 · 9: 5</a:t>
+                        <a:t>7: 6 · 9: 10</a:t>
                       </a:r>
                     </a:p>
                   </a:txBody>
@@ -7860,7 +7860,7 @@
                           <a:latin typeface="Malgun Gothic"/>
                           <a:ea typeface="Malgun Gothic"/>
                         </a:rPr>
-                        <a:t>4~7</a:t>
+                        <a:t>6~7</a:t>
                       </a:r>
                     </a:p>
                   </a:txBody>
@@ -7904,7 +7904,7 @@
                           <a:latin typeface="Malgun Gothic"/>
                           <a:ea typeface="Malgun Gothic"/>
                         </a:rPr>
-                        <a:t>4: 2 · 6: 8 · 7: 6</a:t>
+                        <a:t>6: 12 · 7: 4</a:t>
                       </a:r>
                     </a:p>
                   </a:txBody>
@@ -7948,7 +7948,7 @@
                           <a:latin typeface="Malgun Gothic"/>
                           <a:ea typeface="Malgun Gothic"/>
                         </a:rPr>
-                        <a:t>방공여단 중계와 되돌아오는 길(−1~−2) · Patriot이 쏘면 7로 같음</a:t>
+                        <a:t>방공여단 중계와 되돌아오는 길(−2~−3) · Patriot이 쏘면 7로 같음</a:t>
                       </a:r>
                     </a:p>
                   </a:txBody>
@@ -8082,7 +8082,7 @@
                           <a:latin typeface="Malgun Gothic"/>
                           <a:ea typeface="Malgun Gothic"/>
                         </a:rPr>
-                        <a:t>6: 1 · 7: 9 · 9: 43</a:t>
+                        <a:t>6: 11 · 7: 7 · 9: 34</a:t>
                       </a:r>
                     </a:p>
                   </a:txBody>
@@ -8126,7 +8126,7 @@
                           <a:latin typeface="Malgun Gothic"/>
                           <a:ea typeface="Malgun Gothic"/>
                         </a:rPr>
-                        <a:t>4~5</a:t>
+                        <a:t>4~6</a:t>
                       </a:r>
                     </a:p>
                   </a:txBody>
@@ -8170,7 +8170,7 @@
                           <a:latin typeface="Malgun Gothic"/>
                           <a:ea typeface="Malgun Gothic"/>
                         </a:rPr>
-                        <a:t>4: 24 · 5: 28</a:t>
+                        <a:t>4: 24 · 5: 26 · 6: 3</a:t>
                       </a:r>
                     </a:p>
                   </a:txBody>
@@ -8363,7 +8363,7 @@
                 <a:latin typeface="Malgun Gothic"/>
                 <a:ea typeface="Malgun Gothic"/>
               </a:rPr>
-              <a:t>어느 레이더가 먼저 보았는가(±1~2): 그린파인이면 「레이더 → 결심 지휘소」 2칸, AN/TPY-2이면 「AN/TPY-2 → THAAD 사격통제소 → THAAD 지휘소」 3칸 뒤에 협조 시작. 소형 무인기도 TPS-880K(4) 대 천궁-II 레이더(5).</a:t>
+              <a:t>어느 레이더가 먼저 보았는가(±1~2): 그린파인이면 「레이더 → 결심 지휘소」 2칸, AN/TPY-2이면 「AN/TPY-2 → THAAD 사격통제소 → THAAD 지휘소」 3칸 뒤에 협조 시작. 소형 무인기도 TPS-880K(4·6) 대 천궁-II 레이더(5·9), 순항도 FPS-117(5) 대 Patriot 레이더(7).</a:t>
             </a:r>
           </a:p>
           <a:p>
@@ -8426,7 +8426,7 @@
                 <a:latin typeface="Malgun Gothic"/>
                 <a:ea typeface="Malgun Gothic"/>
               </a:rPr>
-              <a:t>재지정·재교전은 노드 수를 늘리지 않는다(같은 길로 다시) — 시간만 는다. 구조가 바꾸는 것은 방공여단 중계·이중 왕복·순항의 사수뿐이고, 레이더·협조 횟수·사수 소속은 두 체계에 똑같이 작용해 To-Be에도 5~9의 폭이 남는다.</a:t>
+              <a:t>재지정·재교전은 노드 수를 늘리지 않는다(같은 길로 다시) — 시간만 는다. 구조가 바꾸는 것은 방공여단 중계·이중 왕복뿐이고, 레이더·협조 횟수·사수 소속은 두 체계에 똑같이 작용해 To-Be에도 폭이 남는다.</a:t>
             </a:r>
           </a:p>
         </p:txBody>
@@ -8582,7 +8582,7 @@
                 <a:latin typeface="Malgun Gothic"/>
                 <a:ea typeface="Malgun Gothic"/>
               </a:rPr>
-              <a:t>K-JAMDS 효과척도 분석 결과서 5판(2026-10-03) · SC3 복합 동시 포화 · 한반도 본 배치(지휘소 96 · 포대 84) · 위협 228개 · seed 29 · 모든 수치는 공개자료 기반 정책연구용 개념값</a:t>
+              <a:t>K-JAMDS 효과척도 분석 결과서 6판(2026-10-04) · SC3 복합 동시 포화 · 한반도 본 배치(지휘소 96 · 포대 84) · 위협 228개 · seed 29 · 모든 수치는 공개자료 기반 정책연구용 개념값</a:t>
             </a:r>
           </a:p>
         </p:txBody>
@@ -9110,7 +9110,7 @@
                           <a:latin typeface="Malgun Gothic"/>
                           <a:ea typeface="Malgun Gothic"/>
                         </a:rPr>
-                        <a:t>52</a:t>
+                        <a:t>58</a:t>
                       </a:r>
                     </a:p>
                   </a:txBody>
@@ -9154,7 +9154,7 @@
                           <a:latin typeface="Malgun Gothic"/>
                           <a:ea typeface="Malgun Gothic"/>
                         </a:rPr>
-                        <a:t>176</a:t>
+                        <a:t>167</a:t>
                       </a:r>
                     </a:p>
                   </a:txBody>
@@ -9198,7 +9198,7 @@
                           <a:latin typeface="Malgun Gothic"/>
                           <a:ea typeface="Malgun Gothic"/>
                         </a:rPr>
-                        <a:t>54</a:t>
+                        <a:t>58</a:t>
                       </a:r>
                     </a:p>
                   </a:txBody>
@@ -9420,7 +9420,7 @@
                           <a:latin typeface="Malgun Gothic"/>
                           <a:ea typeface="Malgun Gothic"/>
                         </a:rPr>
-                        <a:t>74</a:t>
+                        <a:t>76</a:t>
                       </a:r>
                     </a:p>
                   </a:txBody>
@@ -9464,7 +9464,7 @@
                           <a:latin typeface="Malgun Gothic"/>
                           <a:ea typeface="Malgun Gothic"/>
                         </a:rPr>
-                        <a:t>25</a:t>
+                        <a:t>22</a:t>
                       </a:r>
                     </a:p>
                   </a:txBody>
@@ -9508,7 +9508,7 @@
                           <a:latin typeface="Malgun Gothic"/>
                           <a:ea typeface="Malgun Gothic"/>
                         </a:rPr>
-                        <a:t>27</a:t>
+                        <a:t>28</a:t>
                       </a:r>
                     </a:p>
                   </a:txBody>
@@ -9552,7 +9552,7 @@
                           <a:latin typeface="Malgun Gothic"/>
                           <a:ea typeface="Malgun Gothic"/>
                         </a:rPr>
-                        <a:t>127</a:t>
+                        <a:t>125</a:t>
                       </a:r>
                     </a:p>
                   </a:txBody>
@@ -9686,7 +9686,7 @@
                           <a:latin typeface="Malgun Gothic"/>
                           <a:ea typeface="Malgun Gothic"/>
                         </a:rPr>
-                        <a:t>2</a:t>
+                        <a:t>3</a:t>
                       </a:r>
                     </a:p>
                   </a:txBody>
@@ -9730,6 +9730,94 @@
                           <a:latin typeface="Malgun Gothic"/>
                           <a:ea typeface="Malgun Gothic"/>
                         </a:rPr>
+                        <a:t>32</a:t>
+                      </a:r>
+                    </a:p>
+                  </a:txBody>
+                  <a:tcPr marL="54864" marR="54864" marT="36576" marB="36576" anchor="ctr">
+                    <a:lnL w="6350">
+                      <a:solidFill>
+                        <a:srgbClr val="C9D2DA"/>
+                      </a:solidFill>
+                    </a:lnL>
+                    <a:lnR w="6350">
+                      <a:solidFill>
+                        <a:srgbClr val="C9D2DA"/>
+                      </a:solidFill>
+                    </a:lnR>
+                    <a:lnT w="6350">
+                      <a:solidFill>
+                        <a:srgbClr val="C9D2DA"/>
+                      </a:solidFill>
+                    </a:lnT>
+                    <a:lnB w="6350">
+                      <a:solidFill>
+                        <a:srgbClr val="C9D2DA"/>
+                      </a:solidFill>
+                    </a:lnB>
+                    <a:solidFill>
+                      <a:srgbClr val="F3F6F8"/>
+                    </a:solidFill>
+                  </a:tcPr>
+                </a:tc>
+                <a:tc>
+                  <a:txBody>
+                    <a:bodyPr/>
+                    <a:lstStyle/>
+                    <a:p>
+                      <a:pPr algn="ctr"/>
+                      <a:r>
+                        <a:rPr lang="ko-KR" sz="1100" b="0" i="0" dirty="0">
+                          <a:solidFill>
+                            <a:srgbClr val="1D2A35"/>
+                          </a:solidFill>
+                          <a:latin typeface="Malgun Gothic"/>
+                          <a:ea typeface="Malgun Gothic"/>
+                        </a:rPr>
+                        <a:t>48</a:t>
+                      </a:r>
+                    </a:p>
+                  </a:txBody>
+                  <a:tcPr marL="54864" marR="54864" marT="36576" marB="36576" anchor="ctr">
+                    <a:lnL w="6350">
+                      <a:solidFill>
+                        <a:srgbClr val="C9D2DA"/>
+                      </a:solidFill>
+                    </a:lnL>
+                    <a:lnR w="6350">
+                      <a:solidFill>
+                        <a:srgbClr val="C9D2DA"/>
+                      </a:solidFill>
+                    </a:lnR>
+                    <a:lnT w="6350">
+                      <a:solidFill>
+                        <a:srgbClr val="C9D2DA"/>
+                      </a:solidFill>
+                    </a:lnT>
+                    <a:lnB w="6350">
+                      <a:solidFill>
+                        <a:srgbClr val="C9D2DA"/>
+                      </a:solidFill>
+                    </a:lnB>
+                    <a:solidFill>
+                      <a:srgbClr val="F3F6F8"/>
+                    </a:solidFill>
+                  </a:tcPr>
+                </a:tc>
+                <a:tc>
+                  <a:txBody>
+                    <a:bodyPr/>
+                    <a:lstStyle/>
+                    <a:p>
+                      <a:pPr algn="ctr"/>
+                      <a:r>
+                        <a:rPr lang="ko-KR" sz="1100" b="0" i="0" dirty="0">
+                          <a:solidFill>
+                            <a:srgbClr val="1D2A35"/>
+                          </a:solidFill>
+                          <a:latin typeface="Malgun Gothic"/>
+                          <a:ea typeface="Malgun Gothic"/>
+                        </a:rPr>
                         <a:t>24</a:t>
                       </a:r>
                     </a:p>
@@ -9767,94 +9855,6 @@
                     <a:p>
                       <a:pPr algn="ctr"/>
                       <a:r>
-                        <a:rPr lang="ko-KR" sz="1100" b="0" i="0" dirty="0">
-                          <a:solidFill>
-                            <a:srgbClr val="1D2A35"/>
-                          </a:solidFill>
-                          <a:latin typeface="Malgun Gothic"/>
-                          <a:ea typeface="Malgun Gothic"/>
-                        </a:rPr>
-                        <a:t>15</a:t>
-                      </a:r>
-                    </a:p>
-                  </a:txBody>
-                  <a:tcPr marL="54864" marR="54864" marT="36576" marB="36576" anchor="ctr">
-                    <a:lnL w="6350">
-                      <a:solidFill>
-                        <a:srgbClr val="C9D2DA"/>
-                      </a:solidFill>
-                    </a:lnL>
-                    <a:lnR w="6350">
-                      <a:solidFill>
-                        <a:srgbClr val="C9D2DA"/>
-                      </a:solidFill>
-                    </a:lnR>
-                    <a:lnT w="6350">
-                      <a:solidFill>
-                        <a:srgbClr val="C9D2DA"/>
-                      </a:solidFill>
-                    </a:lnT>
-                    <a:lnB w="6350">
-                      <a:solidFill>
-                        <a:srgbClr val="C9D2DA"/>
-                      </a:solidFill>
-                    </a:lnB>
-                    <a:solidFill>
-                      <a:srgbClr val="F3F6F8"/>
-                    </a:solidFill>
-                  </a:tcPr>
-                </a:tc>
-                <a:tc>
-                  <a:txBody>
-                    <a:bodyPr/>
-                    <a:lstStyle/>
-                    <a:p>
-                      <a:pPr algn="ctr"/>
-                      <a:r>
-                        <a:rPr lang="ko-KR" sz="1100" b="0" i="0" dirty="0">
-                          <a:solidFill>
-                            <a:srgbClr val="1D2A35"/>
-                          </a:solidFill>
-                          <a:latin typeface="Malgun Gothic"/>
-                          <a:ea typeface="Malgun Gothic"/>
-                        </a:rPr>
-                        <a:t>14</a:t>
-                      </a:r>
-                    </a:p>
-                  </a:txBody>
-                  <a:tcPr marL="54864" marR="54864" marT="36576" marB="36576" anchor="ctr">
-                    <a:lnL w="6350">
-                      <a:solidFill>
-                        <a:srgbClr val="C9D2DA"/>
-                      </a:solidFill>
-                    </a:lnL>
-                    <a:lnR w="6350">
-                      <a:solidFill>
-                        <a:srgbClr val="C9D2DA"/>
-                      </a:solidFill>
-                    </a:lnR>
-                    <a:lnT w="6350">
-                      <a:solidFill>
-                        <a:srgbClr val="C9D2DA"/>
-                      </a:solidFill>
-                    </a:lnT>
-                    <a:lnB w="6350">
-                      <a:solidFill>
-                        <a:srgbClr val="C9D2DA"/>
-                      </a:solidFill>
-                    </a:lnB>
-                    <a:solidFill>
-                      <a:srgbClr val="F3F6F8"/>
-                    </a:solidFill>
-                  </a:tcPr>
-                </a:tc>
-                <a:tc>
-                  <a:txBody>
-                    <a:bodyPr/>
-                    <a:lstStyle/>
-                    <a:p>
-                      <a:pPr algn="ctr"/>
-                      <a:r>
                         <a:rPr lang="ko-KR" sz="1100" b="1" i="0" dirty="0">
                           <a:solidFill>
                             <a:srgbClr val="B3261E"/>
@@ -9862,7 +9862,7 @@
                           <a:latin typeface="Malgun Gothic"/>
                           <a:ea typeface="Malgun Gothic"/>
                         </a:rPr>
-                        <a:t>55</a:t>
+                        <a:t>107</a:t>
                       </a:r>
                     </a:p>
                   </a:txBody>
@@ -9996,7 +9996,7 @@
                           <a:latin typeface="Malgun Gothic"/>
                           <a:ea typeface="Malgun Gothic"/>
                         </a:rPr>
-                        <a:t>1</a:t>
+                        <a:t>2</a:t>
                       </a:r>
                     </a:p>
                   </a:txBody>
@@ -10040,7 +10040,7 @@
                           <a:latin typeface="Malgun Gothic"/>
                           <a:ea typeface="Malgun Gothic"/>
                         </a:rPr>
-                        <a:t>32</a:t>
+                        <a:t>53</a:t>
                       </a:r>
                     </a:p>
                   </a:txBody>
@@ -10077,14 +10077,14 @@
                     <a:p>
                       <a:pPr algn="ctr"/>
                       <a:r>
-                        <a:rPr lang="ko-KR" sz="1100" b="0" i="0" dirty="0">
-                          <a:solidFill>
-                            <a:srgbClr val="1D2A35"/>
-                          </a:solidFill>
-                          <a:latin typeface="Malgun Gothic"/>
-                          <a:ea typeface="Malgun Gothic"/>
-                        </a:rPr>
-                        <a:t>20</a:t>
+                        <a:rPr lang="ko-KR" sz="1100" b="1" i="0" dirty="0">
+                          <a:solidFill>
+                            <a:srgbClr val="B3261E"/>
+                          </a:solidFill>
+                          <a:latin typeface="Malgun Gothic"/>
+                          <a:ea typeface="Malgun Gothic"/>
+                        </a:rPr>
+                        <a:t>33</a:t>
                       </a:r>
                     </a:p>
                   </a:txBody>
@@ -10121,14 +10121,14 @@
                     <a:p>
                       <a:pPr algn="ctr"/>
                       <a:r>
-                        <a:rPr lang="ko-KR" sz="1100" b="0" i="0" dirty="0">
-                          <a:solidFill>
-                            <a:srgbClr val="1D2A35"/>
-                          </a:solidFill>
-                          <a:latin typeface="Malgun Gothic"/>
-                          <a:ea typeface="Malgun Gothic"/>
-                        </a:rPr>
-                        <a:t>34</a:t>
+                        <a:rPr lang="ko-KR" sz="1100" b="1" i="0" dirty="0">
+                          <a:solidFill>
+                            <a:srgbClr val="B3261E"/>
+                          </a:solidFill>
+                          <a:latin typeface="Malgun Gothic"/>
+                          <a:ea typeface="Malgun Gothic"/>
+                        </a:rPr>
+                        <a:t>77</a:t>
                       </a:r>
                     </a:p>
                   </a:txBody>
@@ -10172,7 +10172,7 @@
                           <a:latin typeface="Malgun Gothic"/>
                           <a:ea typeface="Malgun Gothic"/>
                         </a:rPr>
-                        <a:t>88</a:t>
+                        <a:t>164</a:t>
                       </a:r>
                     </a:p>
                   </a:txBody>
@@ -10262,7 +10262,7 @@
                           <a:latin typeface="Malgun Gothic"/>
                           <a:ea typeface="Malgun Gothic"/>
                         </a:rPr>
-                        <a:t>0</a:t>
+                        <a:t>2</a:t>
                       </a:r>
                     </a:p>
                   </a:txBody>
@@ -10306,7 +10306,7 @@
                           <a:latin typeface="Malgun Gothic"/>
                           <a:ea typeface="Malgun Gothic"/>
                         </a:rPr>
-                        <a:t>3</a:t>
+                        <a:t>2</a:t>
                       </a:r>
                     </a:p>
                   </a:txBody>
@@ -10350,7 +10350,7 @@
                           <a:latin typeface="Malgun Gothic"/>
                           <a:ea typeface="Malgun Gothic"/>
                         </a:rPr>
-                        <a:t>77</a:t>
+                        <a:t>84</a:t>
                       </a:r>
                     </a:p>
                   </a:txBody>
@@ -10394,7 +10394,7 @@
                           <a:latin typeface="Malgun Gothic"/>
                           <a:ea typeface="Malgun Gothic"/>
                         </a:rPr>
-                        <a:t>269</a:t>
+                        <a:t>334</a:t>
                       </a:r>
                     </a:p>
                   </a:txBody>
@@ -10438,7 +10438,7 @@
                           <a:latin typeface="Malgun Gothic"/>
                           <a:ea typeface="Malgun Gothic"/>
                         </a:rPr>
-                        <a:t>19</a:t>
+                        <a:t>20</a:t>
                       </a:r>
                     </a:p>
                   </a:txBody>
@@ -10482,7 +10482,7 @@
                           <a:latin typeface="Malgun Gothic"/>
                           <a:ea typeface="Malgun Gothic"/>
                         </a:rPr>
-                        <a:t>362</a:t>
+                        <a:t>449</a:t>
                       </a:r>
                     </a:p>
                   </a:txBody>
@@ -11084,7 +11084,7 @@
                           <a:latin typeface="Malgun Gothic"/>
                           <a:ea typeface="Malgun Gothic"/>
                         </a:rPr>
-                        <a:t>201</a:t>
+                        <a:t>203</a:t>
                       </a:r>
                     </a:p>
                   </a:txBody>
@@ -11128,7 +11128,7 @@
                           <a:latin typeface="Malgun Gothic"/>
                           <a:ea typeface="Malgun Gothic"/>
                         </a:rPr>
-                        <a:t>62</a:t>
+                        <a:t>56</a:t>
                       </a:r>
                     </a:p>
                   </a:txBody>
@@ -11172,7 +11172,7 @@
                           <a:latin typeface="Malgun Gothic"/>
                           <a:ea typeface="Malgun Gothic"/>
                         </a:rPr>
-                        <a:t>291</a:t>
+                        <a:t>282</a:t>
                       </a:r>
                     </a:p>
                   </a:txBody>
@@ -11394,7 +11394,7 @@
                           <a:latin typeface="Malgun Gothic"/>
                           <a:ea typeface="Malgun Gothic"/>
                         </a:rPr>
-                        <a:t>18</a:t>
+                        <a:t>20</a:t>
                       </a:r>
                     </a:p>
                   </a:txBody>
@@ -11482,7 +11482,7 @@
                           <a:latin typeface="Malgun Gothic"/>
                           <a:ea typeface="Malgun Gothic"/>
                         </a:rPr>
-                        <a:t>118</a:t>
+                        <a:t>119</a:t>
                       </a:r>
                     </a:p>
                   </a:txBody>
@@ -11616,7 +11616,7 @@
                           <a:latin typeface="Malgun Gothic"/>
                           <a:ea typeface="Malgun Gothic"/>
                         </a:rPr>
-                        <a:t>1</a:t>
+                        <a:t>3</a:t>
                       </a:r>
                     </a:p>
                   </a:txBody>
@@ -11704,7 +11704,7 @@
                           <a:latin typeface="Malgun Gothic"/>
                           <a:ea typeface="Malgun Gothic"/>
                         </a:rPr>
-                        <a:t>7</a:t>
+                        <a:t>56</a:t>
                       </a:r>
                     </a:p>
                   </a:txBody>
@@ -11748,7 +11748,7 @@
                           <a:latin typeface="Malgun Gothic"/>
                           <a:ea typeface="Malgun Gothic"/>
                         </a:rPr>
-                        <a:t>10</a:t>
+                        <a:t>26</a:t>
                       </a:r>
                     </a:p>
                   </a:txBody>
@@ -11792,7 +11792,7 @@
                           <a:latin typeface="Malgun Gothic"/>
                           <a:ea typeface="Malgun Gothic"/>
                         </a:rPr>
-                        <a:t>20</a:t>
+                        <a:t>87</a:t>
                       </a:r>
                     </a:p>
                   </a:txBody>
@@ -11970,7 +11970,7 @@
                           <a:latin typeface="Malgun Gothic"/>
                           <a:ea typeface="Malgun Gothic"/>
                         </a:rPr>
-                        <a:t>12</a:t>
+                        <a:t>15</a:t>
                       </a:r>
                     </a:p>
                   </a:txBody>
@@ -12007,14 +12007,14 @@
                     <a:p>
                       <a:pPr algn="ctr"/>
                       <a:r>
-                        <a:rPr lang="ko-KR" sz="1100" b="0" i="0" dirty="0">
-                          <a:solidFill>
-                            <a:srgbClr val="1D2A35"/>
-                          </a:solidFill>
-                          <a:latin typeface="Malgun Gothic"/>
-                          <a:ea typeface="Malgun Gothic"/>
-                        </a:rPr>
-                        <a:t>17</a:t>
+                        <a:rPr lang="ko-KR" sz="1100" b="1" i="0" dirty="0">
+                          <a:solidFill>
+                            <a:srgbClr val="B3261E"/>
+                          </a:solidFill>
+                          <a:latin typeface="Malgun Gothic"/>
+                          <a:ea typeface="Malgun Gothic"/>
+                        </a:rPr>
+                        <a:t>48</a:t>
                       </a:r>
                     </a:p>
                   </a:txBody>
@@ -12051,14 +12051,14 @@
                     <a:p>
                       <a:pPr algn="ctr"/>
                       <a:r>
-                        <a:rPr lang="ko-KR" sz="1100" b="0" i="0" dirty="0">
-                          <a:solidFill>
-                            <a:srgbClr val="1D2A35"/>
-                          </a:solidFill>
-                          <a:latin typeface="Malgun Gothic"/>
-                          <a:ea typeface="Malgun Gothic"/>
-                        </a:rPr>
-                        <a:t>31</a:t>
+                        <a:rPr lang="ko-KR" sz="1100" b="1" i="0" dirty="0">
+                          <a:solidFill>
+                            <a:srgbClr val="B3261E"/>
+                          </a:solidFill>
+                          <a:latin typeface="Malgun Gothic"/>
+                          <a:ea typeface="Malgun Gothic"/>
+                        </a:rPr>
+                        <a:t>52</a:t>
                       </a:r>
                     </a:p>
                   </a:txBody>
@@ -12102,7 +12102,7 @@
                           <a:latin typeface="Malgun Gothic"/>
                           <a:ea typeface="Malgun Gothic"/>
                         </a:rPr>
-                        <a:t>59</a:t>
+                        <a:t>119</a:t>
                       </a:r>
                     </a:p>
                   </a:txBody>
@@ -12192,7 +12192,7 @@
                           <a:latin typeface="Malgun Gothic"/>
                           <a:ea typeface="Malgun Gothic"/>
                         </a:rPr>
-                        <a:t>0</a:t>
+                        <a:t>2</a:t>
                       </a:r>
                     </a:p>
                   </a:txBody>
@@ -12280,7 +12280,7 @@
                           <a:latin typeface="Malgun Gothic"/>
                           <a:ea typeface="Malgun Gothic"/>
                         </a:rPr>
-                        <a:t>17</a:t>
+                        <a:t>16</a:t>
                       </a:r>
                     </a:p>
                   </a:txBody>
@@ -12324,7 +12324,7 @@
                           <a:latin typeface="Malgun Gothic"/>
                           <a:ea typeface="Malgun Gothic"/>
                         </a:rPr>
-                        <a:t>330</a:t>
+                        <a:t>431</a:t>
                       </a:r>
                     </a:p>
                   </a:txBody>
@@ -12368,7 +12368,7 @@
                           <a:latin typeface="Malgun Gothic"/>
                           <a:ea typeface="Malgun Gothic"/>
                         </a:rPr>
-                        <a:t>17</a:t>
+                        <a:t>20</a:t>
                       </a:r>
                     </a:p>
                   </a:txBody>
@@ -12412,7 +12412,7 @@
                           <a:latin typeface="Malgun Gothic"/>
                           <a:ea typeface="Malgun Gothic"/>
                         </a:rPr>
-                        <a:t>372</a:t>
+                        <a:t>465</a:t>
                       </a:r>
                     </a:p>
                   </a:txBody>
@@ -12483,7 +12483,7 @@
                 <a:latin typeface="Malgun Gothic"/>
                 <a:ea typeface="Malgun Gothic"/>
               </a:rPr>
-              <a:t>전체 평균: 교전 시작까지 198 → 180초 · 격추까지 222 → 219초(seed 30·31도 235 → 224 · 231 → 222초) · 생성→탐지와 탐지→접수는 두 체계가 같다(같은 레이더·보고 주기)</a:t>
+              <a:t>전체 평균: 교전 시작까지 222 → 215초(seed 30·31도 229 → 218 · 232 → 225초) · 격추까지 263 → 252초 · 생성→탐지는 탄도·공중 모두 발사·이륙 원점 기준(공중 0~2초는 레이더 수평선·지형 차폐 없음의 결과)</a:t>
             </a:r>
           </a:p>
         </p:txBody>
@@ -12598,7 +12598,7 @@
                 <a:latin typeface="Malgun Gothic"/>
                 <a:ea typeface="Malgun Gothic"/>
               </a:rPr>
-              <a:t>K-JAMDS 효과척도 분석 결과서 5판(2026-10-03) · SC3 복합 동시 포화 · 한반도 본 배치(지휘소 96 · 포대 84) · 위협 228개 · seed 29 · 모든 수치는 공개자료 기반 정책연구용 개념값</a:t>
+              <a:t>K-JAMDS 효과척도 분석 결과서 6판(2026-10-04) · SC3 복합 동시 포화 · 한반도 본 배치(지휘소 96 · 포대 84) · 위협 228개 · seed 29 · 모든 수치는 공개자료 기반 정책연구용 개념값</a:t>
             </a:r>
           </a:p>
         </p:txBody>
@@ -12670,7 +12670,7 @@
                 <a:latin typeface="Malgun Gothic"/>
                 <a:ea typeface="Malgun Gothic"/>
               </a:rPr>
-              <a:t>52 → 20초</a:t>
+              <a:t>58 → 20초</a:t>
             </a:r>
           </a:p>
         </p:txBody>
@@ -12787,7 +12787,7 @@
                 <a:latin typeface="Malgun Gothic"/>
                 <a:ea typeface="Malgun Gothic"/>
               </a:rPr>
-              <a:t>77 → 17초</a:t>
+              <a:t>84 → 16초</a:t>
             </a:r>
           </a:p>
         </p:txBody>
@@ -12904,7 +12904,7 @@
                 <a:latin typeface="Malgun Gothic"/>
                 <a:ea typeface="Malgun Gothic"/>
               </a:rPr>
-              <a:t>55 → 20초</a:t>
+              <a:t>53 → 15초</a:t>
             </a:r>
           </a:p>
         </p:txBody>
@@ -12948,8 +12948,8 @@
                 <a:latin typeface="Malgun Gothic"/>
                 <a:ea typeface="Malgun Gothic"/>
               </a:rPr>
-              <a:t>순항미사일 · 탐지→명중
-(천마 직접 교전)</a:t>
+              <a:t>전투기 · 접수→결심
+(탐지→명중 164 → 119초)</a:t>
             </a:r>
           </a:p>
         </p:txBody>
@@ -13021,7 +13021,7 @@
                 <a:latin typeface="Malgun Gothic"/>
                 <a:ea typeface="Malgun Gothic"/>
               </a:rPr>
-              <a:t>88 → 59초</a:t>
+              <a:t>32 → 3초</a:t>
             </a:r>
           </a:p>
         </p:txBody>
@@ -13065,8 +13065,8 @@
                 <a:latin typeface="Malgun Gothic"/>
                 <a:ea typeface="Malgun Gothic"/>
               </a:rPr>
-              <a:t>전투기 · 탐지→명중
-(방공여단·음성 제거)</a:t>
+              <a:t>순항미사일 · 접수→결심
+(탐지→명중 107 → 87초)</a:t>
             </a:r>
           </a:p>
         </p:txBody>
@@ -13206,7 +13206,7 @@
                 <a:latin typeface="Malgun Gothic"/>
                 <a:ea typeface="Malgun Gothic"/>
               </a:rPr>
-              <a:t>방사포는 74 → 58초. Patriot 협조 음성 21초와 방공여단 중계가 빠진 몫이며, 요격 창이 좁아 이 16초가 「지휘 시한 초과」 누수(9 대 5)와 격추 수(54 대 63)로 이어진다.</a:t>
+              <a:t>방사포는 76 → 58초. Patriot 협조 음성 21초와 방공여단 중계가 빠진 몫이며, 요격 창이 좁아 이 18초가 「지휘 시한 초과」 누수(7 대 3)와 격추 수(51 대 64)로 이어진다 — 두 체계 격추 차이 +14의 거의 전부.</a:t>
             </a:r>
           </a:p>
           <a:p>
@@ -13227,7 +13227,7 @@
                 <a:latin typeface="Malgun Gothic"/>
                 <a:ea typeface="Malgun Gothic"/>
               </a:rPr>
-              <a:t>같은 탄도탄 srbm#3: As-Is는 음성 제안이 엇갈려 두 지휘소가 각자 사수를 지정(한미 중복) → 둘 다 빗나가 누수, To-Be는 통합공중작전통제소가 1초 만에 동의 → 빗나간 뒤 재협조·재발사 5초 → 격추.</a:t>
+              <a:t>같은 탄도탄 srbm#3: As-Is는 음성 제안이 엇갈려 두 지휘소가 각자 사수를 지정(한미 중복) → 둘째 발이 명중, To-Be는 1초 만에 한 곳이 지정 → 그 한 발이 빗나가 누수. 같은 결심 구조에서 명중 추첨이 결과를 가른 예.</a:t>
             </a:r>
           </a:p>
         </p:txBody>
@@ -13346,7 +13346,7 @@
                 <a:latin typeface="Malgun Gothic"/>
                 <a:ea typeface="Malgun Gothic"/>
               </a:rPr>
-              <a:t>탄도탄·소형 무인기는 결심이 빨라진 만큼 「결심→발사」의 사수 대기가 늘어 총 시간이 같다(286 대 291 · 362 대 372). THAAD가 고도 150 km 아래로 들어오는 시점, 천마 사거리 9 km에 드는 시점을 지휘 구조가 바꾸지 못한다 — 물리가 정하는 시점.</a:t>
+              <a:t>탄도탄·소형 무인기는 결심이 빨라진 만큼 「결심→발사」의 사수 대기가 늘어 총 시간이 같다(286 대 282 · 449 대 465). THAAD가 고도 150 km 아래로 들어오는 시점, 천마 사거리 9 km에 드는 시점을 지휘 구조가 바꾸지 못한다 — 물리가 정하는 시점.</a:t>
             </a:r>
           </a:p>
           <a:p>
@@ -13367,7 +13367,7 @@
                 <a:latin typeface="Malgun Gothic"/>
                 <a:ea typeface="Malgun Gothic"/>
               </a:rPr>
-              <a:t>순항·전투기는 요격 창이 넓어 결심이 빨라진 만큼 명중도 빨라진다(55 → 20 · 88 → 59초).</a:t>
+              <a:t>전투기는 요격 창이 넓어 결심이 빨라진 만큼 명중도 빨라진다(164 → 119초). 순항은 두 체계 모두 Patriot이 쏘므로 매체 차이(음성 ↔ 데이터링크)만 남는다(107 → 87초).</a:t>
             </a:r>
           </a:p>
           <a:p>
@@ -13544,7 +13544,7 @@
                 <a:latin typeface="Malgun Gothic"/>
                 <a:ea typeface="Malgun Gothic"/>
               </a:rPr>
-              <a:t>K-JAMDS 효과척도 분석 결과서 5판(2026-10-03) · SC3 복합 동시 포화 · 한반도 본 배치(지휘소 96 · 포대 84) · 위협 228개 · seed 29 · 모든 수치는 공개자료 기반 정책연구용 개념값</a:t>
+              <a:t>K-JAMDS 효과척도 분석 결과서 6판(2026-10-04) · SC3 복합 동시 포화 · 한반도 본 배치(지휘소 96 · 포대 84) · 위협 228개 · seed 29 · 모든 수치는 공개자료 기반 정책연구용 개념값</a:t>
             </a:r>
           </a:p>
         </p:txBody>
@@ -13558,8 +13558,8 @@
           <p:nvPr/>
         </p:nvGraphicFramePr>
         <p:xfrm>
-          <a:off x="548640" y="1325880"/>
-          <a:ext cx="11064240" cy="4023360"/>
+          <a:off x="548640" y="1280160"/>
+          <a:ext cx="11064240" cy="3621024"/>
         </p:xfrm>
         <a:graphic>
           <a:graphicData uri="http://schemas.openxmlformats.org/drawingml/2006/table">
@@ -13567,12 +13567,12 @@
               <a:tblPr/>
               <a:tblGrid>
                 <a:gridCol w="1554480"/>
-                <a:gridCol w="2514600"/>
-                <a:gridCol w="2788920"/>
+                <a:gridCol w="2468880"/>
+                <a:gridCol w="2834640"/>
                 <a:gridCol w="2286000"/>
                 <a:gridCol w="1920240"/>
               </a:tblGrid>
-              <a:tr h="365760">
+              <a:tr h="329184">
                 <a:tc>
                   <a:txBody>
                     <a:bodyPr/>
@@ -13580,7 +13580,7 @@
                     <a:p>
                       <a:pPr algn="l"/>
                       <a:r>
-                        <a:rPr lang="ko-KR" sz="950" b="1" i="0" dirty="0">
+                        <a:rPr lang="ko-KR" sz="900" b="1" i="0" dirty="0">
                           <a:solidFill>
                             <a:srgbClr val="FFFFFF"/>
                           </a:solidFill>
@@ -13624,7 +13624,7 @@
                     <a:p>
                       <a:pPr algn="l"/>
                       <a:r>
-                        <a:rPr lang="ko-KR" sz="950" b="1" i="0" dirty="0">
+                        <a:rPr lang="ko-KR" sz="900" b="1" i="0" dirty="0">
                           <a:solidFill>
                             <a:srgbClr val="FFFFFF"/>
                           </a:solidFill>
@@ -13668,7 +13668,7 @@
                     <a:p>
                       <a:pPr algn="l"/>
                       <a:r>
-                        <a:rPr lang="ko-KR" sz="950" b="1" i="0" dirty="0">
+                        <a:rPr lang="ko-KR" sz="900" b="1" i="0" dirty="0">
                           <a:solidFill>
                             <a:srgbClr val="FFFFFF"/>
                           </a:solidFill>
@@ -13712,7 +13712,7 @@
                     <a:p>
                       <a:pPr algn="l"/>
                       <a:r>
-                        <a:rPr lang="ko-KR" sz="950" b="1" i="0" dirty="0">
+                        <a:rPr lang="ko-KR" sz="900" b="1" i="0" dirty="0">
                           <a:solidFill>
                             <a:srgbClr val="FFFFFF"/>
                           </a:solidFill>
@@ -13756,7 +13756,7 @@
                     <a:p>
                       <a:pPr algn="l"/>
                       <a:r>
-                        <a:rPr lang="ko-KR" sz="950" b="1" i="0" dirty="0">
+                        <a:rPr lang="ko-KR" sz="900" b="1" i="0" dirty="0">
                           <a:solidFill>
                             <a:srgbClr val="FFFFFF"/>
                           </a:solidFill>
@@ -13794,7 +13794,7 @@
                   </a:tcPr>
                 </a:tc>
               </a:tr>
-              <a:tr h="365760">
+              <a:tr h="329184">
                 <a:tc>
                   <a:txBody>
                     <a:bodyPr/>
@@ -13802,7 +13802,7 @@
                     <a:p>
                       <a:pPr algn="l"/>
                       <a:r>
-                        <a:rPr lang="ko-KR" sz="950" b="1" i="0" dirty="0">
+                        <a:rPr lang="ko-KR" sz="900" b="1" i="0" dirty="0">
                           <a:solidFill>
                             <a:srgbClr val="1D2A35"/>
                           </a:solidFill>
@@ -13846,7 +13846,7 @@
                     <a:p>
                       <a:pPr algn="l"/>
                       <a:r>
-                        <a:rPr lang="ko-KR" sz="950" b="0" i="0" dirty="0">
+                        <a:rPr lang="ko-KR" sz="900" b="0" i="0" dirty="0">
                           <a:solidFill>
                             <a:srgbClr val="1D2A35"/>
                           </a:solidFill>
@@ -13890,24 +13890,24 @@
                     <a:p>
                       <a:pPr algn="l"/>
                       <a:r>
-                        <a:rPr lang="ko-KR" sz="950" b="1" i="0" dirty="0">
+                        <a:rPr lang="ko-KR" sz="900" b="1" i="0" dirty="0">
                           <a:solidFill>
                             <a:srgbClr val="1D2A35"/>
                           </a:solidFill>
                           <a:latin typeface="Malgun Gothic"/>
                           <a:ea typeface="Malgun Gothic"/>
                         </a:rPr>
-                        <a:t>탄도탄작전통제소 0.48</a:t>
-                      </a:r>
-                      <a:r>
-                        <a:rPr lang="ko-KR" sz="950" b="0" i="0" dirty="0">
+                        <a:t>탄도탄작전통제소 0.51</a:t>
+                      </a:r>
+                      <a:r>
+                        <a:rPr lang="ko-KR" sz="900" b="0" i="0" dirty="0">
                           <a:solidFill>
                             <a:srgbClr val="1D2A35"/>
                           </a:solidFill>
                           <a:latin typeface="Malgun Gothic"/>
                           <a:ea typeface="Malgun Gothic"/>
                         </a:rPr>
-                        <a:t> · 중앙방공통제소 0.24 · 대기 ≤1.9초 · 드롭 0</a:t>
+                        <a:t> · 중앙방공통제소 0.29 · 대기 ≤1.4초 · 드롭 0</a:t>
                       </a:r>
                     </a:p>
                   </a:txBody>
@@ -13944,17 +13944,17 @@
                     <a:p>
                       <a:pPr algn="l"/>
                       <a:r>
-                        <a:rPr lang="ko-KR" sz="950" b="1" i="0" dirty="0">
+                        <a:rPr lang="ko-KR" sz="900" b="1" i="0" dirty="0">
                           <a:solidFill>
                             <a:srgbClr val="1D2A35"/>
                           </a:solidFill>
                           <a:latin typeface="Malgun Gothic"/>
                           <a:ea typeface="Malgun Gothic"/>
                         </a:rPr>
-                        <a:t>탄도탄작전통제소 0.52 · 통합공중작전통제소 0.20</a:t>
-                      </a:r>
-                      <a:r>
-                        <a:rPr lang="ko-KR" sz="950" b="0" i="0" dirty="0">
+                        <a:t>탄도탄작전통제소 0.45 · 통합공중작전통제소 0.20</a:t>
+                      </a:r>
+                      <a:r>
+                        <a:rPr lang="ko-KR" sz="900" b="0" i="0" dirty="0">
                           <a:solidFill>
                             <a:srgbClr val="1D2A35"/>
                           </a:solidFill>
@@ -13998,7 +13998,7 @@
                     <a:p>
                       <a:pPr algn="l"/>
                       <a:r>
-                        <a:rPr lang="ko-KR" sz="950" b="1" i="0" dirty="0">
+                        <a:rPr lang="ko-KR" sz="900" b="1" i="0" dirty="0">
                           <a:solidFill>
                             <a:srgbClr val="1B7F3B"/>
                           </a:solidFill>
@@ -14036,7 +14036,7 @@
                   </a:tcPr>
                 </a:tc>
               </a:tr>
-              <a:tr h="365760">
+              <a:tr h="329184">
                 <a:tc>
                   <a:txBody>
                     <a:bodyPr/>
@@ -14044,7 +14044,7 @@
                     <a:p>
                       <a:pPr algn="l"/>
                       <a:r>
-                        <a:rPr lang="ko-KR" sz="950" b="1" i="0" dirty="0">
+                        <a:rPr lang="ko-KR" sz="900" b="1" i="0" dirty="0">
                           <a:solidFill>
                             <a:srgbClr val="1D2A35"/>
                           </a:solidFill>
@@ -14088,7 +14088,7 @@
                     <a:p>
                       <a:pPr algn="l"/>
                       <a:r>
-                        <a:rPr lang="ko-KR" sz="950" b="0" i="0" dirty="0">
+                        <a:rPr lang="ko-KR" sz="900" b="0" i="0" dirty="0">
                           <a:solidFill>
                             <a:srgbClr val="1D2A35"/>
                           </a:solidFill>
@@ -14132,14 +14132,14 @@
                     <a:p>
                       <a:pPr algn="l"/>
                       <a:r>
-                        <a:rPr lang="ko-KR" sz="950" b="0" i="0" dirty="0">
+                        <a:rPr lang="ko-KR" sz="900" b="0" i="0" dirty="0">
                           <a:solidFill>
                             <a:srgbClr val="1D2A35"/>
                           </a:solidFill>
                           <a:latin typeface="Malgun Gothic"/>
                           <a:ea typeface="Malgun Gothic"/>
                         </a:rPr>
-                        <a:t>최대 0.12(3여단 126건) · 드롭 0</a:t>
+                        <a:t>최대 0.14(3여단 145건) · 드롭 0</a:t>
                       </a:r>
                     </a:p>
                   </a:txBody>
@@ -14176,7 +14176,7 @@
                     <a:p>
                       <a:pPr algn="l"/>
                       <a:r>
-                        <a:rPr lang="ko-KR" sz="950" b="0" i="0" dirty="0">
+                        <a:rPr lang="ko-KR" sz="900" b="0" i="0" dirty="0">
                           <a:solidFill>
                             <a:srgbClr val="1D2A35"/>
                           </a:solidFill>
@@ -14220,7 +14220,7 @@
                     <a:p>
                       <a:pPr algn="l"/>
                       <a:r>
-                        <a:rPr lang="ko-KR" sz="950" b="1" i="0" dirty="0">
+                        <a:rPr lang="ko-KR" sz="900" b="1" i="0" dirty="0">
                           <a:solidFill>
                             <a:srgbClr val="143D5C"/>
                           </a:solidFill>
@@ -14258,7 +14258,7 @@
                   </a:tcPr>
                 </a:tc>
               </a:tr>
-              <a:tr h="365760">
+              <a:tr h="329184">
                 <a:tc>
                   <a:txBody>
                     <a:bodyPr/>
@@ -14266,7 +14266,7 @@
                     <a:p>
                       <a:pPr algn="l"/>
                       <a:r>
-                        <a:rPr lang="ko-KR" sz="950" b="1" i="0" dirty="0">
+                        <a:rPr lang="ko-KR" sz="900" b="1" i="0" dirty="0">
                           <a:solidFill>
                             <a:srgbClr val="1D2A35"/>
                           </a:solidFill>
@@ -14310,7 +14310,7 @@
                     <a:p>
                       <a:pPr algn="l"/>
                       <a:r>
-                        <a:rPr lang="ko-KR" sz="950" b="0" i="0" dirty="0">
+                        <a:rPr lang="ko-KR" sz="900" b="0" i="0" dirty="0">
                           <a:solidFill>
                             <a:srgbClr val="1D2A35"/>
                           </a:solidFill>
@@ -14354,7 +14354,7 @@
                     <a:p>
                       <a:pPr algn="l"/>
                       <a:r>
-                        <a:rPr lang="ko-KR" sz="950" b="0" i="0" dirty="0">
+                        <a:rPr lang="ko-KR" sz="900" b="0" i="0" dirty="0">
                           <a:solidFill>
                             <a:srgbClr val="1D2A35"/>
                           </a:solidFill>
@@ -14398,7 +14398,7 @@
                     <a:p>
                       <a:pPr algn="l"/>
                       <a:r>
-                        <a:rPr lang="ko-KR" sz="950" b="0" i="0" dirty="0">
+                        <a:rPr lang="ko-KR" sz="900" b="0" i="0" dirty="0">
                           <a:solidFill>
                             <a:srgbClr val="1D2A35"/>
                           </a:solidFill>
@@ -14442,7 +14442,7 @@
                     <a:p>
                       <a:pPr algn="l"/>
                       <a:r>
-                        <a:rPr lang="ko-KR" sz="950" b="1" i="0" dirty="0">
+                        <a:rPr lang="ko-KR" sz="900" b="1" i="0" dirty="0">
                           <a:solidFill>
                             <a:srgbClr val="1B7F3B"/>
                           </a:solidFill>
@@ -14480,7 +14480,7 @@
                   </a:tcPr>
                 </a:tc>
               </a:tr>
-              <a:tr h="365760">
+              <a:tr h="329184">
                 <a:tc>
                   <a:txBody>
                     <a:bodyPr/>
@@ -14488,7 +14488,7 @@
                     <a:p>
                       <a:pPr algn="l"/>
                       <a:r>
-                        <a:rPr lang="ko-KR" sz="950" b="1" i="0" dirty="0">
+                        <a:rPr lang="ko-KR" sz="900" b="1" i="0" dirty="0">
                           <a:solidFill>
                             <a:srgbClr val="1D2A35"/>
                           </a:solidFill>
@@ -14532,7 +14532,7 @@
                     <a:p>
                       <a:pPr algn="l"/>
                       <a:r>
-                        <a:rPr lang="ko-KR" sz="950" b="0" i="0" dirty="0">
+                        <a:rPr lang="ko-KR" sz="900" b="0" i="0" dirty="0">
                           <a:solidFill>
                             <a:srgbClr val="1D2A35"/>
                           </a:solidFill>
@@ -14576,14 +14576,14 @@
                     <a:p>
                       <a:pPr algn="l"/>
                       <a:r>
-                        <a:rPr lang="ko-KR" sz="950" b="0" i="0" dirty="0">
+                        <a:rPr lang="ko-KR" sz="900" b="0" i="0" dirty="0">
                           <a:solidFill>
                             <a:srgbClr val="1D2A35"/>
                           </a:solidFill>
                           <a:latin typeface="Malgun Gothic"/>
                           <a:ea typeface="Malgun Gothic"/>
                         </a:rPr>
-                        <a:t>33곳 활동 · 최대 0.02 · 드롭 0</a:t>
+                        <a:t>32곳 활동 · 최대 0.02 · 드롭 0</a:t>
                       </a:r>
                     </a:p>
                   </a:txBody>
@@ -14620,14 +14620,14 @@
                     <a:p>
                       <a:pPr algn="l"/>
                       <a:r>
-                        <a:rPr lang="ko-KR" sz="950" b="0" i="0" dirty="0">
+                        <a:rPr lang="ko-KR" sz="900" b="0" i="0" dirty="0">
                           <a:solidFill>
                             <a:srgbClr val="1D2A35"/>
                           </a:solidFill>
                           <a:latin typeface="Malgun Gothic"/>
                           <a:ea typeface="Malgun Gothic"/>
                         </a:rPr>
-                        <a:t>32곳 활동 · 최대 0.01 · 드롭 0</a:t>
+                        <a:t>28곳 활동 · 최대 0.01 · 드롭 0</a:t>
                       </a:r>
                     </a:p>
                   </a:txBody>
@@ -14664,7 +14664,7 @@
                     <a:p>
                       <a:pPr algn="l"/>
                       <a:r>
-                        <a:rPr lang="ko-KR" sz="950" b="1" i="0" dirty="0">
+                        <a:rPr lang="ko-KR" sz="900" b="1" i="0" dirty="0">
                           <a:solidFill>
                             <a:srgbClr val="1B7F3B"/>
                           </a:solidFill>
@@ -14702,7 +14702,7 @@
                   </a:tcPr>
                 </a:tc>
               </a:tr>
-              <a:tr h="365760">
+              <a:tr h="329184">
                 <a:tc>
                   <a:txBody>
                     <a:bodyPr/>
@@ -14710,7 +14710,7 @@
                     <a:p>
                       <a:pPr algn="l"/>
                       <a:r>
-                        <a:rPr lang="ko-KR" sz="950" b="1" i="0" dirty="0">
+                        <a:rPr lang="ko-KR" sz="900" b="1" i="0" dirty="0">
                           <a:solidFill>
                             <a:srgbClr val="1D2A35"/>
                           </a:solidFill>
@@ -14754,7 +14754,7 @@
                     <a:p>
                       <a:pPr algn="l"/>
                       <a:r>
-                        <a:rPr lang="ko-KR" sz="950" b="0" i="0" dirty="0">
+                        <a:rPr lang="ko-KR" sz="900" b="0" i="0" dirty="0">
                           <a:solidFill>
                             <a:srgbClr val="1D2A35"/>
                           </a:solidFill>
@@ -14798,24 +14798,24 @@
                     <a:p>
                       <a:pPr algn="l"/>
                       <a:r>
-                        <a:rPr lang="ko-KR" sz="950" b="1" i="0" dirty="0">
+                        <a:rPr lang="ko-KR" sz="900" b="1" i="0" dirty="0">
                           <a:solidFill>
                             <a:srgbClr val="B3261E"/>
                           </a:solidFill>
                           <a:latin typeface="Malgun Gothic"/>
                           <a:ea typeface="Malgun Gothic"/>
                         </a:rPr>
-                        <a:t>THAAD 6/6 포화 · 차단 23건</a:t>
-                      </a:r>
-                      <a:r>
-                        <a:rPr lang="ko-KR" sz="950" b="0" i="0" dirty="0">
+                        <a:t>THAAD 6/6 포화 · 차단 26건</a:t>
+                      </a:r>
+                      <a:r>
+                        <a:rPr lang="ko-KR" sz="900" b="0" i="0" dirty="0">
                           <a:solidFill>
                             <a:srgbClr val="1D2A35"/>
                           </a:solidFill>
                           <a:latin typeface="Malgun Gothic"/>
                           <a:ea typeface="Malgun Gothic"/>
                         </a:rPr>
-                        <a:t> · L-SAM 5/10 · 4/10</a:t>
+                        <a:t> · L-SAM 5/10 · 3/10</a:t>
                       </a:r>
                     </a:p>
                   </a:txBody>
@@ -14852,24 +14852,24 @@
                     <a:p>
                       <a:pPr algn="l"/>
                       <a:r>
-                        <a:rPr lang="ko-KR" sz="950" b="1" i="0" dirty="0">
+                        <a:rPr lang="ko-KR" sz="900" b="1" i="0" dirty="0">
                           <a:solidFill>
                             <a:srgbClr val="B3261E"/>
                           </a:solidFill>
                           <a:latin typeface="Malgun Gothic"/>
                           <a:ea typeface="Malgun Gothic"/>
                         </a:rPr>
-                        <a:t>THAAD 6/6 포화 · 차단 21건</a:t>
-                      </a:r>
-                      <a:r>
-                        <a:rPr lang="ko-KR" sz="950" b="0" i="0" dirty="0">
+                        <a:t>THAAD 6/6 포화 · 차단 24건</a:t>
+                      </a:r>
+                      <a:r>
+                        <a:rPr lang="ko-KR" sz="900" b="0" i="0" dirty="0">
                           <a:solidFill>
                             <a:srgbClr val="1D2A35"/>
                           </a:solidFill>
                           <a:latin typeface="Malgun Gothic"/>
                           <a:ea typeface="Malgun Gothic"/>
                         </a:rPr>
-                        <a:t> · L-SAM 5/10</a:t>
+                        <a:t> · L-SAM 7/10 · 6/10</a:t>
                       </a:r>
                     </a:p>
                   </a:txBody>
@@ -14906,7 +14906,7 @@
                     <a:p>
                       <a:pPr algn="l"/>
                       <a:r>
-                        <a:rPr lang="ko-KR" sz="950" b="1" i="0" dirty="0">
+                        <a:rPr lang="ko-KR" sz="900" b="1" i="0" dirty="0">
                           <a:solidFill>
                             <a:srgbClr val="B3261E"/>
                           </a:solidFill>
@@ -14944,7 +14944,7 @@
                   </a:tcPr>
                 </a:tc>
               </a:tr>
-              <a:tr h="365760">
+              <a:tr h="329184">
                 <a:tc>
                   <a:txBody>
                     <a:bodyPr/>
@@ -14952,7 +14952,7 @@
                     <a:p>
                       <a:pPr algn="l"/>
                       <a:r>
-                        <a:rPr lang="ko-KR" sz="950" b="1" i="0" dirty="0">
+                        <a:rPr lang="ko-KR" sz="900" b="1" i="0" dirty="0">
                           <a:solidFill>
                             <a:srgbClr val="1D2A35"/>
                           </a:solidFill>
@@ -14996,7 +14996,7 @@
                     <a:p>
                       <a:pPr algn="l"/>
                       <a:r>
-                        <a:rPr lang="ko-KR" sz="950" b="0" i="0" dirty="0">
+                        <a:rPr lang="ko-KR" sz="900" b="0" i="0" dirty="0">
                           <a:solidFill>
                             <a:srgbClr val="1D2A35"/>
                           </a:solidFill>
@@ -15040,7 +15040,7 @@
                     <a:p>
                       <a:pPr algn="l"/>
                       <a:r>
-                        <a:rPr lang="ko-KR" sz="950" b="0" i="0" dirty="0">
+                        <a:rPr lang="ko-KR" sz="900" b="0" i="0" dirty="0">
                           <a:solidFill>
                             <a:srgbClr val="1D2A35"/>
                           </a:solidFill>
@@ -15084,7 +15084,7 @@
                     <a:p>
                       <a:pPr algn="l"/>
                       <a:r>
-                        <a:rPr lang="ko-KR" sz="950" b="0" i="0" dirty="0">
+                        <a:rPr lang="ko-KR" sz="900" b="0" i="0" dirty="0">
                           <a:solidFill>
                             <a:srgbClr val="1D2A35"/>
                           </a:solidFill>
@@ -15128,7 +15128,7 @@
                     <a:p>
                       <a:pPr algn="l"/>
                       <a:r>
-                        <a:rPr lang="ko-KR" sz="950" b="1" i="0" dirty="0">
+                        <a:rPr lang="ko-KR" sz="900" b="1" i="0" dirty="0">
                           <a:solidFill>
                             <a:srgbClr val="1B7F3B"/>
                           </a:solidFill>
@@ -15166,7 +15166,7 @@
                   </a:tcPr>
                 </a:tc>
               </a:tr>
-              <a:tr h="365760">
+              <a:tr h="329184">
                 <a:tc>
                   <a:txBody>
                     <a:bodyPr/>
@@ -15174,7 +15174,7 @@
                     <a:p>
                       <a:pPr algn="l"/>
                       <a:r>
-                        <a:rPr lang="ko-KR" sz="950" b="1" i="0" dirty="0">
+                        <a:rPr lang="ko-KR" sz="900" b="1" i="0" dirty="0">
                           <a:solidFill>
                             <a:srgbClr val="1D2A35"/>
                           </a:solidFill>
@@ -15218,7 +15218,7 @@
                     <a:p>
                       <a:pPr algn="l"/>
                       <a:r>
-                        <a:rPr lang="ko-KR" sz="950" b="0" i="0" dirty="0">
+                        <a:rPr lang="ko-KR" sz="900" b="0" i="0" dirty="0">
                           <a:solidFill>
                             <a:srgbClr val="1D2A35"/>
                           </a:solidFill>
@@ -15262,24 +15262,24 @@
                     <a:p>
                       <a:pPr algn="l"/>
                       <a:r>
-                        <a:rPr lang="ko-KR" sz="950" b="1" i="0" dirty="0">
+                        <a:rPr lang="ko-KR" sz="900" b="1" i="0" dirty="0">
                           <a:solidFill>
                             <a:srgbClr val="B3261E"/>
                           </a:solidFill>
                           <a:latin typeface="Malgun Gothic"/>
                           <a:ea typeface="Malgun Gothic"/>
                         </a:rPr>
-                        <a:t>탄 소진 누수 18건</a:t>
-                      </a:r>
-                      <a:r>
-                        <a:rPr lang="ko-KR" sz="950" b="0" i="0" dirty="0">
+                        <a:t>탄 소진 누수 19건</a:t>
+                      </a:r>
+                      <a:r>
+                        <a:rPr lang="ko-KR" sz="900" b="0" i="0" dirty="0">
                           <a:solidFill>
                             <a:srgbClr val="1D2A35"/>
                           </a:solidFill>
                           <a:latin typeface="Malgun Gothic"/>
                           <a:ea typeface="Malgun Gothic"/>
                         </a:rPr>
-                        <a:t> · 상위 3개 포대 38% · 0발 53</a:t>
+                        <a:t> · 상위 3개 포대 41% · 0발 55</a:t>
                       </a:r>
                     </a:p>
                   </a:txBody>
@@ -15316,24 +15316,24 @@
                     <a:p>
                       <a:pPr algn="l"/>
                       <a:r>
-                        <a:rPr lang="ko-KR" sz="950" b="1" i="0" dirty="0">
+                        <a:rPr lang="ko-KR" sz="900" b="1" i="0" dirty="0">
                           <a:solidFill>
                             <a:srgbClr val="B3261E"/>
                           </a:solidFill>
                           <a:latin typeface="Malgun Gothic"/>
                           <a:ea typeface="Malgun Gothic"/>
                         </a:rPr>
-                        <a:t>탄 소진 누수 11건</a:t>
-                      </a:r>
-                      <a:r>
-                        <a:rPr lang="ko-KR" sz="950" b="0" i="0" dirty="0">
+                        <a:t>탄 소진 누수 13건</a:t>
+                      </a:r>
+                      <a:r>
+                        <a:rPr lang="ko-KR" sz="900" b="0" i="0" dirty="0">
                           <a:solidFill>
                             <a:srgbClr val="1D2A35"/>
                           </a:solidFill>
                           <a:latin typeface="Malgun Gothic"/>
                           <a:ea typeface="Malgun Gothic"/>
                         </a:rPr>
-                        <a:t> · 상위 3개 39% · 0발 56</a:t>
+                        <a:t> · 상위 3개 45% · 0발 59</a:t>
                       </a:r>
                     </a:p>
                   </a:txBody>
@@ -15370,7 +15370,7 @@
                     <a:p>
                       <a:pPr algn="l"/>
                       <a:r>
-                        <a:rPr lang="ko-KR" sz="950" b="1" i="0" dirty="0">
+                        <a:rPr lang="ko-KR" sz="900" b="1" i="0" dirty="0">
                           <a:solidFill>
                             <a:srgbClr val="B3261E"/>
                           </a:solidFill>
@@ -15408,7 +15408,7 @@
                   </a:tcPr>
                 </a:tc>
               </a:tr>
-              <a:tr h="365760">
+              <a:tr h="329184">
                 <a:tc>
                   <a:txBody>
                     <a:bodyPr/>
@@ -15416,7 +15416,7 @@
                     <a:p>
                       <a:pPr algn="l"/>
                       <a:r>
-                        <a:rPr lang="ko-KR" sz="950" b="1" i="0" dirty="0">
+                        <a:rPr lang="ko-KR" sz="900" b="1" i="0" dirty="0">
                           <a:solidFill>
                             <a:srgbClr val="1D2A35"/>
                           </a:solidFill>
@@ -15460,7 +15460,7 @@
                     <a:p>
                       <a:pPr algn="l"/>
                       <a:r>
-                        <a:rPr lang="ko-KR" sz="950" b="0" i="0" dirty="0">
+                        <a:rPr lang="ko-KR" sz="900" b="0" i="0" dirty="0">
                           <a:solidFill>
                             <a:srgbClr val="1D2A35"/>
                           </a:solidFill>
@@ -15504,14 +15504,14 @@
                     <a:p>
                       <a:pPr algn="l"/>
                       <a:r>
-                        <a:rPr lang="ko-KR" sz="950" b="0" i="0" dirty="0">
+                        <a:rPr lang="ko-KR" sz="900" b="0" i="0" dirty="0">
                           <a:solidFill>
                             <a:srgbClr val="1D2A35"/>
                           </a:solidFill>
                           <a:latin typeface="Malgun Gothic"/>
                           <a:ea typeface="Malgun Gothic"/>
                         </a:rPr>
-                        <a:t>전달 중 전문 최대 0.67건(THAAD→탄도탄작전통제소 음성)</a:t>
+                        <a:t>전달 중 전문 최대 0.69건(THAAD→탄도탄작전통제소 음성)</a:t>
                       </a:r>
                     </a:p>
                   </a:txBody>
@@ -15548,7 +15548,7 @@
                     <a:p>
                       <a:pPr algn="l"/>
                       <a:r>
-                        <a:rPr lang="ko-KR" sz="950" b="0" i="0" dirty="0">
+                        <a:rPr lang="ko-KR" sz="900" b="0" i="0" dirty="0">
                           <a:solidFill>
                             <a:srgbClr val="1D2A35"/>
                           </a:solidFill>
@@ -15592,7 +15592,7 @@
                     <a:p>
                       <a:pPr algn="l"/>
                       <a:r>
-                        <a:rPr lang="ko-KR" sz="950" b="1" i="0" dirty="0">
+                        <a:rPr lang="ko-KR" sz="900" b="1" i="0" dirty="0">
                           <a:solidFill>
                             <a:srgbClr val="5B6B7A"/>
                           </a:solidFill>
@@ -15630,7 +15630,7 @@
                   </a:tcPr>
                 </a:tc>
               </a:tr>
-              <a:tr h="365760">
+              <a:tr h="329184">
                 <a:tc>
                   <a:txBody>
                     <a:bodyPr/>
@@ -15638,7 +15638,7 @@
                     <a:p>
                       <a:pPr algn="l"/>
                       <a:r>
-                        <a:rPr lang="ko-KR" sz="950" b="1" i="0" dirty="0">
+                        <a:rPr lang="ko-KR" sz="900" b="1" i="0" dirty="0">
                           <a:solidFill>
                             <a:srgbClr val="1D2A35"/>
                           </a:solidFill>
@@ -15682,7 +15682,7 @@
                     <a:p>
                       <a:pPr algn="l"/>
                       <a:r>
-                        <a:rPr lang="ko-KR" sz="950" b="0" i="0" dirty="0">
+                        <a:rPr lang="ko-KR" sz="900" b="0" i="0" dirty="0">
                           <a:solidFill>
                             <a:srgbClr val="1D2A35"/>
                           </a:solidFill>
@@ -15726,24 +15726,24 @@
                     <a:p>
                       <a:pPr algn="l"/>
                       <a:r>
-                        <a:rPr lang="ko-KR" sz="950" b="1" i="0" dirty="0">
+                        <a:rPr lang="ko-KR" sz="900" b="1" i="0" dirty="0">
                           <a:solidFill>
                             <a:srgbClr val="B3261E"/>
                           </a:solidFill>
                           <a:latin typeface="Malgun Gothic"/>
                           <a:ea typeface="Malgun Gothic"/>
                         </a:rPr>
-                        <a:t>버려짐 148건</a:t>
-                      </a:r>
-                      <a:r>
-                        <a:rPr lang="ko-KR" sz="950" b="0" i="0" dirty="0">
+                        <a:t>버려짐 121건</a:t>
+                      </a:r>
+                      <a:r>
+                        <a:rPr lang="ko-KR" sz="900" b="0" i="0" dirty="0">
                           <a:solidFill>
                             <a:srgbClr val="1D2A35"/>
                           </a:solidFill>
                           <a:latin typeface="Malgun Gothic"/>
                           <a:ea typeface="Malgun Gothic"/>
                         </a:rPr>
-                        <a:t> · 대기 29건</a:t>
+                        <a:t> · 대기 31건</a:t>
                       </a:r>
                     </a:p>
                   </a:txBody>
@@ -15780,14 +15780,14 @@
                     <a:p>
                       <a:pPr algn="l"/>
                       <a:r>
-                        <a:rPr lang="ko-KR" sz="950" b="0" i="0" dirty="0">
+                        <a:rPr lang="ko-KR" sz="900" b="0" i="0" dirty="0">
                           <a:solidFill>
                             <a:srgbClr val="1D2A35"/>
                           </a:solidFill>
                           <a:latin typeface="Malgun Gothic"/>
                           <a:ea typeface="Malgun Gothic"/>
                         </a:rPr>
-                        <a:t>버려짐 0 · 대기 26건</a:t>
+                        <a:t>버려짐 0 · 대기 25건</a:t>
                       </a:r>
                     </a:p>
                   </a:txBody>
@@ -15824,7 +15824,7 @@
                     <a:p>
                       <a:pPr algn="l"/>
                       <a:r>
-                        <a:rPr lang="ko-KR" sz="950" b="1" i="0" dirty="0">
+                        <a:rPr lang="ko-KR" sz="900" b="1" i="0" dirty="0">
                           <a:solidFill>
                             <a:srgbClr val="B3261E"/>
                           </a:solidFill>
@@ -15862,7 +15862,7 @@
                   </a:tcPr>
                 </a:tc>
               </a:tr>
-              <a:tr h="365760">
+              <a:tr h="329184">
                 <a:tc>
                   <a:txBody>
                     <a:bodyPr/>
@@ -15870,7 +15870,7 @@
                     <a:p>
                       <a:pPr algn="l"/>
                       <a:r>
-                        <a:rPr lang="ko-KR" sz="950" b="1" i="0" dirty="0">
+                        <a:rPr lang="ko-KR" sz="900" b="1" i="0" dirty="0">
                           <a:solidFill>
                             <a:srgbClr val="1D2A35"/>
                           </a:solidFill>
@@ -15914,7 +15914,7 @@
                     <a:p>
                       <a:pPr algn="l"/>
                       <a:r>
-                        <a:rPr lang="ko-KR" sz="950" b="0" i="0" dirty="0">
+                        <a:rPr lang="ko-KR" sz="900" b="0" i="0" dirty="0">
                           <a:solidFill>
                             <a:srgbClr val="1D2A35"/>
                           </a:solidFill>
@@ -15958,14 +15958,14 @@
                     <a:p>
                       <a:pPr algn="l"/>
                       <a:r>
-                        <a:rPr lang="ko-KR" sz="950" b="0" i="0" dirty="0">
+                        <a:rPr lang="ko-KR" sz="900" b="0" i="0" dirty="0">
                           <a:solidFill>
                             <a:srgbClr val="1D2A35"/>
                           </a:solidFill>
                           <a:latin typeface="Malgun Gothic"/>
                           <a:ea typeface="Malgun Gothic"/>
                         </a:rPr>
-                        <a:t>보고 14기 · 그린파인 충북 140개 · FPS-117 16기 보고 0</a:t>
+                        <a:t>보고 14기 · 그린파인 충북 140개 · FPS-117 강원북 16건</a:t>
                       </a:r>
                     </a:p>
                   </a:txBody>
@@ -16002,14 +16002,14 @@
                     <a:p>
                       <a:pPr algn="l"/>
                       <a:r>
-                        <a:rPr lang="ko-KR" sz="950" b="0" i="0" dirty="0">
+                        <a:rPr lang="ko-KR" sz="900" b="0" i="0" dirty="0">
                           <a:solidFill>
                             <a:srgbClr val="1D2A35"/>
                           </a:solidFill>
                           <a:latin typeface="Malgun Gothic"/>
                           <a:ea typeface="Malgun Gothic"/>
                         </a:rPr>
-                        <a:t>같음</a:t>
+                        <a:t>같음(강원북 64건)</a:t>
                       </a:r>
                     </a:p>
                   </a:txBody>
@@ -16046,7 +16046,7 @@
                     <a:p>
                       <a:pPr algn="l"/>
                       <a:r>
-                        <a:rPr lang="ko-KR" sz="950" b="1" i="0" dirty="0">
+                        <a:rPr lang="ko-KR" sz="900" b="1" i="0" dirty="0">
                           <a:solidFill>
                             <a:srgbClr val="5B6B7A"/>
                           </a:solidFill>
@@ -16096,8 +16096,8 @@
         </p:nvSpPr>
         <p:spPr>
           <a:xfrm>
-            <a:off x="548640" y="5897880"/>
-            <a:ext cx="11064240" cy="502920"/>
+            <a:off x="548640" y="5989320"/>
+            <a:ext cx="11064240" cy="411480"/>
           </a:xfrm>
           <a:prstGeom prst="rect">
             <a:avLst/>
@@ -16120,14 +16120,14 @@
               <a:buNone/>
             </a:pPr>
             <a:r>
-              <a:rPr lang="ko-KR" sz="1050" b="1" i="0" dirty="0">
+              <a:rPr lang="ko-KR" sz="1000" b="1" i="0" dirty="0">
                 <a:solidFill>
                   <a:srgbClr val="1D2A35"/>
                 </a:solidFill>
                 <a:latin typeface="Malgun Gothic"/>
                 <a:ea typeface="Malgun Gothic"/>
               </a:rPr>
-              <a:t>읽는 법: 실제로 포화된 것은 THAAD 채널과 상층 포대 탄약뿐이고, 둘 다 지휘 구조가 아니라 물리(요격 창이 열리는 포대가 그곳뿐)와 자원(보유탄)이 정한다. 지휘소는 모두 용량의 절반 아래, 통신·레이더는 용량이 없어 포화가 생길 수 없다.</a:t>
+              <a:t>읽는 법: 실제로 포화된 것은 THAAD 채널과 상층 포대 탄약뿐 — 지휘 구조가 아니라 물리(요격 창)와 자원(보유탄)이 정한다. 지휘소는 용량의 절반 아래, 통신·레이더는 용량이 없어 포화가 생길 수 없다.</a:t>
             </a:r>
           </a:p>
         </p:txBody>
@@ -16242,7 +16242,7 @@
                 <a:latin typeface="Malgun Gothic"/>
                 <a:ea typeface="Malgun Gothic"/>
               </a:rPr>
-              <a:t>K-JAMDS 효과척도 분석 결과서 5판(2026-10-03) · SC3 복합 동시 포화 · 한반도 본 배치(지휘소 96 · 포대 84) · 위협 228개 · seed 29 · 모든 수치는 공개자료 기반 정책연구용 개념값</a:t>
+              <a:t>K-JAMDS 효과척도 분석 결과서 6판(2026-10-04) · SC3 복합 동시 포화 · 한반도 본 배치(지휘소 96 · 포대 84) · 위협 228개 · seed 29 · 모든 수치는 공개자료 기반 정책연구용 개념값</a:t>
             </a:r>
           </a:p>
         </p:txBody>
@@ -16432,7 +16432,7 @@
         <p:spPr>
           <a:xfrm>
             <a:off x="2286000" y="1691640"/>
-            <a:ext cx="1711757" cy="182880"/>
+            <a:ext cx="1818742" cy="182880"/>
           </a:xfrm>
           <a:prstGeom prst="rect">
             <a:avLst/>
@@ -16460,7 +16460,7 @@
         </p:nvSpPr>
         <p:spPr>
           <a:xfrm>
-            <a:off x="4043477" y="1645920"/>
+            <a:off x="4150462" y="1645920"/>
             <a:ext cx="731520" cy="274320"/>
           </a:xfrm>
           <a:prstGeom prst="rect">
@@ -16488,7 +16488,7 @@
                 <a:latin typeface="Malgun Gothic"/>
                 <a:ea typeface="Malgun Gothic"/>
               </a:rPr>
-              <a:t>0.48</a:t>
+              <a:t>0.51</a:t>
             </a:r>
           </a:p>
         </p:txBody>
@@ -16502,7 +16502,7 @@
         <p:spPr>
           <a:xfrm>
             <a:off x="2286000" y="1920240"/>
-            <a:ext cx="1854403" cy="182880"/>
+            <a:ext cx="1604772" cy="182880"/>
           </a:xfrm>
           <a:prstGeom prst="rect">
             <a:avLst/>
@@ -16530,7 +16530,7 @@
         </p:nvSpPr>
         <p:spPr>
           <a:xfrm>
-            <a:off x="4186123" y="1874520"/>
+            <a:off x="3936492" y="1874520"/>
             <a:ext cx="731520" cy="274320"/>
           </a:xfrm>
           <a:prstGeom prst="rect">
@@ -16558,7 +16558,7 @@
                 <a:latin typeface="Malgun Gothic"/>
                 <a:ea typeface="Malgun Gothic"/>
               </a:rPr>
-              <a:t>0.52</a:t>
+              <a:t>0.45</a:t>
             </a:r>
           </a:p>
         </p:txBody>
@@ -16613,7 +16613,7 @@
         <p:spPr>
           <a:xfrm>
             <a:off x="2286000" y="2258568"/>
-            <a:ext cx="855878" cy="182880"/>
+            <a:ext cx="1034186" cy="182880"/>
           </a:xfrm>
           <a:prstGeom prst="rect">
             <a:avLst/>
@@ -16641,7 +16641,7 @@
         </p:nvSpPr>
         <p:spPr>
           <a:xfrm>
-            <a:off x="3187598" y="2212848"/>
+            <a:off x="3365906" y="2212848"/>
             <a:ext cx="731520" cy="274320"/>
           </a:xfrm>
           <a:prstGeom prst="rect">
@@ -16669,7 +16669,7 @@
                 <a:latin typeface="Malgun Gothic"/>
                 <a:ea typeface="Malgun Gothic"/>
               </a:rPr>
-              <a:t>0.24</a:t>
+              <a:t>0.29</a:t>
             </a:r>
           </a:p>
         </p:txBody>
@@ -16683,7 +16683,7 @@
         <p:spPr>
           <a:xfrm>
             <a:off x="2286000" y="2487168"/>
-            <a:ext cx="570586" cy="182880"/>
+            <a:ext cx="606247" cy="182880"/>
           </a:xfrm>
           <a:prstGeom prst="rect">
             <a:avLst/>
@@ -16711,7 +16711,7 @@
         </p:nvSpPr>
         <p:spPr>
           <a:xfrm>
-            <a:off x="2902306" y="2441448"/>
+            <a:off x="2937967" y="2441448"/>
             <a:ext cx="731520" cy="274320"/>
           </a:xfrm>
           <a:prstGeom prst="rect">
@@ -16739,7 +16739,7 @@
                 <a:latin typeface="Malgun Gothic"/>
                 <a:ea typeface="Malgun Gothic"/>
               </a:rPr>
-              <a:t>0.16</a:t>
+              <a:t>0.17</a:t>
             </a:r>
           </a:p>
         </p:txBody>
@@ -16946,7 +16946,7 @@
         <p:spPr>
           <a:xfrm>
             <a:off x="2286000" y="3392424"/>
-            <a:ext cx="427939" cy="182880"/>
+            <a:ext cx="499262" cy="182880"/>
           </a:xfrm>
           <a:prstGeom prst="rect">
             <a:avLst/>
@@ -16974,7 +16974,7 @@
         </p:nvSpPr>
         <p:spPr>
           <a:xfrm>
-            <a:off x="2759659" y="3346704"/>
+            <a:off x="2830982" y="3346704"/>
             <a:ext cx="731520" cy="274320"/>
           </a:xfrm>
           <a:prstGeom prst="rect">
@@ -17002,7 +17002,7 @@
                 <a:latin typeface="Malgun Gothic"/>
                 <a:ea typeface="Malgun Gothic"/>
               </a:rPr>
-              <a:t>0.12</a:t>
+              <a:t>0.14</a:t>
             </a:r>
           </a:p>
         </p:txBody>
@@ -17098,7 +17098,7 @@
         <p:spPr>
           <a:xfrm>
             <a:off x="2286000" y="3959352"/>
-            <a:ext cx="106985" cy="182880"/>
+            <a:ext cx="71323" cy="182880"/>
           </a:xfrm>
           <a:prstGeom prst="rect">
             <a:avLst/>
@@ -17126,7 +17126,7 @@
         </p:nvSpPr>
         <p:spPr>
           <a:xfrm>
-            <a:off x="2438705" y="3913632"/>
+            <a:off x="2403043" y="3913632"/>
             <a:ext cx="731520" cy="274320"/>
           </a:xfrm>
           <a:prstGeom prst="rect">
@@ -17154,7 +17154,7 @@
                 <a:latin typeface="Malgun Gothic"/>
                 <a:ea typeface="Malgun Gothic"/>
               </a:rPr>
-              <a:t>0.03</a:t>
+              <a:t>0.02</a:t>
             </a:r>
           </a:p>
         </p:txBody>
@@ -17658,7 +17658,7 @@
                 <a:latin typeface="Malgun Gothic"/>
                 <a:ea typeface="Malgun Gothic"/>
               </a:rPr>
-              <a:t>6/6 · 23건</a:t>
+              <a:t>6/6 · 26건</a:t>
             </a:r>
           </a:p>
         </p:txBody>
@@ -17703,7 +17703,7 @@
                 <a:ea typeface="Malgun Gothic"/>
               </a:rPr>
               <a:t>THAAD 채널 포화 · 차단(As-Is)
-To-Be 6/6 · 21건</a:t>
+To-Be 6/6 · 24건</a:t>
             </a:r>
           </a:p>
         </p:txBody>
@@ -17775,7 +17775,7 @@
                 <a:latin typeface="Malgun Gothic"/>
                 <a:ea typeface="Malgun Gothic"/>
               </a:rPr>
-              <a:t>18 → 11건</a:t>
+              <a:t>19 → 13건</a:t>
             </a:r>
           </a:p>
         </p:txBody>
@@ -17892,7 +17892,7 @@
                 <a:latin typeface="Malgun Gothic"/>
                 <a:ea typeface="Malgun Gothic"/>
               </a:rPr>
-              <a:t>38% · 39%</a:t>
+              <a:t>41% · 45%</a:t>
             </a:r>
           </a:p>
         </p:txBody>
@@ -17937,7 +17937,7 @@
                 <a:ea typeface="Malgun Gothic"/>
               </a:rPr>
               <a:t>상위 3개 포대 발사 비중
-(THAAD 34·43 · L-SAM 중북 26·33 · 수도 29·28)</a:t>
+(THAAD 39·38 · 수도 L-SAM 33·39 · 중북 24·35)</a:t>
             </a:r>
           </a:p>
         </p:txBody>
@@ -18009,7 +18009,7 @@
                 <a:latin typeface="Malgun Gothic"/>
                 <a:ea typeface="Malgun Gothic"/>
               </a:rPr>
-              <a:t>53 · 56</a:t>
+              <a:t>55 · 59</a:t>
             </a:r>
           </a:p>
         </p:txBody>
@@ -18194,7 +18194,7 @@
                 <a:latin typeface="Malgun Gothic"/>
                 <a:ea typeface="Malgun Gothic"/>
               </a:rPr>
-              <a:t>지휘소 포화는 강도 3배부터(탄도탄작전통제소 1.0 · 통합공중작전통제소 0.98). 거기서 To-Be 우위는 +18 → +104(강도 5배)로 커진다.</a:t>
+              <a:t>지휘소 포화는 강도 3배부터(탄도탄작전통제소 1.0 · 통합공중작전통제소 0.98). 거기서 To-Be 우위는 +14 → +117(강도 5배)로 커진다.</a:t>
             </a:r>
           </a:p>
         </p:txBody>

--- a/K-JAMDS_효과척도_발표정리본.pptx
+++ b/K-JAMDS_효과척도_발표정리본.pptx
@@ -8638,7 +8638,7 @@
         </p:nvGraphicFramePr>
         <p:xfrm>
           <a:off x="548640" y="1691640"/>
-          <a:ext cx="11064240" cy="1865376"/>
+          <a:ext cx="11064240" cy="1700784"/>
         </p:xfrm>
         <a:graphic>
           <a:graphicData uri="http://schemas.openxmlformats.org/drawingml/2006/table">
@@ -8653,7 +8653,7 @@
                 <a:gridCol w="1272877"/>
                 <a:gridCol w="1958273"/>
               </a:tblGrid>
-              <a:tr h="310896">
+              <a:tr h="283464">
                 <a:tc>
                   <a:txBody>
                     <a:bodyPr/>
@@ -8963,7 +8963,7 @@
                   </a:tcPr>
                 </a:tc>
               </a:tr>
-              <a:tr h="310896">
+              <a:tr h="283464">
                 <a:tc>
                   <a:txBody>
                     <a:bodyPr/>
@@ -9273,7 +9273,7 @@
                   </a:tcPr>
                 </a:tc>
               </a:tr>
-              <a:tr h="310896">
+              <a:tr h="283464">
                 <a:tc>
                   <a:txBody>
                     <a:bodyPr/>
@@ -9583,7 +9583,7 @@
                   </a:tcPr>
                 </a:tc>
               </a:tr>
-              <a:tr h="310896">
+              <a:tr h="283464">
                 <a:tc>
                   <a:txBody>
                     <a:bodyPr/>
@@ -9893,7 +9893,7 @@
                   </a:tcPr>
                 </a:tc>
               </a:tr>
-              <a:tr h="310896">
+              <a:tr h="283464">
                 <a:tc>
                   <a:txBody>
                     <a:bodyPr/>
@@ -10203,7 +10203,7 @@
                   </a:tcPr>
                 </a:tc>
               </a:tr>
-              <a:tr h="310896">
+              <a:tr h="283464">
                 <a:tc>
                   <a:txBody>
                     <a:bodyPr/>
@@ -10525,7 +10525,7 @@
         </p:nvSpPr>
         <p:spPr>
           <a:xfrm>
-            <a:off x="548640" y="3703320"/>
+            <a:off x="548640" y="3474720"/>
             <a:ext cx="5486400" cy="320040"/>
           </a:xfrm>
           <a:prstGeom prst="rect">
@@ -10567,8 +10567,8 @@
           <p:nvPr/>
         </p:nvGraphicFramePr>
         <p:xfrm>
-          <a:off x="548640" y="4023360"/>
-          <a:ext cx="11064240" cy="1865376"/>
+          <a:off x="548640" y="3794760"/>
+          <a:ext cx="11064240" cy="1700784"/>
         </p:xfrm>
         <a:graphic>
           <a:graphicData uri="http://schemas.openxmlformats.org/drawingml/2006/table">
@@ -10583,7 +10583,7 @@
                 <a:gridCol w="1272877"/>
                 <a:gridCol w="1958273"/>
               </a:tblGrid>
-              <a:tr h="310896">
+              <a:tr h="283464">
                 <a:tc>
                   <a:txBody>
                     <a:bodyPr/>
@@ -10893,7 +10893,7 @@
                   </a:tcPr>
                 </a:tc>
               </a:tr>
-              <a:tr h="310896">
+              <a:tr h="283464">
                 <a:tc>
                   <a:txBody>
                     <a:bodyPr/>
@@ -11203,7 +11203,7 @@
                   </a:tcPr>
                 </a:tc>
               </a:tr>
-              <a:tr h="310896">
+              <a:tr h="283464">
                 <a:tc>
                   <a:txBody>
                     <a:bodyPr/>
@@ -11513,7 +11513,7 @@
                   </a:tcPr>
                 </a:tc>
               </a:tr>
-              <a:tr h="310896">
+              <a:tr h="283464">
                 <a:tc>
                   <a:txBody>
                     <a:bodyPr/>
@@ -11823,7 +11823,7 @@
                   </a:tcPr>
                 </a:tc>
               </a:tr>
-              <a:tr h="310896">
+              <a:tr h="283464">
                 <a:tc>
                   <a:txBody>
                     <a:bodyPr/>
@@ -12133,7 +12133,7 @@
                   </a:tcPr>
                 </a:tc>
               </a:tr>
-              <a:tr h="310896">
+              <a:tr h="283464">
                 <a:tc>
                   <a:txBody>
                     <a:bodyPr/>
@@ -12455,8 +12455,8 @@
         </p:nvSpPr>
         <p:spPr>
           <a:xfrm>
-            <a:off x="548640" y="5989320"/>
-            <a:ext cx="11064240" cy="411480"/>
+            <a:off x="548640" y="5559552"/>
+            <a:ext cx="11064240" cy="320040"/>
           </a:xfrm>
           <a:prstGeom prst="rect">
             <a:avLst/>
@@ -12483,7 +12483,48 @@
                 <a:latin typeface="Malgun Gothic"/>
                 <a:ea typeface="Malgun Gothic"/>
               </a:rPr>
-              <a:t>전체 평균: 교전 시작까지 222 → 215초(seed 30·31도 229 → 218 · 232 → 225초) · 격추까지 263 → 252초 · 생성→탐지는 탄도·공중 모두 발사·이륙 원점 기준(공중 0~2초는 레이더 수평선·지형 차폐 없음의 결과)</a:t>
+              <a:t>전체 평균: 교전 시작까지 222 → 215초(seed 30·31도 229 → 218 · 232 → 225초) · 격추까지 263 → 252초 · 생성→탐지는 탄도·공중 모두 발사·이륙 원점 기준</a:t>
+            </a:r>
+          </a:p>
+        </p:txBody>
+      </p:sp>
+      <p:sp>
+        <p:nvSpPr>
+          <p:cNvPr id="11" name="Text 11"/>
+          <p:cNvSpPr txBox="1"/>
+          <p:nvPr/>
+        </p:nvSpPr>
+        <p:spPr>
+          <a:xfrm>
+            <a:off x="548640" y="5852160"/>
+            <a:ext cx="11064240" cy="411480"/>
+          </a:xfrm>
+          <a:prstGeom prst="rect">
+            <a:avLst/>
+          </a:prstGeom>
+          <a:noFill/>
+          <a:ln>
+            <a:noFill/>
+          </a:ln>
+        </p:spPr>
+        <p:txBody>
+          <a:bodyPr wrap="square" lIns="0" tIns="0" rIns="0" bIns="0" anchor="t" rtlCol="0">
+            <a:normAutofit/>
+          </a:bodyPr>
+          <a:lstStyle/>
+          <a:p>
+            <a:pPr algn="l">
+              <a:buNone/>
+            </a:pPr>
+            <a:r>
+              <a:rPr lang="ko-KR" sz="1000" b="0" i="0" dirty="0">
+                <a:solidFill>
+                  <a:srgbClr val="1D2A35"/>
+                </a:solidFill>
+                <a:latin typeface="Malgun Gothic"/>
+                <a:ea typeface="Malgun Gothic"/>
+              </a:rPr>
+              <a:t>0초 칸(1초 미만의 반올림): 순항·전투기 생성→탐지 0.2초 = 발사·이륙 원점이 FPS-117 레이더 수평선 안(지형 차폐 없음) · To-Be 전투기 탐지→접수 0.3초 = 포대 레이더가 통합공중작전통제소로 1초 주기 직결 보고(As-Is는 교전통제소를 거쳐 2초)</a:t>
             </a:r>
           </a:p>
         </p:txBody>

--- a/K-JAMDS_효과척도_발표정리본.pptx
+++ b/K-JAMDS_효과척도_발표정리본.pptx
@@ -12598,7 +12598,7 @@
                 <a:latin typeface="Malgun Gothic"/>
                 <a:ea typeface="Malgun Gothic"/>
               </a:rPr>
-              <a:t>4. 얼마나 효율적인가 — 시간 (2/2): 어디서 빨라지고 어디서 그대로인가</a:t>
+              <a:t>4. 얼마나 효율적인가 — 시간 (2/2): 결심 단축이 총 시간·격추로 이어지는가</a:t>
             </a:r>
           </a:p>
         </p:txBody>
@@ -13340,7 +13340,7 @@
                 <a:latin typeface="Malgun Gothic"/>
                 <a:ea typeface="Malgun Gothic"/>
               </a:rPr>
-              <a:t>그대로인 자리 — 발사·명중 시각</a:t>
+              <a:t>결심 단축이 총 시간으로 이어지는가 — 세 갈래</a:t>
             </a:r>
           </a:p>
         </p:txBody>
@@ -13387,7 +13387,7 @@
                 <a:latin typeface="Malgun Gothic"/>
                 <a:ea typeface="Malgun Gothic"/>
               </a:rPr>
-              <a:t>탄도탄·소형 무인기는 결심이 빨라진 만큼 「결심→발사」의 사수 대기가 늘어 총 시간이 같다(286 대 282 · 449 대 465). THAAD가 고도 150 km 아래로 들어오는 시점, 천마 사거리 9 km에 드는 시점을 지휘 구조가 바꾸지 못한다 — 물리가 정하는 시점.</a:t>
+              <a:t>총 시간 그대로(탄도탄 286 대 282 · 소형 무인기 449 대 465): 결심이 빨라진 만큼 「결심→발사」 사수 대기가 늘어난다. THAAD가 고도 150 km 아래로 들어오는 시점, 천마 사거리 9 km에 드는 시점을 지휘 구조가 바꾸지 못한다 — 요격 창이 열리는 시각은 물리가 정한다.</a:t>
             </a:r>
           </a:p>
           <a:p>
@@ -13408,7 +13408,7 @@
                 <a:latin typeface="Malgun Gothic"/>
                 <a:ea typeface="Malgun Gothic"/>
               </a:rPr>
-              <a:t>전투기는 요격 창이 넓어 결심이 빨라진 만큼 명중도 빨라진다(164 → 119초). 순항은 두 체계 모두 Patriot이 쏘므로 매체 차이(음성 ↔ 데이터링크)만 남는다(107 → 87초).</a:t>
+              <a:t>총 시간 단축(전투기 164 → 119초 · 순항 107 → 87초): 창이 이미 열려 있어 결심이 빨라진 만큼 발사·명중도 당겨진다. 다만 창이 넓어 어차피 창 안에서 맞히므로 격추 수는 같다(15 대 15 · 16 대 16).</a:t>
             </a:r>
           </a:p>
           <a:p>
@@ -13429,7 +13429,7 @@
                 <a:latin typeface="Malgun Gothic"/>
                 <a:ea typeface="Malgun Gothic"/>
               </a:rPr>
-              <a:t>정리: 지휘 구조의 효과는 「결심까지의 시간」에 그대로 나타나고, 그것이 격추 수로 바뀌는지는 그 위협의 요격 창이 좁은가(방사포)에 달려 있다.</a:t>
+              <a:t>격추 수로 전환(방사포 51 → 64): 창이 좁아 18초 늦은 명령이 창을 넘긴다. 지휘 구조의 효과가 격추로 바뀌는 유일한 유형.</a:t>
             </a:r>
           </a:p>
         </p:txBody>

--- a/K-JAMDS_효과척도_발표정리본.pptx
+++ b/K-JAMDS_효과척도_발표정리본.pptx
@@ -8500,7 +8500,7 @@
                 <a:latin typeface="Malgun Gothic"/>
                 <a:ea typeface="Malgun Gothic"/>
               </a:rPr>
-              <a:t>4. 얼마나 효율적인가 — 시간 (1/2): 단계별 소요(평균 · 초)</a:t>
+              <a:t>4. 얼마나 효율적인가 — 시간 (1/2): 단계별 소요(평균 · 초)와 격추 수</a:t>
             </a:r>
           </a:p>
         </p:txBody>
@@ -8541,7 +8541,7 @@
                 <a:latin typeface="Malgun Gothic"/>
                 <a:ea typeface="Malgun Gothic"/>
               </a:rPr>
-              <a:t>접수→결심 = 사수를 정하기까지 · 결심→발사 = 포대가 쏠 수 있게 되기까지의 사수 대기 포함 · 붉은 칸 = 차이 15% 이상이면서 10초 이상</a:t>
+              <a:t>결심→발사 = 사수 대기 포함 · 붉은 칸 = 차이 15% 이상·10초 이상 · 시간은 명중한 항적만 세므로 누수는 격추 열로 읽는다</a:t>
             </a:r>
           </a:p>
         </p:txBody>
@@ -8645,13 +8645,14 @@
             <a:tbl>
               <a:tblPr/>
               <a:tblGrid>
-                <a:gridCol w="1762445"/>
+                <a:gridCol w="1566618"/>
+                <a:gridCol w="783309"/>
+                <a:gridCol w="1174964"/>
+                <a:gridCol w="1566618"/>
+                <a:gridCol w="1566618"/>
                 <a:gridCol w="1272877"/>
-                <a:gridCol w="1664532"/>
-                <a:gridCol w="1664532"/>
-                <a:gridCol w="1468704"/>
                 <a:gridCol w="1272877"/>
-                <a:gridCol w="1958273"/>
+                <a:gridCol w="1860359"/>
               </a:tblGrid>
               <a:tr h="283464">
                 <a:tc>
@@ -8712,6 +8713,50 @@
                           <a:latin typeface="Malgun Gothic"/>
                           <a:ea typeface="Malgun Gothic"/>
                         </a:rPr>
+                        <a:t>격추</a:t>
+                      </a:r>
+                    </a:p>
+                  </a:txBody>
+                  <a:tcPr marL="54864" marR="54864" marT="36576" marB="36576" anchor="ctr">
+                    <a:lnL w="6350">
+                      <a:solidFill>
+                        <a:srgbClr val="C9D2DA"/>
+                      </a:solidFill>
+                    </a:lnL>
+                    <a:lnR w="6350">
+                      <a:solidFill>
+                        <a:srgbClr val="C9D2DA"/>
+                      </a:solidFill>
+                    </a:lnR>
+                    <a:lnT w="6350">
+                      <a:solidFill>
+                        <a:srgbClr val="C9D2DA"/>
+                      </a:solidFill>
+                    </a:lnT>
+                    <a:lnB w="6350">
+                      <a:solidFill>
+                        <a:srgbClr val="C9D2DA"/>
+                      </a:solidFill>
+                    </a:lnB>
+                    <a:solidFill>
+                      <a:srgbClr val="143D5C"/>
+                    </a:solidFill>
+                  </a:tcPr>
+                </a:tc>
+                <a:tc>
+                  <a:txBody>
+                    <a:bodyPr/>
+                    <a:lstStyle/>
+                    <a:p>
+                      <a:pPr algn="ctr"/>
+                      <a:r>
+                        <a:rPr lang="ko-KR" sz="1100" b="1" i="0" dirty="0">
+                          <a:solidFill>
+                            <a:srgbClr val="FFFFFF"/>
+                          </a:solidFill>
+                          <a:latin typeface="Malgun Gothic"/>
+                          <a:ea typeface="Malgun Gothic"/>
+                        </a:rPr>
                         <a:t>생성→탐지</a:t>
                       </a:r>
                     </a:p>
@@ -9022,6 +9067,50 @@
                           <a:latin typeface="Malgun Gothic"/>
                           <a:ea typeface="Malgun Gothic"/>
                         </a:rPr>
+                        <a:t>46</a:t>
+                      </a:r>
+                    </a:p>
+                  </a:txBody>
+                  <a:tcPr marL="54864" marR="54864" marT="36576" marB="36576" anchor="ctr">
+                    <a:lnL w="6350">
+                      <a:solidFill>
+                        <a:srgbClr val="C9D2DA"/>
+                      </a:solidFill>
+                    </a:lnL>
+                    <a:lnR w="6350">
+                      <a:solidFill>
+                        <a:srgbClr val="C9D2DA"/>
+                      </a:solidFill>
+                    </a:lnR>
+                    <a:lnT w="6350">
+                      <a:solidFill>
+                        <a:srgbClr val="C9D2DA"/>
+                      </a:solidFill>
+                    </a:lnT>
+                    <a:lnB w="6350">
+                      <a:solidFill>
+                        <a:srgbClr val="C9D2DA"/>
+                      </a:solidFill>
+                    </a:lnB>
+                    <a:solidFill>
+                      <a:srgbClr val="F3F6F8"/>
+                    </a:solidFill>
+                  </a:tcPr>
+                </a:tc>
+                <a:tc>
+                  <a:txBody>
+                    <a:bodyPr/>
+                    <a:lstStyle/>
+                    <a:p>
+                      <a:pPr algn="ctr"/>
+                      <a:r>
+                        <a:rPr lang="ko-KR" sz="1100" b="0" i="0" dirty="0">
+                          <a:solidFill>
+                            <a:srgbClr val="1D2A35"/>
+                          </a:solidFill>
+                          <a:latin typeface="Malgun Gothic"/>
+                          <a:ea typeface="Malgun Gothic"/>
+                        </a:rPr>
                         <a:t>9</a:t>
                       </a:r>
                     </a:p>
@@ -9325,6 +9414,50 @@
                     <a:p>
                       <a:pPr algn="ctr"/>
                       <a:r>
+                        <a:rPr lang="ko-KR" sz="1100" b="1" i="0" dirty="0">
+                          <a:solidFill>
+                            <a:srgbClr val="B3261E"/>
+                          </a:solidFill>
+                          <a:latin typeface="Malgun Gothic"/>
+                          <a:ea typeface="Malgun Gothic"/>
+                        </a:rPr>
+                        <a:t>51</a:t>
+                      </a:r>
+                    </a:p>
+                  </a:txBody>
+                  <a:tcPr marL="54864" marR="54864" marT="36576" marB="36576" anchor="ctr">
+                    <a:lnL w="6350">
+                      <a:solidFill>
+                        <a:srgbClr val="C9D2DA"/>
+                      </a:solidFill>
+                    </a:lnL>
+                    <a:lnR w="6350">
+                      <a:solidFill>
+                        <a:srgbClr val="C9D2DA"/>
+                      </a:solidFill>
+                    </a:lnR>
+                    <a:lnT w="6350">
+                      <a:solidFill>
+                        <a:srgbClr val="C9D2DA"/>
+                      </a:solidFill>
+                    </a:lnT>
+                    <a:lnB w="6350">
+                      <a:solidFill>
+                        <a:srgbClr val="C9D2DA"/>
+                      </a:solidFill>
+                    </a:lnB>
+                    <a:solidFill>
+                      <a:srgbClr val="FFFFFF"/>
+                    </a:solidFill>
+                  </a:tcPr>
+                </a:tc>
+                <a:tc>
+                  <a:txBody>
+                    <a:bodyPr/>
+                    <a:lstStyle/>
+                    <a:p>
+                      <a:pPr algn="ctr"/>
+                      <a:r>
                         <a:rPr lang="ko-KR" sz="1100" b="0" i="0" dirty="0">
                           <a:solidFill>
                             <a:srgbClr val="1D2A35"/>
@@ -9642,6 +9775,50 @@
                           <a:latin typeface="Malgun Gothic"/>
                           <a:ea typeface="Malgun Gothic"/>
                         </a:rPr>
+                        <a:t>16</a:t>
+                      </a:r>
+                    </a:p>
+                  </a:txBody>
+                  <a:tcPr marL="54864" marR="54864" marT="36576" marB="36576" anchor="ctr">
+                    <a:lnL w="6350">
+                      <a:solidFill>
+                        <a:srgbClr val="C9D2DA"/>
+                      </a:solidFill>
+                    </a:lnL>
+                    <a:lnR w="6350">
+                      <a:solidFill>
+                        <a:srgbClr val="C9D2DA"/>
+                      </a:solidFill>
+                    </a:lnR>
+                    <a:lnT w="6350">
+                      <a:solidFill>
+                        <a:srgbClr val="C9D2DA"/>
+                      </a:solidFill>
+                    </a:lnT>
+                    <a:lnB w="6350">
+                      <a:solidFill>
+                        <a:srgbClr val="C9D2DA"/>
+                      </a:solidFill>
+                    </a:lnB>
+                    <a:solidFill>
+                      <a:srgbClr val="F3F6F8"/>
+                    </a:solidFill>
+                  </a:tcPr>
+                </a:tc>
+                <a:tc>
+                  <a:txBody>
+                    <a:bodyPr/>
+                    <a:lstStyle/>
+                    <a:p>
+                      <a:pPr algn="ctr"/>
+                      <a:r>
+                        <a:rPr lang="ko-KR" sz="1100" b="0" i="0" dirty="0">
+                          <a:solidFill>
+                            <a:srgbClr val="1D2A35"/>
+                          </a:solidFill>
+                          <a:latin typeface="Malgun Gothic"/>
+                          <a:ea typeface="Malgun Gothic"/>
+                        </a:rPr>
                         <a:t>0</a:t>
                       </a:r>
                     </a:p>
@@ -9952,6 +10129,50 @@
                           <a:latin typeface="Malgun Gothic"/>
                           <a:ea typeface="Malgun Gothic"/>
                         </a:rPr>
+                        <a:t>15</a:t>
+                      </a:r>
+                    </a:p>
+                  </a:txBody>
+                  <a:tcPr marL="54864" marR="54864" marT="36576" marB="36576" anchor="ctr">
+                    <a:lnL w="6350">
+                      <a:solidFill>
+                        <a:srgbClr val="C9D2DA"/>
+                      </a:solidFill>
+                    </a:lnL>
+                    <a:lnR w="6350">
+                      <a:solidFill>
+                        <a:srgbClr val="C9D2DA"/>
+                      </a:solidFill>
+                    </a:lnR>
+                    <a:lnT w="6350">
+                      <a:solidFill>
+                        <a:srgbClr val="C9D2DA"/>
+                      </a:solidFill>
+                    </a:lnT>
+                    <a:lnB w="6350">
+                      <a:solidFill>
+                        <a:srgbClr val="C9D2DA"/>
+                      </a:solidFill>
+                    </a:lnB>
+                    <a:solidFill>
+                      <a:srgbClr val="FFFFFF"/>
+                    </a:solidFill>
+                  </a:tcPr>
+                </a:tc>
+                <a:tc>
+                  <a:txBody>
+                    <a:bodyPr/>
+                    <a:lstStyle/>
+                    <a:p>
+                      <a:pPr algn="ctr"/>
+                      <a:r>
+                        <a:rPr lang="ko-KR" sz="1100" b="0" i="0" dirty="0">
+                          <a:solidFill>
+                            <a:srgbClr val="1D2A35"/>
+                          </a:solidFill>
+                          <a:latin typeface="Malgun Gothic"/>
+                          <a:ea typeface="Malgun Gothic"/>
+                        </a:rPr>
                         <a:t>0</a:t>
                       </a:r>
                     </a:p>
@@ -10219,6 +10440,50 @@
                           <a:ea typeface="Malgun Gothic"/>
                         </a:rPr>
                         <a:t>소형 무인기(53)</a:t>
+                      </a:r>
+                    </a:p>
+                  </a:txBody>
+                  <a:tcPr marL="54864" marR="54864" marT="36576" marB="36576" anchor="ctr">
+                    <a:lnL w="6350">
+                      <a:solidFill>
+                        <a:srgbClr val="C9D2DA"/>
+                      </a:solidFill>
+                    </a:lnL>
+                    <a:lnR w="6350">
+                      <a:solidFill>
+                        <a:srgbClr val="C9D2DA"/>
+                      </a:solidFill>
+                    </a:lnR>
+                    <a:lnT w="6350">
+                      <a:solidFill>
+                        <a:srgbClr val="C9D2DA"/>
+                      </a:solidFill>
+                    </a:lnT>
+                    <a:lnB w="6350">
+                      <a:solidFill>
+                        <a:srgbClr val="C9D2DA"/>
+                      </a:solidFill>
+                    </a:lnB>
+                    <a:solidFill>
+                      <a:srgbClr val="F3F6F8"/>
+                    </a:solidFill>
+                  </a:tcPr>
+                </a:tc>
+                <a:tc>
+                  <a:txBody>
+                    <a:bodyPr/>
+                    <a:lstStyle/>
+                    <a:p>
+                      <a:pPr algn="ctr"/>
+                      <a:r>
+                        <a:rPr lang="ko-KR" sz="1100" b="0" i="0" dirty="0">
+                          <a:solidFill>
+                            <a:srgbClr val="1D2A35"/>
+                          </a:solidFill>
+                          <a:latin typeface="Malgun Gothic"/>
+                          <a:ea typeface="Malgun Gothic"/>
+                        </a:rPr>
+                        <a:t>50</a:t>
                       </a:r>
                     </a:p>
                   </a:txBody>
@@ -10575,13 +10840,14 @@
             <a:tbl>
               <a:tblPr/>
               <a:tblGrid>
-                <a:gridCol w="1762445"/>
+                <a:gridCol w="1566618"/>
+                <a:gridCol w="783309"/>
+                <a:gridCol w="1174964"/>
+                <a:gridCol w="1566618"/>
+                <a:gridCol w="1566618"/>
                 <a:gridCol w="1272877"/>
-                <a:gridCol w="1664532"/>
-                <a:gridCol w="1664532"/>
-                <a:gridCol w="1468704"/>
                 <a:gridCol w="1272877"/>
-                <a:gridCol w="1958273"/>
+                <a:gridCol w="1860359"/>
               </a:tblGrid>
               <a:tr h="283464">
                 <a:tc>
@@ -10642,6 +10908,50 @@
                           <a:latin typeface="Malgun Gothic"/>
                           <a:ea typeface="Malgun Gothic"/>
                         </a:rPr>
+                        <a:t>격추</a:t>
+                      </a:r>
+                    </a:p>
+                  </a:txBody>
+                  <a:tcPr marL="54864" marR="54864" marT="36576" marB="36576" anchor="ctr">
+                    <a:lnL w="6350">
+                      <a:solidFill>
+                        <a:srgbClr val="C9D2DA"/>
+                      </a:solidFill>
+                    </a:lnL>
+                    <a:lnR w="6350">
+                      <a:solidFill>
+                        <a:srgbClr val="C9D2DA"/>
+                      </a:solidFill>
+                    </a:lnR>
+                    <a:lnT w="6350">
+                      <a:solidFill>
+                        <a:srgbClr val="C9D2DA"/>
+                      </a:solidFill>
+                    </a:lnT>
+                    <a:lnB w="6350">
+                      <a:solidFill>
+                        <a:srgbClr val="C9D2DA"/>
+                      </a:solidFill>
+                    </a:lnB>
+                    <a:solidFill>
+                      <a:srgbClr val="143D5C"/>
+                    </a:solidFill>
+                  </a:tcPr>
+                </a:tc>
+                <a:tc>
+                  <a:txBody>
+                    <a:bodyPr/>
+                    <a:lstStyle/>
+                    <a:p>
+                      <a:pPr algn="ctr"/>
+                      <a:r>
+                        <a:rPr lang="ko-KR" sz="1100" b="1" i="0" dirty="0">
+                          <a:solidFill>
+                            <a:srgbClr val="FFFFFF"/>
+                          </a:solidFill>
+                          <a:latin typeface="Malgun Gothic"/>
+                          <a:ea typeface="Malgun Gothic"/>
+                        </a:rPr>
                         <a:t>생성→탐지</a:t>
                       </a:r>
                     </a:p>
@@ -10952,6 +11262,50 @@
                           <a:latin typeface="Malgun Gothic"/>
                           <a:ea typeface="Malgun Gothic"/>
                         </a:rPr>
+                        <a:t>45</a:t>
+                      </a:r>
+                    </a:p>
+                  </a:txBody>
+                  <a:tcPr marL="54864" marR="54864" marT="36576" marB="36576" anchor="ctr">
+                    <a:lnL w="6350">
+                      <a:solidFill>
+                        <a:srgbClr val="C9D2DA"/>
+                      </a:solidFill>
+                    </a:lnL>
+                    <a:lnR w="6350">
+                      <a:solidFill>
+                        <a:srgbClr val="C9D2DA"/>
+                      </a:solidFill>
+                    </a:lnR>
+                    <a:lnT w="6350">
+                      <a:solidFill>
+                        <a:srgbClr val="C9D2DA"/>
+                      </a:solidFill>
+                    </a:lnT>
+                    <a:lnB w="6350">
+                      <a:solidFill>
+                        <a:srgbClr val="C9D2DA"/>
+                      </a:solidFill>
+                    </a:lnB>
+                    <a:solidFill>
+                      <a:srgbClr val="F3F6F8"/>
+                    </a:solidFill>
+                  </a:tcPr>
+                </a:tc>
+                <a:tc>
+                  <a:txBody>
+                    <a:bodyPr/>
+                    <a:lstStyle/>
+                    <a:p>
+                      <a:pPr algn="ctr"/>
+                      <a:r>
+                        <a:rPr lang="ko-KR" sz="1100" b="0" i="0" dirty="0">
+                          <a:solidFill>
+                            <a:srgbClr val="1D2A35"/>
+                          </a:solidFill>
+                          <a:latin typeface="Malgun Gothic"/>
+                          <a:ea typeface="Malgun Gothic"/>
+                        </a:rPr>
                         <a:t>9</a:t>
                       </a:r>
                     </a:p>
@@ -11255,6 +11609,50 @@
                     <a:p>
                       <a:pPr algn="ctr"/>
                       <a:r>
+                        <a:rPr lang="ko-KR" sz="1100" b="1" i="0" dirty="0">
+                          <a:solidFill>
+                            <a:srgbClr val="B3261E"/>
+                          </a:solidFill>
+                          <a:latin typeface="Malgun Gothic"/>
+                          <a:ea typeface="Malgun Gothic"/>
+                        </a:rPr>
+                        <a:t>64</a:t>
+                      </a:r>
+                    </a:p>
+                  </a:txBody>
+                  <a:tcPr marL="54864" marR="54864" marT="36576" marB="36576" anchor="ctr">
+                    <a:lnL w="6350">
+                      <a:solidFill>
+                        <a:srgbClr val="C9D2DA"/>
+                      </a:solidFill>
+                    </a:lnL>
+                    <a:lnR w="6350">
+                      <a:solidFill>
+                        <a:srgbClr val="C9D2DA"/>
+                      </a:solidFill>
+                    </a:lnR>
+                    <a:lnT w="6350">
+                      <a:solidFill>
+                        <a:srgbClr val="C9D2DA"/>
+                      </a:solidFill>
+                    </a:lnT>
+                    <a:lnB w="6350">
+                      <a:solidFill>
+                        <a:srgbClr val="C9D2DA"/>
+                      </a:solidFill>
+                    </a:lnB>
+                    <a:solidFill>
+                      <a:srgbClr val="FFFFFF"/>
+                    </a:solidFill>
+                  </a:tcPr>
+                </a:tc>
+                <a:tc>
+                  <a:txBody>
+                    <a:bodyPr/>
+                    <a:lstStyle/>
+                    <a:p>
+                      <a:pPr algn="ctr"/>
+                      <a:r>
                         <a:rPr lang="ko-KR" sz="1100" b="0" i="0" dirty="0">
                           <a:solidFill>
                             <a:srgbClr val="1D2A35"/>
@@ -11572,6 +11970,50 @@
                           <a:latin typeface="Malgun Gothic"/>
                           <a:ea typeface="Malgun Gothic"/>
                         </a:rPr>
+                        <a:t>16</a:t>
+                      </a:r>
+                    </a:p>
+                  </a:txBody>
+                  <a:tcPr marL="54864" marR="54864" marT="36576" marB="36576" anchor="ctr">
+                    <a:lnL w="6350">
+                      <a:solidFill>
+                        <a:srgbClr val="C9D2DA"/>
+                      </a:solidFill>
+                    </a:lnL>
+                    <a:lnR w="6350">
+                      <a:solidFill>
+                        <a:srgbClr val="C9D2DA"/>
+                      </a:solidFill>
+                    </a:lnR>
+                    <a:lnT w="6350">
+                      <a:solidFill>
+                        <a:srgbClr val="C9D2DA"/>
+                      </a:solidFill>
+                    </a:lnT>
+                    <a:lnB w="6350">
+                      <a:solidFill>
+                        <a:srgbClr val="C9D2DA"/>
+                      </a:solidFill>
+                    </a:lnB>
+                    <a:solidFill>
+                      <a:srgbClr val="F3F6F8"/>
+                    </a:solidFill>
+                  </a:tcPr>
+                </a:tc>
+                <a:tc>
+                  <a:txBody>
+                    <a:bodyPr/>
+                    <a:lstStyle/>
+                    <a:p>
+                      <a:pPr algn="ctr"/>
+                      <a:r>
+                        <a:rPr lang="ko-KR" sz="1100" b="0" i="0" dirty="0">
+                          <a:solidFill>
+                            <a:srgbClr val="1D2A35"/>
+                          </a:solidFill>
+                          <a:latin typeface="Malgun Gothic"/>
+                          <a:ea typeface="Malgun Gothic"/>
+                        </a:rPr>
                         <a:t>0</a:t>
                       </a:r>
                     </a:p>
@@ -11882,6 +12324,50 @@
                           <a:latin typeface="Malgun Gothic"/>
                           <a:ea typeface="Malgun Gothic"/>
                         </a:rPr>
+                        <a:t>15</a:t>
+                      </a:r>
+                    </a:p>
+                  </a:txBody>
+                  <a:tcPr marL="54864" marR="54864" marT="36576" marB="36576" anchor="ctr">
+                    <a:lnL w="6350">
+                      <a:solidFill>
+                        <a:srgbClr val="C9D2DA"/>
+                      </a:solidFill>
+                    </a:lnL>
+                    <a:lnR w="6350">
+                      <a:solidFill>
+                        <a:srgbClr val="C9D2DA"/>
+                      </a:solidFill>
+                    </a:lnR>
+                    <a:lnT w="6350">
+                      <a:solidFill>
+                        <a:srgbClr val="C9D2DA"/>
+                      </a:solidFill>
+                    </a:lnT>
+                    <a:lnB w="6350">
+                      <a:solidFill>
+                        <a:srgbClr val="C9D2DA"/>
+                      </a:solidFill>
+                    </a:lnB>
+                    <a:solidFill>
+                      <a:srgbClr val="FFFFFF"/>
+                    </a:solidFill>
+                  </a:tcPr>
+                </a:tc>
+                <a:tc>
+                  <a:txBody>
+                    <a:bodyPr/>
+                    <a:lstStyle/>
+                    <a:p>
+                      <a:pPr algn="ctr"/>
+                      <a:r>
+                        <a:rPr lang="ko-KR" sz="1100" b="0" i="0" dirty="0">
+                          <a:solidFill>
+                            <a:srgbClr val="1D2A35"/>
+                          </a:solidFill>
+                          <a:latin typeface="Malgun Gothic"/>
+                          <a:ea typeface="Malgun Gothic"/>
+                        </a:rPr>
                         <a:t>0</a:t>
                       </a:r>
                     </a:p>
@@ -12149,6 +12635,50 @@
                           <a:ea typeface="Malgun Gothic"/>
                         </a:rPr>
                         <a:t>소형 무인기(53)</a:t>
+                      </a:r>
+                    </a:p>
+                  </a:txBody>
+                  <a:tcPr marL="54864" marR="54864" marT="36576" marB="36576" anchor="ctr">
+                    <a:lnL w="6350">
+                      <a:solidFill>
+                        <a:srgbClr val="C9D2DA"/>
+                      </a:solidFill>
+                    </a:lnL>
+                    <a:lnR w="6350">
+                      <a:solidFill>
+                        <a:srgbClr val="C9D2DA"/>
+                      </a:solidFill>
+                    </a:lnR>
+                    <a:lnT w="6350">
+                      <a:solidFill>
+                        <a:srgbClr val="C9D2DA"/>
+                      </a:solidFill>
+                    </a:lnT>
+                    <a:lnB w="6350">
+                      <a:solidFill>
+                        <a:srgbClr val="C9D2DA"/>
+                      </a:solidFill>
+                    </a:lnB>
+                    <a:solidFill>
+                      <a:srgbClr val="F3F6F8"/>
+                    </a:solidFill>
+                  </a:tcPr>
+                </a:tc>
+                <a:tc>
+                  <a:txBody>
+                    <a:bodyPr/>
+                    <a:lstStyle/>
+                    <a:p>
+                      <a:pPr algn="ctr"/>
+                      <a:r>
+                        <a:rPr lang="ko-KR" sz="1100" b="0" i="0" dirty="0">
+                          <a:solidFill>
+                            <a:srgbClr val="1D2A35"/>
+                          </a:solidFill>
+                          <a:latin typeface="Malgun Gothic"/>
+                          <a:ea typeface="Malgun Gothic"/>
+                        </a:rPr>
+                        <a:t>52</a:t>
                       </a:r>
                     </a:p>
                   </a:txBody>
@@ -13380,7 +13910,7 @@
               <a:buChar char="•"/>
             </a:pPr>
             <a:r>
-              <a:rPr lang="ko-KR" sz="1100" b="0" i="0" dirty="0">
+              <a:rPr lang="ko-KR" sz="1050" b="0" i="0" dirty="0">
                 <a:solidFill>
                   <a:srgbClr val="1D2A35"/>
                 </a:solidFill>
@@ -13401,14 +13931,14 @@
               <a:buChar char="•"/>
             </a:pPr>
             <a:r>
-              <a:rPr lang="ko-KR" sz="1100" b="0" i="0" dirty="0">
+              <a:rPr lang="ko-KR" sz="1050" b="0" i="0" dirty="0">
                 <a:solidFill>
                   <a:srgbClr val="1D2A35"/>
                 </a:solidFill>
                 <a:latin typeface="Malgun Gothic"/>
                 <a:ea typeface="Malgun Gothic"/>
               </a:rPr>
-              <a:t>총 시간 단축(전투기 164 → 119초 · 순항 107 → 87초): 창이 이미 열려 있어 결심이 빨라진 만큼 발사·명중도 당겨진다. 다만 창이 넓어 어차피 창 안에서 맞히므로 격추 수는 같다(15 대 15 · 16 대 16).</a:t>
+              <a:t>총 시간 단축(전투기 164 → 119초 · 순항 107 → 87초): 창이 이미 열려 있어 결심이 빨라진 만큼 발사·명중도 당겨진다. 창이 넓어 격추 수는 같다(15 대 15 · 16 대 16). 순항의 결심→발사 48 → 56초·발사→명중 24 → 26초 증가는 늦어진 것이 아니다(생성→발사 83 → 62초) — 결심이 30초 당겨진 만큼 Patriot 창까지의 대기가 늘고, 사수가 천궁-II(비행 20초)에서 Patriot(28초)으로 바뀐 결과.</a:t>
             </a:r>
           </a:p>
           <a:p>
@@ -13422,7 +13952,7 @@
               <a:buChar char="•"/>
             </a:pPr>
             <a:r>
-              <a:rPr lang="ko-KR" sz="1100" b="0" i="0" dirty="0">
+              <a:rPr lang="ko-KR" sz="1050" b="0" i="0" dirty="0">
                 <a:solidFill>
                   <a:srgbClr val="1D2A35"/>
                 </a:solidFill>

--- a/K-JAMDS_효과척도_발표정리본.pptx
+++ b/K-JAMDS_효과척도_발표정리본.pptx
@@ -13938,7 +13938,7 @@
                 <a:latin typeface="Malgun Gothic"/>
                 <a:ea typeface="Malgun Gothic"/>
               </a:rPr>
-              <a:t>총 시간 단축(전투기 164 → 119초 · 순항 107 → 87초): 창이 이미 열려 있어 결심이 빨라진 만큼 발사·명중도 당겨진다. 창이 넓어 격추 수는 같다(15 대 15 · 16 대 16). 순항의 결심→발사 48 → 56초·발사→명중 24 → 26초 증가는 늦어진 것이 아니다(생성→발사 83 → 62초) — 결심이 30초 당겨진 만큼 Patriot 창까지의 대기가 늘고, 사수가 천궁-II(비행 20초)에서 Patriot(28초)으로 바뀐 결과.</a:t>
+              <a:t>총 시간 단축(전투기 164 → 119초 · 순항 107 → 87초): 창이 이미 열려 있어 결심이 빨라진 만큼 발사·명중도 당겨진다. 창이 넓어 격추 수는 같다(15 대 15 · 16 대 16). 순항의 결심→발사 48 → 56초·발사→명중 24 → 26초 증가는 늦어진 것이 아니다(생성→발사 83 → 62초) — 결심이 30초 당겨진 만큼 Patriot 창까지의 대기가 늘고, 사수가 한국군 포대 8건(천궁-II·L-SAM · 비행 평균 20초)에서 Patriot 14건(28초)으로 바뀐 결과.</a:t>
             </a:r>
           </a:p>
           <a:p>

--- a/K-JAMDS_효과척도_발표정리본.pptx
+++ b/K-JAMDS_효과척도_발표정리본.pptx
@@ -14033,7 +14033,7 @@
                 <a:latin typeface="Malgun Gothic"/>
                 <a:ea typeface="Malgun Gothic"/>
               </a:rPr>
-              <a:t>5. 얼마나 효율적인가 — 부하 (1/2): 처리 용량이 있는 부분 전부</a:t>
+              <a:t>5. 얼마나 효율적인가 — 부하 (1/2): 지휘소는 여유, 병목은 포대의 물리와 탄</a:t>
             </a:r>
           </a:p>
         </p:txBody>
@@ -14074,7 +14074,7 @@
                 <a:latin typeface="Malgun Gothic"/>
                 <a:ea typeface="Malgun Gothic"/>
               </a:rPr>
-              <a:t>이용률은 생성 구간 1800초 기준 · 「용량 없음」인 부분은 부하가 커져도 결과에 영향이 없어 분석 범위 밖</a:t>
+              <a:t>이용률 = 처리 중인 시간 비율(1이면 쉴 틈 없음 · 0.9부터 포화) · 생성 구간 1800초 기준</a:t>
             </a:r>
           </a:p>
         </p:txBody>
@@ -14120,30 +14120,497 @@
           </a:p>
         </p:txBody>
       </p:sp>
+      <p:sp>
+        <p:nvSpPr>
+          <p:cNvPr id="6" name="Shape 6"/>
+          <p:cNvSpPr/>
+          <p:nvPr/>
+        </p:nvSpPr>
+        <p:spPr>
+          <a:xfrm>
+            <a:off x="548640" y="1234440"/>
+            <a:ext cx="2606040" cy="1371600"/>
+          </a:xfrm>
+          <a:prstGeom prst="roundRect">
+            <a:avLst>
+              <a:gd name="adj" fmla="val 12000"/>
+            </a:avLst>
+          </a:prstGeom>
+          <a:solidFill>
+            <a:srgbClr val="F3F6F8"/>
+          </a:solidFill>
+          <a:ln>
+            <a:noFill/>
+          </a:ln>
+        </p:spPr>
+        <p:txBody>
+          <a:bodyPr/>
+          <a:lstStyle/>
+          <a:p>
+            <a:endParaRPr lang="ko-KR"/>
+          </a:p>
+        </p:txBody>
+      </p:sp>
+      <p:sp>
+        <p:nvSpPr>
+          <p:cNvPr id="7" name="Text 7"/>
+          <p:cNvSpPr txBox="1"/>
+          <p:nvPr/>
+        </p:nvSpPr>
+        <p:spPr>
+          <a:xfrm>
+            <a:off x="548640" y="1307592"/>
+            <a:ext cx="2606040" cy="754380"/>
+          </a:xfrm>
+          <a:prstGeom prst="rect">
+            <a:avLst/>
+          </a:prstGeom>
+          <a:noFill/>
+          <a:ln>
+            <a:noFill/>
+          </a:ln>
+        </p:spPr>
+        <p:txBody>
+          <a:bodyPr wrap="square" lIns="0" tIns="0" rIns="0" bIns="0" anchor="ctr" rtlCol="0">
+            <a:normAutofit/>
+          </a:bodyPr>
+          <a:lstStyle/>
+          <a:p>
+            <a:pPr algn="ctr">
+              <a:buNone/>
+            </a:pPr>
+            <a:r>
+              <a:rPr lang="ko-KR" sz="3000" b="1" i="0" dirty="0">
+                <a:solidFill>
+                  <a:srgbClr val="1B7F3B"/>
+                </a:solidFill>
+                <a:latin typeface="Malgun Gothic"/>
+                <a:ea typeface="Malgun Gothic"/>
+              </a:rPr>
+              <a:t>0.51 / 0.45</a:t>
+            </a:r>
+          </a:p>
+        </p:txBody>
+      </p:sp>
+      <p:sp>
+        <p:nvSpPr>
+          <p:cNvPr id="8" name="Text 8"/>
+          <p:cNvSpPr txBox="1"/>
+          <p:nvPr/>
+        </p:nvSpPr>
+        <p:spPr>
+          <a:xfrm>
+            <a:off x="640080" y="2057400"/>
+            <a:ext cx="2423160" cy="521208"/>
+          </a:xfrm>
+          <a:prstGeom prst="rect">
+            <a:avLst/>
+          </a:prstGeom>
+          <a:noFill/>
+          <a:ln>
+            <a:noFill/>
+          </a:ln>
+        </p:spPr>
+        <p:txBody>
+          <a:bodyPr wrap="square" lIns="0" tIns="0" rIns="0" bIns="0" anchor="t" rtlCol="0">
+            <a:normAutofit/>
+          </a:bodyPr>
+          <a:lstStyle/>
+          <a:p>
+            <a:pPr algn="ctr">
+              <a:lnSpc>
+                <a:spcPct val="114999"/>
+              </a:lnSpc>
+              <a:buNone/>
+            </a:pPr>
+            <a:r>
+              <a:rPr lang="ko-KR" sz="1100" b="0" i="0" dirty="0">
+                <a:solidFill>
+                  <a:srgbClr val="5B6B7A"/>
+                </a:solidFill>
+                <a:latin typeface="Malgun Gothic"/>
+                <a:ea typeface="Malgun Gothic"/>
+              </a:rPr>
+              <a:t>결심 지휘소 최대 이용률 As-Is / To-Be
+(탄도탄작전통제소 · 임계 0.9의 절반)</a:t>
+            </a:r>
+          </a:p>
+        </p:txBody>
+      </p:sp>
+      <p:sp>
+        <p:nvSpPr>
+          <p:cNvPr id="9" name="Shape 9"/>
+          <p:cNvSpPr/>
+          <p:nvPr/>
+        </p:nvSpPr>
+        <p:spPr>
+          <a:xfrm>
+            <a:off x="3337560" y="1234440"/>
+            <a:ext cx="2606040" cy="1371600"/>
+          </a:xfrm>
+          <a:prstGeom prst="roundRect">
+            <a:avLst>
+              <a:gd name="adj" fmla="val 12000"/>
+            </a:avLst>
+          </a:prstGeom>
+          <a:solidFill>
+            <a:srgbClr val="F3F6F8"/>
+          </a:solidFill>
+          <a:ln>
+            <a:noFill/>
+          </a:ln>
+        </p:spPr>
+        <p:txBody>
+          <a:bodyPr/>
+          <a:lstStyle/>
+          <a:p>
+            <a:endParaRPr lang="ko-KR"/>
+          </a:p>
+        </p:txBody>
+      </p:sp>
+      <p:sp>
+        <p:nvSpPr>
+          <p:cNvPr id="10" name="Text 10"/>
+          <p:cNvSpPr txBox="1"/>
+          <p:nvPr/>
+        </p:nvSpPr>
+        <p:spPr>
+          <a:xfrm>
+            <a:off x="3337560" y="1307592"/>
+            <a:ext cx="2606040" cy="754380"/>
+          </a:xfrm>
+          <a:prstGeom prst="rect">
+            <a:avLst/>
+          </a:prstGeom>
+          <a:noFill/>
+          <a:ln>
+            <a:noFill/>
+          </a:ln>
+        </p:spPr>
+        <p:txBody>
+          <a:bodyPr wrap="square" lIns="0" tIns="0" rIns="0" bIns="0" anchor="ctr" rtlCol="0">
+            <a:normAutofit/>
+          </a:bodyPr>
+          <a:lstStyle/>
+          <a:p>
+            <a:pPr algn="ctr">
+              <a:buNone/>
+            </a:pPr>
+            <a:r>
+              <a:rPr lang="ko-KR" sz="3000" b="1" i="0" dirty="0">
+                <a:solidFill>
+                  <a:srgbClr val="B3261E"/>
+                </a:solidFill>
+                <a:latin typeface="Malgun Gothic"/>
+                <a:ea typeface="Malgun Gothic"/>
+              </a:rPr>
+              <a:t>6/6 포화</a:t>
+            </a:r>
+          </a:p>
+        </p:txBody>
+      </p:sp>
+      <p:sp>
+        <p:nvSpPr>
+          <p:cNvPr id="11" name="Text 11"/>
+          <p:cNvSpPr txBox="1"/>
+          <p:nvPr/>
+        </p:nvSpPr>
+        <p:spPr>
+          <a:xfrm>
+            <a:off x="3429000" y="2057400"/>
+            <a:ext cx="2423160" cy="521208"/>
+          </a:xfrm>
+          <a:prstGeom prst="rect">
+            <a:avLst/>
+          </a:prstGeom>
+          <a:noFill/>
+          <a:ln>
+            <a:noFill/>
+          </a:ln>
+        </p:spPr>
+        <p:txBody>
+          <a:bodyPr wrap="square" lIns="0" tIns="0" rIns="0" bIns="0" anchor="t" rtlCol="0">
+            <a:normAutofit/>
+          </a:bodyPr>
+          <a:lstStyle/>
+          <a:p>
+            <a:pPr algn="ctr">
+              <a:lnSpc>
+                <a:spcPct val="114999"/>
+              </a:lnSpc>
+              <a:buNone/>
+            </a:pPr>
+            <a:r>
+              <a:rPr lang="ko-KR" sz="1100" b="0" i="0" dirty="0">
+                <a:solidFill>
+                  <a:srgbClr val="5B6B7A"/>
+                </a:solidFill>
+                <a:latin typeface="Malgun Gothic"/>
+                <a:ea typeface="Malgun Gothic"/>
+              </a:rPr>
+              <a:t>THAAD 동시교전 채널
+(차단 26 · 24건 — 두 체계 같음)</a:t>
+            </a:r>
+          </a:p>
+        </p:txBody>
+      </p:sp>
+      <p:sp>
+        <p:nvSpPr>
+          <p:cNvPr id="12" name="Shape 12"/>
+          <p:cNvSpPr/>
+          <p:nvPr/>
+        </p:nvSpPr>
+        <p:spPr>
+          <a:xfrm>
+            <a:off x="6126480" y="1234440"/>
+            <a:ext cx="2606040" cy="1371600"/>
+          </a:xfrm>
+          <a:prstGeom prst="roundRect">
+            <a:avLst>
+              <a:gd name="adj" fmla="val 12000"/>
+            </a:avLst>
+          </a:prstGeom>
+          <a:solidFill>
+            <a:srgbClr val="F3F6F8"/>
+          </a:solidFill>
+          <a:ln>
+            <a:noFill/>
+          </a:ln>
+        </p:spPr>
+        <p:txBody>
+          <a:bodyPr/>
+          <a:lstStyle/>
+          <a:p>
+            <a:endParaRPr lang="ko-KR"/>
+          </a:p>
+        </p:txBody>
+      </p:sp>
+      <p:sp>
+        <p:nvSpPr>
+          <p:cNvPr id="13" name="Text 13"/>
+          <p:cNvSpPr txBox="1"/>
+          <p:nvPr/>
+        </p:nvSpPr>
+        <p:spPr>
+          <a:xfrm>
+            <a:off x="6126480" y="1307592"/>
+            <a:ext cx="2606040" cy="754380"/>
+          </a:xfrm>
+          <a:prstGeom prst="rect">
+            <a:avLst/>
+          </a:prstGeom>
+          <a:noFill/>
+          <a:ln>
+            <a:noFill/>
+          </a:ln>
+        </p:spPr>
+        <p:txBody>
+          <a:bodyPr wrap="square" lIns="0" tIns="0" rIns="0" bIns="0" anchor="ctr" rtlCol="0">
+            <a:normAutofit/>
+          </a:bodyPr>
+          <a:lstStyle/>
+          <a:p>
+            <a:pPr algn="ctr">
+              <a:buNone/>
+            </a:pPr>
+            <a:r>
+              <a:rPr lang="ko-KR" sz="3000" b="1" i="0" dirty="0">
+                <a:solidFill>
+                  <a:srgbClr val="B3261E"/>
+                </a:solidFill>
+                <a:latin typeface="Malgun Gothic"/>
+                <a:ea typeface="Malgun Gothic"/>
+              </a:rPr>
+              <a:t>19 → 13건</a:t>
+            </a:r>
+          </a:p>
+        </p:txBody>
+      </p:sp>
+      <p:sp>
+        <p:nvSpPr>
+          <p:cNvPr id="14" name="Text 14"/>
+          <p:cNvSpPr txBox="1"/>
+          <p:nvPr/>
+        </p:nvSpPr>
+        <p:spPr>
+          <a:xfrm>
+            <a:off x="6217920" y="2057400"/>
+            <a:ext cx="2423160" cy="521208"/>
+          </a:xfrm>
+          <a:prstGeom prst="rect">
+            <a:avLst/>
+          </a:prstGeom>
+          <a:noFill/>
+          <a:ln>
+            <a:noFill/>
+          </a:ln>
+        </p:spPr>
+        <p:txBody>
+          <a:bodyPr wrap="square" lIns="0" tIns="0" rIns="0" bIns="0" anchor="t" rtlCol="0">
+            <a:normAutofit/>
+          </a:bodyPr>
+          <a:lstStyle/>
+          <a:p>
+            <a:pPr algn="ctr">
+              <a:lnSpc>
+                <a:spcPct val="114999"/>
+              </a:lnSpc>
+              <a:buNone/>
+            </a:pPr>
+            <a:r>
+              <a:rPr lang="ko-KR" sz="1100" b="0" i="0" dirty="0">
+                <a:solidFill>
+                  <a:srgbClr val="5B6B7A"/>
+                </a:solidFill>
+                <a:latin typeface="Malgun Gothic"/>
+                <a:ea typeface="Malgun Gothic"/>
+              </a:rPr>
+              <a:t>탄 소진 누수 As-Is → To-Be
+(상층 L-SAM 24발이 먼저 빔)</a:t>
+            </a:r>
+          </a:p>
+        </p:txBody>
+      </p:sp>
+      <p:sp>
+        <p:nvSpPr>
+          <p:cNvPr id="15" name="Shape 15"/>
+          <p:cNvSpPr/>
+          <p:nvPr/>
+        </p:nvSpPr>
+        <p:spPr>
+          <a:xfrm>
+            <a:off x="8915400" y="1234440"/>
+            <a:ext cx="2606040" cy="1371600"/>
+          </a:xfrm>
+          <a:prstGeom prst="roundRect">
+            <a:avLst>
+              <a:gd name="adj" fmla="val 12000"/>
+            </a:avLst>
+          </a:prstGeom>
+          <a:solidFill>
+            <a:srgbClr val="F3F6F8"/>
+          </a:solidFill>
+          <a:ln>
+            <a:noFill/>
+          </a:ln>
+        </p:spPr>
+        <p:txBody>
+          <a:bodyPr/>
+          <a:lstStyle/>
+          <a:p>
+            <a:endParaRPr lang="ko-KR"/>
+          </a:p>
+        </p:txBody>
+      </p:sp>
+      <p:sp>
+        <p:nvSpPr>
+          <p:cNvPr id="16" name="Text 16"/>
+          <p:cNvSpPr txBox="1"/>
+          <p:nvPr/>
+        </p:nvSpPr>
+        <p:spPr>
+          <a:xfrm>
+            <a:off x="8915400" y="1307592"/>
+            <a:ext cx="2606040" cy="754380"/>
+          </a:xfrm>
+          <a:prstGeom prst="rect">
+            <a:avLst/>
+          </a:prstGeom>
+          <a:noFill/>
+          <a:ln>
+            <a:noFill/>
+          </a:ln>
+        </p:spPr>
+        <p:txBody>
+          <a:bodyPr wrap="square" lIns="0" tIns="0" rIns="0" bIns="0" anchor="ctr" rtlCol="0">
+            <a:normAutofit/>
+          </a:bodyPr>
+          <a:lstStyle/>
+          <a:p>
+            <a:pPr algn="ctr">
+              <a:buNone/>
+            </a:pPr>
+            <a:r>
+              <a:rPr lang="ko-KR" sz="3000" b="1" i="0" dirty="0">
+                <a:solidFill>
+                  <a:srgbClr val="1B7F3B"/>
+                </a:solidFill>
+                <a:latin typeface="Malgun Gothic"/>
+                <a:ea typeface="Malgun Gothic"/>
+              </a:rPr>
+              <a:t>0 → 0건</a:t>
+            </a:r>
+          </a:p>
+        </p:txBody>
+      </p:sp>
+      <p:sp>
+        <p:nvSpPr>
+          <p:cNvPr id="17" name="Text 17"/>
+          <p:cNvSpPr txBox="1"/>
+          <p:nvPr/>
+        </p:nvSpPr>
+        <p:spPr>
+          <a:xfrm>
+            <a:off x="9006840" y="2057400"/>
+            <a:ext cx="2423160" cy="521208"/>
+          </a:xfrm>
+          <a:prstGeom prst="rect">
+            <a:avLst/>
+          </a:prstGeom>
+          <a:noFill/>
+          <a:ln>
+            <a:noFill/>
+          </a:ln>
+        </p:spPr>
+        <p:txBody>
+          <a:bodyPr wrap="square" lIns="0" tIns="0" rIns="0" bIns="0" anchor="t" rtlCol="0">
+            <a:normAutofit/>
+          </a:bodyPr>
+          <a:lstStyle/>
+          <a:p>
+            <a:pPr algn="ctr">
+              <a:lnSpc>
+                <a:spcPct val="114999"/>
+              </a:lnSpc>
+              <a:buNone/>
+            </a:pPr>
+            <a:r>
+              <a:rPr lang="ko-KR" sz="1100" b="0" i="0" dirty="0">
+                <a:solidFill>
+                  <a:srgbClr val="5B6B7A"/>
+                </a:solidFill>
+                <a:latin typeface="Malgun Gothic"/>
+                <a:ea typeface="Malgun Gothic"/>
+              </a:rPr>
+              <a:t>지휘소·사격통제소 처리 누락(드롭)
+(대기열 넘침 없음)</a:t>
+            </a:r>
+          </a:p>
+        </p:txBody>
+      </p:sp>
       <p:graphicFrame>
         <p:nvGraphicFramePr>
-          <p:cNvPr id="6" name="Table 6"/>
+          <p:cNvPr id="18" name="Table 18"/>
           <p:cNvGraphicFramePr>
             <a:graphicFrameLocks noGrp="1"/>
           </p:cNvGraphicFramePr>
           <p:nvPr/>
         </p:nvGraphicFramePr>
         <p:xfrm>
-          <a:off x="548640" y="1280160"/>
-          <a:ext cx="11064240" cy="3621024"/>
+          <a:off x="548640" y="2834640"/>
+          <a:ext cx="11064240" cy="2560320"/>
         </p:xfrm>
         <a:graphic>
           <a:graphicData uri="http://schemas.openxmlformats.org/drawingml/2006/table">
             <a:tbl>
               <a:tblPr/>
               <a:tblGrid>
-                <a:gridCol w="1554480"/>
-                <a:gridCol w="2468880"/>
+                <a:gridCol w="2377440"/>
+                <a:gridCol w="3108960"/>
+                <a:gridCol w="2743200"/>
                 <a:gridCol w="2834640"/>
-                <a:gridCol w="2286000"/>
-                <a:gridCol w="1920240"/>
               </a:tblGrid>
-              <a:tr h="329184">
+              <a:tr h="365760">
                 <a:tc>
                   <a:txBody>
                     <a:bodyPr/>
@@ -14151,7 +14618,7 @@
                     <a:p>
                       <a:pPr algn="l"/>
                       <a:r>
-                        <a:rPr lang="ko-KR" sz="900" b="1" i="0" dirty="0">
+                        <a:rPr lang="ko-KR" sz="1050" b="1" i="0" dirty="0">
                           <a:solidFill>
                             <a:srgbClr val="FFFFFF"/>
                           </a:solidFill>
@@ -14195,14 +14662,14 @@
                     <a:p>
                       <a:pPr algn="l"/>
                       <a:r>
-                        <a:rPr lang="ko-KR" sz="900" b="1" i="0" dirty="0">
+                        <a:rPr lang="ko-KR" sz="1050" b="1" i="0" dirty="0">
                           <a:solidFill>
                             <a:srgbClr val="FFFFFF"/>
                           </a:solidFill>
                           <a:latin typeface="Malgun Gothic"/>
                           <a:ea typeface="Malgun Gothic"/>
                         </a:rPr>
-                        <a:t>용량 모델(개념값)</a:t>
+                        <a:t>As-Is</a:t>
                       </a:r>
                     </a:p>
                   </a:txBody>
@@ -14239,14 +14706,14 @@
                     <a:p>
                       <a:pPr algn="l"/>
                       <a:r>
-                        <a:rPr lang="ko-KR" sz="900" b="1" i="0" dirty="0">
+                        <a:rPr lang="ko-KR" sz="1050" b="1" i="0" dirty="0">
                           <a:solidFill>
                             <a:srgbClr val="FFFFFF"/>
                           </a:solidFill>
                           <a:latin typeface="Malgun Gothic"/>
                           <a:ea typeface="Malgun Gothic"/>
                         </a:rPr>
-                        <a:t>As-Is 관측</a:t>
+                        <a:t>To-Be</a:t>
                       </a:r>
                     </a:p>
                   </a:txBody>
@@ -14283,14 +14750,14 @@
                     <a:p>
                       <a:pPr algn="l"/>
                       <a:r>
-                        <a:rPr lang="ko-KR" sz="900" b="1" i="0" dirty="0">
+                        <a:rPr lang="ko-KR" sz="1050" b="1" i="0" dirty="0">
                           <a:solidFill>
                             <a:srgbClr val="FFFFFF"/>
                           </a:solidFill>
                           <a:latin typeface="Malgun Gothic"/>
                           <a:ea typeface="Malgun Gothic"/>
                         </a:rPr>
-                        <a:t>To-Be 관측</a:t>
+                        <a:t>한 줄 판정</a:t>
                       </a:r>
                     </a:p>
                   </a:txBody>
@@ -14320,6 +14787,8 @@
                     </a:solidFill>
                   </a:tcPr>
                 </a:tc>
+              </a:tr>
+              <a:tr h="365760">
                 <a:tc>
                   <a:txBody>
                     <a:bodyPr/>
@@ -14327,45 +14796,177 @@
                     <a:p>
                       <a:pPr algn="l"/>
                       <a:r>
-                        <a:rPr lang="ko-KR" sz="900" b="1" i="0" dirty="0">
-                          <a:solidFill>
-                            <a:srgbClr val="FFFFFF"/>
-                          </a:solidFill>
-                          <a:latin typeface="Malgun Gothic"/>
-                          <a:ea typeface="Malgun Gothic"/>
-                        </a:rPr>
-                        <a:t>판정</a:t>
-                      </a:r>
-                    </a:p>
-                  </a:txBody>
-                  <a:tcPr marL="54864" marR="54864" marT="36576" marB="36576" anchor="ctr">
-                    <a:lnL w="6350">
-                      <a:solidFill>
-                        <a:srgbClr val="C9D2DA"/>
-                      </a:solidFill>
-                    </a:lnL>
-                    <a:lnR w="6350">
-                      <a:solidFill>
-                        <a:srgbClr val="C9D2DA"/>
-                      </a:solidFill>
-                    </a:lnR>
-                    <a:lnT w="6350">
-                      <a:solidFill>
-                        <a:srgbClr val="C9D2DA"/>
-                      </a:solidFill>
-                    </a:lnT>
-                    <a:lnB w="6350">
-                      <a:solidFill>
-                        <a:srgbClr val="C9D2DA"/>
-                      </a:solidFill>
-                    </a:lnB>
-                    <a:solidFill>
-                      <a:srgbClr val="143D5C"/>
+                        <a:rPr lang="ko-KR" sz="1050" b="1" i="0" dirty="0">
+                          <a:solidFill>
+                            <a:srgbClr val="1D2A35"/>
+                          </a:solidFill>
+                          <a:latin typeface="Malgun Gothic"/>
+                          <a:ea typeface="Malgun Gothic"/>
+                        </a:rPr>
+                        <a:t>결심 지휘소</a:t>
+                      </a:r>
+                    </a:p>
+                  </a:txBody>
+                  <a:tcPr marL="54864" marR="54864" marT="36576" marB="36576" anchor="ctr">
+                    <a:lnL w="6350">
+                      <a:solidFill>
+                        <a:srgbClr val="C9D2DA"/>
+                      </a:solidFill>
+                    </a:lnL>
+                    <a:lnR w="6350">
+                      <a:solidFill>
+                        <a:srgbClr val="C9D2DA"/>
+                      </a:solidFill>
+                    </a:lnR>
+                    <a:lnT w="6350">
+                      <a:solidFill>
+                        <a:srgbClr val="C9D2DA"/>
+                      </a:solidFill>
+                    </a:lnT>
+                    <a:lnB w="6350">
+                      <a:solidFill>
+                        <a:srgbClr val="C9D2DA"/>
+                      </a:solidFill>
+                    </a:lnB>
+                    <a:solidFill>
+                      <a:srgbClr val="F3F6F8"/>
+                    </a:solidFill>
+                  </a:tcPr>
+                </a:tc>
+                <a:tc>
+                  <a:txBody>
+                    <a:bodyPr/>
+                    <a:lstStyle/>
+                    <a:p>
+                      <a:pPr algn="l"/>
+                      <a:r>
+                        <a:rPr lang="ko-KR" sz="1050" b="0" i="0" dirty="0">
+                          <a:solidFill>
+                            <a:srgbClr val="1D2A35"/>
+                          </a:solidFill>
+                          <a:latin typeface="Malgun Gothic"/>
+                          <a:ea typeface="Malgun Gothic"/>
+                        </a:rPr>
+                        <a:t>이용률 최대 0.51 · 대기 1초 안팎</a:t>
+                      </a:r>
+                    </a:p>
+                  </a:txBody>
+                  <a:tcPr marL="54864" marR="54864" marT="36576" marB="36576" anchor="ctr">
+                    <a:lnL w="6350">
+                      <a:solidFill>
+                        <a:srgbClr val="C9D2DA"/>
+                      </a:solidFill>
+                    </a:lnL>
+                    <a:lnR w="6350">
+                      <a:solidFill>
+                        <a:srgbClr val="C9D2DA"/>
+                      </a:solidFill>
+                    </a:lnR>
+                    <a:lnT w="6350">
+                      <a:solidFill>
+                        <a:srgbClr val="C9D2DA"/>
+                      </a:solidFill>
+                    </a:lnT>
+                    <a:lnB w="6350">
+                      <a:solidFill>
+                        <a:srgbClr val="C9D2DA"/>
+                      </a:solidFill>
+                    </a:lnB>
+                    <a:solidFill>
+                      <a:srgbClr val="F3F6F8"/>
+                    </a:solidFill>
+                  </a:tcPr>
+                </a:tc>
+                <a:tc>
+                  <a:txBody>
+                    <a:bodyPr/>
+                    <a:lstStyle/>
+                    <a:p>
+                      <a:pPr algn="l"/>
+                      <a:r>
+                        <a:rPr lang="ko-KR" sz="1050" b="0" i="0" dirty="0">
+                          <a:solidFill>
+                            <a:srgbClr val="1D2A35"/>
+                          </a:solidFill>
+                          <a:latin typeface="Malgun Gothic"/>
+                          <a:ea typeface="Malgun Gothic"/>
+                        </a:rPr>
+                        <a:t>최대 0.45 · 통합공중작전통제소 0.20</a:t>
+                      </a:r>
+                    </a:p>
+                  </a:txBody>
+                  <a:tcPr marL="54864" marR="54864" marT="36576" marB="36576" anchor="ctr">
+                    <a:lnL w="6350">
+                      <a:solidFill>
+                        <a:srgbClr val="C9D2DA"/>
+                      </a:solidFill>
+                    </a:lnL>
+                    <a:lnR w="6350">
+                      <a:solidFill>
+                        <a:srgbClr val="C9D2DA"/>
+                      </a:solidFill>
+                    </a:lnR>
+                    <a:lnT w="6350">
+                      <a:solidFill>
+                        <a:srgbClr val="C9D2DA"/>
+                      </a:solidFill>
+                    </a:lnT>
+                    <a:lnB w="6350">
+                      <a:solidFill>
+                        <a:srgbClr val="C9D2DA"/>
+                      </a:solidFill>
+                    </a:lnB>
+                    <a:solidFill>
+                      <a:srgbClr val="F3F6F8"/>
+                    </a:solidFill>
+                  </a:tcPr>
+                </a:tc>
+                <a:tc>
+                  <a:txBody>
+                    <a:bodyPr/>
+                    <a:lstStyle/>
+                    <a:p>
+                      <a:pPr algn="l"/>
+                      <a:r>
+                        <a:rPr lang="ko-KR" sz="1050" b="1" i="0" dirty="0">
+                          <a:solidFill>
+                            <a:srgbClr val="1B7F3B"/>
+                          </a:solidFill>
+                          <a:latin typeface="Malgun Gothic"/>
+                          <a:ea typeface="Malgun Gothic"/>
+                        </a:rPr>
+                        <a:t>여유 — 포화는 위협 3배부터</a:t>
+                      </a:r>
+                    </a:p>
+                  </a:txBody>
+                  <a:tcPr marL="54864" marR="54864" marT="36576" marB="36576" anchor="ctr">
+                    <a:lnL w="6350">
+                      <a:solidFill>
+                        <a:srgbClr val="C9D2DA"/>
+                      </a:solidFill>
+                    </a:lnL>
+                    <a:lnR w="6350">
+                      <a:solidFill>
+                        <a:srgbClr val="C9D2DA"/>
+                      </a:solidFill>
+                    </a:lnR>
+                    <a:lnT w="6350">
+                      <a:solidFill>
+                        <a:srgbClr val="C9D2DA"/>
+                      </a:solidFill>
+                    </a:lnT>
+                    <a:lnB w="6350">
+                      <a:solidFill>
+                        <a:srgbClr val="C9D2DA"/>
+                      </a:solidFill>
+                    </a:lnB>
+                    <a:solidFill>
+                      <a:srgbClr val="F3F6F8"/>
                     </a:solidFill>
                   </a:tcPr>
                 </a:tc>
               </a:tr>
-              <a:tr h="329184">
+              <a:tr h="365760">
                 <a:tc>
                   <a:txBody>
                     <a:bodyPr/>
@@ -14373,14 +14974,192 @@
                     <a:p>
                       <a:pPr algn="l"/>
                       <a:r>
-                        <a:rPr lang="ko-KR" sz="900" b="1" i="0" dirty="0">
+                        <a:rPr lang="ko-KR" sz="1050" b="1" i="0" dirty="0">
                           <a:solidFill>
                             <a:srgbClr val="1D2A35"/>
                           </a:solidFill>
                           <a:latin typeface="Malgun Gothic"/>
                           <a:ea typeface="Malgun Gothic"/>
                         </a:rPr>
-                        <a:t>결심 지휘소</a:t>
+                        <a:t>방공여단 통제소</a:t>
+                      </a:r>
+                    </a:p>
+                  </a:txBody>
+                  <a:tcPr marL="54864" marR="54864" marT="36576" marB="36576" anchor="ctr">
+                    <a:lnL w="6350">
+                      <a:solidFill>
+                        <a:srgbClr val="C9D2DA"/>
+                      </a:solidFill>
+                    </a:lnL>
+                    <a:lnR w="6350">
+                      <a:solidFill>
+                        <a:srgbClr val="C9D2DA"/>
+                      </a:solidFill>
+                    </a:lnR>
+                    <a:lnT w="6350">
+                      <a:solidFill>
+                        <a:srgbClr val="C9D2DA"/>
+                      </a:solidFill>
+                    </a:lnT>
+                    <a:lnB w="6350">
+                      <a:solidFill>
+                        <a:srgbClr val="C9D2DA"/>
+                      </a:solidFill>
+                    </a:lnB>
+                    <a:solidFill>
+                      <a:srgbClr val="FFFFFF"/>
+                    </a:solidFill>
+                  </a:tcPr>
+                </a:tc>
+                <a:tc>
+                  <a:txBody>
+                    <a:bodyPr/>
+                    <a:lstStyle/>
+                    <a:p>
+                      <a:pPr algn="l"/>
+                      <a:r>
+                        <a:rPr lang="ko-KR" sz="1050" b="0" i="0" dirty="0">
+                          <a:solidFill>
+                            <a:srgbClr val="1D2A35"/>
+                          </a:solidFill>
+                          <a:latin typeface="Malgun Gothic"/>
+                          <a:ea typeface="Malgun Gothic"/>
+                        </a:rPr>
+                        <a:t>명령 인가 경유 · 이용률 최대 0.14</a:t>
+                      </a:r>
+                    </a:p>
+                  </a:txBody>
+                  <a:tcPr marL="54864" marR="54864" marT="36576" marB="36576" anchor="ctr">
+                    <a:lnL w="6350">
+                      <a:solidFill>
+                        <a:srgbClr val="C9D2DA"/>
+                      </a:solidFill>
+                    </a:lnL>
+                    <a:lnR w="6350">
+                      <a:solidFill>
+                        <a:srgbClr val="C9D2DA"/>
+                      </a:solidFill>
+                    </a:lnR>
+                    <a:lnT w="6350">
+                      <a:solidFill>
+                        <a:srgbClr val="C9D2DA"/>
+                      </a:solidFill>
+                    </a:lnT>
+                    <a:lnB w="6350">
+                      <a:solidFill>
+                        <a:srgbClr val="C9D2DA"/>
+                      </a:solidFill>
+                    </a:lnB>
+                    <a:solidFill>
+                      <a:srgbClr val="FFFFFF"/>
+                    </a:solidFill>
+                  </a:tcPr>
+                </a:tc>
+                <a:tc>
+                  <a:txBody>
+                    <a:bodyPr/>
+                    <a:lstStyle/>
+                    <a:p>
+                      <a:pPr algn="l"/>
+                      <a:r>
+                        <a:rPr lang="ko-KR" sz="1050" b="0" i="0" dirty="0">
+                          <a:solidFill>
+                            <a:srgbClr val="1D2A35"/>
+                          </a:solidFill>
+                          <a:latin typeface="Malgun Gothic"/>
+                          <a:ea typeface="Malgun Gothic"/>
+                        </a:rPr>
+                        <a:t>명령이 지나지 않음(도착 0)</a:t>
+                      </a:r>
+                    </a:p>
+                  </a:txBody>
+                  <a:tcPr marL="54864" marR="54864" marT="36576" marB="36576" anchor="ctr">
+                    <a:lnL w="6350">
+                      <a:solidFill>
+                        <a:srgbClr val="C9D2DA"/>
+                      </a:solidFill>
+                    </a:lnL>
+                    <a:lnR w="6350">
+                      <a:solidFill>
+                        <a:srgbClr val="C9D2DA"/>
+                      </a:solidFill>
+                    </a:lnR>
+                    <a:lnT w="6350">
+                      <a:solidFill>
+                        <a:srgbClr val="C9D2DA"/>
+                      </a:solidFill>
+                    </a:lnT>
+                    <a:lnB w="6350">
+                      <a:solidFill>
+                        <a:srgbClr val="C9D2DA"/>
+                      </a:solidFill>
+                    </a:lnB>
+                    <a:solidFill>
+                      <a:srgbClr val="FFFFFF"/>
+                    </a:solidFill>
+                  </a:tcPr>
+                </a:tc>
+                <a:tc>
+                  <a:txBody>
+                    <a:bodyPr/>
+                    <a:lstStyle/>
+                    <a:p>
+                      <a:pPr algn="l"/>
+                      <a:r>
+                        <a:rPr lang="ko-KR" sz="1050" b="1" i="0" dirty="0">
+                          <a:solidFill>
+                            <a:srgbClr val="143D5C"/>
+                          </a:solidFill>
+                          <a:latin typeface="Malgun Gothic"/>
+                          <a:ea typeface="Malgun Gothic"/>
+                        </a:rPr>
+                        <a:t>부하가 아니라 거치는 칸 +1</a:t>
+                      </a:r>
+                    </a:p>
+                  </a:txBody>
+                  <a:tcPr marL="54864" marR="54864" marT="36576" marB="36576" anchor="ctr">
+                    <a:lnL w="6350">
+                      <a:solidFill>
+                        <a:srgbClr val="C9D2DA"/>
+                      </a:solidFill>
+                    </a:lnL>
+                    <a:lnR w="6350">
+                      <a:solidFill>
+                        <a:srgbClr val="C9D2DA"/>
+                      </a:solidFill>
+                    </a:lnR>
+                    <a:lnT w="6350">
+                      <a:solidFill>
+                        <a:srgbClr val="C9D2DA"/>
+                      </a:solidFill>
+                    </a:lnT>
+                    <a:lnB w="6350">
+                      <a:solidFill>
+                        <a:srgbClr val="C9D2DA"/>
+                      </a:solidFill>
+                    </a:lnB>
+                    <a:solidFill>
+                      <a:srgbClr val="FFFFFF"/>
+                    </a:solidFill>
+                  </a:tcPr>
+                </a:tc>
+              </a:tr>
+              <a:tr h="365760">
+                <a:tc>
+                  <a:txBody>
+                    <a:bodyPr/>
+                    <a:lstStyle/>
+                    <a:p>
+                      <a:pPr algn="l"/>
+                      <a:r>
+                        <a:rPr lang="ko-KR" sz="1050" b="1" i="0" dirty="0">
+                          <a:solidFill>
+                            <a:srgbClr val="1D2A35"/>
+                          </a:solidFill>
+                          <a:latin typeface="Malgun Gothic"/>
+                          <a:ea typeface="Malgun Gothic"/>
+                        </a:rPr>
+                        <a:t>포대 사격통제소(84곳)</a:t>
                       </a:r>
                     </a:p>
                   </a:txBody>
@@ -14417,14 +15196,14 @@
                     <a:p>
                       <a:pPr algn="l"/>
                       <a:r>
-                        <a:rPr lang="ko-KR" sz="900" b="0" i="0" dirty="0">
+                        <a:rPr lang="ko-KR" sz="1050" b="0" i="0" dirty="0">
                           <a:solidFill>
                             <a:srgbClr val="1D2A35"/>
                           </a:solidFill>
                           <a:latin typeface="Malgun Gothic"/>
                           <a:ea typeface="Malgun Gothic"/>
                         </a:rPr>
-                        <a:t>창구 6·10·20 · 대기실 60·100·40 · 항적당 37.5초</a:t>
+                        <a:t>32곳 활동 · 최대 0.02</a:t>
                       </a:r>
                     </a:p>
                   </a:txBody>
@@ -14461,24 +15240,282 @@
                     <a:p>
                       <a:pPr algn="l"/>
                       <a:r>
-                        <a:rPr lang="ko-KR" sz="900" b="1" i="0" dirty="0">
+                        <a:rPr lang="ko-KR" sz="1050" b="0" i="0" dirty="0">
                           <a:solidFill>
                             <a:srgbClr val="1D2A35"/>
                           </a:solidFill>
                           <a:latin typeface="Malgun Gothic"/>
                           <a:ea typeface="Malgun Gothic"/>
                         </a:rPr>
-                        <a:t>탄도탄작전통제소 0.51</a:t>
-                      </a:r>
-                      <a:r>
-                        <a:rPr lang="ko-KR" sz="900" b="0" i="0" dirty="0">
+                        <a:t>28곳 활동 · 최대 0.01</a:t>
+                      </a:r>
+                    </a:p>
+                  </a:txBody>
+                  <a:tcPr marL="54864" marR="54864" marT="36576" marB="36576" anchor="ctr">
+                    <a:lnL w="6350">
+                      <a:solidFill>
+                        <a:srgbClr val="C9D2DA"/>
+                      </a:solidFill>
+                    </a:lnL>
+                    <a:lnR w="6350">
+                      <a:solidFill>
+                        <a:srgbClr val="C9D2DA"/>
+                      </a:solidFill>
+                    </a:lnR>
+                    <a:lnT w="6350">
+                      <a:solidFill>
+                        <a:srgbClr val="C9D2DA"/>
+                      </a:solidFill>
+                    </a:lnT>
+                    <a:lnB w="6350">
+                      <a:solidFill>
+                        <a:srgbClr val="C9D2DA"/>
+                      </a:solidFill>
+                    </a:lnB>
+                    <a:solidFill>
+                      <a:srgbClr val="F3F6F8"/>
+                    </a:solidFill>
+                  </a:tcPr>
+                </a:tc>
+                <a:tc>
+                  <a:txBody>
+                    <a:bodyPr/>
+                    <a:lstStyle/>
+                    <a:p>
+                      <a:pPr algn="l"/>
+                      <a:r>
+                        <a:rPr lang="ko-KR" sz="1050" b="1" i="0" dirty="0">
+                          <a:solidFill>
+                            <a:srgbClr val="1B7F3B"/>
+                          </a:solidFill>
+                          <a:latin typeface="Malgun Gothic"/>
+                          <a:ea typeface="Malgun Gothic"/>
+                        </a:rPr>
+                        <a:t>여유</a:t>
+                      </a:r>
+                    </a:p>
+                  </a:txBody>
+                  <a:tcPr marL="54864" marR="54864" marT="36576" marB="36576" anchor="ctr">
+                    <a:lnL w="6350">
+                      <a:solidFill>
+                        <a:srgbClr val="C9D2DA"/>
+                      </a:solidFill>
+                    </a:lnL>
+                    <a:lnR w="6350">
+                      <a:solidFill>
+                        <a:srgbClr val="C9D2DA"/>
+                      </a:solidFill>
+                    </a:lnR>
+                    <a:lnT w="6350">
+                      <a:solidFill>
+                        <a:srgbClr val="C9D2DA"/>
+                      </a:solidFill>
+                    </a:lnT>
+                    <a:lnB w="6350">
+                      <a:solidFill>
+                        <a:srgbClr val="C9D2DA"/>
+                      </a:solidFill>
+                    </a:lnB>
+                    <a:solidFill>
+                      <a:srgbClr val="F3F6F8"/>
+                    </a:solidFill>
+                  </a:tcPr>
+                </a:tc>
+              </a:tr>
+              <a:tr h="365760">
+                <a:tc>
+                  <a:txBody>
+                    <a:bodyPr/>
+                    <a:lstStyle/>
+                    <a:p>
+                      <a:pPr algn="l"/>
+                      <a:r>
+                        <a:rPr lang="ko-KR" sz="1050" b="1" i="0" dirty="0">
                           <a:solidFill>
                             <a:srgbClr val="1D2A35"/>
                           </a:solidFill>
                           <a:latin typeface="Malgun Gothic"/>
                           <a:ea typeface="Malgun Gothic"/>
                         </a:rPr>
-                        <a:t> · 중앙방공통제소 0.29 · 대기 ≤1.4초 · 드롭 0</a:t>
+                        <a:t>포대 동시교전 채널</a:t>
+                      </a:r>
+                    </a:p>
+                  </a:txBody>
+                  <a:tcPr marL="54864" marR="54864" marT="36576" marB="36576" anchor="ctr">
+                    <a:lnL w="6350">
+                      <a:solidFill>
+                        <a:srgbClr val="C9D2DA"/>
+                      </a:solidFill>
+                    </a:lnL>
+                    <a:lnR w="6350">
+                      <a:solidFill>
+                        <a:srgbClr val="C9D2DA"/>
+                      </a:solidFill>
+                    </a:lnR>
+                    <a:lnT w="6350">
+                      <a:solidFill>
+                        <a:srgbClr val="C9D2DA"/>
+                      </a:solidFill>
+                    </a:lnT>
+                    <a:lnB w="6350">
+                      <a:solidFill>
+                        <a:srgbClr val="C9D2DA"/>
+                      </a:solidFill>
+                    </a:lnB>
+                    <a:solidFill>
+                      <a:srgbClr val="FFFFFF"/>
+                    </a:solidFill>
+                  </a:tcPr>
+                </a:tc>
+                <a:tc>
+                  <a:txBody>
+                    <a:bodyPr/>
+                    <a:lstStyle/>
+                    <a:p>
+                      <a:pPr algn="l"/>
+                      <a:r>
+                        <a:rPr lang="ko-KR" sz="1050" b="0" i="0" dirty="0">
+                          <a:solidFill>
+                            <a:srgbClr val="1D2A35"/>
+                          </a:solidFill>
+                          <a:latin typeface="Malgun Gothic"/>
+                          <a:ea typeface="Malgun Gothic"/>
+                        </a:rPr>
+                        <a:t>THAAD 6/6 포화 · 차단 26건</a:t>
+                      </a:r>
+                    </a:p>
+                  </a:txBody>
+                  <a:tcPr marL="54864" marR="54864" marT="36576" marB="36576" anchor="ctr">
+                    <a:lnL w="6350">
+                      <a:solidFill>
+                        <a:srgbClr val="C9D2DA"/>
+                      </a:solidFill>
+                    </a:lnL>
+                    <a:lnR w="6350">
+                      <a:solidFill>
+                        <a:srgbClr val="C9D2DA"/>
+                      </a:solidFill>
+                    </a:lnR>
+                    <a:lnT w="6350">
+                      <a:solidFill>
+                        <a:srgbClr val="C9D2DA"/>
+                      </a:solidFill>
+                    </a:lnT>
+                    <a:lnB w="6350">
+                      <a:solidFill>
+                        <a:srgbClr val="C9D2DA"/>
+                      </a:solidFill>
+                    </a:lnB>
+                    <a:solidFill>
+                      <a:srgbClr val="FFFFFF"/>
+                    </a:solidFill>
+                  </a:tcPr>
+                </a:tc>
+                <a:tc>
+                  <a:txBody>
+                    <a:bodyPr/>
+                    <a:lstStyle/>
+                    <a:p>
+                      <a:pPr algn="l"/>
+                      <a:r>
+                        <a:rPr lang="ko-KR" sz="1050" b="0" i="0" dirty="0">
+                          <a:solidFill>
+                            <a:srgbClr val="1D2A35"/>
+                          </a:solidFill>
+                          <a:latin typeface="Malgun Gothic"/>
+                          <a:ea typeface="Malgun Gothic"/>
+                        </a:rPr>
+                        <a:t>THAAD 6/6 포화 · 차단 24건</a:t>
+                      </a:r>
+                    </a:p>
+                  </a:txBody>
+                  <a:tcPr marL="54864" marR="54864" marT="36576" marB="36576" anchor="ctr">
+                    <a:lnL w="6350">
+                      <a:solidFill>
+                        <a:srgbClr val="C9D2DA"/>
+                      </a:solidFill>
+                    </a:lnL>
+                    <a:lnR w="6350">
+                      <a:solidFill>
+                        <a:srgbClr val="C9D2DA"/>
+                      </a:solidFill>
+                    </a:lnR>
+                    <a:lnT w="6350">
+                      <a:solidFill>
+                        <a:srgbClr val="C9D2DA"/>
+                      </a:solidFill>
+                    </a:lnT>
+                    <a:lnB w="6350">
+                      <a:solidFill>
+                        <a:srgbClr val="C9D2DA"/>
+                      </a:solidFill>
+                    </a:lnB>
+                    <a:solidFill>
+                      <a:srgbClr val="FFFFFF"/>
+                    </a:solidFill>
+                  </a:tcPr>
+                </a:tc>
+                <a:tc>
+                  <a:txBody>
+                    <a:bodyPr/>
+                    <a:lstStyle/>
+                    <a:p>
+                      <a:pPr algn="l"/>
+                      <a:r>
+                        <a:rPr lang="ko-KR" sz="1050" b="1" i="0" dirty="0">
+                          <a:solidFill>
+                            <a:srgbClr val="B3261E"/>
+                          </a:solidFill>
+                          <a:latin typeface="Malgun Gothic"/>
+                          <a:ea typeface="Malgun Gothic"/>
+                        </a:rPr>
+                        <a:t>병목 — 요격 창이 겹치는 물리</a:t>
+                      </a:r>
+                    </a:p>
+                  </a:txBody>
+                  <a:tcPr marL="54864" marR="54864" marT="36576" marB="36576" anchor="ctr">
+                    <a:lnL w="6350">
+                      <a:solidFill>
+                        <a:srgbClr val="C9D2DA"/>
+                      </a:solidFill>
+                    </a:lnL>
+                    <a:lnR w="6350">
+                      <a:solidFill>
+                        <a:srgbClr val="C9D2DA"/>
+                      </a:solidFill>
+                    </a:lnR>
+                    <a:lnT w="6350">
+                      <a:solidFill>
+                        <a:srgbClr val="C9D2DA"/>
+                      </a:solidFill>
+                    </a:lnT>
+                    <a:lnB w="6350">
+                      <a:solidFill>
+                        <a:srgbClr val="C9D2DA"/>
+                      </a:solidFill>
+                    </a:lnB>
+                    <a:solidFill>
+                      <a:srgbClr val="FFFFFF"/>
+                    </a:solidFill>
+                  </a:tcPr>
+                </a:tc>
+              </a:tr>
+              <a:tr h="365760">
+                <a:tc>
+                  <a:txBody>
+                    <a:bodyPr/>
+                    <a:lstStyle/>
+                    <a:p>
+                      <a:pPr algn="l"/>
+                      <a:r>
+                        <a:rPr lang="ko-KR" sz="1050" b="1" i="0" dirty="0">
+                          <a:solidFill>
+                            <a:srgbClr val="1D2A35"/>
+                          </a:solidFill>
+                          <a:latin typeface="Malgun Gothic"/>
+                          <a:ea typeface="Malgun Gothic"/>
+                        </a:rPr>
+                        <a:t>포대 탄약</a:t>
                       </a:r>
                     </a:p>
                   </a:txBody>
@@ -14515,24 +15552,58 @@
                     <a:p>
                       <a:pPr algn="l"/>
                       <a:r>
-                        <a:rPr lang="ko-KR" sz="900" b="1" i="0" dirty="0">
+                        <a:rPr lang="ko-KR" sz="1050" b="0" i="0" dirty="0">
                           <a:solidFill>
                             <a:srgbClr val="1D2A35"/>
                           </a:solidFill>
                           <a:latin typeface="Malgun Gothic"/>
                           <a:ea typeface="Malgun Gothic"/>
                         </a:rPr>
-                        <a:t>탄도탄작전통제소 0.45 · 통합공중작전통제소 0.20</a:t>
-                      </a:r>
-                      <a:r>
-                        <a:rPr lang="ko-KR" sz="900" b="0" i="0" dirty="0">
+                        <a:t>탄 소진 누수 19건 · 상위 3개 포대가 41% 발사</a:t>
+                      </a:r>
+                    </a:p>
+                  </a:txBody>
+                  <a:tcPr marL="54864" marR="54864" marT="36576" marB="36576" anchor="ctr">
+                    <a:lnL w="6350">
+                      <a:solidFill>
+                        <a:srgbClr val="C9D2DA"/>
+                      </a:solidFill>
+                    </a:lnL>
+                    <a:lnR w="6350">
+                      <a:solidFill>
+                        <a:srgbClr val="C9D2DA"/>
+                      </a:solidFill>
+                    </a:lnR>
+                    <a:lnT w="6350">
+                      <a:solidFill>
+                        <a:srgbClr val="C9D2DA"/>
+                      </a:solidFill>
+                    </a:lnT>
+                    <a:lnB w="6350">
+                      <a:solidFill>
+                        <a:srgbClr val="C9D2DA"/>
+                      </a:solidFill>
+                    </a:lnB>
+                    <a:solidFill>
+                      <a:srgbClr val="F3F6F8"/>
+                    </a:solidFill>
+                  </a:tcPr>
+                </a:tc>
+                <a:tc>
+                  <a:txBody>
+                    <a:bodyPr/>
+                    <a:lstStyle/>
+                    <a:p>
+                      <a:pPr algn="l"/>
+                      <a:r>
+                        <a:rPr lang="ko-KR" sz="1050" b="0" i="0" dirty="0">
                           <a:solidFill>
                             <a:srgbClr val="1D2A35"/>
                           </a:solidFill>
                           <a:latin typeface="Malgun Gothic"/>
                           <a:ea typeface="Malgun Gothic"/>
                         </a:rPr>
-                        <a:t> · 드롭 0</a:t>
+                        <a:t>13건 · 45%</a:t>
                       </a:r>
                     </a:p>
                   </a:txBody>
@@ -14569,14 +15640,14 @@
                     <a:p>
                       <a:pPr algn="l"/>
                       <a:r>
-                        <a:rPr lang="ko-KR" sz="900" b="1" i="0" dirty="0">
-                          <a:solidFill>
-                            <a:srgbClr val="1B7F3B"/>
-                          </a:solidFill>
-                          <a:latin typeface="Malgun Gothic"/>
-                          <a:ea typeface="Malgun Gothic"/>
-                        </a:rPr>
-                        <a:t>여유 — 포화는 강도 3배부터</a:t>
+                        <a:rPr lang="ko-KR" sz="1050" b="1" i="0" dirty="0">
+                          <a:solidFill>
+                            <a:srgbClr val="B3261E"/>
+                          </a:solidFill>
+                          <a:latin typeface="Malgun Gothic"/>
+                          <a:ea typeface="Malgun Gothic"/>
+                        </a:rPr>
+                        <a:t>병목 — 보유탄의 벽</a:t>
                       </a:r>
                     </a:p>
                   </a:txBody>
@@ -14607,7 +15678,7 @@
                   </a:tcPr>
                 </a:tc>
               </a:tr>
-              <a:tr h="329184">
+              <a:tr h="365760">
                 <a:tc>
                   <a:txBody>
                     <a:bodyPr/>
@@ -14615,14 +15686,14 @@
                     <a:p>
                       <a:pPr algn="l"/>
                       <a:r>
-                        <a:rPr lang="ko-KR" sz="900" b="1" i="0" dirty="0">
+                        <a:rPr lang="ko-KR" sz="1050" b="1" i="0" dirty="0">
                           <a:solidFill>
                             <a:srgbClr val="1D2A35"/>
                           </a:solidFill>
                           <a:latin typeface="Malgun Gothic"/>
                           <a:ea typeface="Malgun Gothic"/>
                         </a:rPr>
-                        <a:t>방공여단 통제소(As-Is)</a:t>
+                        <a:t>교전 현황 공유(군단 방공→상급)</a:t>
                       </a:r>
                     </a:p>
                   </a:txBody>
@@ -14659,14 +15730,14 @@
                     <a:p>
                       <a:pPr algn="l"/>
                       <a:r>
-                        <a:rPr lang="ko-KR" sz="900" b="0" i="0" dirty="0">
+                        <a:rPr lang="ko-KR" sz="1050" b="0" i="0" dirty="0">
                           <a:solidFill>
                             <a:srgbClr val="1D2A35"/>
                           </a:solidFill>
                           <a:latin typeface="Malgun Gothic"/>
                           <a:ea typeface="Malgun Gothic"/>
                         </a:rPr>
-                        <a:t>창구 5 · 대기실 25 · 명령 인가 9초</a:t>
+                        <a:t>음성/VTC 1채널 · 121건 버려짐</a:t>
                       </a:r>
                     </a:p>
                   </a:txBody>
@@ -14703,14 +15774,14 @@
                     <a:p>
                       <a:pPr algn="l"/>
                       <a:r>
-                        <a:rPr lang="ko-KR" sz="900" b="0" i="0" dirty="0">
+                        <a:rPr lang="ko-KR" sz="1050" b="0" i="0" dirty="0">
                           <a:solidFill>
                             <a:srgbClr val="1D2A35"/>
                           </a:solidFill>
                           <a:latin typeface="Malgun Gothic"/>
                           <a:ea typeface="Malgun Gothic"/>
                         </a:rPr>
-                        <a:t>최대 0.14(3여단 145건) · 드롭 0</a:t>
+                        <a:t>데이터링크 · 버려짐 0</a:t>
                       </a:r>
                     </a:p>
                   </a:txBody>
@@ -14747,1884 +15818,14 @@
                     <a:p>
                       <a:pPr algn="l"/>
                       <a:r>
-                        <a:rPr lang="ko-KR" sz="900" b="0" i="0" dirty="0">
-                          <a:solidFill>
-                            <a:srgbClr val="1D2A35"/>
-                          </a:solidFill>
-                          <a:latin typeface="Malgun Gothic"/>
-                          <a:ea typeface="Malgun Gothic"/>
-                        </a:rPr>
-                        <a:t>없음 — 통합망으로 포대 직접</a:t>
-                      </a:r>
-                    </a:p>
-                  </a:txBody>
-                  <a:tcPr marL="54864" marR="54864" marT="36576" marB="36576" anchor="ctr">
-                    <a:lnL w="6350">
-                      <a:solidFill>
-                        <a:srgbClr val="C9D2DA"/>
-                      </a:solidFill>
-                    </a:lnL>
-                    <a:lnR w="6350">
-                      <a:solidFill>
-                        <a:srgbClr val="C9D2DA"/>
-                      </a:solidFill>
-                    </a:lnR>
-                    <a:lnT w="6350">
-                      <a:solidFill>
-                        <a:srgbClr val="C9D2DA"/>
-                      </a:solidFill>
-                    </a:lnT>
-                    <a:lnB w="6350">
-                      <a:solidFill>
-                        <a:srgbClr val="C9D2DA"/>
-                      </a:solidFill>
-                    </a:lnB>
-                    <a:solidFill>
-                      <a:srgbClr val="FFFFFF"/>
-                    </a:solidFill>
-                  </a:tcPr>
-                </a:tc>
-                <a:tc>
-                  <a:txBody>
-                    <a:bodyPr/>
-                    <a:lstStyle/>
-                    <a:p>
-                      <a:pPr algn="l"/>
-                      <a:r>
-                        <a:rPr lang="ko-KR" sz="900" b="1" i="0" dirty="0">
-                          <a:solidFill>
-                            <a:srgbClr val="143D5C"/>
-                          </a:solidFill>
-                          <a:latin typeface="Malgun Gothic"/>
-                          <a:ea typeface="Malgun Gothic"/>
-                        </a:rPr>
-                        <a:t>부하 아닌 지연 +1칸</a:t>
-                      </a:r>
-                    </a:p>
-                  </a:txBody>
-                  <a:tcPr marL="54864" marR="54864" marT="36576" marB="36576" anchor="ctr">
-                    <a:lnL w="6350">
-                      <a:solidFill>
-                        <a:srgbClr val="C9D2DA"/>
-                      </a:solidFill>
-                    </a:lnL>
-                    <a:lnR w="6350">
-                      <a:solidFill>
-                        <a:srgbClr val="C9D2DA"/>
-                      </a:solidFill>
-                    </a:lnR>
-                    <a:lnT w="6350">
-                      <a:solidFill>
-                        <a:srgbClr val="C9D2DA"/>
-                      </a:solidFill>
-                    </a:lnT>
-                    <a:lnB w="6350">
-                      <a:solidFill>
-                        <a:srgbClr val="C9D2DA"/>
-                      </a:solidFill>
-                    </a:lnB>
-                    <a:solidFill>
-                      <a:srgbClr val="FFFFFF"/>
-                    </a:solidFill>
-                  </a:tcPr>
-                </a:tc>
-              </a:tr>
-              <a:tr h="329184">
-                <a:tc>
-                  <a:txBody>
-                    <a:bodyPr/>
-                    <a:lstStyle/>
-                    <a:p>
-                      <a:pPr algn="l"/>
-                      <a:r>
-                        <a:rPr lang="ko-KR" sz="900" b="1" i="0" dirty="0">
-                          <a:solidFill>
-                            <a:srgbClr val="1D2A35"/>
-                          </a:solidFill>
-                          <a:latin typeface="Malgun Gothic"/>
-                          <a:ea typeface="Malgun Gothic"/>
-                        </a:rPr>
-                        <a:t>미군·군단 방공 지휘소</a:t>
-                      </a:r>
-                    </a:p>
-                  </a:txBody>
-                  <a:tcPr marL="54864" marR="54864" marT="36576" marB="36576" anchor="ctr">
-                    <a:lnL w="6350">
-                      <a:solidFill>
-                        <a:srgbClr val="C9D2DA"/>
-                      </a:solidFill>
-                    </a:lnL>
-                    <a:lnR w="6350">
-                      <a:solidFill>
-                        <a:srgbClr val="C9D2DA"/>
-                      </a:solidFill>
-                    </a:lnR>
-                    <a:lnT w="6350">
-                      <a:solidFill>
-                        <a:srgbClr val="C9D2DA"/>
-                      </a:solidFill>
-                    </a:lnT>
-                    <a:lnB w="6350">
-                      <a:solidFill>
-                        <a:srgbClr val="C9D2DA"/>
-                      </a:solidFill>
-                    </a:lnB>
-                    <a:solidFill>
-                      <a:srgbClr val="F3F6F8"/>
-                    </a:solidFill>
-                  </a:tcPr>
-                </a:tc>
-                <a:tc>
-                  <a:txBody>
-                    <a:bodyPr/>
-                    <a:lstStyle/>
-                    <a:p>
-                      <a:pPr algn="l"/>
-                      <a:r>
-                        <a:rPr lang="ko-KR" sz="900" b="0" i="0" dirty="0">
-                          <a:solidFill>
-                            <a:srgbClr val="1D2A35"/>
-                          </a:solidFill>
-                          <a:latin typeface="Malgun Gothic"/>
-                          <a:ea typeface="Malgun Gothic"/>
-                        </a:rPr>
-                        <a:t>창구 6~12 · 3.5초</a:t>
-                      </a:r>
-                    </a:p>
-                  </a:txBody>
-                  <a:tcPr marL="54864" marR="54864" marT="36576" marB="36576" anchor="ctr">
-                    <a:lnL w="6350">
-                      <a:solidFill>
-                        <a:srgbClr val="C9D2DA"/>
-                      </a:solidFill>
-                    </a:lnL>
-                    <a:lnR w="6350">
-                      <a:solidFill>
-                        <a:srgbClr val="C9D2DA"/>
-                      </a:solidFill>
-                    </a:lnR>
-                    <a:lnT w="6350">
-                      <a:solidFill>
-                        <a:srgbClr val="C9D2DA"/>
-                      </a:solidFill>
-                    </a:lnT>
-                    <a:lnB w="6350">
-                      <a:solidFill>
-                        <a:srgbClr val="C9D2DA"/>
-                      </a:solidFill>
-                    </a:lnB>
-                    <a:solidFill>
-                      <a:srgbClr val="F3F6F8"/>
-                    </a:solidFill>
-                  </a:tcPr>
-                </a:tc>
-                <a:tc>
-                  <a:txBody>
-                    <a:bodyPr/>
-                    <a:lstStyle/>
-                    <a:p>
-                      <a:pPr algn="l"/>
-                      <a:r>
-                        <a:rPr lang="ko-KR" sz="900" b="0" i="0" dirty="0">
-                          <a:solidFill>
-                            <a:srgbClr val="1D2A35"/>
-                          </a:solidFill>
-                          <a:latin typeface="Malgun Gothic"/>
-                          <a:ea typeface="Malgun Gothic"/>
-                        </a:rPr>
-                        <a:t>≤0.03 · 수방사·서북도서 도착 0</a:t>
-                      </a:r>
-                    </a:p>
-                  </a:txBody>
-                  <a:tcPr marL="54864" marR="54864" marT="36576" marB="36576" anchor="ctr">
-                    <a:lnL w="6350">
-                      <a:solidFill>
-                        <a:srgbClr val="C9D2DA"/>
-                      </a:solidFill>
-                    </a:lnL>
-                    <a:lnR w="6350">
-                      <a:solidFill>
-                        <a:srgbClr val="C9D2DA"/>
-                      </a:solidFill>
-                    </a:lnR>
-                    <a:lnT w="6350">
-                      <a:solidFill>
-                        <a:srgbClr val="C9D2DA"/>
-                      </a:solidFill>
-                    </a:lnT>
-                    <a:lnB w="6350">
-                      <a:solidFill>
-                        <a:srgbClr val="C9D2DA"/>
-                      </a:solidFill>
-                    </a:lnB>
-                    <a:solidFill>
-                      <a:srgbClr val="F3F6F8"/>
-                    </a:solidFill>
-                  </a:tcPr>
-                </a:tc>
-                <a:tc>
-                  <a:txBody>
-                    <a:bodyPr/>
-                    <a:lstStyle/>
-                    <a:p>
-                      <a:pPr algn="l"/>
-                      <a:r>
-                        <a:rPr lang="ko-KR" sz="900" b="0" i="0" dirty="0">
-                          <a:solidFill>
-                            <a:srgbClr val="1D2A35"/>
-                          </a:solidFill>
-                          <a:latin typeface="Malgun Gothic"/>
-                          <a:ea typeface="Malgun Gothic"/>
-                        </a:rPr>
-                        <a:t>≤0.03</a:t>
-                      </a:r>
-                    </a:p>
-                  </a:txBody>
-                  <a:tcPr marL="54864" marR="54864" marT="36576" marB="36576" anchor="ctr">
-                    <a:lnL w="6350">
-                      <a:solidFill>
-                        <a:srgbClr val="C9D2DA"/>
-                      </a:solidFill>
-                    </a:lnL>
-                    <a:lnR w="6350">
-                      <a:solidFill>
-                        <a:srgbClr val="C9D2DA"/>
-                      </a:solidFill>
-                    </a:lnR>
-                    <a:lnT w="6350">
-                      <a:solidFill>
-                        <a:srgbClr val="C9D2DA"/>
-                      </a:solidFill>
-                    </a:lnT>
-                    <a:lnB w="6350">
-                      <a:solidFill>
-                        <a:srgbClr val="C9D2DA"/>
-                      </a:solidFill>
-                    </a:lnB>
-                    <a:solidFill>
-                      <a:srgbClr val="F3F6F8"/>
-                    </a:solidFill>
-                  </a:tcPr>
-                </a:tc>
-                <a:tc>
-                  <a:txBody>
-                    <a:bodyPr/>
-                    <a:lstStyle/>
-                    <a:p>
-                      <a:pPr algn="l"/>
-                      <a:r>
-                        <a:rPr lang="ko-KR" sz="900" b="1" i="0" dirty="0">
-                          <a:solidFill>
-                            <a:srgbClr val="1B7F3B"/>
-                          </a:solidFill>
-                          <a:latin typeface="Malgun Gothic"/>
-                          <a:ea typeface="Malgun Gothic"/>
-                        </a:rPr>
-                        <a:t>여유</a:t>
-                      </a:r>
-                    </a:p>
-                  </a:txBody>
-                  <a:tcPr marL="54864" marR="54864" marT="36576" marB="36576" anchor="ctr">
-                    <a:lnL w="6350">
-                      <a:solidFill>
-                        <a:srgbClr val="C9D2DA"/>
-                      </a:solidFill>
-                    </a:lnL>
-                    <a:lnR w="6350">
-                      <a:solidFill>
-                        <a:srgbClr val="C9D2DA"/>
-                      </a:solidFill>
-                    </a:lnR>
-                    <a:lnT w="6350">
-                      <a:solidFill>
-                        <a:srgbClr val="C9D2DA"/>
-                      </a:solidFill>
-                    </a:lnT>
-                    <a:lnB w="6350">
-                      <a:solidFill>
-                        <a:srgbClr val="C9D2DA"/>
-                      </a:solidFill>
-                    </a:lnB>
-                    <a:solidFill>
-                      <a:srgbClr val="F3F6F8"/>
-                    </a:solidFill>
-                  </a:tcPr>
-                </a:tc>
-              </a:tr>
-              <a:tr h="329184">
-                <a:tc>
-                  <a:txBody>
-                    <a:bodyPr/>
-                    <a:lstStyle/>
-                    <a:p>
-                      <a:pPr algn="l"/>
-                      <a:r>
-                        <a:rPr lang="ko-KR" sz="900" b="1" i="0" dirty="0">
-                          <a:solidFill>
-                            <a:srgbClr val="1D2A35"/>
-                          </a:solidFill>
-                          <a:latin typeface="Malgun Gothic"/>
-                          <a:ea typeface="Malgun Gothic"/>
-                        </a:rPr>
-                        <a:t>포대 사격통제소(84곳)</a:t>
-                      </a:r>
-                    </a:p>
-                  </a:txBody>
-                  <a:tcPr marL="54864" marR="54864" marT="36576" marB="36576" anchor="ctr">
-                    <a:lnL w="6350">
-                      <a:solidFill>
-                        <a:srgbClr val="C9D2DA"/>
-                      </a:solidFill>
-                    </a:lnL>
-                    <a:lnR w="6350">
-                      <a:solidFill>
-                        <a:srgbClr val="C9D2DA"/>
-                      </a:solidFill>
-                    </a:lnR>
-                    <a:lnT w="6350">
-                      <a:solidFill>
-                        <a:srgbClr val="C9D2DA"/>
-                      </a:solidFill>
-                    </a:lnT>
-                    <a:lnB w="6350">
-                      <a:solidFill>
-                        <a:srgbClr val="C9D2DA"/>
-                      </a:solidFill>
-                    </a:lnB>
-                    <a:solidFill>
-                      <a:srgbClr val="FFFFFF"/>
-                    </a:solidFill>
-                  </a:tcPr>
-                </a:tc>
-                <a:tc>
-                  <a:txBody>
-                    <a:bodyPr/>
-                    <a:lstStyle/>
-                    <a:p>
-                      <a:pPr algn="l"/>
-                      <a:r>
-                        <a:rPr lang="ko-KR" sz="900" b="0" i="0" dirty="0">
-                          <a:solidFill>
-                            <a:srgbClr val="1D2A35"/>
-                          </a:solidFill>
-                          <a:latin typeface="Malgun Gothic"/>
-                          <a:ea typeface="Malgun Gothic"/>
-                        </a:rPr>
-                        <a:t>창구 8 · 대기실 16 · 명령 접수 3.5초</a:t>
-                      </a:r>
-                    </a:p>
-                  </a:txBody>
-                  <a:tcPr marL="54864" marR="54864" marT="36576" marB="36576" anchor="ctr">
-                    <a:lnL w="6350">
-                      <a:solidFill>
-                        <a:srgbClr val="C9D2DA"/>
-                      </a:solidFill>
-                    </a:lnL>
-                    <a:lnR w="6350">
-                      <a:solidFill>
-                        <a:srgbClr val="C9D2DA"/>
-                      </a:solidFill>
-                    </a:lnR>
-                    <a:lnT w="6350">
-                      <a:solidFill>
-                        <a:srgbClr val="C9D2DA"/>
-                      </a:solidFill>
-                    </a:lnT>
-                    <a:lnB w="6350">
-                      <a:solidFill>
-                        <a:srgbClr val="C9D2DA"/>
-                      </a:solidFill>
-                    </a:lnB>
-                    <a:solidFill>
-                      <a:srgbClr val="FFFFFF"/>
-                    </a:solidFill>
-                  </a:tcPr>
-                </a:tc>
-                <a:tc>
-                  <a:txBody>
-                    <a:bodyPr/>
-                    <a:lstStyle/>
-                    <a:p>
-                      <a:pPr algn="l"/>
-                      <a:r>
-                        <a:rPr lang="ko-KR" sz="900" b="0" i="0" dirty="0">
-                          <a:solidFill>
-                            <a:srgbClr val="1D2A35"/>
-                          </a:solidFill>
-                          <a:latin typeface="Malgun Gothic"/>
-                          <a:ea typeface="Malgun Gothic"/>
-                        </a:rPr>
-                        <a:t>32곳 활동 · 최대 0.02 · 드롭 0</a:t>
-                      </a:r>
-                    </a:p>
-                  </a:txBody>
-                  <a:tcPr marL="54864" marR="54864" marT="36576" marB="36576" anchor="ctr">
-                    <a:lnL w="6350">
-                      <a:solidFill>
-                        <a:srgbClr val="C9D2DA"/>
-                      </a:solidFill>
-                    </a:lnL>
-                    <a:lnR w="6350">
-                      <a:solidFill>
-                        <a:srgbClr val="C9D2DA"/>
-                      </a:solidFill>
-                    </a:lnR>
-                    <a:lnT w="6350">
-                      <a:solidFill>
-                        <a:srgbClr val="C9D2DA"/>
-                      </a:solidFill>
-                    </a:lnT>
-                    <a:lnB w="6350">
-                      <a:solidFill>
-                        <a:srgbClr val="C9D2DA"/>
-                      </a:solidFill>
-                    </a:lnB>
-                    <a:solidFill>
-                      <a:srgbClr val="FFFFFF"/>
-                    </a:solidFill>
-                  </a:tcPr>
-                </a:tc>
-                <a:tc>
-                  <a:txBody>
-                    <a:bodyPr/>
-                    <a:lstStyle/>
-                    <a:p>
-                      <a:pPr algn="l"/>
-                      <a:r>
-                        <a:rPr lang="ko-KR" sz="900" b="0" i="0" dirty="0">
-                          <a:solidFill>
-                            <a:srgbClr val="1D2A35"/>
-                          </a:solidFill>
-                          <a:latin typeface="Malgun Gothic"/>
-                          <a:ea typeface="Malgun Gothic"/>
-                        </a:rPr>
-                        <a:t>28곳 활동 · 최대 0.01 · 드롭 0</a:t>
-                      </a:r>
-                    </a:p>
-                  </a:txBody>
-                  <a:tcPr marL="54864" marR="54864" marT="36576" marB="36576" anchor="ctr">
-                    <a:lnL w="6350">
-                      <a:solidFill>
-                        <a:srgbClr val="C9D2DA"/>
-                      </a:solidFill>
-                    </a:lnL>
-                    <a:lnR w="6350">
-                      <a:solidFill>
-                        <a:srgbClr val="C9D2DA"/>
-                      </a:solidFill>
-                    </a:lnR>
-                    <a:lnT w="6350">
-                      <a:solidFill>
-                        <a:srgbClr val="C9D2DA"/>
-                      </a:solidFill>
-                    </a:lnT>
-                    <a:lnB w="6350">
-                      <a:solidFill>
-                        <a:srgbClr val="C9D2DA"/>
-                      </a:solidFill>
-                    </a:lnB>
-                    <a:solidFill>
-                      <a:srgbClr val="FFFFFF"/>
-                    </a:solidFill>
-                  </a:tcPr>
-                </a:tc>
-                <a:tc>
-                  <a:txBody>
-                    <a:bodyPr/>
-                    <a:lstStyle/>
-                    <a:p>
-                      <a:pPr algn="l"/>
-                      <a:r>
-                        <a:rPr lang="ko-KR" sz="900" b="1" i="0" dirty="0">
-                          <a:solidFill>
-                            <a:srgbClr val="1B7F3B"/>
-                          </a:solidFill>
-                          <a:latin typeface="Malgun Gothic"/>
-                          <a:ea typeface="Malgun Gothic"/>
-                        </a:rPr>
-                        <a:t>여유</a:t>
-                      </a:r>
-                    </a:p>
-                  </a:txBody>
-                  <a:tcPr marL="54864" marR="54864" marT="36576" marB="36576" anchor="ctr">
-                    <a:lnL w="6350">
-                      <a:solidFill>
-                        <a:srgbClr val="C9D2DA"/>
-                      </a:solidFill>
-                    </a:lnL>
-                    <a:lnR w="6350">
-                      <a:solidFill>
-                        <a:srgbClr val="C9D2DA"/>
-                      </a:solidFill>
-                    </a:lnR>
-                    <a:lnT w="6350">
-                      <a:solidFill>
-                        <a:srgbClr val="C9D2DA"/>
-                      </a:solidFill>
-                    </a:lnT>
-                    <a:lnB w="6350">
-                      <a:solidFill>
-                        <a:srgbClr val="C9D2DA"/>
-                      </a:solidFill>
-                    </a:lnB>
-                    <a:solidFill>
-                      <a:srgbClr val="FFFFFF"/>
-                    </a:solidFill>
-                  </a:tcPr>
-                </a:tc>
-              </a:tr>
-              <a:tr h="329184">
-                <a:tc>
-                  <a:txBody>
-                    <a:bodyPr/>
-                    <a:lstStyle/>
-                    <a:p>
-                      <a:pPr algn="l"/>
-                      <a:r>
-                        <a:rPr lang="ko-KR" sz="900" b="1" i="0" dirty="0">
-                          <a:solidFill>
-                            <a:srgbClr val="1D2A35"/>
-                          </a:solidFill>
-                          <a:latin typeface="Malgun Gothic"/>
-                          <a:ea typeface="Malgun Gothic"/>
-                        </a:rPr>
-                        <a:t>포대 동시교전 채널</a:t>
-                      </a:r>
-                    </a:p>
-                  </a:txBody>
-                  <a:tcPr marL="54864" marR="54864" marT="36576" marB="36576" anchor="ctr">
-                    <a:lnL w="6350">
-                      <a:solidFill>
-                        <a:srgbClr val="C9D2DA"/>
-                      </a:solidFill>
-                    </a:lnL>
-                    <a:lnR w="6350">
-                      <a:solidFill>
-                        <a:srgbClr val="C9D2DA"/>
-                      </a:solidFill>
-                    </a:lnR>
-                    <a:lnT w="6350">
-                      <a:solidFill>
-                        <a:srgbClr val="C9D2DA"/>
-                      </a:solidFill>
-                    </a:lnT>
-                    <a:lnB w="6350">
-                      <a:solidFill>
-                        <a:srgbClr val="C9D2DA"/>
-                      </a:solidFill>
-                    </a:lnB>
-                    <a:solidFill>
-                      <a:srgbClr val="F3F6F8"/>
-                    </a:solidFill>
-                  </a:tcPr>
-                </a:tc>
-                <a:tc>
-                  <a:txBody>
-                    <a:bodyPr/>
-                    <a:lstStyle/>
-                    <a:p>
-                      <a:pPr algn="l"/>
-                      <a:r>
-                        <a:rPr lang="ko-KR" sz="900" b="0" i="0" dirty="0">
-                          <a:solidFill>
-                            <a:srgbClr val="1D2A35"/>
-                          </a:solidFill>
-                          <a:latin typeface="Malgun Gothic"/>
-                          <a:ea typeface="Malgun Gothic"/>
-                        </a:rPr>
-                        <a:t>THAAD 6 · L-SAM 10 · PAC-3·Patriot 9</a:t>
-                      </a:r>
-                    </a:p>
-                  </a:txBody>
-                  <a:tcPr marL="54864" marR="54864" marT="36576" marB="36576" anchor="ctr">
-                    <a:lnL w="6350">
-                      <a:solidFill>
-                        <a:srgbClr val="C9D2DA"/>
-                      </a:solidFill>
-                    </a:lnL>
-                    <a:lnR w="6350">
-                      <a:solidFill>
-                        <a:srgbClr val="C9D2DA"/>
-                      </a:solidFill>
-                    </a:lnR>
-                    <a:lnT w="6350">
-                      <a:solidFill>
-                        <a:srgbClr val="C9D2DA"/>
-                      </a:solidFill>
-                    </a:lnT>
-                    <a:lnB w="6350">
-                      <a:solidFill>
-                        <a:srgbClr val="C9D2DA"/>
-                      </a:solidFill>
-                    </a:lnB>
-                    <a:solidFill>
-                      <a:srgbClr val="F3F6F8"/>
-                    </a:solidFill>
-                  </a:tcPr>
-                </a:tc>
-                <a:tc>
-                  <a:txBody>
-                    <a:bodyPr/>
-                    <a:lstStyle/>
-                    <a:p>
-                      <a:pPr algn="l"/>
-                      <a:r>
-                        <a:rPr lang="ko-KR" sz="900" b="1" i="0" dirty="0">
+                        <a:rPr lang="ko-KR" sz="1050" b="1" i="0" dirty="0">
                           <a:solidFill>
                             <a:srgbClr val="B3261E"/>
                           </a:solidFill>
                           <a:latin typeface="Malgun Gothic"/>
                           <a:ea typeface="Malgun Gothic"/>
                         </a:rPr>
-                        <a:t>THAAD 6/6 포화 · 차단 26건</a:t>
-                      </a:r>
-                      <a:r>
-                        <a:rPr lang="ko-KR" sz="900" b="0" i="0" dirty="0">
-                          <a:solidFill>
-                            <a:srgbClr val="1D2A35"/>
-                          </a:solidFill>
-                          <a:latin typeface="Malgun Gothic"/>
-                          <a:ea typeface="Malgun Gothic"/>
-                        </a:rPr>
-                        <a:t> · L-SAM 5/10 · 3/10</a:t>
-                      </a:r>
-                    </a:p>
-                  </a:txBody>
-                  <a:tcPr marL="54864" marR="54864" marT="36576" marB="36576" anchor="ctr">
-                    <a:lnL w="6350">
-                      <a:solidFill>
-                        <a:srgbClr val="C9D2DA"/>
-                      </a:solidFill>
-                    </a:lnL>
-                    <a:lnR w="6350">
-                      <a:solidFill>
-                        <a:srgbClr val="C9D2DA"/>
-                      </a:solidFill>
-                    </a:lnR>
-                    <a:lnT w="6350">
-                      <a:solidFill>
-                        <a:srgbClr val="C9D2DA"/>
-                      </a:solidFill>
-                    </a:lnT>
-                    <a:lnB w="6350">
-                      <a:solidFill>
-                        <a:srgbClr val="C9D2DA"/>
-                      </a:solidFill>
-                    </a:lnB>
-                    <a:solidFill>
-                      <a:srgbClr val="F3F6F8"/>
-                    </a:solidFill>
-                  </a:tcPr>
-                </a:tc>
-                <a:tc>
-                  <a:txBody>
-                    <a:bodyPr/>
-                    <a:lstStyle/>
-                    <a:p>
-                      <a:pPr algn="l"/>
-                      <a:r>
-                        <a:rPr lang="ko-KR" sz="900" b="1" i="0" dirty="0">
-                          <a:solidFill>
-                            <a:srgbClr val="B3261E"/>
-                          </a:solidFill>
-                          <a:latin typeface="Malgun Gothic"/>
-                          <a:ea typeface="Malgun Gothic"/>
-                        </a:rPr>
-                        <a:t>THAAD 6/6 포화 · 차단 24건</a:t>
-                      </a:r>
-                      <a:r>
-                        <a:rPr lang="ko-KR" sz="900" b="0" i="0" dirty="0">
-                          <a:solidFill>
-                            <a:srgbClr val="1D2A35"/>
-                          </a:solidFill>
-                          <a:latin typeface="Malgun Gothic"/>
-                          <a:ea typeface="Malgun Gothic"/>
-                        </a:rPr>
-                        <a:t> · L-SAM 7/10 · 6/10</a:t>
-                      </a:r>
-                    </a:p>
-                  </a:txBody>
-                  <a:tcPr marL="54864" marR="54864" marT="36576" marB="36576" anchor="ctr">
-                    <a:lnL w="6350">
-                      <a:solidFill>
-                        <a:srgbClr val="C9D2DA"/>
-                      </a:solidFill>
-                    </a:lnL>
-                    <a:lnR w="6350">
-                      <a:solidFill>
-                        <a:srgbClr val="C9D2DA"/>
-                      </a:solidFill>
-                    </a:lnR>
-                    <a:lnT w="6350">
-                      <a:solidFill>
-                        <a:srgbClr val="C9D2DA"/>
-                      </a:solidFill>
-                    </a:lnT>
-                    <a:lnB w="6350">
-                      <a:solidFill>
-                        <a:srgbClr val="C9D2DA"/>
-                      </a:solidFill>
-                    </a:lnB>
-                    <a:solidFill>
-                      <a:srgbClr val="F3F6F8"/>
-                    </a:solidFill>
-                  </a:tcPr>
-                </a:tc>
-                <a:tc>
-                  <a:txBody>
-                    <a:bodyPr/>
-                    <a:lstStyle/>
-                    <a:p>
-                      <a:pPr algn="l"/>
-                      <a:r>
-                        <a:rPr lang="ko-KR" sz="900" b="1" i="0" dirty="0">
-                          <a:solidFill>
-                            <a:srgbClr val="B3261E"/>
-                          </a:solidFill>
-                          <a:latin typeface="Malgun Gothic"/>
-                          <a:ea typeface="Malgun Gothic"/>
-                        </a:rPr>
-                        <a:t>THAAD만 포화 — 물리(요격 창 겹침)</a:t>
-                      </a:r>
-                    </a:p>
-                  </a:txBody>
-                  <a:tcPr marL="54864" marR="54864" marT="36576" marB="36576" anchor="ctr">
-                    <a:lnL w="6350">
-                      <a:solidFill>
-                        <a:srgbClr val="C9D2DA"/>
-                      </a:solidFill>
-                    </a:lnL>
-                    <a:lnR w="6350">
-                      <a:solidFill>
-                        <a:srgbClr val="C9D2DA"/>
-                      </a:solidFill>
-                    </a:lnR>
-                    <a:lnT w="6350">
-                      <a:solidFill>
-                        <a:srgbClr val="C9D2DA"/>
-                      </a:solidFill>
-                    </a:lnT>
-                    <a:lnB w="6350">
-                      <a:solidFill>
-                        <a:srgbClr val="C9D2DA"/>
-                      </a:solidFill>
-                    </a:lnB>
-                    <a:solidFill>
-                      <a:srgbClr val="F3F6F8"/>
-                    </a:solidFill>
-                  </a:tcPr>
-                </a:tc>
-              </a:tr>
-              <a:tr h="329184">
-                <a:tc>
-                  <a:txBody>
-                    <a:bodyPr/>
-                    <a:lstStyle/>
-                    <a:p>
-                      <a:pPr algn="l"/>
-                      <a:r>
-                        <a:rPr lang="ko-KR" sz="900" b="1" i="0" dirty="0">
-                          <a:solidFill>
-                            <a:srgbClr val="1D2A35"/>
-                          </a:solidFill>
-                          <a:latin typeface="Malgun Gothic"/>
-                          <a:ea typeface="Malgun Gothic"/>
-                        </a:rPr>
-                        <a:t>포대 발사대·발사 간격</a:t>
-                      </a:r>
-                    </a:p>
-                  </a:txBody>
-                  <a:tcPr marL="54864" marR="54864" marT="36576" marB="36576" anchor="ctr">
-                    <a:lnL w="6350">
-                      <a:solidFill>
-                        <a:srgbClr val="C9D2DA"/>
-                      </a:solidFill>
-                    </a:lnL>
-                    <a:lnR w="6350">
-                      <a:solidFill>
-                        <a:srgbClr val="C9D2DA"/>
-                      </a:solidFill>
-                    </a:lnR>
-                    <a:lnT w="6350">
-                      <a:solidFill>
-                        <a:srgbClr val="C9D2DA"/>
-                      </a:solidFill>
-                    </a:lnT>
-                    <a:lnB w="6350">
-                      <a:solidFill>
-                        <a:srgbClr val="C9D2DA"/>
-                      </a:solidFill>
-                    </a:lnB>
-                    <a:solidFill>
-                      <a:srgbClr val="FFFFFF"/>
-                    </a:solidFill>
-                  </a:tcPr>
-                </a:tc>
-                <a:tc>
-                  <a:txBody>
-                    <a:bodyPr/>
-                    <a:lstStyle/>
-                    <a:p>
-                      <a:pPr algn="l"/>
-                      <a:r>
-                        <a:rPr lang="ko-KR" sz="900" b="0" i="0" dirty="0">
-                          <a:solidFill>
-                            <a:srgbClr val="1D2A35"/>
-                          </a:solidFill>
-                          <a:latin typeface="Malgun Gothic"/>
-                          <a:ea typeface="Malgun Gothic"/>
-                        </a:rPr>
-                        <a:t>발사대 4~6기 · 발사대당 5초</a:t>
-                      </a:r>
-                    </a:p>
-                  </a:txBody>
-                  <a:tcPr marL="54864" marR="54864" marT="36576" marB="36576" anchor="ctr">
-                    <a:lnL w="6350">
-                      <a:solidFill>
-                        <a:srgbClr val="C9D2DA"/>
-                      </a:solidFill>
-                    </a:lnL>
-                    <a:lnR w="6350">
-                      <a:solidFill>
-                        <a:srgbClr val="C9D2DA"/>
-                      </a:solidFill>
-                    </a:lnR>
-                    <a:lnT w="6350">
-                      <a:solidFill>
-                        <a:srgbClr val="C9D2DA"/>
-                      </a:solidFill>
-                    </a:lnT>
-                    <a:lnB w="6350">
-                      <a:solidFill>
-                        <a:srgbClr val="C9D2DA"/>
-                      </a:solidFill>
-                    </a:lnB>
-                    <a:solidFill>
-                      <a:srgbClr val="FFFFFF"/>
-                    </a:solidFill>
-                  </a:tcPr>
-                </a:tc>
-                <a:tc>
-                  <a:txBody>
-                    <a:bodyPr/>
-                    <a:lstStyle/>
-                    <a:p>
-                      <a:pPr algn="l"/>
-                      <a:r>
-                        <a:rPr lang="ko-KR" sz="900" b="0" i="0" dirty="0">
-                          <a:solidFill>
-                            <a:srgbClr val="1D2A35"/>
-                          </a:solidFill>
-                          <a:latin typeface="Malgun Gothic"/>
-                          <a:ea typeface="Malgun Gothic"/>
-                        </a:rPr>
-                        <a:t>1분 최대 5~6발 · 10분 18~20발</a:t>
-                      </a:r>
-                    </a:p>
-                  </a:txBody>
-                  <a:tcPr marL="54864" marR="54864" marT="36576" marB="36576" anchor="ctr">
-                    <a:lnL w="6350">
-                      <a:solidFill>
-                        <a:srgbClr val="C9D2DA"/>
-                      </a:solidFill>
-                    </a:lnL>
-                    <a:lnR w="6350">
-                      <a:solidFill>
-                        <a:srgbClr val="C9D2DA"/>
-                      </a:solidFill>
-                    </a:lnR>
-                    <a:lnT w="6350">
-                      <a:solidFill>
-                        <a:srgbClr val="C9D2DA"/>
-                      </a:solidFill>
-                    </a:lnT>
-                    <a:lnB w="6350">
-                      <a:solidFill>
-                        <a:srgbClr val="C9D2DA"/>
-                      </a:solidFill>
-                    </a:lnB>
-                    <a:solidFill>
-                      <a:srgbClr val="FFFFFF"/>
-                    </a:solidFill>
-                  </a:tcPr>
-                </a:tc>
-                <a:tc>
-                  <a:txBody>
-                    <a:bodyPr/>
-                    <a:lstStyle/>
-                    <a:p>
-                      <a:pPr algn="l"/>
-                      <a:r>
-                        <a:rPr lang="ko-KR" sz="900" b="0" i="0" dirty="0">
-                          <a:solidFill>
-                            <a:srgbClr val="1D2A35"/>
-                          </a:solidFill>
-                          <a:latin typeface="Malgun Gothic"/>
-                          <a:ea typeface="Malgun Gothic"/>
-                        </a:rPr>
-                        <a:t>같음</a:t>
-                      </a:r>
-                    </a:p>
-                  </a:txBody>
-                  <a:tcPr marL="54864" marR="54864" marT="36576" marB="36576" anchor="ctr">
-                    <a:lnL w="6350">
-                      <a:solidFill>
-                        <a:srgbClr val="C9D2DA"/>
-                      </a:solidFill>
-                    </a:lnL>
-                    <a:lnR w="6350">
-                      <a:solidFill>
-                        <a:srgbClr val="C9D2DA"/>
-                      </a:solidFill>
-                    </a:lnR>
-                    <a:lnT w="6350">
-                      <a:solidFill>
-                        <a:srgbClr val="C9D2DA"/>
-                      </a:solidFill>
-                    </a:lnT>
-                    <a:lnB w="6350">
-                      <a:solidFill>
-                        <a:srgbClr val="C9D2DA"/>
-                      </a:solidFill>
-                    </a:lnB>
-                    <a:solidFill>
-                      <a:srgbClr val="FFFFFF"/>
-                    </a:solidFill>
-                  </a:tcPr>
-                </a:tc>
-                <a:tc>
-                  <a:txBody>
-                    <a:bodyPr/>
-                    <a:lstStyle/>
-                    <a:p>
-                      <a:pPr algn="l"/>
-                      <a:r>
-                        <a:rPr lang="ko-KR" sz="900" b="1" i="0" dirty="0">
-                          <a:solidFill>
-                            <a:srgbClr val="1B7F3B"/>
-                          </a:solidFill>
-                          <a:latin typeface="Malgun Gothic"/>
-                          <a:ea typeface="Malgun Gothic"/>
-                        </a:rPr>
-                        <a:t>여유</a:t>
-                      </a:r>
-                    </a:p>
-                  </a:txBody>
-                  <a:tcPr marL="54864" marR="54864" marT="36576" marB="36576" anchor="ctr">
-                    <a:lnL w="6350">
-                      <a:solidFill>
-                        <a:srgbClr val="C9D2DA"/>
-                      </a:solidFill>
-                    </a:lnL>
-                    <a:lnR w="6350">
-                      <a:solidFill>
-                        <a:srgbClr val="C9D2DA"/>
-                      </a:solidFill>
-                    </a:lnR>
-                    <a:lnT w="6350">
-                      <a:solidFill>
-                        <a:srgbClr val="C9D2DA"/>
-                      </a:solidFill>
-                    </a:lnT>
-                    <a:lnB w="6350">
-                      <a:solidFill>
-                        <a:srgbClr val="C9D2DA"/>
-                      </a:solidFill>
-                    </a:lnB>
-                    <a:solidFill>
-                      <a:srgbClr val="FFFFFF"/>
-                    </a:solidFill>
-                  </a:tcPr>
-                </a:tc>
-              </a:tr>
-              <a:tr h="329184">
-                <a:tc>
-                  <a:txBody>
-                    <a:bodyPr/>
-                    <a:lstStyle/>
-                    <a:p>
-                      <a:pPr algn="l"/>
-                      <a:r>
-                        <a:rPr lang="ko-KR" sz="900" b="1" i="0" dirty="0">
-                          <a:solidFill>
-                            <a:srgbClr val="1D2A35"/>
-                          </a:solidFill>
-                          <a:latin typeface="Malgun Gothic"/>
-                          <a:ea typeface="Malgun Gothic"/>
-                        </a:rPr>
-                        <a:t>포대 탄약·재장전</a:t>
-                      </a:r>
-                    </a:p>
-                  </a:txBody>
-                  <a:tcPr marL="54864" marR="54864" marT="36576" marB="36576" anchor="ctr">
-                    <a:lnL w="6350">
-                      <a:solidFill>
-                        <a:srgbClr val="C9D2DA"/>
-                      </a:solidFill>
-                    </a:lnL>
-                    <a:lnR w="6350">
-                      <a:solidFill>
-                        <a:srgbClr val="C9D2DA"/>
-                      </a:solidFill>
-                    </a:lnR>
-                    <a:lnT w="6350">
-                      <a:solidFill>
-                        <a:srgbClr val="C9D2DA"/>
-                      </a:solidFill>
-                    </a:lnT>
-                    <a:lnB w="6350">
-                      <a:solidFill>
-                        <a:srgbClr val="C9D2DA"/>
-                      </a:solidFill>
-                    </a:lnB>
-                    <a:solidFill>
-                      <a:srgbClr val="F3F6F8"/>
-                    </a:solidFill>
-                  </a:tcPr>
-                </a:tc>
-                <a:tc>
-                  <a:txBody>
-                    <a:bodyPr/>
-                    <a:lstStyle/>
-                    <a:p>
-                      <a:pPr algn="l"/>
-                      <a:r>
-                        <a:rPr lang="ko-KR" sz="900" b="0" i="0" dirty="0">
-                          <a:solidFill>
-                            <a:srgbClr val="1D2A35"/>
-                          </a:solidFill>
-                          <a:latin typeface="Malgun Gothic"/>
-                          <a:ea typeface="Malgun Gothic"/>
-                        </a:rPr>
-                        <a:t>L-SAM 24 · THAAD 48 · PAC-3 72 · 재장전 900초</a:t>
-                      </a:r>
-                    </a:p>
-                  </a:txBody>
-                  <a:tcPr marL="54864" marR="54864" marT="36576" marB="36576" anchor="ctr">
-                    <a:lnL w="6350">
-                      <a:solidFill>
-                        <a:srgbClr val="C9D2DA"/>
-                      </a:solidFill>
-                    </a:lnL>
-                    <a:lnR w="6350">
-                      <a:solidFill>
-                        <a:srgbClr val="C9D2DA"/>
-                      </a:solidFill>
-                    </a:lnR>
-                    <a:lnT w="6350">
-                      <a:solidFill>
-                        <a:srgbClr val="C9D2DA"/>
-                      </a:solidFill>
-                    </a:lnT>
-                    <a:lnB w="6350">
-                      <a:solidFill>
-                        <a:srgbClr val="C9D2DA"/>
-                      </a:solidFill>
-                    </a:lnB>
-                    <a:solidFill>
-                      <a:srgbClr val="F3F6F8"/>
-                    </a:solidFill>
-                  </a:tcPr>
-                </a:tc>
-                <a:tc>
-                  <a:txBody>
-                    <a:bodyPr/>
-                    <a:lstStyle/>
-                    <a:p>
-                      <a:pPr algn="l"/>
-                      <a:r>
-                        <a:rPr lang="ko-KR" sz="900" b="1" i="0" dirty="0">
-                          <a:solidFill>
-                            <a:srgbClr val="B3261E"/>
-                          </a:solidFill>
-                          <a:latin typeface="Malgun Gothic"/>
-                          <a:ea typeface="Malgun Gothic"/>
-                        </a:rPr>
-                        <a:t>탄 소진 누수 19건</a:t>
-                      </a:r>
-                      <a:r>
-                        <a:rPr lang="ko-KR" sz="900" b="0" i="0" dirty="0">
-                          <a:solidFill>
-                            <a:srgbClr val="1D2A35"/>
-                          </a:solidFill>
-                          <a:latin typeface="Malgun Gothic"/>
-                          <a:ea typeface="Malgun Gothic"/>
-                        </a:rPr>
-                        <a:t> · 상위 3개 포대 41% · 0발 55</a:t>
-                      </a:r>
-                    </a:p>
-                  </a:txBody>
-                  <a:tcPr marL="54864" marR="54864" marT="36576" marB="36576" anchor="ctr">
-                    <a:lnL w="6350">
-                      <a:solidFill>
-                        <a:srgbClr val="C9D2DA"/>
-                      </a:solidFill>
-                    </a:lnL>
-                    <a:lnR w="6350">
-                      <a:solidFill>
-                        <a:srgbClr val="C9D2DA"/>
-                      </a:solidFill>
-                    </a:lnR>
-                    <a:lnT w="6350">
-                      <a:solidFill>
-                        <a:srgbClr val="C9D2DA"/>
-                      </a:solidFill>
-                    </a:lnT>
-                    <a:lnB w="6350">
-                      <a:solidFill>
-                        <a:srgbClr val="C9D2DA"/>
-                      </a:solidFill>
-                    </a:lnB>
-                    <a:solidFill>
-                      <a:srgbClr val="F3F6F8"/>
-                    </a:solidFill>
-                  </a:tcPr>
-                </a:tc>
-                <a:tc>
-                  <a:txBody>
-                    <a:bodyPr/>
-                    <a:lstStyle/>
-                    <a:p>
-                      <a:pPr algn="l"/>
-                      <a:r>
-                        <a:rPr lang="ko-KR" sz="900" b="1" i="0" dirty="0">
-                          <a:solidFill>
-                            <a:srgbClr val="B3261E"/>
-                          </a:solidFill>
-                          <a:latin typeface="Malgun Gothic"/>
-                          <a:ea typeface="Malgun Gothic"/>
-                        </a:rPr>
-                        <a:t>탄 소진 누수 13건</a:t>
-                      </a:r>
-                      <a:r>
-                        <a:rPr lang="ko-KR" sz="900" b="0" i="0" dirty="0">
-                          <a:solidFill>
-                            <a:srgbClr val="1D2A35"/>
-                          </a:solidFill>
-                          <a:latin typeface="Malgun Gothic"/>
-                          <a:ea typeface="Malgun Gothic"/>
-                        </a:rPr>
-                        <a:t> · 상위 3개 45% · 0발 59</a:t>
-                      </a:r>
-                    </a:p>
-                  </a:txBody>
-                  <a:tcPr marL="54864" marR="54864" marT="36576" marB="36576" anchor="ctr">
-                    <a:lnL w="6350">
-                      <a:solidFill>
-                        <a:srgbClr val="C9D2DA"/>
-                      </a:solidFill>
-                    </a:lnL>
-                    <a:lnR w="6350">
-                      <a:solidFill>
-                        <a:srgbClr val="C9D2DA"/>
-                      </a:solidFill>
-                    </a:lnR>
-                    <a:lnT w="6350">
-                      <a:solidFill>
-                        <a:srgbClr val="C9D2DA"/>
-                      </a:solidFill>
-                    </a:lnT>
-                    <a:lnB w="6350">
-                      <a:solidFill>
-                        <a:srgbClr val="C9D2DA"/>
-                      </a:solidFill>
-                    </a:lnB>
-                    <a:solidFill>
-                      <a:srgbClr val="F3F6F8"/>
-                    </a:solidFill>
-                  </a:tcPr>
-                </a:tc>
-                <a:tc>
-                  <a:txBody>
-                    <a:bodyPr/>
-                    <a:lstStyle/>
-                    <a:p>
-                      <a:pPr algn="l"/>
-                      <a:r>
-                        <a:rPr lang="ko-KR" sz="900" b="1" i="0" dirty="0">
-                          <a:solidFill>
-                            <a:srgbClr val="B3261E"/>
-                          </a:solidFill>
-                          <a:latin typeface="Malgun Gothic"/>
-                          <a:ea typeface="Malgun Gothic"/>
-                        </a:rPr>
-                        <a:t>상층 L-SAM 24발이 먼저 닿는 벽</a:t>
-                      </a:r>
-                    </a:p>
-                  </a:txBody>
-                  <a:tcPr marL="54864" marR="54864" marT="36576" marB="36576" anchor="ctr">
-                    <a:lnL w="6350">
-                      <a:solidFill>
-                        <a:srgbClr val="C9D2DA"/>
-                      </a:solidFill>
-                    </a:lnL>
-                    <a:lnR w="6350">
-                      <a:solidFill>
-                        <a:srgbClr val="C9D2DA"/>
-                      </a:solidFill>
-                    </a:lnR>
-                    <a:lnT w="6350">
-                      <a:solidFill>
-                        <a:srgbClr val="C9D2DA"/>
-                      </a:solidFill>
-                    </a:lnT>
-                    <a:lnB w="6350">
-                      <a:solidFill>
-                        <a:srgbClr val="C9D2DA"/>
-                      </a:solidFill>
-                    </a:lnB>
-                    <a:solidFill>
-                      <a:srgbClr val="F3F6F8"/>
-                    </a:solidFill>
-                  </a:tcPr>
-                </a:tc>
-              </a:tr>
-              <a:tr h="329184">
-                <a:tc>
-                  <a:txBody>
-                    <a:bodyPr/>
-                    <a:lstStyle/>
-                    <a:p>
-                      <a:pPr algn="l"/>
-                      <a:r>
-                        <a:rPr lang="ko-KR" sz="900" b="1" i="0" dirty="0">
-                          <a:solidFill>
-                            <a:srgbClr val="1D2A35"/>
-                          </a:solidFill>
-                          <a:latin typeface="Malgun Gothic"/>
-                          <a:ea typeface="Malgun Gothic"/>
-                        </a:rPr>
-                        <a:t>통신 계선</a:t>
-                      </a:r>
-                    </a:p>
-                  </a:txBody>
-                  <a:tcPr marL="54864" marR="54864" marT="36576" marB="36576" anchor="ctr">
-                    <a:lnL w="6350">
-                      <a:solidFill>
-                        <a:srgbClr val="C9D2DA"/>
-                      </a:solidFill>
-                    </a:lnL>
-                    <a:lnR w="6350">
-                      <a:solidFill>
-                        <a:srgbClr val="C9D2DA"/>
-                      </a:solidFill>
-                    </a:lnR>
-                    <a:lnT w="6350">
-                      <a:solidFill>
-                        <a:srgbClr val="C9D2DA"/>
-                      </a:solidFill>
-                    </a:lnT>
-                    <a:lnB w="6350">
-                      <a:solidFill>
-                        <a:srgbClr val="C9D2DA"/>
-                      </a:solidFill>
-                    </a:lnB>
-                    <a:solidFill>
-                      <a:srgbClr val="FFFFFF"/>
-                    </a:solidFill>
-                  </a:tcPr>
-                </a:tc>
-                <a:tc>
-                  <a:txBody>
-                    <a:bodyPr/>
-                    <a:lstStyle/>
-                    <a:p>
-                      <a:pPr algn="l"/>
-                      <a:r>
-                        <a:rPr lang="ko-KR" sz="900" b="0" i="0" dirty="0">
-                          <a:solidFill>
-                            <a:srgbClr val="1D2A35"/>
-                          </a:solidFill>
-                          <a:latin typeface="Malgun Gothic"/>
-                          <a:ea typeface="Malgun Gothic"/>
-                        </a:rPr>
-                        <a:t>용량 없음 — 지연만(데이터링크 1초 · 음성 20초 · 채팅 40초)</a:t>
-                      </a:r>
-                    </a:p>
-                  </a:txBody>
-                  <a:tcPr marL="54864" marR="54864" marT="36576" marB="36576" anchor="ctr">
-                    <a:lnL w="6350">
-                      <a:solidFill>
-                        <a:srgbClr val="C9D2DA"/>
-                      </a:solidFill>
-                    </a:lnL>
-                    <a:lnR w="6350">
-                      <a:solidFill>
-                        <a:srgbClr val="C9D2DA"/>
-                      </a:solidFill>
-                    </a:lnR>
-                    <a:lnT w="6350">
-                      <a:solidFill>
-                        <a:srgbClr val="C9D2DA"/>
-                      </a:solidFill>
-                    </a:lnT>
-                    <a:lnB w="6350">
-                      <a:solidFill>
-                        <a:srgbClr val="C9D2DA"/>
-                      </a:solidFill>
-                    </a:lnB>
-                    <a:solidFill>
-                      <a:srgbClr val="FFFFFF"/>
-                    </a:solidFill>
-                  </a:tcPr>
-                </a:tc>
-                <a:tc>
-                  <a:txBody>
-                    <a:bodyPr/>
-                    <a:lstStyle/>
-                    <a:p>
-                      <a:pPr algn="l"/>
-                      <a:r>
-                        <a:rPr lang="ko-KR" sz="900" b="0" i="0" dirty="0">
-                          <a:solidFill>
-                            <a:srgbClr val="1D2A35"/>
-                          </a:solidFill>
-                          <a:latin typeface="Malgun Gothic"/>
-                          <a:ea typeface="Malgun Gothic"/>
-                        </a:rPr>
-                        <a:t>전달 중 전문 최대 0.69건(THAAD→탄도탄작전통제소 음성)</a:t>
-                      </a:r>
-                    </a:p>
-                  </a:txBody>
-                  <a:tcPr marL="54864" marR="54864" marT="36576" marB="36576" anchor="ctr">
-                    <a:lnL w="6350">
-                      <a:solidFill>
-                        <a:srgbClr val="C9D2DA"/>
-                      </a:solidFill>
-                    </a:lnL>
-                    <a:lnR w="6350">
-                      <a:solidFill>
-                        <a:srgbClr val="C9D2DA"/>
-                      </a:solidFill>
-                    </a:lnR>
-                    <a:lnT w="6350">
-                      <a:solidFill>
-                        <a:srgbClr val="C9D2DA"/>
-                      </a:solidFill>
-                    </a:lnT>
-                    <a:lnB w="6350">
-                      <a:solidFill>
-                        <a:srgbClr val="C9D2DA"/>
-                      </a:solidFill>
-                    </a:lnB>
-                    <a:solidFill>
-                      <a:srgbClr val="FFFFFF"/>
-                    </a:solidFill>
-                  </a:tcPr>
-                </a:tc>
-                <a:tc>
-                  <a:txBody>
-                    <a:bodyPr/>
-                    <a:lstStyle/>
-                    <a:p>
-                      <a:pPr algn="l"/>
-                      <a:r>
-                        <a:rPr lang="ko-KR" sz="900" b="0" i="0" dirty="0">
-                          <a:solidFill>
-                            <a:srgbClr val="1D2A35"/>
-                          </a:solidFill>
-                          <a:latin typeface="Malgun Gothic"/>
-                          <a:ea typeface="Malgun Gothic"/>
-                        </a:rPr>
-                        <a:t>최대 0.62건(그린파인 보고)</a:t>
-                      </a:r>
-                    </a:p>
-                  </a:txBody>
-                  <a:tcPr marL="54864" marR="54864" marT="36576" marB="36576" anchor="ctr">
-                    <a:lnL w="6350">
-                      <a:solidFill>
-                        <a:srgbClr val="C9D2DA"/>
-                      </a:solidFill>
-                    </a:lnL>
-                    <a:lnR w="6350">
-                      <a:solidFill>
-                        <a:srgbClr val="C9D2DA"/>
-                      </a:solidFill>
-                    </a:lnR>
-                    <a:lnT w="6350">
-                      <a:solidFill>
-                        <a:srgbClr val="C9D2DA"/>
-                      </a:solidFill>
-                    </a:lnT>
-                    <a:lnB w="6350">
-                      <a:solidFill>
-                        <a:srgbClr val="C9D2DA"/>
-                      </a:solidFill>
-                    </a:lnB>
-                    <a:solidFill>
-                      <a:srgbClr val="FFFFFF"/>
-                    </a:solidFill>
-                  </a:tcPr>
-                </a:tc>
-                <a:tc>
-                  <a:txBody>
-                    <a:bodyPr/>
-                    <a:lstStyle/>
-                    <a:p>
-                      <a:pPr algn="l"/>
-                      <a:r>
-                        <a:rPr lang="ko-KR" sz="900" b="1" i="0" dirty="0">
-                          <a:solidFill>
-                            <a:srgbClr val="5B6B7A"/>
-                          </a:solidFill>
-                          <a:latin typeface="Malgun Gothic"/>
-                          <a:ea typeface="Malgun Gothic"/>
-                        </a:rPr>
-                        <a:t>포화 자체가 생기지 않음</a:t>
-                      </a:r>
-                    </a:p>
-                  </a:txBody>
-                  <a:tcPr marL="54864" marR="54864" marT="36576" marB="36576" anchor="ctr">
-                    <a:lnL w="6350">
-                      <a:solidFill>
-                        <a:srgbClr val="C9D2DA"/>
-                      </a:solidFill>
-                    </a:lnL>
-                    <a:lnR w="6350">
-                      <a:solidFill>
-                        <a:srgbClr val="C9D2DA"/>
-                      </a:solidFill>
-                    </a:lnR>
-                    <a:lnT w="6350">
-                      <a:solidFill>
-                        <a:srgbClr val="C9D2DA"/>
-                      </a:solidFill>
-                    </a:lnT>
-                    <a:lnB w="6350">
-                      <a:solidFill>
-                        <a:srgbClr val="C9D2DA"/>
-                      </a:solidFill>
-                    </a:lnB>
-                    <a:solidFill>
-                      <a:srgbClr val="FFFFFF"/>
-                    </a:solidFill>
-                  </a:tcPr>
-                </a:tc>
-              </a:tr>
-              <a:tr h="329184">
-                <a:tc>
-                  <a:txBody>
-                    <a:bodyPr/>
-                    <a:lstStyle/>
-                    <a:p>
-                      <a:pPr algn="l"/>
-                      <a:r>
-                        <a:rPr lang="ko-KR" sz="900" b="1" i="0" dirty="0">
-                          <a:solidFill>
-                            <a:srgbClr val="1D2A35"/>
-                          </a:solidFill>
-                          <a:latin typeface="Malgun Gothic"/>
-                          <a:ea typeface="Malgun Gothic"/>
-                        </a:rPr>
-                        <a:t>교전 현황 공유 채널</a:t>
-                      </a:r>
-                    </a:p>
-                  </a:txBody>
-                  <a:tcPr marL="54864" marR="54864" marT="36576" marB="36576" anchor="ctr">
-                    <a:lnL w="6350">
-                      <a:solidFill>
-                        <a:srgbClr val="C9D2DA"/>
-                      </a:solidFill>
-                    </a:lnL>
-                    <a:lnR w="6350">
-                      <a:solidFill>
-                        <a:srgbClr val="C9D2DA"/>
-                      </a:solidFill>
-                    </a:lnR>
-                    <a:lnT w="6350">
-                      <a:solidFill>
-                        <a:srgbClr val="C9D2DA"/>
-                      </a:solidFill>
-                    </a:lnT>
-                    <a:lnB w="6350">
-                      <a:solidFill>
-                        <a:srgbClr val="C9D2DA"/>
-                      </a:solidFill>
-                    </a:lnB>
-                    <a:solidFill>
-                      <a:srgbClr val="F3F6F8"/>
-                    </a:solidFill>
-                  </a:tcPr>
-                </a:tc>
-                <a:tc>
-                  <a:txBody>
-                    <a:bodyPr/>
-                    <a:lstStyle/>
-                    <a:p>
-                      <a:pPr algn="l"/>
-                      <a:r>
-                        <a:rPr lang="ko-KR" sz="900" b="0" i="0" dirty="0">
-                          <a:solidFill>
-                            <a:srgbClr val="1D2A35"/>
-                          </a:solidFill>
-                          <a:latin typeface="Malgun Gothic"/>
-                          <a:ea typeface="Malgun Gothic"/>
-                        </a:rPr>
-                        <a:t>전송 1 · 대기 4 · As-Is 음성/VTC 135초 · To-Be 1초</a:t>
-                      </a:r>
-                    </a:p>
-                  </a:txBody>
-                  <a:tcPr marL="54864" marR="54864" marT="36576" marB="36576" anchor="ctr">
-                    <a:lnL w="6350">
-                      <a:solidFill>
-                        <a:srgbClr val="C9D2DA"/>
-                      </a:solidFill>
-                    </a:lnL>
-                    <a:lnR w="6350">
-                      <a:solidFill>
-                        <a:srgbClr val="C9D2DA"/>
-                      </a:solidFill>
-                    </a:lnR>
-                    <a:lnT w="6350">
-                      <a:solidFill>
-                        <a:srgbClr val="C9D2DA"/>
-                      </a:solidFill>
-                    </a:lnT>
-                    <a:lnB w="6350">
-                      <a:solidFill>
-                        <a:srgbClr val="C9D2DA"/>
-                      </a:solidFill>
-                    </a:lnB>
-                    <a:solidFill>
-                      <a:srgbClr val="F3F6F8"/>
-                    </a:solidFill>
-                  </a:tcPr>
-                </a:tc>
-                <a:tc>
-                  <a:txBody>
-                    <a:bodyPr/>
-                    <a:lstStyle/>
-                    <a:p>
-                      <a:pPr algn="l"/>
-                      <a:r>
-                        <a:rPr lang="ko-KR" sz="900" b="1" i="0" dirty="0">
-                          <a:solidFill>
-                            <a:srgbClr val="B3261E"/>
-                          </a:solidFill>
-                          <a:latin typeface="Malgun Gothic"/>
-                          <a:ea typeface="Malgun Gothic"/>
-                        </a:rPr>
-                        <a:t>버려짐 121건</a:t>
-                      </a:r>
-                      <a:r>
-                        <a:rPr lang="ko-KR" sz="900" b="0" i="0" dirty="0">
-                          <a:solidFill>
-                            <a:srgbClr val="1D2A35"/>
-                          </a:solidFill>
-                          <a:latin typeface="Malgun Gothic"/>
-                          <a:ea typeface="Malgun Gothic"/>
-                        </a:rPr>
-                        <a:t> · 대기 31건</a:t>
-                      </a:r>
-                    </a:p>
-                  </a:txBody>
-                  <a:tcPr marL="54864" marR="54864" marT="36576" marB="36576" anchor="ctr">
-                    <a:lnL w="6350">
-                      <a:solidFill>
-                        <a:srgbClr val="C9D2DA"/>
-                      </a:solidFill>
-                    </a:lnL>
-                    <a:lnR w="6350">
-                      <a:solidFill>
-                        <a:srgbClr val="C9D2DA"/>
-                      </a:solidFill>
-                    </a:lnR>
-                    <a:lnT w="6350">
-                      <a:solidFill>
-                        <a:srgbClr val="C9D2DA"/>
-                      </a:solidFill>
-                    </a:lnT>
-                    <a:lnB w="6350">
-                      <a:solidFill>
-                        <a:srgbClr val="C9D2DA"/>
-                      </a:solidFill>
-                    </a:lnB>
-                    <a:solidFill>
-                      <a:srgbClr val="F3F6F8"/>
-                    </a:solidFill>
-                  </a:tcPr>
-                </a:tc>
-                <a:tc>
-                  <a:txBody>
-                    <a:bodyPr/>
-                    <a:lstStyle/>
-                    <a:p>
-                      <a:pPr algn="l"/>
-                      <a:r>
-                        <a:rPr lang="ko-KR" sz="900" b="0" i="0" dirty="0">
-                          <a:solidFill>
-                            <a:srgbClr val="1D2A35"/>
-                          </a:solidFill>
-                          <a:latin typeface="Malgun Gothic"/>
-                          <a:ea typeface="Malgun Gothic"/>
-                        </a:rPr>
-                        <a:t>버려짐 0 · 대기 25건</a:t>
-                      </a:r>
-                    </a:p>
-                  </a:txBody>
-                  <a:tcPr marL="54864" marR="54864" marT="36576" marB="36576" anchor="ctr">
-                    <a:lnL w="6350">
-                      <a:solidFill>
-                        <a:srgbClr val="C9D2DA"/>
-                      </a:solidFill>
-                    </a:lnL>
-                    <a:lnR w="6350">
-                      <a:solidFill>
-                        <a:srgbClr val="C9D2DA"/>
-                      </a:solidFill>
-                    </a:lnR>
-                    <a:lnT w="6350">
-                      <a:solidFill>
-                        <a:srgbClr val="C9D2DA"/>
-                      </a:solidFill>
-                    </a:lnT>
-                    <a:lnB w="6350">
-                      <a:solidFill>
-                        <a:srgbClr val="C9D2DA"/>
-                      </a:solidFill>
-                    </a:lnB>
-                    <a:solidFill>
-                      <a:srgbClr val="F3F6F8"/>
-                    </a:solidFill>
-                  </a:tcPr>
-                </a:tc>
-                <a:tc>
-                  <a:txBody>
-                    <a:bodyPr/>
-                    <a:lstStyle/>
-                    <a:p>
-                      <a:pPr algn="l"/>
-                      <a:r>
-                        <a:rPr lang="ko-KR" sz="900" b="1" i="0" dirty="0">
-                          <a:solidFill>
-                            <a:srgbClr val="B3261E"/>
-                          </a:solidFill>
-                          <a:latin typeface="Malgun Gothic"/>
-                          <a:ea typeface="Malgun Gothic"/>
-                        </a:rPr>
-                        <a:t>As-Is만 손실 — 상급이 군단 방공 교전을 모름</a:t>
-                      </a:r>
-                    </a:p>
-                  </a:txBody>
-                  <a:tcPr marL="54864" marR="54864" marT="36576" marB="36576" anchor="ctr">
-                    <a:lnL w="6350">
-                      <a:solidFill>
-                        <a:srgbClr val="C9D2DA"/>
-                      </a:solidFill>
-                    </a:lnL>
-                    <a:lnR w="6350">
-                      <a:solidFill>
-                        <a:srgbClr val="C9D2DA"/>
-                      </a:solidFill>
-                    </a:lnR>
-                    <a:lnT w="6350">
-                      <a:solidFill>
-                        <a:srgbClr val="C9D2DA"/>
-                      </a:solidFill>
-                    </a:lnT>
-                    <a:lnB w="6350">
-                      <a:solidFill>
-                        <a:srgbClr val="C9D2DA"/>
-                      </a:solidFill>
-                    </a:lnB>
-                    <a:solidFill>
-                      <a:srgbClr val="F3F6F8"/>
-                    </a:solidFill>
-                  </a:tcPr>
-                </a:tc>
-              </a:tr>
-              <a:tr h="329184">
-                <a:tc>
-                  <a:txBody>
-                    <a:bodyPr/>
-                    <a:lstStyle/>
-                    <a:p>
-                      <a:pPr algn="l"/>
-                      <a:r>
-                        <a:rPr lang="ko-KR" sz="900" b="1" i="0" dirty="0">
-                          <a:solidFill>
-                            <a:srgbClr val="1D2A35"/>
-                          </a:solidFill>
-                          <a:latin typeface="Malgun Gothic"/>
-                          <a:ea typeface="Malgun Gothic"/>
-                        </a:rPr>
-                        <a:t>탐지 레이더(71기)</a:t>
-                      </a:r>
-                    </a:p>
-                  </a:txBody>
-                  <a:tcPr marL="54864" marR="54864" marT="36576" marB="36576" anchor="ctr">
-                    <a:lnL w="6350">
-                      <a:solidFill>
-                        <a:srgbClr val="C9D2DA"/>
-                      </a:solidFill>
-                    </a:lnL>
-                    <a:lnR w="6350">
-                      <a:solidFill>
-                        <a:srgbClr val="C9D2DA"/>
-                      </a:solidFill>
-                    </a:lnR>
-                    <a:lnT w="6350">
-                      <a:solidFill>
-                        <a:srgbClr val="C9D2DA"/>
-                      </a:solidFill>
-                    </a:lnT>
-                    <a:lnB w="6350">
-                      <a:solidFill>
-                        <a:srgbClr val="C9D2DA"/>
-                      </a:solidFill>
-                    </a:lnB>
-                    <a:solidFill>
-                      <a:srgbClr val="FFFFFF"/>
-                    </a:solidFill>
-                  </a:tcPr>
-                </a:tc>
-                <a:tc>
-                  <a:txBody>
-                    <a:bodyPr/>
-                    <a:lstStyle/>
-                    <a:p>
-                      <a:pPr algn="l"/>
-                      <a:r>
-                        <a:rPr lang="ko-KR" sz="900" b="0" i="0" dirty="0">
-                          <a:solidFill>
-                            <a:srgbClr val="1D2A35"/>
-                          </a:solidFill>
-                          <a:latin typeface="Malgun Gothic"/>
-                          <a:ea typeface="Malgun Gothic"/>
-                        </a:rPr>
-                        <a:t>용량 없음 — 추적 수·빔 자원 제한 없음</a:t>
-                      </a:r>
-                    </a:p>
-                  </a:txBody>
-                  <a:tcPr marL="54864" marR="54864" marT="36576" marB="36576" anchor="ctr">
-                    <a:lnL w="6350">
-                      <a:solidFill>
-                        <a:srgbClr val="C9D2DA"/>
-                      </a:solidFill>
-                    </a:lnL>
-                    <a:lnR w="6350">
-                      <a:solidFill>
-                        <a:srgbClr val="C9D2DA"/>
-                      </a:solidFill>
-                    </a:lnR>
-                    <a:lnT w="6350">
-                      <a:solidFill>
-                        <a:srgbClr val="C9D2DA"/>
-                      </a:solidFill>
-                    </a:lnT>
-                    <a:lnB w="6350">
-                      <a:solidFill>
-                        <a:srgbClr val="C9D2DA"/>
-                      </a:solidFill>
-                    </a:lnB>
-                    <a:solidFill>
-                      <a:srgbClr val="FFFFFF"/>
-                    </a:solidFill>
-                  </a:tcPr>
-                </a:tc>
-                <a:tc>
-                  <a:txBody>
-                    <a:bodyPr/>
-                    <a:lstStyle/>
-                    <a:p>
-                      <a:pPr algn="l"/>
-                      <a:r>
-                        <a:rPr lang="ko-KR" sz="900" b="0" i="0" dirty="0">
-                          <a:solidFill>
-                            <a:srgbClr val="1D2A35"/>
-                          </a:solidFill>
-                          <a:latin typeface="Malgun Gothic"/>
-                          <a:ea typeface="Malgun Gothic"/>
-                        </a:rPr>
-                        <a:t>보고 14기 · 그린파인 충북 140개 · FPS-117 강원북 16건</a:t>
-                      </a:r>
-                    </a:p>
-                  </a:txBody>
-                  <a:tcPr marL="54864" marR="54864" marT="36576" marB="36576" anchor="ctr">
-                    <a:lnL w="6350">
-                      <a:solidFill>
-                        <a:srgbClr val="C9D2DA"/>
-                      </a:solidFill>
-                    </a:lnL>
-                    <a:lnR w="6350">
-                      <a:solidFill>
-                        <a:srgbClr val="C9D2DA"/>
-                      </a:solidFill>
-                    </a:lnR>
-                    <a:lnT w="6350">
-                      <a:solidFill>
-                        <a:srgbClr val="C9D2DA"/>
-                      </a:solidFill>
-                    </a:lnT>
-                    <a:lnB w="6350">
-                      <a:solidFill>
-                        <a:srgbClr val="C9D2DA"/>
-                      </a:solidFill>
-                    </a:lnB>
-                    <a:solidFill>
-                      <a:srgbClr val="FFFFFF"/>
-                    </a:solidFill>
-                  </a:tcPr>
-                </a:tc>
-                <a:tc>
-                  <a:txBody>
-                    <a:bodyPr/>
-                    <a:lstStyle/>
-                    <a:p>
-                      <a:pPr algn="l"/>
-                      <a:r>
-                        <a:rPr lang="ko-KR" sz="900" b="0" i="0" dirty="0">
-                          <a:solidFill>
-                            <a:srgbClr val="1D2A35"/>
-                          </a:solidFill>
-                          <a:latin typeface="Malgun Gothic"/>
-                          <a:ea typeface="Malgun Gothic"/>
-                        </a:rPr>
-                        <a:t>같음(강원북 64건)</a:t>
-                      </a:r>
-                    </a:p>
-                  </a:txBody>
-                  <a:tcPr marL="54864" marR="54864" marT="36576" marB="36576" anchor="ctr">
-                    <a:lnL w="6350">
-                      <a:solidFill>
-                        <a:srgbClr val="C9D2DA"/>
-                      </a:solidFill>
-                    </a:lnL>
-                    <a:lnR w="6350">
-                      <a:solidFill>
-                        <a:srgbClr val="C9D2DA"/>
-                      </a:solidFill>
-                    </a:lnR>
-                    <a:lnT w="6350">
-                      <a:solidFill>
-                        <a:srgbClr val="C9D2DA"/>
-                      </a:solidFill>
-                    </a:lnT>
-                    <a:lnB w="6350">
-                      <a:solidFill>
-                        <a:srgbClr val="C9D2DA"/>
-                      </a:solidFill>
-                    </a:lnB>
-                    <a:solidFill>
-                      <a:srgbClr val="FFFFFF"/>
-                    </a:solidFill>
-                  </a:tcPr>
-                </a:tc>
-                <a:tc>
-                  <a:txBody>
-                    <a:bodyPr/>
-                    <a:lstStyle/>
-                    <a:p>
-                      <a:pPr algn="l"/>
-                      <a:r>
-                        <a:rPr lang="ko-KR" sz="900" b="1" i="0" dirty="0">
-                          <a:solidFill>
-                            <a:srgbClr val="5B6B7A"/>
-                          </a:solidFill>
-                          <a:latin typeface="Malgun Gothic"/>
-                          <a:ea typeface="Malgun Gothic"/>
-                        </a:rPr>
-                        <a:t>분석 불가</a:t>
+                        <a:t>As-Is만 손실 — 상급이 교전을 모름</a:t>
                       </a:r>
                     </a:p>
                   </a:txBody>
@@ -16661,14 +15862,14 @@
       </p:graphicFrame>
       <p:sp>
         <p:nvSpPr>
-          <p:cNvPr id="7" name="Text 7"/>
+          <p:cNvPr id="19" name="Text 19"/>
           <p:cNvSpPr txBox="1"/>
           <p:nvPr/>
         </p:nvSpPr>
         <p:spPr>
           <a:xfrm>
-            <a:off x="548640" y="5989320"/>
-            <a:ext cx="11064240" cy="411480"/>
+            <a:off x="548640" y="5577840"/>
+            <a:ext cx="11064240" cy="731520"/>
           </a:xfrm>
           <a:prstGeom prst="rect">
             <a:avLst/>
@@ -16691,14 +15892,14 @@
               <a:buNone/>
             </a:pPr>
             <a:r>
-              <a:rPr lang="ko-KR" sz="1000" b="1" i="0" dirty="0">
+              <a:rPr lang="ko-KR" sz="1100" b="1" i="0" dirty="0">
                 <a:solidFill>
                   <a:srgbClr val="1D2A35"/>
                 </a:solidFill>
                 <a:latin typeface="Malgun Gothic"/>
                 <a:ea typeface="Malgun Gothic"/>
               </a:rPr>
-              <a:t>읽는 법: 실제로 포화된 것은 THAAD 채널과 상층 포대 탄약뿐 — 지휘 구조가 아니라 물리(요격 창)와 자원(보유탄)이 정한다. 지휘소는 용량의 절반 아래, 통신·레이더는 용량이 없어 포화가 생길 수 없다.</a:t>
+              <a:t>읽는 법: 지휘 구조를 바꿔도 창구가 포화되는 자리는 없다. 실제로 막히는 곳은 포대의 동시교전 채널(THAAD)과 보유탄(상층 L-SAM)이며, 이것은 두 체계에 같은 물리·자원의 벽이다. 지휘 구조의 차이는 포화가 아니라 「거치는 창구의 수(방공여단 +1)」와 「창구 사이의 매체(음성 ↔ 데이터링크)」로 나타난다.</a:t>
             </a:r>
           </a:p>
         </p:txBody>
@@ -16772,7 +15973,7 @@
                 <a:latin typeface="Malgun Gothic"/>
                 <a:ea typeface="Malgun Gothic"/>
               </a:rPr>
-              <a:t>5. 얼마나 효율적인가 — 부하 (2/2): 병목은 상층 포대 3곳의 채널과 탄</a:t>
+              <a:t>5. 얼마나 효율적인가 — 부하 (2/2): 지휘소 이용률과 모델이 보지 못하는 부하</a:t>
             </a:r>
           </a:p>
         </p:txBody>
@@ -16854,7 +16055,7 @@
                 <a:latin typeface="Malgun Gothic"/>
                 <a:ea typeface="Malgun Gothic"/>
               </a:rPr>
-              <a:t>결심 지휘소 이용률(생성 구간 1800초 기준 · 임계 0.9)</a:t>
+              <a:t>결심 지휘소 이용률(임계 0.9)</a:t>
             </a:r>
           </a:p>
         </p:txBody>
@@ -18129,8 +17330,8 @@
         </p:nvSpPr>
         <p:spPr>
           <a:xfrm>
-            <a:off x="6492240" y="1188720"/>
-            <a:ext cx="5120640" cy="320040"/>
+            <a:off x="548640" y="5440680"/>
+            <a:ext cx="5760720" cy="822960"/>
           </a:xfrm>
           <a:prstGeom prst="rect">
             <a:avLst/>
@@ -18147,17 +17348,20 @@
           <a:lstStyle/>
           <a:p>
             <a:pPr algn="l">
+              <a:lnSpc>
+                <a:spcPct val="120000"/>
+              </a:lnSpc>
               <a:buNone/>
             </a:pPr>
             <a:r>
-              <a:rPr lang="ko-KR" sz="1300" b="1" i="0" dirty="0">
+              <a:rPr lang="ko-KR" sz="1050" b="0" i="0" dirty="0">
                 <a:solidFill>
-                  <a:srgbClr val="B3261E"/>
+                  <a:srgbClr val="1D2A35"/>
                 </a:solidFill>
                 <a:latin typeface="Malgun Gothic"/>
                 <a:ea typeface="Malgun Gothic"/>
               </a:rPr>
-              <a:t>포대 — 여기가 병목</a:t>
+              <a:t>방공여단 통제소는 두 체계 모두 편제에 있지만, To-Be는 통합공중작전통제소가 포대 사격통제소로 바로 명령하므로 교전 명령이 지나지 않는다(도착 0건). 지휘소 포화는 위협 3배부터이며, 거기서 To-Be 우위는 +14 → +117(5배)로 커진다.</a:t>
             </a:r>
           </a:p>
         </p:txBody>
@@ -18170,8 +17374,8 @@
         </p:nvSpPr>
         <p:spPr>
           <a:xfrm>
-            <a:off x="6492240" y="1600200"/>
-            <a:ext cx="2468880" cy="1325880"/>
+            <a:off x="6492240" y="1188720"/>
+            <a:ext cx="5120640" cy="2377440"/>
           </a:xfrm>
           <a:prstGeom prst="roundRect">
             <a:avLst>
@@ -18201,475 +17405,7 @@
         </p:nvSpPr>
         <p:spPr>
           <a:xfrm>
-            <a:off x="6492240" y="1673352"/>
-            <a:ext cx="2468880" cy="729234"/>
-          </a:xfrm>
-          <a:prstGeom prst="rect">
-            <a:avLst/>
-          </a:prstGeom>
-          <a:noFill/>
-          <a:ln>
-            <a:noFill/>
-          </a:ln>
-        </p:spPr>
-        <p:txBody>
-          <a:bodyPr wrap="square" lIns="0" tIns="0" rIns="0" bIns="0" anchor="ctr" rtlCol="0">
-            <a:normAutofit/>
-          </a:bodyPr>
-          <a:lstStyle/>
-          <a:p>
-            <a:pPr algn="ctr">
-              <a:buNone/>
-            </a:pPr>
-            <a:r>
-              <a:rPr lang="ko-KR" sz="3000" b="1" i="0" dirty="0">
-                <a:solidFill>
-                  <a:srgbClr val="B3261E"/>
-                </a:solidFill>
-                <a:latin typeface="Malgun Gothic"/>
-                <a:ea typeface="Malgun Gothic"/>
-              </a:rPr>
-              <a:t>6/6 · 26건</a:t>
-            </a:r>
-          </a:p>
-        </p:txBody>
-      </p:sp>
-      <p:sp>
-        <p:nvSpPr>
-          <p:cNvPr id="44" name="Text 44"/>
-          <p:cNvSpPr txBox="1"/>
-          <p:nvPr/>
-        </p:nvSpPr>
-        <p:spPr>
-          <a:xfrm>
-            <a:off x="6583680" y="2395728"/>
-            <a:ext cx="2286000" cy="503834"/>
-          </a:xfrm>
-          <a:prstGeom prst="rect">
-            <a:avLst/>
-          </a:prstGeom>
-          <a:noFill/>
-          <a:ln>
-            <a:noFill/>
-          </a:ln>
-        </p:spPr>
-        <p:txBody>
-          <a:bodyPr wrap="square" lIns="0" tIns="0" rIns="0" bIns="0" anchor="t" rtlCol="0">
-            <a:normAutofit/>
-          </a:bodyPr>
-          <a:lstStyle/>
-          <a:p>
-            <a:pPr algn="ctr">
-              <a:lnSpc>
-                <a:spcPct val="114999"/>
-              </a:lnSpc>
-              <a:buNone/>
-            </a:pPr>
-            <a:r>
-              <a:rPr lang="ko-KR" sz="1100" b="0" i="0" dirty="0">
-                <a:solidFill>
-                  <a:srgbClr val="5B6B7A"/>
-                </a:solidFill>
-                <a:latin typeface="Malgun Gothic"/>
-                <a:ea typeface="Malgun Gothic"/>
-              </a:rPr>
-              <a:t>THAAD 채널 포화 · 차단(As-Is)
-To-Be 6/6 · 24건</a:t>
-            </a:r>
-          </a:p>
-        </p:txBody>
-      </p:sp>
-      <p:sp>
-        <p:nvSpPr>
-          <p:cNvPr id="45" name="Shape 45"/>
-          <p:cNvSpPr/>
-          <p:nvPr/>
-        </p:nvSpPr>
-        <p:spPr>
-          <a:xfrm>
-            <a:off x="9098280" y="1600200"/>
-            <a:ext cx="2468880" cy="1325880"/>
-          </a:xfrm>
-          <a:prstGeom prst="roundRect">
-            <a:avLst>
-              <a:gd name="adj" fmla="val 12000"/>
-            </a:avLst>
-          </a:prstGeom>
-          <a:solidFill>
-            <a:srgbClr val="F3F6F8"/>
-          </a:solidFill>
-          <a:ln>
-            <a:noFill/>
-          </a:ln>
-        </p:spPr>
-        <p:txBody>
-          <a:bodyPr/>
-          <a:lstStyle/>
-          <a:p>
-            <a:endParaRPr lang="ko-KR"/>
-          </a:p>
-        </p:txBody>
-      </p:sp>
-      <p:sp>
-        <p:nvSpPr>
-          <p:cNvPr id="46" name="Text 46"/>
-          <p:cNvSpPr txBox="1"/>
-          <p:nvPr/>
-        </p:nvSpPr>
-        <p:spPr>
-          <a:xfrm>
-            <a:off x="9098280" y="1673352"/>
-            <a:ext cx="2468880" cy="729234"/>
-          </a:xfrm>
-          <a:prstGeom prst="rect">
-            <a:avLst/>
-          </a:prstGeom>
-          <a:noFill/>
-          <a:ln>
-            <a:noFill/>
-          </a:ln>
-        </p:spPr>
-        <p:txBody>
-          <a:bodyPr wrap="square" lIns="0" tIns="0" rIns="0" bIns="0" anchor="ctr" rtlCol="0">
-            <a:normAutofit/>
-          </a:bodyPr>
-          <a:lstStyle/>
-          <a:p>
-            <a:pPr algn="ctr">
-              <a:buNone/>
-            </a:pPr>
-            <a:r>
-              <a:rPr lang="ko-KR" sz="3000" b="1" i="0" dirty="0">
-                <a:solidFill>
-                  <a:srgbClr val="B3261E"/>
-                </a:solidFill>
-                <a:latin typeface="Malgun Gothic"/>
-                <a:ea typeface="Malgun Gothic"/>
-              </a:rPr>
-              <a:t>19 → 13건</a:t>
-            </a:r>
-          </a:p>
-        </p:txBody>
-      </p:sp>
-      <p:sp>
-        <p:nvSpPr>
-          <p:cNvPr id="47" name="Text 47"/>
-          <p:cNvSpPr txBox="1"/>
-          <p:nvPr/>
-        </p:nvSpPr>
-        <p:spPr>
-          <a:xfrm>
-            <a:off x="9189720" y="2395728"/>
-            <a:ext cx="2286000" cy="503834"/>
-          </a:xfrm>
-          <a:prstGeom prst="rect">
-            <a:avLst/>
-          </a:prstGeom>
-          <a:noFill/>
-          <a:ln>
-            <a:noFill/>
-          </a:ln>
-        </p:spPr>
-        <p:txBody>
-          <a:bodyPr wrap="square" lIns="0" tIns="0" rIns="0" bIns="0" anchor="t" rtlCol="0">
-            <a:normAutofit/>
-          </a:bodyPr>
-          <a:lstStyle/>
-          <a:p>
-            <a:pPr algn="ctr">
-              <a:lnSpc>
-                <a:spcPct val="114999"/>
-              </a:lnSpc>
-              <a:buNone/>
-            </a:pPr>
-            <a:r>
-              <a:rPr lang="ko-KR" sz="1100" b="0" i="0" dirty="0">
-                <a:solidFill>
-                  <a:srgbClr val="5B6B7A"/>
-                </a:solidFill>
-                <a:latin typeface="Malgun Gothic"/>
-                <a:ea typeface="Malgun Gothic"/>
-              </a:rPr>
-              <a:t>탄 소진 누수 As-Is → To-Be
-(상층 L-SAM 24발이 먼저 빔)</a:t>
-            </a:r>
-          </a:p>
-        </p:txBody>
-      </p:sp>
-      <p:sp>
-        <p:nvSpPr>
-          <p:cNvPr id="48" name="Shape 48"/>
-          <p:cNvSpPr/>
-          <p:nvPr/>
-        </p:nvSpPr>
-        <p:spPr>
-          <a:xfrm>
-            <a:off x="6492240" y="3063240"/>
-            <a:ext cx="2468880" cy="1325880"/>
-          </a:xfrm>
-          <a:prstGeom prst="roundRect">
-            <a:avLst>
-              <a:gd name="adj" fmla="val 12000"/>
-            </a:avLst>
-          </a:prstGeom>
-          <a:solidFill>
-            <a:srgbClr val="F3F6F8"/>
-          </a:solidFill>
-          <a:ln>
-            <a:noFill/>
-          </a:ln>
-        </p:spPr>
-        <p:txBody>
-          <a:bodyPr/>
-          <a:lstStyle/>
-          <a:p>
-            <a:endParaRPr lang="ko-KR"/>
-          </a:p>
-        </p:txBody>
-      </p:sp>
-      <p:sp>
-        <p:nvSpPr>
-          <p:cNvPr id="49" name="Text 49"/>
-          <p:cNvSpPr txBox="1"/>
-          <p:nvPr/>
-        </p:nvSpPr>
-        <p:spPr>
-          <a:xfrm>
-            <a:off x="6492240" y="3136392"/>
-            <a:ext cx="2468880" cy="729234"/>
-          </a:xfrm>
-          <a:prstGeom prst="rect">
-            <a:avLst/>
-          </a:prstGeom>
-          <a:noFill/>
-          <a:ln>
-            <a:noFill/>
-          </a:ln>
-        </p:spPr>
-        <p:txBody>
-          <a:bodyPr wrap="square" lIns="0" tIns="0" rIns="0" bIns="0" anchor="ctr" rtlCol="0">
-            <a:normAutofit/>
-          </a:bodyPr>
-          <a:lstStyle/>
-          <a:p>
-            <a:pPr algn="ctr">
-              <a:buNone/>
-            </a:pPr>
-            <a:r>
-              <a:rPr lang="ko-KR" sz="3000" b="1" i="0" dirty="0">
-                <a:solidFill>
-                  <a:srgbClr val="143D5C"/>
-                </a:solidFill>
-                <a:latin typeface="Malgun Gothic"/>
-                <a:ea typeface="Malgun Gothic"/>
-              </a:rPr>
-              <a:t>41% · 45%</a:t>
-            </a:r>
-          </a:p>
-        </p:txBody>
-      </p:sp>
-      <p:sp>
-        <p:nvSpPr>
-          <p:cNvPr id="50" name="Text 50"/>
-          <p:cNvSpPr txBox="1"/>
-          <p:nvPr/>
-        </p:nvSpPr>
-        <p:spPr>
-          <a:xfrm>
-            <a:off x="6583680" y="3858768"/>
-            <a:ext cx="2286000" cy="503834"/>
-          </a:xfrm>
-          <a:prstGeom prst="rect">
-            <a:avLst/>
-          </a:prstGeom>
-          <a:noFill/>
-          <a:ln>
-            <a:noFill/>
-          </a:ln>
-        </p:spPr>
-        <p:txBody>
-          <a:bodyPr wrap="square" lIns="0" tIns="0" rIns="0" bIns="0" anchor="t" rtlCol="0">
-            <a:normAutofit/>
-          </a:bodyPr>
-          <a:lstStyle/>
-          <a:p>
-            <a:pPr algn="ctr">
-              <a:lnSpc>
-                <a:spcPct val="114999"/>
-              </a:lnSpc>
-              <a:buNone/>
-            </a:pPr>
-            <a:r>
-              <a:rPr lang="ko-KR" sz="1100" b="0" i="0" dirty="0">
-                <a:solidFill>
-                  <a:srgbClr val="5B6B7A"/>
-                </a:solidFill>
-                <a:latin typeface="Malgun Gothic"/>
-                <a:ea typeface="Malgun Gothic"/>
-              </a:rPr>
-              <a:t>상위 3개 포대 발사 비중
-(THAAD 39·38 · 수도 L-SAM 33·39 · 중북 24·35)</a:t>
-            </a:r>
-          </a:p>
-        </p:txBody>
-      </p:sp>
-      <p:sp>
-        <p:nvSpPr>
-          <p:cNvPr id="51" name="Shape 51"/>
-          <p:cNvSpPr/>
-          <p:nvPr/>
-        </p:nvSpPr>
-        <p:spPr>
-          <a:xfrm>
-            <a:off x="9098280" y="3063240"/>
-            <a:ext cx="2468880" cy="1325880"/>
-          </a:xfrm>
-          <a:prstGeom prst="roundRect">
-            <a:avLst>
-              <a:gd name="adj" fmla="val 12000"/>
-            </a:avLst>
-          </a:prstGeom>
-          <a:solidFill>
-            <a:srgbClr val="F3F6F8"/>
-          </a:solidFill>
-          <a:ln>
-            <a:noFill/>
-          </a:ln>
-        </p:spPr>
-        <p:txBody>
-          <a:bodyPr/>
-          <a:lstStyle/>
-          <a:p>
-            <a:endParaRPr lang="ko-KR"/>
-          </a:p>
-        </p:txBody>
-      </p:sp>
-      <p:sp>
-        <p:nvSpPr>
-          <p:cNvPr id="52" name="Text 52"/>
-          <p:cNvSpPr txBox="1"/>
-          <p:nvPr/>
-        </p:nvSpPr>
-        <p:spPr>
-          <a:xfrm>
-            <a:off x="9098280" y="3136392"/>
-            <a:ext cx="2468880" cy="729234"/>
-          </a:xfrm>
-          <a:prstGeom prst="rect">
-            <a:avLst/>
-          </a:prstGeom>
-          <a:noFill/>
-          <a:ln>
-            <a:noFill/>
-          </a:ln>
-        </p:spPr>
-        <p:txBody>
-          <a:bodyPr wrap="square" lIns="0" tIns="0" rIns="0" bIns="0" anchor="ctr" rtlCol="0">
-            <a:normAutofit/>
-          </a:bodyPr>
-          <a:lstStyle/>
-          <a:p>
-            <a:pPr algn="ctr">
-              <a:buNone/>
-            </a:pPr>
-            <a:r>
-              <a:rPr lang="ko-KR" sz="3000" b="1" i="0" dirty="0">
-                <a:solidFill>
-                  <a:srgbClr val="143D5C"/>
-                </a:solidFill>
-                <a:latin typeface="Malgun Gothic"/>
-                <a:ea typeface="Malgun Gothic"/>
-              </a:rPr>
-              <a:t>55 · 59</a:t>
-            </a:r>
-          </a:p>
-        </p:txBody>
-      </p:sp>
-      <p:sp>
-        <p:nvSpPr>
-          <p:cNvPr id="53" name="Text 53"/>
-          <p:cNvSpPr txBox="1"/>
-          <p:nvPr/>
-        </p:nvSpPr>
-        <p:spPr>
-          <a:xfrm>
-            <a:off x="9189720" y="3858768"/>
-            <a:ext cx="2286000" cy="503834"/>
-          </a:xfrm>
-          <a:prstGeom prst="rect">
-            <a:avLst/>
-          </a:prstGeom>
-          <a:noFill/>
-          <a:ln>
-            <a:noFill/>
-          </a:ln>
-        </p:spPr>
-        <p:txBody>
-          <a:bodyPr wrap="square" lIns="0" tIns="0" rIns="0" bIns="0" anchor="t" rtlCol="0">
-            <a:normAutofit/>
-          </a:bodyPr>
-          <a:lstStyle/>
-          <a:p>
-            <a:pPr algn="ctr">
-              <a:lnSpc>
-                <a:spcPct val="114999"/>
-              </a:lnSpc>
-              <a:buNone/>
-            </a:pPr>
-            <a:r>
-              <a:rPr lang="ko-KR" sz="1100" b="0" i="0" dirty="0">
-                <a:solidFill>
-                  <a:srgbClr val="5B6B7A"/>
-                </a:solidFill>
-                <a:latin typeface="Malgun Gothic"/>
-                <a:ea typeface="Malgun Gothic"/>
-              </a:rPr>
-              <a:t>한 발도 안 쏜 포대(84개 중)
-— 요격 창 밖의 위치</a:t>
-            </a:r>
-          </a:p>
-        </p:txBody>
-      </p:sp>
-      <p:sp>
-        <p:nvSpPr>
-          <p:cNvPr id="54" name="Shape 54"/>
-          <p:cNvSpPr/>
-          <p:nvPr/>
-        </p:nvSpPr>
-        <p:spPr>
-          <a:xfrm>
-            <a:off x="6492240" y="4572000"/>
-            <a:ext cx="5120640" cy="1737360"/>
-          </a:xfrm>
-          <a:prstGeom prst="roundRect">
-            <a:avLst>
-              <a:gd name="adj" fmla="val 12000"/>
-            </a:avLst>
-          </a:prstGeom>
-          <a:solidFill>
-            <a:srgbClr val="F3F6F8"/>
-          </a:solidFill>
-          <a:ln>
-            <a:noFill/>
-          </a:ln>
-        </p:spPr>
-        <p:txBody>
-          <a:bodyPr/>
-          <a:lstStyle/>
-          <a:p>
-            <a:endParaRPr lang="ko-KR"/>
-          </a:p>
-        </p:txBody>
-      </p:sp>
-      <p:sp>
-        <p:nvSpPr>
-          <p:cNvPr id="55" name="Text 55"/>
-          <p:cNvSpPr txBox="1"/>
-          <p:nvPr/>
-        </p:nvSpPr>
-        <p:spPr>
-          <a:xfrm>
-            <a:off x="6629400" y="4663440"/>
+            <a:off x="6629400" y="1280160"/>
             <a:ext cx="4846320" cy="320040"/>
           </a:xfrm>
           <a:prstGeom prst="rect">
@@ -18697,21 +17433,182 @@
                 <a:latin typeface="Malgun Gothic"/>
                 <a:ea typeface="Malgun Gothic"/>
               </a:rPr>
-              <a:t>분석 코멘트</a:t>
+              <a:t>핵심 세 줄</a:t>
             </a:r>
           </a:p>
         </p:txBody>
       </p:sp>
       <p:sp>
         <p:nvSpPr>
-          <p:cNvPr id="56" name="Text 56"/>
+          <p:cNvPr id="44" name="Text 44"/>
           <p:cNvSpPr txBox="1"/>
           <p:nvPr/>
         </p:nvSpPr>
         <p:spPr>
           <a:xfrm>
-            <a:off x="6629400" y="5010912"/>
-            <a:ext cx="4846320" cy="1207008"/>
+            <a:off x="6629400" y="1627632"/>
+            <a:ext cx="4846320" cy="1847088"/>
+          </a:xfrm>
+          <a:prstGeom prst="rect">
+            <a:avLst/>
+          </a:prstGeom>
+          <a:noFill/>
+          <a:ln>
+            <a:noFill/>
+          </a:ln>
+        </p:spPr>
+        <p:txBody>
+          <a:bodyPr wrap="square" lIns="0" tIns="0" rIns="0" bIns="0" anchor="t" rtlCol="0">
+            <a:normAutofit/>
+          </a:bodyPr>
+          <a:lstStyle/>
+          <a:p>
+            <a:pPr algn="l" marL="228600" indent="-228600">
+              <a:lnSpc>
+                <a:spcPct val="114999"/>
+              </a:lnSpc>
+              <a:spcAft>
+                <a:spcPts val="400"/>
+              </a:spcAft>
+              <a:buChar char="•"/>
+            </a:pPr>
+            <a:r>
+              <a:rPr lang="ko-KR" sz="1100" b="0" i="0" dirty="0">
+                <a:solidFill>
+                  <a:srgbClr val="1D2A35"/>
+                </a:solidFill>
+                <a:latin typeface="Malgun Gothic"/>
+                <a:ea typeface="Malgun Gothic"/>
+              </a:rPr>
+              <a:t>지휘소는 용량의 절반 아래 — 이 강도에서 지휘 구조가 창구 포화로 결과를 바꾸지는 않는다.</a:t>
+            </a:r>
+          </a:p>
+          <a:p>
+            <a:pPr algn="l" marL="228600" indent="-228600">
+              <a:lnSpc>
+                <a:spcPct val="114999"/>
+              </a:lnSpc>
+              <a:spcAft>
+                <a:spcPts val="400"/>
+              </a:spcAft>
+              <a:buChar char="•"/>
+            </a:pPr>
+            <a:r>
+              <a:rPr lang="ko-KR" sz="1100" b="0" i="0" dirty="0">
+                <a:solidFill>
+                  <a:srgbClr val="1D2A35"/>
+                </a:solidFill>
+                <a:latin typeface="Malgun Gothic"/>
+                <a:ea typeface="Malgun Gothic"/>
+              </a:rPr>
+              <a:t>막히는 곳은 포대: THAAD 채널 6/6 포화(차단 26·24건)와 상층 L-SAM 24발 소진(누수 19·13건). 요격 창이 겹치는 물리와 보유탄의 문제라 두 체계가 같다.</a:t>
+            </a:r>
+          </a:p>
+          <a:p>
+            <a:pPr algn="l" marL="228600" indent="-228600">
+              <a:lnSpc>
+                <a:spcPct val="114999"/>
+              </a:lnSpc>
+              <a:spcAft>
+                <a:spcPts val="400"/>
+              </a:spcAft>
+              <a:buChar char="•"/>
+            </a:pPr>
+            <a:r>
+              <a:rPr lang="ko-KR" sz="1100" b="0" i="0" dirty="0">
+                <a:solidFill>
+                  <a:srgbClr val="1D2A35"/>
+                </a:solidFill>
+                <a:latin typeface="Malgun Gothic"/>
+                <a:ea typeface="Malgun Gothic"/>
+              </a:rPr>
+              <a:t>As-Is만 잃는 것: 군단 방공의 교전 현황이 음성/VTC 한 채널에 막혀 121건 버려짐 — 상급이 군단 방공의 교전을 모른 채 결심한다.</a:t>
+            </a:r>
+          </a:p>
+        </p:txBody>
+      </p:sp>
+      <p:sp>
+        <p:nvSpPr>
+          <p:cNvPr id="45" name="Shape 45"/>
+          <p:cNvSpPr/>
+          <p:nvPr/>
+        </p:nvSpPr>
+        <p:spPr>
+          <a:xfrm>
+            <a:off x="6492240" y="3749040"/>
+            <a:ext cx="5120640" cy="2560320"/>
+          </a:xfrm>
+          <a:prstGeom prst="roundRect">
+            <a:avLst>
+              <a:gd name="adj" fmla="val 12000"/>
+            </a:avLst>
+          </a:prstGeom>
+          <a:solidFill>
+            <a:srgbClr val="F3F6F8"/>
+          </a:solidFill>
+          <a:ln>
+            <a:noFill/>
+          </a:ln>
+        </p:spPr>
+        <p:txBody>
+          <a:bodyPr/>
+          <a:lstStyle/>
+          <a:p>
+            <a:endParaRPr lang="ko-KR"/>
+          </a:p>
+        </p:txBody>
+      </p:sp>
+      <p:sp>
+        <p:nvSpPr>
+          <p:cNvPr id="46" name="Text 46"/>
+          <p:cNvSpPr txBox="1"/>
+          <p:nvPr/>
+        </p:nvSpPr>
+        <p:spPr>
+          <a:xfrm>
+            <a:off x="6629400" y="3840480"/>
+            <a:ext cx="4846320" cy="320040"/>
+          </a:xfrm>
+          <a:prstGeom prst="rect">
+            <a:avLst/>
+          </a:prstGeom>
+          <a:noFill/>
+          <a:ln>
+            <a:noFill/>
+          </a:ln>
+        </p:spPr>
+        <p:txBody>
+          <a:bodyPr wrap="square" lIns="0" tIns="0" rIns="0" bIns="0" anchor="t" rtlCol="0">
+            <a:normAutofit/>
+          </a:bodyPr>
+          <a:lstStyle/>
+          <a:p>
+            <a:pPr algn="l">
+              <a:buNone/>
+            </a:pPr>
+            <a:r>
+              <a:rPr lang="ko-KR" sz="1300" b="1" i="0" dirty="0">
+                <a:solidFill>
+                  <a:srgbClr val="143D5C"/>
+                </a:solidFill>
+                <a:latin typeface="Malgun Gothic"/>
+                <a:ea typeface="Malgun Gothic"/>
+              </a:rPr>
+              <a:t>모델이 보지 못하는 부하(한계)</a:t>
+            </a:r>
+          </a:p>
+        </p:txBody>
+      </p:sp>
+      <p:sp>
+        <p:nvSpPr>
+          <p:cNvPr id="47" name="Text 47"/>
+          <p:cNvSpPr txBox="1"/>
+          <p:nvPr/>
+        </p:nvSpPr>
+        <p:spPr>
+          <a:xfrm>
+            <a:off x="6629400" y="4187952"/>
+            <a:ext cx="4846320" cy="2029968"/>
           </a:xfrm>
           <a:prstGeom prst="rect">
             <a:avLst/>
@@ -18744,7 +17641,7 @@
                 <a:latin typeface="Malgun Gothic"/>
                 <a:ea typeface="Malgun Gothic"/>
               </a:rPr>
-              <a:t>포화된 두 자리(THAAD 채널·상층 탄)는 두 체계에 같은 물리·자원의 벽이다. 지휘 구조의 차이는 창구 포화가 아니라 거치는 창구의 수(As-Is 방공여단 +1)와 창구 사이의 매체로 나타난다.</a:t>
+              <a:t>통신 계선과 레이더에는 용량이 없다 — 지연만 있고 「바빠서 못 받는다·못 본다」가 없다. 전문 폭주·동시 추적 수 제한의 효과는 어떤 수치에도 없다.</a:t>
             </a:r>
           </a:p>
           <a:p>
@@ -18765,51 +17662,28 @@
                 <a:latin typeface="Malgun Gothic"/>
                 <a:ea typeface="Malgun Gothic"/>
               </a:rPr>
-              <a:t>지휘소 포화는 강도 3배부터(탄도탄작전통제소 1.0 · 통합공중작전통제소 0.98). 거기서 To-Be 우위는 +14 → +117(강도 5배)로 커진다.</a:t>
+              <a:t>이용률은 「항적 접수 처리」만 센 값이다. 예측 평가·협조 전문 판독·상태 보고 읽기는 창구 시간을 쓰지 않으므로 실제 운용자 부하보다 낮다.</a:t>
             </a:r>
           </a:p>
-        </p:txBody>
-      </p:sp>
-      <p:sp>
-        <p:nvSpPr>
-          <p:cNvPr id="57" name="Text 57"/>
-          <p:cNvSpPr txBox="1"/>
-          <p:nvPr/>
-        </p:nvSpPr>
-        <p:spPr>
-          <a:xfrm>
-            <a:off x="548640" y="5440680"/>
-            <a:ext cx="5760720" cy="914400"/>
-          </a:xfrm>
-          <a:prstGeom prst="rect">
-            <a:avLst/>
-          </a:prstGeom>
-          <a:noFill/>
-          <a:ln>
-            <a:noFill/>
-          </a:ln>
-        </p:spPr>
-        <p:txBody>
-          <a:bodyPr wrap="square" lIns="0" tIns="0" rIns="0" bIns="0" anchor="t" rtlCol="0">
-            <a:normAutofit/>
-          </a:bodyPr>
-          <a:lstStyle/>
-          <a:p>
-            <a:pPr algn="l">
+          <a:p>
+            <a:pPr algn="l" marL="228600" indent="-228600">
               <a:lnSpc>
-                <a:spcPct val="120000"/>
+                <a:spcPct val="114999"/>
               </a:lnSpc>
-              <a:buNone/>
+              <a:spcAft>
+                <a:spcPts val="400"/>
+              </a:spcAft>
+              <a:buChar char="•"/>
             </a:pPr>
             <a:r>
-              <a:rPr lang="ko-KR" sz="1050" b="0" i="1" dirty="0">
+              <a:rPr lang="ko-KR" sz="1050" b="0" i="0" dirty="0">
                 <a:solidFill>
-                  <a:srgbClr val="5B6B7A"/>
+                  <a:srgbClr val="1D2A35"/>
                 </a:solidFill>
                 <a:latin typeface="Malgun Gothic"/>
                 <a:ea typeface="Malgun Gothic"/>
               </a:rPr>
-              <a:t>이용률은 「항적 접수 처리」만 센 값이다 — 예측 평가·협조 전문 판독·상태 보고 읽기는 창구 시간을 쓰지 않으므로 실제 운용자 부하보다 낮게 읽어야 한다(한계 참조).</a:t>
+              <a:t>포대 채널·탄약은 물리 엔진 값이라 지휘 구조 비교의 대상이 아니다 — 배치·보유탄 가정을 바꾸면 그대로 바뀐다.</a:t>
             </a:r>
           </a:p>
         </p:txBody>

--- a/K-JAMDS_효과척도_발표정리본.pptx
+++ b/K-JAMDS_효과척도_발표정리본.pptx
@@ -15825,7 +15825,7 @@
                           <a:latin typeface="Malgun Gothic"/>
                           <a:ea typeface="Malgun Gothic"/>
                         </a:rPr>
-                        <a:t>As-Is만 손실 — 상급이 교전을 모름</a:t>
+                        <a:t>As-Is만 손실 — 중복 교전 2~4건 · 격추는 잡음 안</a:t>
                       </a:r>
                     </a:p>
                   </a:txBody>
@@ -17522,7 +17522,7 @@
                 <a:latin typeface="Malgun Gothic"/>
                 <a:ea typeface="Malgun Gothic"/>
               </a:rPr>
-              <a:t>As-Is만 잃는 것: 군단 방공의 교전 현황이 음성/VTC 한 채널에 막혀 121건 버려짐 — 상급이 군단 방공의 교전을 모른 채 결심한다.</a:t>
+              <a:t>As-Is만 잃는 것: 군단 방공의 교전 현황 전문이 음성/VTC 한 회선에 막혀 121건 버려지고 도착한 것도 낡음(34건 중 27건). 상급이 군단 방공의 교전을 모른 채 결심해 군단 방공 ↔ 중앙방공통제소 중복 교전이 실행당 2~4건 생긴다. 채널을 데이터링크로 바꾸면 0~1건이 되지만 격추 차이는 ±5로 잡음 안 — 격추 +14의 원인은 아니다.</a:t>
             </a:r>
           </a:p>
         </p:txBody>
@@ -17641,7 +17641,7 @@
                 <a:latin typeface="Malgun Gothic"/>
                 <a:ea typeface="Malgun Gothic"/>
               </a:rPr>
-              <a:t>통신 계선과 레이더에는 용량이 없다 — 지연만 있고 「바빠서 못 받는다·못 본다」가 없다. 전문 폭주·동시 추적 수 제한의 효과는 어떤 수치에도 없다.</a:t>
+              <a:t>통신 계선과 레이더에는 용량이 없다 — 전문이 몰려도 서로 기다리지 않고 각자 지연만큼 뒤에 닿는다. 지휘소의 「바빠서 못 본다」(창구·대기실 포화 → 항적 버림)는 구현돼 있지만, 창구를 쓰는 일이 항적 접수·명령 인가뿐이라 협조 전문·상태 보고로 바쁜 효과는 없다.</a:t>
             </a:r>
           </a:p>
           <a:p>

--- a/K-JAMDS_효과척도_발표정리본.pptx
+++ b/K-JAMDS_효과척도_발표정리본.pptx
@@ -17375,7 +17375,7 @@
         <p:spPr>
           <a:xfrm>
             <a:off x="6492240" y="1188720"/>
-            <a:ext cx="5120640" cy="2377440"/>
+            <a:ext cx="5120640" cy="2697480"/>
           </a:xfrm>
           <a:prstGeom prst="roundRect">
             <a:avLst>
@@ -17447,7 +17447,7 @@
         <p:spPr>
           <a:xfrm>
             <a:off x="6629400" y="1627632"/>
-            <a:ext cx="4846320" cy="1847088"/>
+            <a:ext cx="4846320" cy="2167128"/>
           </a:xfrm>
           <a:prstGeom prst="rect">
             <a:avLst/>
@@ -17522,7 +17522,7 @@
                 <a:latin typeface="Malgun Gothic"/>
                 <a:ea typeface="Malgun Gothic"/>
               </a:rPr>
-              <a:t>As-Is만 잃는 것: 군단 방공의 교전 현황 전문이 음성/VTC 한 회선에 막혀 121건 버려지고 도착한 것도 낡음(34건 중 27건). 상급이 군단 방공의 교전을 모른 채 결심해 군단 방공 ↔ 중앙방공통제소 중복 교전이 실행당 2~4건 생긴다. 채널을 데이터링크로 바꾸면 0~1건이 되지만 격추 차이는 ±5로 잡음 안 — 격추 +14의 원인은 아니다.</a:t>
+              <a:t>As-Is만 잃는 것: 군단 방공의 교전 현황 전문(전부 소형 무인기) 121건이 음성/VTC 한 회선에 막혀 버려짐. 결과로 남는 중복 교전은 실행당 2~4건 — 중앙방공통제소의 무인기 사수가 L-SAM뿐이라(114회 지정 중 12발 발사·69회 사수 불가) 천마와 발사가 겹치기 어렵기 때문. 대신 L-SAM 재지정·인가 왕복 69건이 헛돈다. 격추 차이는 ±5(잡음 안).</a:t>
             </a:r>
           </a:p>
         </p:txBody>
@@ -17535,8 +17535,8 @@
         </p:nvSpPr>
         <p:spPr>
           <a:xfrm>
-            <a:off x="6492240" y="3749040"/>
-            <a:ext cx="5120640" cy="2560320"/>
+            <a:off x="6492240" y="4023360"/>
+            <a:ext cx="5120640" cy="2286000"/>
           </a:xfrm>
           <a:prstGeom prst="roundRect">
             <a:avLst>
@@ -17566,7 +17566,7 @@
         </p:nvSpPr>
         <p:spPr>
           <a:xfrm>
-            <a:off x="6629400" y="3840480"/>
+            <a:off x="6629400" y="4114800"/>
             <a:ext cx="4846320" cy="320040"/>
           </a:xfrm>
           <a:prstGeom prst="rect">
@@ -17607,8 +17607,8 @@
         </p:nvSpPr>
         <p:spPr>
           <a:xfrm>
-            <a:off x="6629400" y="4187952"/>
-            <a:ext cx="4846320" cy="2029968"/>
+            <a:off x="6629400" y="4462272"/>
+            <a:ext cx="4846320" cy="1755648"/>
           </a:xfrm>
           <a:prstGeom prst="rect">
             <a:avLst/>
@@ -17634,7 +17634,7 @@
               <a:buChar char="•"/>
             </a:pPr>
             <a:r>
-              <a:rPr lang="ko-KR" sz="1050" b="0" i="0" dirty="0">
+              <a:rPr lang="ko-KR" sz="1000" b="0" i="0" dirty="0">
                 <a:solidFill>
                   <a:srgbClr val="1D2A35"/>
                 </a:solidFill>
@@ -17655,7 +17655,7 @@
               <a:buChar char="•"/>
             </a:pPr>
             <a:r>
-              <a:rPr lang="ko-KR" sz="1050" b="0" i="0" dirty="0">
+              <a:rPr lang="ko-KR" sz="1000" b="0" i="0" dirty="0">
                 <a:solidFill>
                   <a:srgbClr val="1D2A35"/>
                 </a:solidFill>
@@ -17676,7 +17676,7 @@
               <a:buChar char="•"/>
             </a:pPr>
             <a:r>
-              <a:rPr lang="ko-KR" sz="1050" b="0" i="0" dirty="0">
+              <a:rPr lang="ko-KR" sz="1000" b="0" i="0" dirty="0">
                 <a:solidFill>
                   <a:srgbClr val="1D2A35"/>
                 </a:solidFill>

--- a/K-JAMDS_효과척도_발표정리본.pptx
+++ b/K-JAMDS_효과척도_발표정리본.pptx
@@ -17522,7 +17522,7 @@
                 <a:latin typeface="Malgun Gothic"/>
                 <a:ea typeface="Malgun Gothic"/>
               </a:rPr>
-              <a:t>As-Is만 잃는 것: 군단 방공의 교전 현황 전문(전부 소형 무인기) 121건이 음성/VTC 한 회선에 막혀 버려짐. 결과로 남는 중복 교전은 실행당 2~4건 — 중앙방공통제소의 무인기 사수가 L-SAM뿐이라(114회 지정 중 12발 발사·69회 사수 불가) 천마와 발사가 겹치기 어렵기 때문. 대신 L-SAM 재지정·인가 왕복 69건이 헛돈다. 격추 차이는 ±5(잡음 안).</a:t>
+              <a:t>As-Is만 잃는 것: 군단 방공의 교전 현황 전문(전부 소형 무인기) 121건이 음성/VTC 한 회선에 막혀 버려짐. 결과로 남는 중복 교전은 실행당 2~4건 — 중앙방공통제소의 무인기 사수가 L-SAM뿐이고 L-SAM 레이더는 저고도 무인기를 수평선 약 80 km 안에서만 봐서(114회 지정 중 12발 발사·69회 사수 불가) 천마와 발사가 겹치기 어렵기 때문. 대신 L-SAM 재지정·인가 왕복 69건이 헛돈다. 격추 차이는 ±5(잡음 안).</a:t>
             </a:r>
           </a:p>
         </p:txBody>

--- a/K-JAMDS_효과척도_발표정리본.pptx
+++ b/K-JAMDS_효과척도_발표정리본.pptx
@@ -8363,7 +8363,7 @@
                 <a:latin typeface="Malgun Gothic"/>
                 <a:ea typeface="Malgun Gothic"/>
               </a:rPr>
-              <a:t>어느 레이더가 먼저 보았는가(±1~2): 그린파인이면 「레이더 → 결심 지휘소」 2칸, AN/TPY-2이면 「AN/TPY-2 → THAAD 사격통제소 → THAAD 지휘소」 3칸 뒤에 협조 시작. 소형 무인기도 TPS-880K(4·6) 대 천궁-II 레이더(5·9), 순항도 FPS-117(5) 대 Patriot 레이더(7).</a:t>
+              <a:t>어느 레이더가 먼저 보았는가(±1~2): 그린파인이면 「레이더 → 결심 지휘소」 2칸, AN/TPY-2이면 「AN/TPY-2 → THAAD 사격통제소 → THAAD 지휘소」 3칸 뒤에 협조 시작. 소형 무인기도 TPS-880K가 먼저 보면 As-Is 6 · To-Be 4칸, 천궁-II 레이더가 먼저 보면 9 · 5칸. 순항도 FPS-117이 먼저 보면 5칸, Patriot 레이더가 먼저 보면 7칸(두 체계 같음).</a:t>
             </a:r>
           </a:p>
           <a:p>

--- a/K-JAMDS_효과척도_발표정리본.pptx
+++ b/K-JAMDS_효과척도_발표정리본.pptx
@@ -1290,7 +1290,7 @@
         </p:nvSpPr>
         <p:spPr>
           <a:xfrm>
-            <a:off x="731520" y="2880360"/>
+            <a:off x="731520" y="2834640"/>
             <a:ext cx="10698480" cy="320040"/>
           </a:xfrm>
           <a:prstGeom prst="rect">
@@ -1311,14 +1311,14 @@
               <a:buNone/>
             </a:pPr>
             <a:r>
-              <a:rPr lang="ko-KR" sz="1400" b="1" i="0" dirty="0">
+              <a:rPr lang="ko-KR" sz="1300" b="1" i="0" dirty="0">
                 <a:solidFill>
                   <a:srgbClr val="FFFFFF"/>
                 </a:solidFill>
                 <a:latin typeface="Malgun Gothic"/>
                 <a:ea typeface="Malgun Gothic"/>
               </a:rPr>
-              <a:t>① 차이가 격추 수로 드러나는 자리는 「명령이 요격 창 안에 닿아야 하는 위협」</a:t>
+              <a:t>① 이 모델에서 체계 비교에 쓸 수 있는 효과척도는 「시간」과 「노드 수」 — 격추 수는 방사포에서만</a:t>
             </a:r>
           </a:p>
         </p:txBody>
@@ -1331,8 +1331,8 @@
         </p:nvSpPr>
         <p:spPr>
           <a:xfrm>
-            <a:off x="731520" y="3209544"/>
-            <a:ext cx="10698480" cy="502920"/>
+            <a:off x="731520" y="3163824"/>
+            <a:ext cx="10698480" cy="566928"/>
           </a:xfrm>
           <a:prstGeom prst="rect">
             <a:avLst/>
@@ -1355,14 +1355,14 @@
               <a:buNone/>
             </a:pPr>
             <a:r>
-              <a:rPr lang="ko-KR" sz="1150" b="0" i="0" dirty="0">
+              <a:rPr lang="ko-KR" sz="1100" b="0" i="0" dirty="0">
                 <a:solidFill>
                   <a:srgbClr val="CADCFC"/>
                 </a:solidFill>
                 <a:latin typeface="Malgun Gothic"/>
                 <a:ea typeface="Malgun Gothic"/>
               </a:rPr>
-              <a:t>방사포 51 → 64 — 두 체계 격추 차이의 거의 전부. 요격 창이 넓은 위협(순항·전투기·소형 무인기)과 THAAD가 맡는 탄도탄에서는 시간·노드 수로만 나타난다.</a:t>
+              <a:t>결심까지 시간(58→20 · 84→16 · 53→15초)과 노드 수(6~9 → 4~6)는 모든 위협에서 차이가 나지만, 격추 수는 명령이 좁은 요격 창 안에 닿아야 하는 방사포(51 → 64)에서만 갈린다. 탄도탄·순항·전투기의 격추는 요격 창·포대 물리·명중 확률이 정해 두 체계가 같다.</a:t>
             </a:r>
           </a:p>
         </p:txBody>
@@ -1396,14 +1396,14 @@
               <a:buNone/>
             </a:pPr>
             <a:r>
-              <a:rPr lang="ko-KR" sz="1400" b="1" i="0" dirty="0">
+              <a:rPr lang="ko-KR" sz="1300" b="1" i="0" dirty="0">
                 <a:solidFill>
                   <a:srgbClr val="FFFFFF"/>
                 </a:solidFill>
                 <a:latin typeface="Malgun Gothic"/>
                 <a:ea typeface="Malgun Gothic"/>
               </a:rPr>
-              <a:t>② 4판(긴급발사 허용)에서 두 체계가 비슷했던 이유</a:t>
+              <a:t>② 4판(긴급발사 허용)에서 두 체계가 비슷했던 이유 — 교전 규칙 가정이 격추 수를 가장 크게 움직인다</a:t>
             </a:r>
           </a:p>
         </p:txBody>
@@ -1417,7 +1417,7 @@
         <p:spPr>
           <a:xfrm>
             <a:off x="731520" y="4078224"/>
-            <a:ext cx="10698480" cy="502920"/>
+            <a:ext cx="10698480" cy="566928"/>
           </a:xfrm>
           <a:prstGeom prst="rect">
             <a:avLst/>
@@ -1440,14 +1440,14 @@
               <a:buNone/>
             </a:pPr>
             <a:r>
-              <a:rPr lang="ko-KR" sz="1150" b="0" i="0" dirty="0">
+              <a:rPr lang="ko-KR" sz="1100" b="0" i="0" dirty="0">
                 <a:solidFill>
                   <a:srgbClr val="CADCFC"/>
                 </a:solidFill>
                 <a:latin typeface="Malgun Gothic"/>
                 <a:ea typeface="Malgun Gothic"/>
               </a:rPr>
-              <a:t>포대의 자체 발사가 As-Is의 음성 협조·방공여단 중계 지연을 덮고 있었다. 표준 절차(명령 없이는 발사 없음)로 고치자 명령 경로의 차이가 그대로 드러났다 — 대기 지시의 발사 권한(교전 규칙)이 격추 수를 가장 크게 움직이는 가정.</a:t>
+              <a:t>포대의 자체 발사가 As-Is의 음성 협조·방공여단 중계 지연을 덮고 있었다. 표준 절차(명령 없이는 발사 없음)로 고치자 명령 경로의 차이가 그대로 드러났다.</a:t>
             </a:r>
           </a:p>
         </p:txBody>
@@ -1460,7 +1460,7 @@
         </p:nvSpPr>
         <p:spPr>
           <a:xfrm>
-            <a:off x="731520" y="4617720"/>
+            <a:off x="731520" y="4663440"/>
             <a:ext cx="10698480" cy="320040"/>
           </a:xfrm>
           <a:prstGeom prst="rect">
@@ -1481,14 +1481,14 @@
               <a:buNone/>
             </a:pPr>
             <a:r>
-              <a:rPr lang="ko-KR" sz="1400" b="1" i="0" dirty="0">
+              <a:rPr lang="ko-KR" sz="1300" b="1" i="0" dirty="0">
                 <a:solidFill>
                   <a:srgbClr val="FFFFFF"/>
                 </a:solidFill>
                 <a:latin typeface="Malgun Gothic"/>
                 <a:ea typeface="Malgun Gothic"/>
               </a:rPr>
-              <a:t>③ 병목은 지휘소가 아니라 포대</a:t>
+              <a:t>③ 부하도 비교 대상이지만, 이 강도에서 병목은 지휘소가 아니라 포대</a:t>
             </a:r>
           </a:p>
         </p:txBody>
@@ -1501,8 +1501,8 @@
         </p:nvSpPr>
         <p:spPr>
           <a:xfrm>
-            <a:off x="731520" y="4946904"/>
-            <a:ext cx="10698480" cy="502920"/>
+            <a:off x="731520" y="4992624"/>
+            <a:ext cx="10698480" cy="566928"/>
           </a:xfrm>
           <a:prstGeom prst="rect">
             <a:avLst/>
@@ -1525,14 +1525,14 @@
               <a:buNone/>
             </a:pPr>
             <a:r>
-              <a:rPr lang="ko-KR" sz="1150" b="0" i="0" dirty="0">
+              <a:rPr lang="ko-KR" sz="1100" b="0" i="0" dirty="0">
                 <a:solidFill>
                   <a:srgbClr val="CADCFC"/>
                 </a:solidFill>
                 <a:latin typeface="Malgun Gothic"/>
                 <a:ea typeface="Malgun Gothic"/>
               </a:rPr>
-              <a:t>지휘소는 모두 용량의 절반 아래(통합공중작전통제소 0.20). 포화는 THAAD 채널(6/6)과 상층 L-SAM 탄(24발)뿐이며 두 체계에 같은 벽. 지휘소 포화와 To-Be 우위 확대는 강도 3배 이상에서.</a:t>
+              <a:t>지휘소는 용량의 절반 아래. 포화는 THAAD 채널(6/6)과 상층 L-SAM 탄(24발)뿐이며 두 체계에 같은 벽. 교전 현황 공유 누락(As-Is 121건)의 파생 결과는 중복 2~4건으로 작게 나오는데, 요격기가 모사되지 않아 천마·비호가 먼저 잡고 L-SAM 사거리에 들면 이미 끝나 있기 때문 — 과소 추정.</a:t>
             </a:r>
           </a:p>
         </p:txBody>
@@ -1545,7 +1545,7 @@
         </p:nvSpPr>
         <p:spPr>
           <a:xfrm>
-            <a:off x="731520" y="5486400"/>
+            <a:off x="731520" y="5577840"/>
             <a:ext cx="10698480" cy="320040"/>
           </a:xfrm>
           <a:prstGeom prst="rect">
@@ -1566,14 +1566,14 @@
               <a:buNone/>
             </a:pPr>
             <a:r>
-              <a:rPr lang="ko-KR" sz="1400" b="1" i="0" dirty="0">
+              <a:rPr lang="ko-KR" sz="1300" b="1" i="0" dirty="0">
                 <a:solidFill>
                   <a:srgbClr val="FFFFFF"/>
                 </a:solidFill>
                 <a:latin typeface="Malgun Gothic"/>
                 <a:ea typeface="Malgun Gothic"/>
               </a:rPr>
-              <a:t>④ To-Be의 남은 빈틈</a:t>
+              <a:t>④ 미군 자산의 연동은 To-Be(킬웹)에서도 풀리지 않은 문제</a:t>
             </a:r>
           </a:p>
         </p:txBody>
@@ -1586,8 +1586,8 @@
         </p:nvSpPr>
         <p:spPr>
           <a:xfrm>
-            <a:off x="731520" y="5815584"/>
-            <a:ext cx="10698480" cy="502920"/>
+            <a:off x="731520" y="5907024"/>
+            <a:ext cx="10698480" cy="566928"/>
           </a:xfrm>
           <a:prstGeom prst="rect">
             <a:avLst/>
@@ -1610,14 +1610,14 @@
               <a:buNone/>
             </a:pPr>
             <a:r>
-              <a:rPr lang="ko-KR" sz="1150" b="0" i="0" dirty="0">
+              <a:rPr lang="ko-KR" sz="1100" b="0" i="0" dirty="0">
                 <a:solidFill>
                   <a:srgbClr val="CADCFC"/>
                 </a:solidFill>
                 <a:latin typeface="Malgun Gothic"/>
                 <a:ea typeface="Malgun Gothic"/>
               </a:rPr>
-              <a:t>군단 방공이 한미 협조 고리 밖에 있어 생기는 중복 발사 12건과, 공중 위협이 발사 원점에서 즉시 보이는 센서 모델(지형 차폐 없음) — 순항미사일의 사수(Patriot 대 천마)가 이 가정에 달려 있다.</a:t>
+              <a:t>두 체계 모두 미군 축은 독립이고 협조 매체만 다르다. 미군을 빼면 To-Be 우위는 유지(154 대 165)되지만 탄도탄 격추가 46 → 27로 준다. 한미 교전 현황 공유·군단 방공 포함 협조 고리가 없어 To-Be에도 중복 12건이 남는다 — 「미군 자산을 킬웹 안에 어떻게 넣는가」가 정의돼야 한다.</a:t>
             </a:r>
           </a:p>
         </p:txBody>
@@ -1786,8 +1786,8 @@
         </p:nvSpPr>
         <p:spPr>
           <a:xfrm>
-            <a:off x="548640" y="1417320"/>
-            <a:ext cx="3566160" cy="2240280"/>
+            <a:off x="548640" y="1371600"/>
+            <a:ext cx="2670048" cy="2331720"/>
           </a:xfrm>
           <a:prstGeom prst="roundRect">
             <a:avLst>
@@ -1817,8 +1817,8 @@
         </p:nvSpPr>
         <p:spPr>
           <a:xfrm>
-            <a:off x="731520" y="1554480"/>
-            <a:ext cx="457200" cy="457200"/>
+            <a:off x="685800" y="1481328"/>
+            <a:ext cx="384048" cy="384048"/>
           </a:xfrm>
           <a:prstGeom prst="ellipse">
             <a:avLst/>
@@ -1840,7 +1840,7 @@
               <a:buNone/>
             </a:pPr>
             <a:r>
-              <a:rPr lang="ko-KR" sz="1600" b="1" i="0" dirty="0">
+              <a:rPr lang="ko-KR" sz="1300" b="1" i="0" dirty="0">
                 <a:solidFill>
                   <a:srgbClr val="FFFFFF"/>
                 </a:solidFill>
@@ -1860,8 +1860,8 @@
         </p:nvSpPr>
         <p:spPr>
           <a:xfrm>
-            <a:off x="1280160" y="1572768"/>
-            <a:ext cx="2697480" cy="457200"/>
+            <a:off x="1143000" y="1463040"/>
+            <a:ext cx="2011680" cy="457200"/>
           </a:xfrm>
           <a:prstGeom prst="rect">
             <a:avLst/>
@@ -1878,10 +1878,13 @@
           <a:lstStyle/>
           <a:p>
             <a:pPr algn="l">
+              <a:lnSpc>
+                <a:spcPct val="110000"/>
+              </a:lnSpc>
               <a:buNone/>
             </a:pPr>
             <a:r>
-              <a:rPr lang="ko-KR" sz="1350" b="1" i="0" dirty="0">
+              <a:rPr lang="ko-KR" sz="1150" b="1" i="0" dirty="0">
                 <a:solidFill>
                   <a:srgbClr val="143D5C"/>
                 </a:solidFill>
@@ -1901,8 +1904,8 @@
         </p:nvSpPr>
         <p:spPr>
           <a:xfrm>
-            <a:off x="731520" y="2130552"/>
-            <a:ext cx="3200400" cy="1463040"/>
+            <a:off x="685800" y="1993392"/>
+            <a:ext cx="2395728" cy="1645920"/>
           </a:xfrm>
           <a:prstGeom prst="rect">
             <a:avLst/>
@@ -1925,14 +1928,14 @@
               <a:buNone/>
             </a:pPr>
             <a:r>
-              <a:rPr lang="ko-KR" sz="1100" b="0" i="0" dirty="0">
+              <a:rPr lang="ko-KR" sz="950" b="0" i="0" dirty="0">
                 <a:solidFill>
                   <a:srgbClr val="1D2A35"/>
                 </a:solidFill>
                 <a:latin typeface="Malgun Gothic"/>
                 <a:ea typeface="Malgun Gothic"/>
               </a:rPr>
-              <a:t>seed 3개 · 강도 1배. 격추 차이는 세 seed에서 방향이 같지만(+18·+19·+6) 크기는 seed 하나의 난수 잡음(±10 안팎)을 포함. 20개 비교와 강도 1·2·3·5배 스윕이 필요.</a:t>
+              <a:t>seed 3개 · 강도 1배. 격추 차이는 세 seed에서 방향이 같지만 크기는 난수 잡음(±10)을 포함. 20개 비교와 강도 1·2·3·5배 스윕이 필요.</a:t>
             </a:r>
           </a:p>
         </p:txBody>
@@ -1945,8 +1948,8 @@
         </p:nvSpPr>
         <p:spPr>
           <a:xfrm>
-            <a:off x="4297680" y="1417320"/>
-            <a:ext cx="3566160" cy="2240280"/>
+            <a:off x="3355848" y="1371600"/>
+            <a:ext cx="2670048" cy="2331720"/>
           </a:xfrm>
           <a:prstGeom prst="roundRect">
             <a:avLst>
@@ -1976,8 +1979,8 @@
         </p:nvSpPr>
         <p:spPr>
           <a:xfrm>
-            <a:off x="4480560" y="1554480"/>
-            <a:ext cx="457200" cy="457200"/>
+            <a:off x="3493008" y="1481328"/>
+            <a:ext cx="384048" cy="384048"/>
           </a:xfrm>
           <a:prstGeom prst="ellipse">
             <a:avLst/>
@@ -1999,7 +2002,7 @@
               <a:buNone/>
             </a:pPr>
             <a:r>
-              <a:rPr lang="ko-KR" sz="1600" b="1" i="0" dirty="0">
+              <a:rPr lang="ko-KR" sz="1300" b="1" i="0" dirty="0">
                 <a:solidFill>
                   <a:srgbClr val="FFFFFF"/>
                 </a:solidFill>
@@ -2019,8 +2022,8 @@
         </p:nvSpPr>
         <p:spPr>
           <a:xfrm>
-            <a:off x="5029200" y="1572768"/>
-            <a:ext cx="2697480" cy="457200"/>
+            <a:off x="3950208" y="1463040"/>
+            <a:ext cx="2011680" cy="457200"/>
           </a:xfrm>
           <a:prstGeom prst="rect">
             <a:avLst/>
@@ -2037,17 +2040,20 @@
           <a:lstStyle/>
           <a:p>
             <a:pPr algn="l">
+              <a:lnSpc>
+                <a:spcPct val="110000"/>
+              </a:lnSpc>
               <a:buNone/>
             </a:pPr>
             <a:r>
-              <a:rPr lang="ko-KR" sz="1350" b="1" i="0" dirty="0">
+              <a:rPr lang="ko-KR" sz="1150" b="1" i="0" dirty="0">
                 <a:solidFill>
                   <a:srgbClr val="143D5C"/>
                 </a:solidFill>
                 <a:latin typeface="Malgun Gothic"/>
                 <a:ea typeface="Malgun Gothic"/>
               </a:rPr>
-              <a:t>지휘소 부하는 「항적 접수」만</a:t>
+              <a:t>지휘소 처리는 「항적 접수」만</a:t>
             </a:r>
           </a:p>
         </p:txBody>
@@ -2060,8 +2066,8 @@
         </p:nvSpPr>
         <p:spPr>
           <a:xfrm>
-            <a:off x="4480560" y="2130552"/>
-            <a:ext cx="3200400" cy="1463040"/>
+            <a:off x="3493008" y="1993392"/>
+            <a:ext cx="2395728" cy="1645920"/>
           </a:xfrm>
           <a:prstGeom prst="rect">
             <a:avLst/>
@@ -2084,14 +2090,14 @@
               <a:buNone/>
             </a:pPr>
             <a:r>
-              <a:rPr lang="ko-KR" sz="1100" b="0" i="0" dirty="0">
+              <a:rPr lang="ko-KR" sz="950" b="0" i="0" dirty="0">
                 <a:solidFill>
                   <a:srgbClr val="1D2A35"/>
                 </a:solidFill>
                 <a:latin typeface="Malgun Gothic"/>
                 <a:ea typeface="Malgun Gothic"/>
               </a:rPr>
-              <a:t>예측 평가·협조 전문 판독·포대 상태 보고 읽기·결과 판독은 창구 시간을 쓰지 않는다. 이용률 0.2~0.5는 실제보다 낮게 읽어야 하고, 통합 지휘소에 모이는 판독 부하는 재지 않았다.</a:t>
+              <a:t>창구를 쓰는 일은 항적 접수·명령 인가·명령 접수뿐. 결심 과정·협조 전문 작성과 판독·포대 상태 확인·결과 판독은 시간 0 — 이 단계들의 처리 시간 구체화가 필요하고, 이용률 0.2~0.5는 실제보다 낮게 읽어야 한다.</a:t>
             </a:r>
           </a:p>
         </p:txBody>
@@ -2104,8 +2110,8 @@
         </p:nvSpPr>
         <p:spPr>
           <a:xfrm>
-            <a:off x="8046720" y="1417320"/>
-            <a:ext cx="3566160" cy="2240280"/>
+            <a:off x="6163056" y="1371600"/>
+            <a:ext cx="2670048" cy="2331720"/>
           </a:xfrm>
           <a:prstGeom prst="roundRect">
             <a:avLst>
@@ -2135,8 +2141,8 @@
         </p:nvSpPr>
         <p:spPr>
           <a:xfrm>
-            <a:off x="8229600" y="1554480"/>
-            <a:ext cx="457200" cy="457200"/>
+            <a:off x="6300216" y="1481328"/>
+            <a:ext cx="384048" cy="384048"/>
           </a:xfrm>
           <a:prstGeom prst="ellipse">
             <a:avLst/>
@@ -2158,7 +2164,7 @@
               <a:buNone/>
             </a:pPr>
             <a:r>
-              <a:rPr lang="ko-KR" sz="1600" b="1" i="0" dirty="0">
+              <a:rPr lang="ko-KR" sz="1300" b="1" i="0" dirty="0">
                 <a:solidFill>
                   <a:srgbClr val="FFFFFF"/>
                 </a:solidFill>
@@ -2178,8 +2184,8 @@
         </p:nvSpPr>
         <p:spPr>
           <a:xfrm>
-            <a:off x="8778240" y="1572768"/>
-            <a:ext cx="2697480" cy="457200"/>
+            <a:off x="6757416" y="1463040"/>
+            <a:ext cx="2011680" cy="457200"/>
           </a:xfrm>
           <a:prstGeom prst="rect">
             <a:avLst/>
@@ -2196,10 +2202,13 @@
           <a:lstStyle/>
           <a:p>
             <a:pPr algn="l">
+              <a:lnSpc>
+                <a:spcPct val="110000"/>
+              </a:lnSpc>
               <a:buNone/>
             </a:pPr>
             <a:r>
-              <a:rPr lang="ko-KR" sz="1350" b="1" i="0" dirty="0">
+              <a:rPr lang="ko-KR" sz="1150" b="1" i="0" dirty="0">
                 <a:solidFill>
                   <a:srgbClr val="143D5C"/>
                 </a:solidFill>
@@ -2219,8 +2228,8 @@
         </p:nvSpPr>
         <p:spPr>
           <a:xfrm>
-            <a:off x="8229600" y="2130552"/>
-            <a:ext cx="3200400" cy="1463040"/>
+            <a:off x="6300216" y="1993392"/>
+            <a:ext cx="2395728" cy="1645920"/>
           </a:xfrm>
           <a:prstGeom prst="rect">
             <a:avLst/>
@@ -2243,14 +2252,14 @@
               <a:buNone/>
             </a:pPr>
             <a:r>
-              <a:rPr lang="ko-KR" sz="1100" b="0" i="0" dirty="0">
+              <a:rPr lang="ko-KR" sz="950" b="0" i="0" dirty="0">
                 <a:solidFill>
                   <a:srgbClr val="1D2A35"/>
                 </a:solidFill>
                 <a:latin typeface="Malgun Gothic"/>
                 <a:ea typeface="Malgun Gothic"/>
               </a:rPr>
-              <a:t>동시 추적 수·빔 자원 제한과 지형 차폐가 없어 「레이더가 바빠서·가려서 늦게 본다」는 효과가 어떤 수치에도 없다. 공중 위협을 발사 원점에서 생성해도 생성→탐지가 0~2초인 이유이며, 순항미사일의 사수(Patriot 대 천마)가 여기에 달려 있다.</a:t>
+              <a:t>동시 추적 수·빔 자원 제한과 지형 차폐가 없어 「바빠서·가려서 늦게 본다」가 없다. 공중 위협의 생성→탐지 0~2초와 순항 사수(Patriot 대 천마)가 여기에 달려 있다.</a:t>
             </a:r>
           </a:p>
         </p:txBody>
@@ -2263,8 +2272,8 @@
         </p:nvSpPr>
         <p:spPr>
           <a:xfrm>
-            <a:off x="548640" y="3840480"/>
-            <a:ext cx="3566160" cy="2240280"/>
+            <a:off x="8970264" y="1371600"/>
+            <a:ext cx="2670048" cy="2331720"/>
           </a:xfrm>
           <a:prstGeom prst="roundRect">
             <a:avLst>
@@ -2294,8 +2303,8 @@
         </p:nvSpPr>
         <p:spPr>
           <a:xfrm>
-            <a:off x="731520" y="3977640"/>
-            <a:ext cx="457200" cy="457200"/>
+            <a:off x="9107424" y="1481328"/>
+            <a:ext cx="384048" cy="384048"/>
           </a:xfrm>
           <a:prstGeom prst="ellipse">
             <a:avLst/>
@@ -2317,7 +2326,7 @@
               <a:buNone/>
             </a:pPr>
             <a:r>
-              <a:rPr lang="ko-KR" sz="1600" b="1" i="0" dirty="0">
+              <a:rPr lang="ko-KR" sz="1300" b="1" i="0" dirty="0">
                 <a:solidFill>
                   <a:srgbClr val="FFFFFF"/>
                 </a:solidFill>
@@ -2337,8 +2346,8 @@
         </p:nvSpPr>
         <p:spPr>
           <a:xfrm>
-            <a:off x="1280160" y="3995928"/>
-            <a:ext cx="2697480" cy="457200"/>
+            <a:off x="9564624" y="1463040"/>
+            <a:ext cx="2011680" cy="457200"/>
           </a:xfrm>
           <a:prstGeom prst="rect">
             <a:avLst/>
@@ -2355,17 +2364,20 @@
           <a:lstStyle/>
           <a:p>
             <a:pPr algn="l">
+              <a:lnSpc>
+                <a:spcPct val="110000"/>
+              </a:lnSpc>
               <a:buNone/>
             </a:pPr>
             <a:r>
-              <a:rPr lang="ko-KR" sz="1350" b="1" i="0" dirty="0">
+              <a:rPr lang="ko-KR" sz="1150" b="1" i="0" dirty="0">
                 <a:solidFill>
                   <a:srgbClr val="143D5C"/>
                 </a:solidFill>
                 <a:latin typeface="Malgun Gothic"/>
                 <a:ea typeface="Malgun Gothic"/>
               </a:rPr>
-              <a:t>통신 계선에 용량이 없다</a:t>
+              <a:t>음성·VTC 회선에 용량이 없다</a:t>
             </a:r>
           </a:p>
         </p:txBody>
@@ -2378,8 +2390,8 @@
         </p:nvSpPr>
         <p:spPr>
           <a:xfrm>
-            <a:off x="731520" y="4553712"/>
-            <a:ext cx="3200400" cy="1463040"/>
+            <a:off x="9107424" y="1993392"/>
+            <a:ext cx="2395728" cy="1645920"/>
           </a:xfrm>
           <a:prstGeom prst="rect">
             <a:avLst/>
@@ -2402,14 +2414,14 @@
               <a:buNone/>
             </a:pPr>
             <a:r>
-              <a:rPr lang="ko-KR" sz="1100" b="0" i="0" dirty="0">
+              <a:rPr lang="ko-KR" sz="950" b="0" i="0" dirty="0">
                 <a:solidFill>
                   <a:srgbClr val="1D2A35"/>
                 </a:solidFill>
                 <a:latin typeface="Malgun Gothic"/>
                 <a:ea typeface="Malgun Gothic"/>
               </a:rPr>
-              <a:t>음성 회선에 전문이 몰려도 각각 20초 뒤 따로 닿는다 — 실제 음성 회선은 한 번에 한 통화이므로 As-Is에 유리한 가정. 교전 현황 공유 채널만 용량이 있다(As-Is 121건 손실).</a:t>
+              <a:t>전화기와 VTC는 무한하지 않은데, 모델은 전문이 몰려도 각각 20초 뒤 따로 닿게 둔다 — As-Is에 유리한 가정. 교전 현황 공유 채널만 회선 수(1)를 가진다.</a:t>
             </a:r>
           </a:p>
         </p:txBody>
@@ -2422,8 +2434,8 @@
         </p:nvSpPr>
         <p:spPr>
           <a:xfrm>
-            <a:off x="4297680" y="3840480"/>
-            <a:ext cx="3566160" cy="2240280"/>
+            <a:off x="548640" y="3840480"/>
+            <a:ext cx="2670048" cy="2331720"/>
           </a:xfrm>
           <a:prstGeom prst="roundRect">
             <a:avLst>
@@ -2453,8 +2465,8 @@
         </p:nvSpPr>
         <p:spPr>
           <a:xfrm>
-            <a:off x="4480560" y="3977640"/>
-            <a:ext cx="457200" cy="457200"/>
+            <a:off x="685800" y="3950208"/>
+            <a:ext cx="384048" cy="384048"/>
           </a:xfrm>
           <a:prstGeom prst="ellipse">
             <a:avLst/>
@@ -2476,7 +2488,7 @@
               <a:buNone/>
             </a:pPr>
             <a:r>
-              <a:rPr lang="ko-KR" sz="1600" b="1" i="0" dirty="0">
+              <a:rPr lang="ko-KR" sz="1300" b="1" i="0" dirty="0">
                 <a:solidFill>
                   <a:srgbClr val="FFFFFF"/>
                 </a:solidFill>
@@ -2496,8 +2508,8 @@
         </p:nvSpPr>
         <p:spPr>
           <a:xfrm>
-            <a:off x="5029200" y="3995928"/>
-            <a:ext cx="2697480" cy="457200"/>
+            <a:off x="1143000" y="3931920"/>
+            <a:ext cx="2011680" cy="457200"/>
           </a:xfrm>
           <a:prstGeom prst="rect">
             <a:avLst/>
@@ -2514,10 +2526,337 @@
           <a:lstStyle/>
           <a:p>
             <a:pPr algn="l">
+              <a:lnSpc>
+                <a:spcPct val="110000"/>
+              </a:lnSpc>
               <a:buNone/>
             </a:pPr>
             <a:r>
-              <a:rPr lang="ko-KR" sz="1350" b="1" i="0" dirty="0">
+              <a:rPr lang="ko-KR" sz="1150" b="1" i="0" dirty="0">
+                <a:solidFill>
+                  <a:srgbClr val="143D5C"/>
+                </a:solidFill>
+                <a:latin typeface="Malgun Gothic"/>
+                <a:ea typeface="Malgun Gothic"/>
+              </a:rPr>
+              <a:t>교전 현황 공유 누락의 결과는 과소 추정</a:t>
+            </a:r>
+          </a:p>
+        </p:txBody>
+      </p:sp>
+      <p:sp>
+        <p:nvSpPr>
+          <p:cNvPr id="25" name="Text 25"/>
+          <p:cNvSpPr txBox="1"/>
+          <p:nvPr/>
+        </p:nvSpPr>
+        <p:spPr>
+          <a:xfrm>
+            <a:off x="685800" y="4462272"/>
+            <a:ext cx="2395728" cy="1645920"/>
+          </a:xfrm>
+          <a:prstGeom prst="rect">
+            <a:avLst/>
+          </a:prstGeom>
+          <a:noFill/>
+          <a:ln>
+            <a:noFill/>
+          </a:ln>
+        </p:spPr>
+        <p:txBody>
+          <a:bodyPr wrap="square" lIns="0" tIns="0" rIns="0" bIns="0" anchor="t" rtlCol="0">
+            <a:normAutofit/>
+          </a:bodyPr>
+          <a:lstStyle/>
+          <a:p>
+            <a:pPr algn="l">
+              <a:lnSpc>
+                <a:spcPct val="122000"/>
+              </a:lnSpc>
+              <a:buNone/>
+            </a:pPr>
+            <a:r>
+              <a:rPr lang="ko-KR" sz="950" b="0" i="0" dirty="0">
+                <a:solidFill>
+                  <a:srgbClr val="1D2A35"/>
+                </a:solidFill>
+                <a:latin typeface="Malgun Gothic"/>
+                <a:ea typeface="Malgun Gothic"/>
+              </a:rPr>
+              <a:t>As-Is 121건 손실의 파생 결과가 중복 2~4건에 그치는 것은 요격기(전투기)가 모사되지 않아서다. 요격기·공대공·피아 식별이 들어오면 중복 교전·아군 오인 사격으로 바뀔 수 있다.</a:t>
+            </a:r>
+          </a:p>
+        </p:txBody>
+      </p:sp>
+      <p:sp>
+        <p:nvSpPr>
+          <p:cNvPr id="26" name="Shape 26"/>
+          <p:cNvSpPr/>
+          <p:nvPr/>
+        </p:nvSpPr>
+        <p:spPr>
+          <a:xfrm>
+            <a:off x="3355848" y="3840480"/>
+            <a:ext cx="2670048" cy="2331720"/>
+          </a:xfrm>
+          <a:prstGeom prst="roundRect">
+            <a:avLst>
+              <a:gd name="adj" fmla="val 12000"/>
+            </a:avLst>
+          </a:prstGeom>
+          <a:solidFill>
+            <a:srgbClr val="F3F6F8"/>
+          </a:solidFill>
+          <a:ln>
+            <a:noFill/>
+          </a:ln>
+        </p:spPr>
+        <p:txBody>
+          <a:bodyPr/>
+          <a:lstStyle/>
+          <a:p>
+            <a:endParaRPr lang="ko-KR"/>
+          </a:p>
+        </p:txBody>
+      </p:sp>
+      <p:sp>
+        <p:nvSpPr>
+          <p:cNvPr id="27" name="Text 27"/>
+          <p:cNvSpPr txBox="1"/>
+          <p:nvPr/>
+        </p:nvSpPr>
+        <p:spPr>
+          <a:xfrm>
+            <a:off x="3493008" y="3950208"/>
+            <a:ext cx="384048" cy="384048"/>
+          </a:xfrm>
+          <a:prstGeom prst="ellipse">
+            <a:avLst/>
+          </a:prstGeom>
+          <a:solidFill>
+            <a:srgbClr val="143D5C"/>
+          </a:solidFill>
+          <a:ln>
+            <a:noFill/>
+          </a:ln>
+        </p:spPr>
+        <p:txBody>
+          <a:bodyPr wrap="square" lIns="0" tIns="0" rIns="0" bIns="0" anchor="ctr" rtlCol="0">
+            <a:normAutofit/>
+          </a:bodyPr>
+          <a:lstStyle/>
+          <a:p>
+            <a:pPr algn="ctr">
+              <a:buNone/>
+            </a:pPr>
+            <a:r>
+              <a:rPr lang="ko-KR" sz="1300" b="1" i="0" dirty="0">
+                <a:solidFill>
+                  <a:srgbClr val="FFFFFF"/>
+                </a:solidFill>
+                <a:latin typeface="Malgun Gothic"/>
+                <a:ea typeface="Malgun Gothic"/>
+              </a:rPr>
+              <a:t>6</a:t>
+            </a:r>
+          </a:p>
+        </p:txBody>
+      </p:sp>
+      <p:sp>
+        <p:nvSpPr>
+          <p:cNvPr id="28" name="Text 28"/>
+          <p:cNvSpPr txBox="1"/>
+          <p:nvPr/>
+        </p:nvSpPr>
+        <p:spPr>
+          <a:xfrm>
+            <a:off x="3950208" y="3931920"/>
+            <a:ext cx="2011680" cy="457200"/>
+          </a:xfrm>
+          <a:prstGeom prst="rect">
+            <a:avLst/>
+          </a:prstGeom>
+          <a:noFill/>
+          <a:ln>
+            <a:noFill/>
+          </a:ln>
+        </p:spPr>
+        <p:txBody>
+          <a:bodyPr wrap="square" lIns="0" tIns="0" rIns="0" bIns="0" anchor="ctr" rtlCol="0">
+            <a:normAutofit/>
+          </a:bodyPr>
+          <a:lstStyle/>
+          <a:p>
+            <a:pPr algn="l">
+              <a:lnSpc>
+                <a:spcPct val="110000"/>
+              </a:lnSpc>
+              <a:buNone/>
+            </a:pPr>
+            <a:r>
+              <a:rPr lang="ko-KR" sz="1150" b="1" i="0" dirty="0">
+                <a:solidFill>
+                  <a:srgbClr val="143D5C"/>
+                </a:solidFill>
+                <a:latin typeface="Malgun Gothic"/>
+                <a:ea typeface="Malgun Gothic"/>
+              </a:rPr>
+              <a:t>미군 자산 연동은 킬웹에서도 미정</a:t>
+            </a:r>
+          </a:p>
+        </p:txBody>
+      </p:sp>
+      <p:sp>
+        <p:nvSpPr>
+          <p:cNvPr id="29" name="Text 29"/>
+          <p:cNvSpPr txBox="1"/>
+          <p:nvPr/>
+        </p:nvSpPr>
+        <p:spPr>
+          <a:xfrm>
+            <a:off x="3493008" y="4462272"/>
+            <a:ext cx="2395728" cy="1645920"/>
+          </a:xfrm>
+          <a:prstGeom prst="rect">
+            <a:avLst/>
+          </a:prstGeom>
+          <a:noFill/>
+          <a:ln>
+            <a:noFill/>
+          </a:ln>
+        </p:spPr>
+        <p:txBody>
+          <a:bodyPr wrap="square" lIns="0" tIns="0" rIns="0" bIns="0" anchor="t" rtlCol="0">
+            <a:normAutofit/>
+          </a:bodyPr>
+          <a:lstStyle/>
+          <a:p>
+            <a:pPr algn="l">
+              <a:lnSpc>
+                <a:spcPct val="122000"/>
+              </a:lnSpc>
+              <a:buNone/>
+            </a:pPr>
+            <a:r>
+              <a:rPr lang="ko-KR" sz="950" b="0" i="0" dirty="0">
+                <a:solidFill>
+                  <a:srgbClr val="1D2A35"/>
+                </a:solidFill>
+                <a:latin typeface="Malgun Gothic"/>
+                <a:ea typeface="Malgun Gothic"/>
+              </a:rPr>
+              <a:t>미군 축은 두 체계 모두 독립, 협조 매체만 다름. 한미 교전 현황 공유·군단 방공 포함 협조 고리 없음(To-Be 중복 12건). 미군 가입·협조·배제 조건별 실험이 필요하다.</a:t>
+            </a:r>
+          </a:p>
+        </p:txBody>
+      </p:sp>
+      <p:sp>
+        <p:nvSpPr>
+          <p:cNvPr id="30" name="Shape 30"/>
+          <p:cNvSpPr/>
+          <p:nvPr/>
+        </p:nvSpPr>
+        <p:spPr>
+          <a:xfrm>
+            <a:off x="6163056" y="3840480"/>
+            <a:ext cx="2670048" cy="2331720"/>
+          </a:xfrm>
+          <a:prstGeom prst="roundRect">
+            <a:avLst>
+              <a:gd name="adj" fmla="val 12000"/>
+            </a:avLst>
+          </a:prstGeom>
+          <a:solidFill>
+            <a:srgbClr val="F3F6F8"/>
+          </a:solidFill>
+          <a:ln>
+            <a:noFill/>
+          </a:ln>
+        </p:spPr>
+        <p:txBody>
+          <a:bodyPr/>
+          <a:lstStyle/>
+          <a:p>
+            <a:endParaRPr lang="ko-KR"/>
+          </a:p>
+        </p:txBody>
+      </p:sp>
+      <p:sp>
+        <p:nvSpPr>
+          <p:cNvPr id="31" name="Text 31"/>
+          <p:cNvSpPr txBox="1"/>
+          <p:nvPr/>
+        </p:nvSpPr>
+        <p:spPr>
+          <a:xfrm>
+            <a:off x="6300216" y="3950208"/>
+            <a:ext cx="384048" cy="384048"/>
+          </a:xfrm>
+          <a:prstGeom prst="ellipse">
+            <a:avLst/>
+          </a:prstGeom>
+          <a:solidFill>
+            <a:srgbClr val="143D5C"/>
+          </a:solidFill>
+          <a:ln>
+            <a:noFill/>
+          </a:ln>
+        </p:spPr>
+        <p:txBody>
+          <a:bodyPr wrap="square" lIns="0" tIns="0" rIns="0" bIns="0" anchor="ctr" rtlCol="0">
+            <a:normAutofit/>
+          </a:bodyPr>
+          <a:lstStyle/>
+          <a:p>
+            <a:pPr algn="ctr">
+              <a:buNone/>
+            </a:pPr>
+            <a:r>
+              <a:rPr lang="ko-KR" sz="1300" b="1" i="0" dirty="0">
+                <a:solidFill>
+                  <a:srgbClr val="FFFFFF"/>
+                </a:solidFill>
+                <a:latin typeface="Malgun Gothic"/>
+                <a:ea typeface="Malgun Gothic"/>
+              </a:rPr>
+              <a:t>7</a:t>
+            </a:r>
+          </a:p>
+        </p:txBody>
+      </p:sp>
+      <p:sp>
+        <p:nvSpPr>
+          <p:cNvPr id="32" name="Text 32"/>
+          <p:cNvSpPr txBox="1"/>
+          <p:nvPr/>
+        </p:nvSpPr>
+        <p:spPr>
+          <a:xfrm>
+            <a:off x="6757416" y="3931920"/>
+            <a:ext cx="2011680" cy="457200"/>
+          </a:xfrm>
+          <a:prstGeom prst="rect">
+            <a:avLst/>
+          </a:prstGeom>
+          <a:noFill/>
+          <a:ln>
+            <a:noFill/>
+          </a:ln>
+        </p:spPr>
+        <p:txBody>
+          <a:bodyPr wrap="square" lIns="0" tIns="0" rIns="0" bIns="0" anchor="ctr" rtlCol="0">
+            <a:normAutofit/>
+          </a:bodyPr>
+          <a:lstStyle/>
+          <a:p>
+            <a:pPr algn="l">
+              <a:lnSpc>
+                <a:spcPct val="110000"/>
+              </a:lnSpc>
+              <a:buNone/>
+            </a:pPr>
+            <a:r>
+              <a:rPr lang="ko-KR" sz="1150" b="1" i="0" dirty="0">
                 <a:solidFill>
                   <a:srgbClr val="143D5C"/>
                 </a:solidFill>
@@ -2531,14 +2870,14 @@
       </p:sp>
       <p:sp>
         <p:nvSpPr>
-          <p:cNvPr id="25" name="Text 25"/>
+          <p:cNvPr id="33" name="Text 33"/>
           <p:cNvSpPr txBox="1"/>
           <p:nvPr/>
         </p:nvSpPr>
         <p:spPr>
           <a:xfrm>
-            <a:off x="4480560" y="4553712"/>
-            <a:ext cx="3200400" cy="1463040"/>
+            <a:off x="6300216" y="4462272"/>
+            <a:ext cx="2395728" cy="1645920"/>
           </a:xfrm>
           <a:prstGeom prst="rect">
             <a:avLst/>
@@ -2561,28 +2900,28 @@
               <a:buNone/>
             </a:pPr>
             <a:r>
-              <a:rPr lang="ko-KR" sz="1100" b="0" i="0" dirty="0">
+              <a:rPr lang="ko-KR" sz="950" b="0" i="0" dirty="0">
                 <a:solidFill>
                   <a:srgbClr val="1D2A35"/>
                 </a:solidFill>
                 <a:latin typeface="Malgun Gothic"/>
                 <a:ea typeface="Malgun Gothic"/>
               </a:rPr>
-              <a:t>15분 재장전·무한 재보급·1표적 1발·L-SAM 탄 주머니 합산은 모두 상층 포대 처리량을 넉넉하게 본다. 요격 확률은 상수(L-SAM 0.75)이며 명중은 난수로 정해진다.</a:t>
+              <a:t>15분 재장전·무한 재보급·1표적 1발·L-SAM 탄 주머니 합산은 상층 포대 처리량을 넉넉하게 본다. 요격 확률은 상수이며 명중은 난수.</a:t>
             </a:r>
           </a:p>
         </p:txBody>
       </p:sp>
       <p:sp>
         <p:nvSpPr>
-          <p:cNvPr id="26" name="Shape 26"/>
+          <p:cNvPr id="34" name="Shape 34"/>
           <p:cNvSpPr/>
           <p:nvPr/>
         </p:nvSpPr>
         <p:spPr>
           <a:xfrm>
-            <a:off x="8046720" y="3840480"/>
-            <a:ext cx="3566160" cy="2240280"/>
+            <a:off x="8970264" y="3840480"/>
+            <a:ext cx="2670048" cy="2331720"/>
           </a:xfrm>
           <a:prstGeom prst="roundRect">
             <a:avLst>
@@ -2606,14 +2945,14 @@
       </p:sp>
       <p:sp>
         <p:nvSpPr>
-          <p:cNvPr id="27" name="Text 27"/>
+          <p:cNvPr id="35" name="Text 35"/>
           <p:cNvSpPr txBox="1"/>
           <p:nvPr/>
         </p:nvSpPr>
         <p:spPr>
           <a:xfrm>
-            <a:off x="8229600" y="3977640"/>
-            <a:ext cx="457200" cy="457200"/>
+            <a:off x="9107424" y="3950208"/>
+            <a:ext cx="384048" cy="384048"/>
           </a:xfrm>
           <a:prstGeom prst="ellipse">
             <a:avLst/>
@@ -2635,28 +2974,28 @@
               <a:buNone/>
             </a:pPr>
             <a:r>
-              <a:rPr lang="ko-KR" sz="1600" b="1" i="0" dirty="0">
+              <a:rPr lang="ko-KR" sz="1300" b="1" i="0" dirty="0">
                 <a:solidFill>
                   <a:srgbClr val="FFFFFF"/>
                 </a:solidFill>
                 <a:latin typeface="Malgun Gothic"/>
                 <a:ea typeface="Malgun Gothic"/>
               </a:rPr>
-              <a:t>6</a:t>
+              <a:t>8</a:t>
             </a:r>
           </a:p>
         </p:txBody>
       </p:sp>
       <p:sp>
         <p:nvSpPr>
-          <p:cNvPr id="28" name="Text 28"/>
+          <p:cNvPr id="36" name="Text 36"/>
           <p:cNvSpPr txBox="1"/>
           <p:nvPr/>
         </p:nvSpPr>
         <p:spPr>
           <a:xfrm>
-            <a:off x="8778240" y="3995928"/>
-            <a:ext cx="2697480" cy="457200"/>
+            <a:off x="9564624" y="3931920"/>
+            <a:ext cx="2011680" cy="457200"/>
           </a:xfrm>
           <a:prstGeom prst="rect">
             <a:avLst/>
@@ -2673,10 +3012,13 @@
           <a:lstStyle/>
           <a:p>
             <a:pPr algn="l">
+              <a:lnSpc>
+                <a:spcPct val="110000"/>
+              </a:lnSpc>
               <a:buNone/>
             </a:pPr>
             <a:r>
-              <a:rPr lang="ko-KR" sz="1350" b="1" i="0" dirty="0">
+              <a:rPr lang="ko-KR" sz="1150" b="1" i="0" dirty="0">
                 <a:solidFill>
                   <a:srgbClr val="143D5C"/>
                 </a:solidFill>
@@ -2690,14 +3032,14 @@
       </p:sp>
       <p:sp>
         <p:nvSpPr>
-          <p:cNvPr id="29" name="Text 29"/>
+          <p:cNvPr id="37" name="Text 37"/>
           <p:cNvSpPr txBox="1"/>
           <p:nvPr/>
         </p:nvSpPr>
         <p:spPr>
           <a:xfrm>
-            <a:off x="8229600" y="4553712"/>
-            <a:ext cx="3200400" cy="1463040"/>
+            <a:off x="9107424" y="4462272"/>
+            <a:ext cx="2395728" cy="1645920"/>
           </a:xfrm>
           <a:prstGeom prst="rect">
             <a:avLst/>
@@ -2720,14 +3062,14 @@
               <a:buNone/>
             </a:pPr>
             <a:r>
-              <a:rPr lang="ko-KR" sz="1100" b="0" i="0" dirty="0">
+              <a:rPr lang="ko-KR" sz="950" b="0" i="0" dirty="0">
                 <a:solidFill>
                   <a:srgbClr val="1D2A35"/>
                 </a:solidFill>
                 <a:latin typeface="Malgun Gothic"/>
                 <a:ea typeface="Malgun Gothic"/>
               </a:rPr>
-              <a:t>대기 지시의 발사 권한(교전 규칙 · 4판 211/205 → 5판 176/194), 천마의 To-Be 한정 순항 교전(사용자 가정), 한미 협조 매체(음성 20초 ↔ 데이터링크 1초), 그린파인 직접 인지. 모두 공개 근거가 얇은 개념값.</a:t>
+              <a:t>대기 지시의 발사 권한(교전 규칙 · 4판 211/205 → 5판 176/194), 한미 협조 매체(음성 20초 ↔ 데이터링크 1초), 지휘소 창구 수(6·10·20 · 3이면 As-Is 포화), 그린파인 직접 인지. 모두 공개 근거가 얇은 개념값.</a:t>
             </a:r>
           </a:p>
         </p:txBody>

--- a/K-JAMDS_효과척도_발표정리본.pptx
+++ b/K-JAMDS_효과척도_발표정리본.pptx
@@ -1290,7 +1290,7 @@
         </p:nvSpPr>
         <p:spPr>
           <a:xfrm>
-            <a:off x="731520" y="2834640"/>
+            <a:off x="731520" y="2788920"/>
             <a:ext cx="10698480" cy="320040"/>
           </a:xfrm>
           <a:prstGeom prst="rect">
@@ -1331,8 +1331,8 @@
         </p:nvSpPr>
         <p:spPr>
           <a:xfrm>
-            <a:off x="731520" y="3163824"/>
-            <a:ext cx="10698480" cy="566928"/>
+            <a:off x="731520" y="3118104"/>
+            <a:ext cx="10698480" cy="640080"/>
           </a:xfrm>
           <a:prstGeom prst="rect">
             <a:avLst/>
@@ -1355,14 +1355,14 @@
               <a:buNone/>
             </a:pPr>
             <a:r>
-              <a:rPr lang="ko-KR" sz="1100" b="0" i="0" dirty="0">
+              <a:rPr lang="ko-KR" sz="1050" b="0" i="0" dirty="0">
                 <a:solidFill>
                   <a:srgbClr val="CADCFC"/>
                 </a:solidFill>
                 <a:latin typeface="Malgun Gothic"/>
                 <a:ea typeface="Malgun Gothic"/>
               </a:rPr>
-              <a:t>결심까지 시간(58→20 · 84→16 · 53→15초)과 노드 수(6~9 → 4~6)는 모든 위협에서 차이가 나지만, 격추 수는 명령이 좁은 요격 창 안에 닿아야 하는 방사포(51 → 64)에서만 갈린다. 탄도탄·순항·전투기의 격추는 요격 창·포대 물리·명중 확률이 정해 두 체계가 같다.</a:t>
+              <a:t>결심까지 시간(58→20 · 84→16 · 53→15초)과 노드 수(6~9 → 4~6)는 모든 위협에서 차이가 난다. 격추 수는 방사포(51 → 64)에서만 갈린다 — 방사포는 쏠 수 있는 시간이 수십 초뿐이라 명령이 18초 늦으면 아예 못 쏘고, 못 쏜 항적은 시간 표에 들어가지 않으므로(명중한 것만 셈) 그 손실은 격추 수로만 보인다. 탄도탄·순항·전투기는 창이 넓어 늦어도 창 안에서 쏘니 격추가 같다.</a:t>
             </a:r>
           </a:p>
         </p:txBody>
@@ -1375,7 +1375,7 @@
         </p:nvSpPr>
         <p:spPr>
           <a:xfrm>
-            <a:off x="731520" y="3749040"/>
+            <a:off x="731520" y="3776472"/>
             <a:ext cx="10698480" cy="320040"/>
           </a:xfrm>
           <a:prstGeom prst="rect">
@@ -1403,7 +1403,7 @@
                 <a:latin typeface="Malgun Gothic"/>
                 <a:ea typeface="Malgun Gothic"/>
               </a:rPr>
-              <a:t>② 4판(긴급발사 허용)에서 두 체계가 비슷했던 이유 — 교전 규칙 가정이 격추 수를 가장 크게 움직인다</a:t>
+              <a:t>② 격추 수를 가장 크게 움직이는 가정은 「포대가 지휘소 명령 없이 스스로 쏠 수 있는가」</a:t>
             </a:r>
           </a:p>
         </p:txBody>
@@ -1416,8 +1416,8 @@
         </p:nvSpPr>
         <p:spPr>
           <a:xfrm>
-            <a:off x="731520" y="4078224"/>
-            <a:ext cx="10698480" cy="566928"/>
+            <a:off x="731520" y="4105656"/>
+            <a:ext cx="10698480" cy="640080"/>
           </a:xfrm>
           <a:prstGeom prst="rect">
             <a:avLst/>
@@ -1440,14 +1440,14 @@
               <a:buNone/>
             </a:pPr>
             <a:r>
-              <a:rPr lang="ko-KR" sz="1100" b="0" i="0" dirty="0">
+              <a:rPr lang="ko-KR" sz="1050" b="0" i="0" dirty="0">
                 <a:solidFill>
                   <a:srgbClr val="CADCFC"/>
                 </a:solidFill>
                 <a:latin typeface="Malgun Gothic"/>
                 <a:ea typeface="Malgun Gothic"/>
               </a:rPr>
-              <a:t>포대의 자체 발사가 As-Is의 음성 협조·방공여단 중계 지연을 덮고 있었다. 표준 절차(명령 없이는 발사 없음)로 고치자 명령 경로의 차이가 그대로 드러났다.</a:t>
+              <a:t>이전 판에서는 「준비하라」는 지시를 받은 포대가 명령이 늦으면 스스로 쏘게 두었다. 그러면 As-Is의 느린 음성 협조·중계가 결과에 드러나지 않아 두 체계가 비슷했다(211 대 205). 표준 절차대로 명령이 와야만 쏘게 하자 명령이 느린 As-Is가 손해를 보며 178 대 192로 갈렸다 — 지휘 구조 못지않게 포대의 발사 권한 가정이 격추 수를 정한다.</a:t>
             </a:r>
           </a:p>
         </p:txBody>
@@ -1460,7 +1460,7 @@
         </p:nvSpPr>
         <p:spPr>
           <a:xfrm>
-            <a:off x="731520" y="4663440"/>
+            <a:off x="731520" y="4764024"/>
             <a:ext cx="10698480" cy="320040"/>
           </a:xfrm>
           <a:prstGeom prst="rect">
@@ -1501,8 +1501,8 @@
         </p:nvSpPr>
         <p:spPr>
           <a:xfrm>
-            <a:off x="731520" y="4992624"/>
-            <a:ext cx="10698480" cy="566928"/>
+            <a:off x="731520" y="5093208"/>
+            <a:ext cx="10698480" cy="640080"/>
           </a:xfrm>
           <a:prstGeom prst="rect">
             <a:avLst/>
@@ -1525,7 +1525,7 @@
               <a:buNone/>
             </a:pPr>
             <a:r>
-              <a:rPr lang="ko-KR" sz="1100" b="0" i="0" dirty="0">
+              <a:rPr lang="ko-KR" sz="1050" b="0" i="0" dirty="0">
                 <a:solidFill>
                   <a:srgbClr val="CADCFC"/>
                 </a:solidFill>
@@ -1545,7 +1545,7 @@
         </p:nvSpPr>
         <p:spPr>
           <a:xfrm>
-            <a:off x="731520" y="5577840"/>
+            <a:off x="731520" y="5751576"/>
             <a:ext cx="10698480" cy="320040"/>
           </a:xfrm>
           <a:prstGeom prst="rect">
@@ -1586,8 +1586,8 @@
         </p:nvSpPr>
         <p:spPr>
           <a:xfrm>
-            <a:off x="731520" y="5907024"/>
-            <a:ext cx="10698480" cy="566928"/>
+            <a:off x="731520" y="6080760"/>
+            <a:ext cx="10698480" cy="640080"/>
           </a:xfrm>
           <a:prstGeom prst="rect">
             <a:avLst/>
@@ -1610,7 +1610,7 @@
               <a:buNone/>
             </a:pPr>
             <a:r>
-              <a:rPr lang="ko-KR" sz="1100" b="0" i="0" dirty="0">
+              <a:rPr lang="ko-KR" sz="1050" b="0" i="0" dirty="0">
                 <a:solidFill>
                   <a:srgbClr val="CADCFC"/>
                 </a:solidFill>

--- a/K-JAMDS_효과척도_발표정리본.pptx
+++ b/K-JAMDS_효과척도_발표정리본.pptx
@@ -315,7 +315,7 @@
                 <a:latin typeface="Malgun Gothic"/>
                 <a:ea typeface="Malgun Gothic"/>
               </a:rPr>
-              <a:t>178 → 192</a:t>
+              <a:t>178 → 190</a:t>
             </a:r>
           </a:p>
         </p:txBody>
@@ -428,7 +428,7 @@
                 <a:latin typeface="Malgun Gothic"/>
                 <a:ea typeface="Malgun Gothic"/>
               </a:rPr>
-              <a:t>222 → 215초</a:t>
+              <a:t>222 → 220초</a:t>
             </a:r>
           </a:p>
         </p:txBody>
@@ -541,7 +541,7 @@
                 <a:latin typeface="Malgun Gothic"/>
                 <a:ea typeface="Malgun Gothic"/>
               </a:rPr>
-              <a:t>58 → 20초</a:t>
+              <a:t>78 → 40초</a:t>
             </a:r>
           </a:p>
         </p:txBody>
@@ -582,7 +582,7 @@
                 <a:latin typeface="Malgun Gothic"/>
                 <a:ea typeface="Malgun Gothic"/>
               </a:rPr>
-              <a:t>탄도탄 접수→결심</a:t>
+              <a:t>탄도탄 접수→결심(실제 사수 기준)</a:t>
             </a:r>
           </a:p>
         </p:txBody>
@@ -654,7 +654,7 @@
                 <a:latin typeface="Malgun Gothic"/>
                 <a:ea typeface="Malgun Gothic"/>
               </a:rPr>
-              <a:t>6~9 → 4~6</a:t>
+              <a:t>7~9 → 6~7</a:t>
             </a:r>
           </a:p>
         </p:txBody>
@@ -695,7 +695,7 @@
                 <a:latin typeface="Malgun Gothic"/>
                 <a:ea typeface="Malgun Gothic"/>
               </a:rPr>
-              <a:t>소형 무인기 거친 노드 수</a:t>
+              <a:t>전투기 거친 노드 수</a:t>
             </a:r>
           </a:p>
         </p:txBody>
@@ -739,7 +739,7 @@
                 <a:latin typeface="Malgun Gothic"/>
                 <a:ea typeface="Malgun Gothic"/>
               </a:rPr>
-              <a:t>조건: SC3 복합 동시 포화 · 한반도 본 배치(지휘소 96 · 포대 84) · 위협 228개(탄도탄 53 · 방사포 90 · 순항 16 · 전투기 16 · 소형 무인기 53) · 생성 1800초 / 관측 3600초 · seed 29(재현성 30·31) · 표준 절차(대기 지시는 준비만 · 발사는 지휘소 명령 · 예외는 자위권 발사) · 탄도·공중 위협 모두 발사·이륙 원점에서 생성 · 결과서 6판(2026-10-04) 기준 · 모든 수치는 공개자료 기반 정책연구용 개념값</a:t>
+              <a:t>조건: SC3 복합 동시 포화 · 한반도 본 배치(지휘소 96 · 포대 84) · 위협 228개(탄도탄 53 · 방사포 90 · 순항 16 · 전투기 16 · 소형 무인기 53) · 생성 1800초 / 관측 3600초 · seed 29(재현성 30·31) · 표준 절차(To-Be에도 통합공중작전통제소 승인 절차 · 대기 지시는 준비만 · 발사는 지휘소 명령 · 예외는 자위권 발사) · 탄도·공중 위협 모두 발사·이륙 원점에서 생성 · 결과서 6판(2026-10-04) 기준 · 모든 수치는 공개자료 기반 정책연구용 개념값</a:t>
             </a:r>
           </a:p>
         </p:txBody>
@@ -885,7 +885,7 @@
                 <a:latin typeface="Malgun Gothic"/>
                 <a:ea typeface="Malgun Gothic"/>
               </a:rPr>
-              <a:t>178 → 192</a:t>
+              <a:t>178 → 190</a:t>
             </a:r>
           </a:p>
         </p:txBody>
@@ -929,7 +929,7 @@
                 <a:latin typeface="Malgun Gothic"/>
                 <a:ea typeface="Malgun Gothic"/>
               </a:rPr>
-              <a:t>격추(228개 중) · seed 3개 평균 185 → 198 · +14·+14·+13</a:t>
+              <a:t>격추(228개 중) · seed 3개 평균 185 → 195 · +12·+9·+9</a:t>
             </a:r>
           </a:p>
         </p:txBody>
@@ -1001,7 +1001,7 @@
                 <a:latin typeface="Malgun Gothic"/>
                 <a:ea typeface="Malgun Gothic"/>
               </a:rPr>
-              <a:t>222 → 215초</a:t>
+              <a:t>222 → 220초</a:t>
             </a:r>
           </a:p>
         </p:txBody>
@@ -1045,7 +1045,7 @@
                 <a:latin typeface="Malgun Gothic"/>
                 <a:ea typeface="Malgun Gothic"/>
               </a:rPr>
-              <a:t>교전 시작까지 평균 · 결심 58→20 · 84→16초</a:t>
+              <a:t>교전 시작까지 평균 · 결심 78→40 · 53→27초</a:t>
             </a:r>
           </a:p>
         </p:txBody>
@@ -1117,7 +1117,7 @@
                 <a:latin typeface="Malgun Gothic"/>
                 <a:ea typeface="Malgun Gothic"/>
               </a:rPr>
-              <a:t>6~9 → 4~6</a:t>
+              <a:t>9 → 6·7</a:t>
             </a:r>
           </a:p>
         </p:txBody>
@@ -1161,7 +1161,7 @@
                 <a:latin typeface="Malgun Gothic"/>
                 <a:ea typeface="Malgun Gothic"/>
               </a:rPr>
-              <a:t>소형 무인기 노드 수 · 전투기 7~9 → 6~7 · 음성 0</a:t>
+              <a:t>전투기·소형 무인기 가장 흔한 노드 수 · 음성 0</a:t>
             </a:r>
           </a:p>
         </p:txBody>
@@ -1233,7 +1233,7 @@
                 <a:latin typeface="Malgun Gothic"/>
                 <a:ea typeface="Malgun Gothic"/>
               </a:rPr>
-              <a:t>8 → 12건</a:t>
+              <a:t>8 → 4건</a:t>
             </a:r>
           </a:p>
         </p:txBody>
@@ -1277,7 +1277,7 @@
                 <a:latin typeface="Malgun Gothic"/>
                 <a:ea typeface="Malgun Gothic"/>
               </a:rPr>
-              <a:t>한미 중복 발사(As-Is 음성 엇갈림 · To-Be 군단 방공이 협조 고리 밖)</a:t>
+              <a:t>한미 중복 발사(As-Is 음성 엇갈림 · To-Be 한미 현황 공유 없음)</a:t>
             </a:r>
           </a:p>
         </p:txBody>
@@ -1362,7 +1362,7 @@
                 <a:latin typeface="Malgun Gothic"/>
                 <a:ea typeface="Malgun Gothic"/>
               </a:rPr>
-              <a:t>결심까지 시간(58→20 · 84→16 · 53→15초)과 노드 수(6~9 → 4~6)는 모든 위협에서 차이가 난다. 격추 수는 방사포(51 → 64)에서만 갈린다 — 방사포는 쏠 수 있는 시간이 수십 초뿐이라 명령이 18초 늦으면 아예 못 쏘고, 못 쏜 항적은 시간 표에 들어가지 않으므로(명중한 것만 셈) 그 손실은 격추 수로만 보인다. 탄도탄·순항·전투기는 창이 넓어 늦어도 창 안에서 쏘니 격추가 같다.</a:t>
+              <a:t>결심까지 시간(78→40 · 77→58 · 53→27초)과 노드 수(9 → 6·7)는 소형 무인기의 결심을 빼면 모든 위협에서 차이가 난다. 격추 수는 방사포(51 → 64)에서만 갈린다 — 방사포는 쏠 수 있는 시간이 수십 초뿐이라 명령이 19초 늦으면 아예 못 쏘고, 못 쏜 항적은 시간 표에 들어가지 않으므로(명중한 것만 셈) 그 손실은 격추 수로만 보인다. 탄도탄·순항·전투기는 창이 넓어 늦어도 창 안에서 쏘니 격추가 같다.</a:t>
             </a:r>
           </a:p>
         </p:txBody>
@@ -1447,7 +1447,7 @@
                 <a:latin typeface="Malgun Gothic"/>
                 <a:ea typeface="Malgun Gothic"/>
               </a:rPr>
-              <a:t>이전 판에서는 「준비하라」는 지시를 받은 포대가 명령이 늦으면 스스로 쏘게 두었다. 그러면 As-Is의 느린 음성 협조·중계가 결과에 드러나지 않아 두 체계가 비슷했다(211 대 205). 표준 절차대로 명령이 와야만 쏘게 하자 명령이 느린 As-Is가 손해를 보며 178 대 192로 갈렸다 — 지휘 구조 못지않게 포대의 발사 권한 가정이 격추 수를 정한다.</a:t>
+              <a:t>이전 판에서는 「준비하라」는 지시를 받은 포대가 명령이 늦으면 스스로 쏘게 두었다. 그러면 As-Is의 느린 음성 협조·중계가 결과에 드러나지 않아 두 체계가 비슷했다(211 대 205). 표준 절차대로 명령이 와야만 쏘게 하고(5판) To-Be에도 승인 절차를 두자(7판) 명령이 느린 As-Is가 손해를 보며 178 대 190으로 갈렸다 — 지휘 구조 못지않게 포대의 발사 권한 가정이 격추 수를 정한다.</a:t>
             </a:r>
           </a:p>
         </p:txBody>
@@ -1617,7 +1617,7 @@
                 <a:latin typeface="Malgun Gothic"/>
                 <a:ea typeface="Malgun Gothic"/>
               </a:rPr>
-              <a:t>두 체계 모두 미군 축은 독립이고 협조 매체만 다르다. 미군을 빼면 To-Be 우위는 유지(154 대 165)되지만 탄도탄 격추가 46 → 27로 준다. 한미 교전 현황 공유·군단 방공 포함 협조 고리가 없어 To-Be에도 중복 12건이 남는다 — 「미군 자산을 킬웹 안에 어떻게 넣는가」가 정의돼야 한다.</a:t>
+              <a:t>두 체계 모두 미군 축은 독립이고 협조 매체만 다르다. 미군을 빼면 To-Be 우위는 유지(154 대 159)되지만 탄도탄 격추가 46 → 27로 준다. 한미 교전 현황 공유가 없어 To-Be에도 중복 4건이 남는다(6판 12건은 군단 방공의 사전 승인 탓) — 「미군 자산을 킬웹 안에 어떻게 넣는가」가 정의돼야 한다.</a:t>
             </a:r>
           </a:p>
         </p:txBody>
@@ -1773,7 +1773,7 @@
                 <a:latin typeface="Malgun Gothic"/>
                 <a:ea typeface="Malgun Gothic"/>
               </a:rPr>
-              <a:t>K-JAMDS 효과척도 분석 결과서 6판(2026-10-04) · SC3 복합 동시 포화 · 한반도 본 배치(지휘소 96 · 포대 84) · 위협 228개 · seed 29 · 모든 수치는 공개자료 기반 정책연구용 개념값</a:t>
+              <a:t>K-JAMDS 효과척도 분석 결과서 7판(2026-10-05) · SC3 복합 동시 포화 · 한반도 본 배치(지휘소 96 · 포대 84) · 위협 228개 · seed 29 · 모든 수치는 공개자료 기반 정책연구용 개념값</a:t>
             </a:r>
           </a:p>
         </p:txBody>
@@ -2259,7 +2259,7 @@
                 <a:latin typeface="Malgun Gothic"/>
                 <a:ea typeface="Malgun Gothic"/>
               </a:rPr>
-              <a:t>동시 추적 수·빔 자원 제한과 지형 차폐가 없어 「바빠서·가려서 늦게 본다」가 없다. 공중 위협의 생성→탐지 0~2초와 순항 사수(Patriot 대 천마)가 여기에 달려 있다.</a:t>
+              <a:t>동시 추적 수·빔 자원 제한과 지형 차폐가 없어 「바빠서·가려서 늦게 본다」가 없다. 공중 위협의 생성→탐지 0~2초와 순항 사수(Patriot 대 천궁-II)가 여기에 달려 있다.</a:t>
             </a:r>
           </a:p>
         </p:txBody>
@@ -2745,7 +2745,7 @@
                 <a:latin typeface="Malgun Gothic"/>
                 <a:ea typeface="Malgun Gothic"/>
               </a:rPr>
-              <a:t>미군 축은 두 체계 모두 독립, 협조 매체만 다름. 한미 교전 현황 공유·군단 방공 포함 협조 고리 없음(To-Be 중복 12건). 미군 가입·협조·배제 조건별 실험이 필요하다.</a:t>
+              <a:t>미군 축은 두 체계 모두 독립, 협조 매체만 다름. 한미 교전 현황 공유 없음(To-Be 중복 4건). 미군 가입·협조·배제 조건별 실험이 필요하다.</a:t>
             </a:r>
           </a:p>
         </p:txBody>
@@ -3069,7 +3069,7 @@
                 <a:latin typeface="Malgun Gothic"/>
                 <a:ea typeface="Malgun Gothic"/>
               </a:rPr>
-              <a:t>대기 지시의 발사 권한(교전 규칙 · 4판 211/205 → 5판 176/194), 한미 협조 매체(음성 20초 ↔ 데이터링크 1초), 지휘소 창구 수(6·10·20 · 3이면 As-Is 포화), 그린파인 직접 인지. 모두 공개 근거가 얇은 개념값.</a:t>
+              <a:t>대기 지시의 발사 권한(교전 규칙 · 4판 211/205 → 7판 178/190), To-Be의 승인 절차(사전 승인이면 무인기 결심 16초·중복 12건으로 과장), 한미 협조 매체(음성 20초 ↔ 데이터링크 1초), 지휘소 창구 수(6·10·20), 천마 순항 교전 제외. 모두 공개 근거가 얇은 개념값.</a:t>
             </a:r>
           </a:p>
         </p:txBody>
@@ -3225,7 +3225,7 @@
                 <a:latin typeface="Malgun Gothic"/>
                 <a:ea typeface="Malgun Gothic"/>
               </a:rPr>
-              <a:t>K-JAMDS 효과척도 분석 결과서 6판(2026-10-04) · SC3 복합 동시 포화 · 한반도 본 배치(지휘소 96 · 포대 84) · 위협 228개 · seed 29 · 모든 수치는 공개자료 기반 정책연구용 개념값</a:t>
+              <a:t>K-JAMDS 효과척도 분석 결과서 7판(2026-10-05) · SC3 복합 동시 포화 · 한반도 본 배치(지휘소 96 · 포대 84) · 위협 228개 · seed 29 · 모든 수치는 공개자료 기반 정책연구용 개념값</a:t>
             </a:r>
           </a:p>
         </p:txBody>
@@ -3752,7 +3752,7 @@
                 <a:latin typeface="Malgun Gothic"/>
                 <a:ea typeface="Malgun Gothic"/>
               </a:rPr>
-              <a:t>항적 접수 직후 포대마다 「지금/언제 쏠 수 있나」 예측(4초 주기 상태 보고 + 계선 지연). 미군과 협조(As-Is 음성 20초 · To-Be 데이터링크 1초) → 「준비되면 쏘라」 명령</a:t>
+              <a:t>항적 접수 직후 포대마다 「지금/언제 쏠 수 있나」 예측(4초 주기 상태 보고 + 계선 지연). 미군과 협조(As-Is 음성 20초 · To-Be 데이터링크 1초) · 군단 방공은 상급 승인(As-Is 음성 · To-Be 데이터링크) → 「준비되면 쏘라」 명령</a:t>
             </a:r>
           </a:p>
         </p:txBody>
@@ -4118,7 +4118,7 @@
                 <a:latin typeface="Malgun Gothic"/>
                 <a:ea typeface="Malgun Gothic"/>
               </a:rPr>
-              <a:t>예측 준비 시각 + 30초가 지나도 못 쏘면 포대가 CANTCO 회신, 지휘소가 1초 뒤 다른 사수 지정(seed 29 · As-Is 70건 · To-Be 37건)</a:t>
+              <a:t>예측 준비 시각 + 30초가 지나도 못 쏘면 포대가 CANTCO 회신, 지휘소가 1초 뒤 다른 사수 지정(seed 29 · As-Is 70건 · To-Be 48건)</a:t>
             </a:r>
           </a:p>
         </p:txBody>
@@ -4203,7 +4203,7 @@
                 <a:latin typeface="Malgun Gothic"/>
                 <a:ea typeface="Malgun Gothic"/>
               </a:rPr>
-              <a:t>사수 지정을 받지 못한 포대가 발사 마감이 닥친 위협에 「내가 맞을 것 같다」고 자체 판단해 쏜다(명령 없음). seed 29에서 자위권 결심 As-Is 10건 · To-Be 11건 중 실제 발사 1·2건, 나머지는 발사 직전 재검증에서 발사 불가. 화면에서는 붉은 점선 고리 + 「자위권 ③」 표식.</a:t>
+              <a:t>사수 지정을 받지 못한 포대가 발사 마감이 닥친 위협에 「내가 맞을 것 같다」고 자체 판단해 쏜다(명령 없음). seed 29에서 자위권 결심 As-Is 10건 · To-Be 9건 중 실제 발사 1·1건, 나머지는 발사 직전 재검증에서 발사 불가. 화면에서는 붉은 점선 고리 + 「자위권 ③」 표식.</a:t>
             </a:r>
           </a:p>
         </p:txBody>
@@ -4444,7 +4444,7 @@
                 <a:latin typeface="Malgun Gothic"/>
                 <a:ea typeface="Malgun Gothic"/>
               </a:rPr>
-              <a:t>K-JAMDS 효과척도 분석 결과서 6판(2026-10-04) · SC3 복합 동시 포화 · 한반도 본 배치(지휘소 96 · 포대 84) · 위협 228개 · seed 29 · 모든 수치는 공개자료 기반 정책연구용 개념값</a:t>
+              <a:t>K-JAMDS 효과척도 분석 결과서 7판(2026-10-05) · SC3 복합 동시 포화 · 한반도 본 배치(지휘소 96 · 포대 84) · 위협 228개 · seed 29 · 모든 수치는 공개자료 기반 정책연구용 개념값</a:t>
             </a:r>
           </a:p>
         </p:txBody>
@@ -4619,7 +4619,7 @@
                           <a:latin typeface="Malgun Gothic"/>
                           <a:ea typeface="Malgun Gothic"/>
                         </a:rPr>
-                        <a:t>탄도탄 ① THAAD가 쏘는 경우(가장 흔함 · 22·29건)</a:t>
+                        <a:t>탄도탄 ① THAAD가 쏘는 경우(가장 흔함 · 22·31건)</a:t>
                       </a:r>
                     </a:p>
                   </a:txBody>
@@ -5021,7 +5021,7 @@
                           <a:latin typeface="Malgun Gothic"/>
                           <a:ea typeface="Malgun Gothic"/>
                         </a:rPr>
-                        <a:t>방사포 ① 협조 없이 바로 명령(가장 흔함 · 35·35건)</a:t>
+                        <a:t>방사포 ① 협조 없이 바로 명령(가장 흔함 · 35·34건)</a:t>
                       </a:r>
                     </a:p>
                   </a:txBody>
@@ -5155,7 +5155,7 @@
                           <a:latin typeface="Malgun Gothic"/>
                           <a:ea typeface="Malgun Gothic"/>
                         </a:rPr>
-                        <a:t>방사포 ② Patriot 지휘소와 협조(23·29건)</a:t>
+                        <a:t>방사포 ② Patriot 지휘소와 협조(23·28건)</a:t>
                       </a:r>
                     </a:p>
                   </a:txBody>
@@ -5377,7 +5377,7 @@
                           <a:latin typeface="Malgun Gothic"/>
                           <a:ea typeface="Malgun Gothic"/>
                         </a:rPr>
-                        <a:t>같음 · 자위권 2건</a:t>
+                        <a:t>같음 · 자위권 1건</a:t>
                       </a:r>
                     </a:p>
                   </a:txBody>
@@ -5547,7 +5547,7 @@
                 <a:latin typeface="Malgun Gothic"/>
                 <a:ea typeface="Malgun Gothic"/>
               </a:rPr>
-              <a:t>방사포: 전부 지휘소 명령으로 쏘므로(자위권 1·2건 제외) As-Is 방공여단 중계 한 칸이 모든 경우에 들어가고, Patriot 협조가 붙은 항적(23·29건)에서는 음성 21초 왕복까지 더해진다 — 방사포 격추 51 대 64의 차이가 여기서 난다.</a:t>
+              <a:t>방사포: 전부 지휘소 명령으로 쏘므로(자위권 1·1건 제외) As-Is 방공여단 중계 한 칸이 모든 경우에 들어가고, Patriot 협조가 붙은 항적(23·28건)에서는 음성 21초 왕복까지 더해진다 — 방사포 격추 51 대 64의 차이가 여기서 난다.</a:t>
             </a:r>
           </a:p>
         </p:txBody>
@@ -5703,7 +5703,7 @@
                 <a:latin typeface="Malgun Gothic"/>
                 <a:ea typeface="Malgun Gothic"/>
               </a:rPr>
-              <a:t>K-JAMDS 효과척도 분석 결과서 6판(2026-10-04) · SC3 복합 동시 포화 · 한반도 본 배치(지휘소 96 · 포대 84) · 위협 228개 · seed 29 · 모든 수치는 공개자료 기반 정책연구용 개념값</a:t>
+              <a:t>K-JAMDS 효과척도 분석 결과서 7판(2026-10-05) · SC3 복합 동시 포화 · 한반도 본 배치(지휘소 96 · 포대 84) · 위협 228개 · seed 29 · 모든 수치는 공개자료 기반 정책연구용 개념값</a:t>
             </a:r>
           </a:p>
         </p:txBody>
@@ -6012,7 +6012,7 @@
                           <a:latin typeface="Malgun Gothic"/>
                           <a:ea typeface="Malgun Gothic"/>
                         </a:rPr>
-                        <a:t>순항미사일 ② 한국군 천궁-II · 천마가 쏘는 경우</a:t>
+                        <a:t>순항미사일 ② 한국군 천궁-II가 쏘는 경우(7·2건)</a:t>
                       </a:r>
                     </a:p>
                   </a:txBody>
@@ -6056,7 +6056,7 @@
                           <a:latin typeface="Malgun Gothic"/>
                           <a:ea typeface="Malgun Gothic"/>
                         </a:rPr>
-                        <a:t>Patriot 지휘소 →(음성 제안) 중앙방공통제소 → 방공여단 통제소 → 천궁-II 연천·충주 사격통제소 → 발사 (7건)</a:t>
+                        <a:t>Patriot 지휘소 →(음성 제안) 중앙방공통제소 → 방공여단 통제소 → 천궁-II 연천·충주 사격통제소 → 발사 (7건)  [7칸]</a:t>
                       </a:r>
                     </a:p>
                   </a:txBody>
@@ -6100,7 +6100,7 @@
                           <a:latin typeface="Malgun Gothic"/>
                           <a:ea typeface="Malgun Gothic"/>
                         </a:rPr>
-                        <a:t>FPS-117 → 통합공중작전통제소 → 군단 방공 지휘소 → 천마 사격통제소 → 천마 (2건)</a:t>
+                        <a:t>Patriot 지휘소 →(데이터링크 제안) 통합공중작전통제소 → 천궁-II 충주 사격통제소 → 발사 (2건)  [6칸] · 천마·비호는 두 체계 모두 순항 교전 대상이 아님(7판)</a:t>
                       </a:r>
                     </a:p>
                   </a:txBody>
@@ -6146,7 +6146,7 @@
                           <a:latin typeface="Malgun Gothic"/>
                           <a:ea typeface="Malgun Gothic"/>
                         </a:rPr>
-                        <a:t>전투기 ① L-SAM 레이더가 본 경우(10·12건)</a:t>
+                        <a:t>전투기 ① L-SAM 레이더가 본 경우(10·11건)</a:t>
                       </a:r>
                     </a:p>
                   </a:txBody>
@@ -6280,7 +6280,7 @@
                           <a:latin typeface="Malgun Gothic"/>
                           <a:ea typeface="Malgun Gothic"/>
                         </a:rPr>
-                        <a:t>전투기 ② Patriot 레이더가 본 경우(6·4건)</a:t>
+                        <a:t>전투기 ② Patriot 레이더가 본 경우(6·5건)</a:t>
                       </a:r>
                     </a:p>
                   </a:txBody>
@@ -6414,7 +6414,7 @@
                           <a:latin typeface="Malgun Gothic"/>
                           <a:ea typeface="Malgun Gothic"/>
                         </a:rPr>
-                        <a:t>소형 무인기 ① 천궁-II 레이더가 본 경우(34·26건)</a:t>
+                        <a:t>소형 무인기 ① 천궁-II 레이더가 본 경우(34·25건)</a:t>
                       </a:r>
                     </a:p>
                   </a:txBody>
@@ -6502,7 +6502,7 @@
                           <a:latin typeface="Malgun Gothic"/>
                           <a:ea typeface="Malgun Gothic"/>
                         </a:rPr>
-                        <a:t>천궁-II 레이더 → 통합공중작전통제소 → 군단 방공 지휘소 → 천마 사격통제소 → 천마  [5칸]</a:t>
+                        <a:t>천궁-II 레이더 → 통합공중작전통제소 →(통합망 항적) 군단 방공 →(데이터링크 승인 요청) 통합공중작전통제소 →(승인) 군단 방공 → 천마 사격통제소 → 천마  [7칸 · 7판: 승인 왕복이 생김]</a:t>
                       </a:r>
                     </a:p>
                   </a:txBody>
@@ -6548,7 +6548,7 @@
                           <a:latin typeface="Malgun Gothic"/>
                           <a:ea typeface="Malgun Gothic"/>
                         </a:rPr>
-                        <a:t>소형 무인기 ② TPS-880K가 본 경우(11·24건)</a:t>
+                        <a:t>소형 무인기 ② TPS-880K가 본 경우(11·16건)</a:t>
                       </a:r>
                     </a:p>
                   </a:txBody>
@@ -6636,7 +6636,7 @@
                           <a:latin typeface="Malgun Gothic"/>
                           <a:ea typeface="Malgun Gothic"/>
                         </a:rPr>
-                        <a:t>TPS-880K → 군단 방공 지휘소 → 천마·비호 사격통제소 → 발사  [4칸]</a:t>
+                        <a:t>TPS-880K → 군단 방공 ⇄(데이터링크 승인) 통합공중작전통제소 → 군단 방공 → 천마·비호 사격통제소 → 발사  [6칸 · 매체만 바뀜]</a:t>
                       </a:r>
                     </a:p>
                   </a:txBody>
@@ -6679,8 +6679,8 @@
         </p:nvSpPr>
         <p:spPr>
           <a:xfrm>
-            <a:off x="548640" y="5074920"/>
-            <a:ext cx="11064240" cy="1280160"/>
+            <a:off x="548640" y="5230368"/>
+            <a:ext cx="11064240" cy="1170432"/>
           </a:xfrm>
           <a:prstGeom prst="roundRect">
             <a:avLst>
@@ -6710,7 +6710,7 @@
         </p:nvSpPr>
         <p:spPr>
           <a:xfrm>
-            <a:off x="685800" y="5166360"/>
+            <a:off x="685800" y="5321808"/>
             <a:ext cx="10789920" cy="320040"/>
           </a:xfrm>
           <a:prstGeom prst="rect">
@@ -6751,8 +6751,8 @@
         </p:nvSpPr>
         <p:spPr>
           <a:xfrm>
-            <a:off x="685800" y="5513832"/>
-            <a:ext cx="10789920" cy="749808"/>
+            <a:off x="685800" y="5669280"/>
+            <a:ext cx="10789920" cy="640080"/>
           </a:xfrm>
           <a:prstGeom prst="rect">
             <a:avLst/>
@@ -6785,7 +6785,7 @@
                 <a:latin typeface="Malgun Gothic"/>
                 <a:ea typeface="Malgun Gothic"/>
               </a:rPr>
-              <a:t>순항미사일은 발사 원점부터 생성되는 6판에서 두 체계 모두 Patriot 케이시가 쏜다(발사 직후 Patriot 레이더·FPS-117이 잡고, 결심 지휘소가 요격 창이 먼저 열리는 포대를 고름). 노드 수는 같고(5~7) 매체만 음성 → 데이터링크. 5판의 「천마 직접 교전」은 2건으로 줄었다.</a:t>
+              <a:t>순항미사일은 두 체계 모두 Patriot 케이시가 쏜다(발사 직후 Patriot 레이더·FPS-117이 잡고, 결심 지휘소가 요격 창이 먼저 열리는 포대를 고름). 노드 수는 같고(5~7) 매체만 음성 → 데이터링크. 천마는 7판부터 두 체계 모두 순항 후보가 아니다(6판 To-Be 2건은 사라짐).</a:t>
             </a:r>
           </a:p>
           <a:p>
@@ -6806,7 +6806,7 @@
                 <a:latin typeface="Malgun Gothic"/>
                 <a:ea typeface="Malgun Gothic"/>
               </a:rPr>
-              <a:t>전투기·소형 무인기는 방공여단 중계와 중앙방공통제소 ⇄ 군단 방공의 채팅·음성 왕복이 빠져 9 → 6 · 9 → 5. TPS-880K가 먼저 보는 경우 As-Is도 승인 왕복만 남아 6칸이다.</a:t>
+              <a:t>전투기는 방공여단 중계와 되돌아오는 길이 빠져 9 → 6. 소형 무인기는 중앙방공통제소 ⇄ 군단 방공의 채팅·음성 이중 왕복(4칸)이 통합공중작전통제소 ⇄ 군단 방공의 데이터링크 승인 왕복(2칸)으로 바뀌어 9 → 7 — 7판에서 To-Be에도 승인 절차를 둔 결과이며, TPS-880K가 먼저 보는 경우는 두 체계 모두 6칸(매체만 다름).</a:t>
             </a:r>
           </a:p>
         </p:txBody>
@@ -6962,7 +6962,7 @@
                 <a:latin typeface="Malgun Gothic"/>
                 <a:ea typeface="Malgun Gothic"/>
               </a:rPr>
-              <a:t>K-JAMDS 효과척도 분석 결과서 6판(2026-10-04) · SC3 복합 동시 포화 · 한반도 본 배치(지휘소 96 · 포대 84) · 위협 228개 · seed 29 · 모든 수치는 공개자료 기반 정책연구용 개념값</a:t>
+              <a:t>K-JAMDS 효과척도 분석 결과서 7판(2026-10-05) · SC3 복합 동시 포화 · 한반도 본 배치(지휘소 96 · 포대 84) · 위협 228개 · seed 29 · 모든 수치는 공개자료 기반 정책연구용 개념값</a:t>
             </a:r>
           </a:p>
         </p:txBody>
@@ -7448,7 +7448,7 @@
                           <a:latin typeface="Malgun Gothic"/>
                           <a:ea typeface="Malgun Gothic"/>
                         </a:rPr>
-                        <a:t>6: 12 · 7: 30 · 8: 8 · 9: 3</a:t>
+                        <a:t>6: 11 · 7: 33 · 8: 7 · 9: 2</a:t>
                       </a:r>
                     </a:p>
                   </a:txBody>
@@ -7670,7 +7670,7 @@
                           <a:latin typeface="Malgun Gothic"/>
                           <a:ea typeface="Malgun Gothic"/>
                         </a:rPr>
-                        <a:t>4~7</a:t>
+                        <a:t>4~6</a:t>
                       </a:r>
                     </a:p>
                   </a:txBody>
@@ -7714,7 +7714,7 @@
                           <a:latin typeface="Malgun Gothic"/>
                           <a:ea typeface="Malgun Gothic"/>
                         </a:rPr>
-                        <a:t>4: 35 · 5: 3 · 6: 29 · 7: 1</a:t>
+                        <a:t>4: 34 · 5: 5 · 6: 28</a:t>
                       </a:r>
                     </a:p>
                   </a:txBody>
@@ -7980,7 +7980,7 @@
                           <a:latin typeface="Malgun Gothic"/>
                           <a:ea typeface="Malgun Gothic"/>
                         </a:rPr>
-                        <a:t>5: 5 · 7: 11</a:t>
+                        <a:t>5: 3 · 6: 2 · 7: 11</a:t>
                       </a:r>
                     </a:p>
                   </a:txBody>
@@ -8246,7 +8246,7 @@
                           <a:latin typeface="Malgun Gothic"/>
                           <a:ea typeface="Malgun Gothic"/>
                         </a:rPr>
-                        <a:t>6: 12 · 7: 4</a:t>
+                        <a:t>6: 13 · 7: 3</a:t>
                       </a:r>
                     </a:p>
                   </a:txBody>
@@ -8468,7 +8468,7 @@
                           <a:latin typeface="Malgun Gothic"/>
                           <a:ea typeface="Malgun Gothic"/>
                         </a:rPr>
-                        <a:t>4~6</a:t>
+                        <a:t>4~8</a:t>
                       </a:r>
                     </a:p>
                   </a:txBody>
@@ -8512,7 +8512,7 @@
                           <a:latin typeface="Malgun Gothic"/>
                           <a:ea typeface="Malgun Gothic"/>
                         </a:rPr>
-                        <a:t>4: 24 · 5: 26 · 6: 3</a:t>
+                        <a:t>4: 8 · 5: 1 · 6: 17 · 7: 26 · 8: 1</a:t>
                       </a:r>
                     </a:p>
                   </a:txBody>
@@ -8556,7 +8556,7 @@
                           <a:latin typeface="Malgun Gothic"/>
                           <a:ea typeface="Malgun Gothic"/>
                         </a:rPr>
-                        <a:t>중앙방공통제소 ⇄ 군단 방공 채팅·음성 이중 왕복(−4) · 방공여단(−1)</a:t>
+                        <a:t>이중 왕복(4칸) → 데이터링크 승인 왕복(2칸)(−2) · 방공여단(−1) · 4칸은 L-SAM이 상층에서 처리</a:t>
                       </a:r>
                     </a:p>
                   </a:txBody>
@@ -8705,7 +8705,7 @@
                 <a:latin typeface="Malgun Gothic"/>
                 <a:ea typeface="Malgun Gothic"/>
               </a:rPr>
-              <a:t>어느 레이더가 먼저 보았는가(±1~2): 그린파인이면 「레이더 → 결심 지휘소」 2칸, AN/TPY-2이면 「AN/TPY-2 → THAAD 사격통제소 → THAAD 지휘소」 3칸 뒤에 협조 시작. 소형 무인기도 TPS-880K가 먼저 보면 As-Is 6 · To-Be 4칸, 천궁-II 레이더가 먼저 보면 9 · 5칸. 순항도 FPS-117이 먼저 보면 5칸, Patriot 레이더가 먼저 보면 7칸(두 체계 같음).</a:t>
+              <a:t>어느 레이더가 먼저 보았는가(±1~2): 그린파인이면 「레이더 → 결심 지휘소」 2칸, AN/TPY-2이면 「AN/TPY-2 → THAAD 사격통제소 → THAAD 지휘소」 3칸 뒤에 협조 시작. 소형 무인기도 TPS-880K가 먼저 보면 두 체계 모두 6칸, 천궁-II 레이더가 먼저 보면 9 · 7칸. 순항도 FPS-117이 먼저 보면 5칸, Patriot 레이더가 먼저 보면 7칸(두 체계 같음).</a:t>
             </a:r>
           </a:p>
           <a:p>
@@ -8747,7 +8747,7 @@
                 <a:latin typeface="Malgun Gothic"/>
                 <a:ea typeface="Malgun Gothic"/>
               </a:rPr>
-              <a:t>사수의 소속(+1): As-Is에서 한국군 포대가 쏘면 방공여단 통제소가 끼고, 미군 포대면 사격통제소로 바로. 군단 방공으로 내려가는 길(As-Is +4): 중앙방공통제소 ⇄ 군단 방공 이중 왕복.</a:t>
+              <a:t>사수의 소속(+1): As-Is에서 한국군 포대가 쏘면 방공여단 통제소가 끼고, 미군 포대면 사격통제소로 바로. 군단 방공으로 내려가는 길(As-Is +4 · To-Be +2): 중앙방공통제소 ⇄ 군단 방공 이중 왕복 대 통합공중작전통제소 승인 왕복 한 번.</a:t>
             </a:r>
           </a:p>
           <a:p>
@@ -8768,7 +8768,7 @@
                 <a:latin typeface="Malgun Gothic"/>
                 <a:ea typeface="Malgun Gothic"/>
               </a:rPr>
-              <a:t>재지정·재교전은 노드 수를 늘리지 않는다(같은 길로 다시) — 시간만 는다. 구조가 바꾸는 것은 방공여단 중계·이중 왕복뿐이고, 레이더·협조 횟수·사수 소속은 두 체계에 똑같이 작용해 To-Be에도 폭이 남는다.</a:t>
+              <a:t>재지정·재교전은 노드 수를 늘리지 않는다(같은 길로 다시) — 시간만 는다. 구조가 바꾸는 것은 방공여단 중계·이중 왕복(→ 승인 왕복)뿐이고, 레이더·협조 횟수·사수 소속은 두 체계에 똑같이 작용해 To-Be에도 폭이 남는다.</a:t>
             </a:r>
           </a:p>
         </p:txBody>
@@ -8883,7 +8883,7 @@
                 <a:latin typeface="Malgun Gothic"/>
                 <a:ea typeface="Malgun Gothic"/>
               </a:rPr>
-              <a:t>결심→발사 = 사수 대기 포함 · 붉은 칸 = 차이 15% 이상·10초 이상 · 시간은 명중한 항적만 세므로 누수는 격추 열로 읽는다</a:t>
+              <a:t>접수→결심 = 실제로 쏜 포대를 정한 결심까지 · 결심→발사 = 사수 대기 포함 · 붉은 칸 = 차이 15%·10초 이상 · 시간은 명중한 항적만 세므로 누수는 격추 열로</a:t>
             </a:r>
           </a:p>
         </p:txBody>
@@ -8924,7 +8924,7 @@
                 <a:latin typeface="Malgun Gothic"/>
                 <a:ea typeface="Malgun Gothic"/>
               </a:rPr>
-              <a:t>K-JAMDS 효과척도 분석 결과서 6판(2026-10-04) · SC3 복합 동시 포화 · 한반도 본 배치(지휘소 96 · 포대 84) · 위협 228개 · seed 29 · 모든 수치는 공개자료 기반 정책연구용 개념값</a:t>
+              <a:t>K-JAMDS 효과척도 분석 결과서 7판(2026-10-05) · SC3 복합 동시 포화 · 한반도 본 배치(지휘소 96 · 포대 84) · 위협 228개 · seed 29 · 모든 수치는 공개자료 기반 정책연구용 개념값</a:t>
             </a:r>
           </a:p>
         </p:txBody>
@@ -9541,7 +9541,7 @@
                           <a:latin typeface="Malgun Gothic"/>
                           <a:ea typeface="Malgun Gothic"/>
                         </a:rPr>
-                        <a:t>58</a:t>
+                        <a:t>78</a:t>
                       </a:r>
                     </a:p>
                   </a:txBody>
@@ -9585,7 +9585,7 @@
                           <a:latin typeface="Malgun Gothic"/>
                           <a:ea typeface="Malgun Gothic"/>
                         </a:rPr>
-                        <a:t>167</a:t>
+                        <a:t>147</a:t>
                       </a:r>
                     </a:p>
                   </a:txBody>
@@ -9895,7 +9895,7 @@
                           <a:latin typeface="Malgun Gothic"/>
                           <a:ea typeface="Malgun Gothic"/>
                         </a:rPr>
-                        <a:t>76</a:t>
+                        <a:t>77</a:t>
                       </a:r>
                     </a:p>
                   </a:txBody>
@@ -9939,7 +9939,7 @@
                           <a:latin typeface="Malgun Gothic"/>
                           <a:ea typeface="Malgun Gothic"/>
                         </a:rPr>
-                        <a:t>22</a:t>
+                        <a:t>21</a:t>
                       </a:r>
                     </a:p>
                   </a:txBody>
@@ -10640,9 +10640,9 @@
                     <a:p>
                       <a:pPr algn="ctr"/>
                       <a:r>
-                        <a:rPr lang="ko-KR" sz="1100" b="1" i="0" dirty="0">
-                          <a:solidFill>
-                            <a:srgbClr val="B3261E"/>
+                        <a:rPr lang="ko-KR" sz="1100" b="0" i="0" dirty="0">
+                          <a:solidFill>
+                            <a:srgbClr val="1D2A35"/>
                           </a:solidFill>
                           <a:latin typeface="Malgun Gothic"/>
                           <a:ea typeface="Malgun Gothic"/>
@@ -10950,6 +10950,50 @@
                     <a:p>
                       <a:pPr algn="ctr"/>
                       <a:r>
+                        <a:rPr lang="ko-KR" sz="1100" b="0" i="0" dirty="0">
+                          <a:solidFill>
+                            <a:srgbClr val="1D2A35"/>
+                          </a:solidFill>
+                          <a:latin typeface="Malgun Gothic"/>
+                          <a:ea typeface="Malgun Gothic"/>
+                        </a:rPr>
+                        <a:t>133</a:t>
+                      </a:r>
+                    </a:p>
+                  </a:txBody>
+                  <a:tcPr marL="54864" marR="54864" marT="36576" marB="36576" anchor="ctr">
+                    <a:lnL w="6350">
+                      <a:solidFill>
+                        <a:srgbClr val="C9D2DA"/>
+                      </a:solidFill>
+                    </a:lnL>
+                    <a:lnR w="6350">
+                      <a:solidFill>
+                        <a:srgbClr val="C9D2DA"/>
+                      </a:solidFill>
+                    </a:lnR>
+                    <a:lnT w="6350">
+                      <a:solidFill>
+                        <a:srgbClr val="C9D2DA"/>
+                      </a:solidFill>
+                    </a:lnT>
+                    <a:lnB w="6350">
+                      <a:solidFill>
+                        <a:srgbClr val="C9D2DA"/>
+                      </a:solidFill>
+                    </a:lnB>
+                    <a:solidFill>
+                      <a:srgbClr val="F3F6F8"/>
+                    </a:solidFill>
+                  </a:tcPr>
+                </a:tc>
+                <a:tc>
+                  <a:txBody>
+                    <a:bodyPr/>
+                    <a:lstStyle/>
+                    <a:p>
+                      <a:pPr algn="ctr"/>
+                      <a:r>
                         <a:rPr lang="ko-KR" sz="1100" b="1" i="0" dirty="0">
                           <a:solidFill>
                             <a:srgbClr val="B3261E"/>
@@ -10957,51 +11001,7 @@
                           <a:latin typeface="Malgun Gothic"/>
                           <a:ea typeface="Malgun Gothic"/>
                         </a:rPr>
-                        <a:t>84</a:t>
-                      </a:r>
-                    </a:p>
-                  </a:txBody>
-                  <a:tcPr marL="54864" marR="54864" marT="36576" marB="36576" anchor="ctr">
-                    <a:lnL w="6350">
-                      <a:solidFill>
-                        <a:srgbClr val="C9D2DA"/>
-                      </a:solidFill>
-                    </a:lnL>
-                    <a:lnR w="6350">
-                      <a:solidFill>
-                        <a:srgbClr val="C9D2DA"/>
-                      </a:solidFill>
-                    </a:lnR>
-                    <a:lnT w="6350">
-                      <a:solidFill>
-                        <a:srgbClr val="C9D2DA"/>
-                      </a:solidFill>
-                    </a:lnT>
-                    <a:lnB w="6350">
-                      <a:solidFill>
-                        <a:srgbClr val="C9D2DA"/>
-                      </a:solidFill>
-                    </a:lnB>
-                    <a:solidFill>
-                      <a:srgbClr val="F3F6F8"/>
-                    </a:solidFill>
-                  </a:tcPr>
-                </a:tc>
-                <a:tc>
-                  <a:txBody>
-                    <a:bodyPr/>
-                    <a:lstStyle/>
-                    <a:p>
-                      <a:pPr algn="ctr"/>
-                      <a:r>
-                        <a:rPr lang="ko-KR" sz="1100" b="1" i="0" dirty="0">
-                          <a:solidFill>
-                            <a:srgbClr val="B3261E"/>
-                          </a:solidFill>
-                          <a:latin typeface="Malgun Gothic"/>
-                          <a:ea typeface="Malgun Gothic"/>
-                        </a:rPr>
-                        <a:t>334</a:t>
+                        <a:t>284</a:t>
                       </a:r>
                     </a:p>
                   </a:txBody>
@@ -11604,7 +11604,7 @@
                           <a:latin typeface="Malgun Gothic"/>
                           <a:ea typeface="Malgun Gothic"/>
                         </a:rPr>
-                        <a:t>45</a:t>
+                        <a:t>46</a:t>
                       </a:r>
                     </a:p>
                   </a:txBody>
@@ -11736,7 +11736,7 @@
                           <a:latin typeface="Malgun Gothic"/>
                           <a:ea typeface="Malgun Gothic"/>
                         </a:rPr>
-                        <a:t>20</a:t>
+                        <a:t>40</a:t>
                       </a:r>
                     </a:p>
                   </a:txBody>
@@ -11780,7 +11780,7 @@
                           <a:latin typeface="Malgun Gothic"/>
                           <a:ea typeface="Malgun Gothic"/>
                         </a:rPr>
-                        <a:t>203</a:t>
+                        <a:t>181</a:t>
                       </a:r>
                     </a:p>
                   </a:txBody>
@@ -11824,7 +11824,7 @@
                           <a:latin typeface="Malgun Gothic"/>
                           <a:ea typeface="Malgun Gothic"/>
                         </a:rPr>
-                        <a:t>56</a:t>
+                        <a:t>54</a:t>
                       </a:r>
                     </a:p>
                   </a:txBody>
@@ -11868,7 +11868,7 @@
                           <a:latin typeface="Malgun Gothic"/>
                           <a:ea typeface="Malgun Gothic"/>
                         </a:rPr>
-                        <a:t>282</a:t>
+                        <a:t>278</a:t>
                       </a:r>
                     </a:p>
                   </a:txBody>
@@ -12134,7 +12134,7 @@
                           <a:latin typeface="Malgun Gothic"/>
                           <a:ea typeface="Malgun Gothic"/>
                         </a:rPr>
-                        <a:t>20</a:t>
+                        <a:t>19</a:t>
                       </a:r>
                     </a:p>
                   </a:txBody>
@@ -12222,7 +12222,7 @@
                           <a:latin typeface="Malgun Gothic"/>
                           <a:ea typeface="Malgun Gothic"/>
                         </a:rPr>
-                        <a:t>119</a:t>
+                        <a:t>115</a:t>
                       </a:r>
                     </a:p>
                   </a:txBody>
@@ -12444,7 +12444,7 @@
                           <a:latin typeface="Malgun Gothic"/>
                           <a:ea typeface="Malgun Gothic"/>
                         </a:rPr>
-                        <a:t>3</a:t>
+                        <a:t>7</a:t>
                       </a:r>
                     </a:p>
                   </a:txBody>
@@ -12488,7 +12488,7 @@
                           <a:latin typeface="Malgun Gothic"/>
                           <a:ea typeface="Malgun Gothic"/>
                         </a:rPr>
-                        <a:t>56</a:t>
+                        <a:t>55</a:t>
                       </a:r>
                     </a:p>
                   </a:txBody>
@@ -12576,7 +12576,7 @@
                           <a:latin typeface="Malgun Gothic"/>
                           <a:ea typeface="Malgun Gothic"/>
                         </a:rPr>
-                        <a:t>87</a:t>
+                        <a:t>91</a:t>
                       </a:r>
                     </a:p>
                   </a:txBody>
@@ -12798,7 +12798,7 @@
                           <a:latin typeface="Malgun Gothic"/>
                           <a:ea typeface="Malgun Gothic"/>
                         </a:rPr>
-                        <a:t>15</a:t>
+                        <a:t>27</a:t>
                       </a:r>
                     </a:p>
                   </a:txBody>
@@ -12835,6 +12835,50 @@
                     <a:p>
                       <a:pPr algn="ctr"/>
                       <a:r>
+                        <a:rPr lang="ko-KR" sz="1100" b="0" i="0" dirty="0">
+                          <a:solidFill>
+                            <a:srgbClr val="1D2A35"/>
+                          </a:solidFill>
+                          <a:latin typeface="Malgun Gothic"/>
+                          <a:ea typeface="Malgun Gothic"/>
+                        </a:rPr>
+                        <a:t>32</a:t>
+                      </a:r>
+                    </a:p>
+                  </a:txBody>
+                  <a:tcPr marL="54864" marR="54864" marT="36576" marB="36576" anchor="ctr">
+                    <a:lnL w="6350">
+                      <a:solidFill>
+                        <a:srgbClr val="C9D2DA"/>
+                      </a:solidFill>
+                    </a:lnL>
+                    <a:lnR w="6350">
+                      <a:solidFill>
+                        <a:srgbClr val="C9D2DA"/>
+                      </a:solidFill>
+                    </a:lnR>
+                    <a:lnT w="6350">
+                      <a:solidFill>
+                        <a:srgbClr val="C9D2DA"/>
+                      </a:solidFill>
+                    </a:lnT>
+                    <a:lnB w="6350">
+                      <a:solidFill>
+                        <a:srgbClr val="C9D2DA"/>
+                      </a:solidFill>
+                    </a:lnB>
+                    <a:solidFill>
+                      <a:srgbClr val="FFFFFF"/>
+                    </a:solidFill>
+                  </a:tcPr>
+                </a:tc>
+                <a:tc>
+                  <a:txBody>
+                    <a:bodyPr/>
+                    <a:lstStyle/>
+                    <a:p>
+                      <a:pPr algn="ctr"/>
+                      <a:r>
                         <a:rPr lang="ko-KR" sz="1100" b="1" i="0" dirty="0">
                           <a:solidFill>
                             <a:srgbClr val="B3261E"/>
@@ -12842,7 +12886,7 @@
                           <a:latin typeface="Malgun Gothic"/>
                           <a:ea typeface="Malgun Gothic"/>
                         </a:rPr>
-                        <a:t>48</a:t>
+                        <a:t>56</a:t>
                       </a:r>
                     </a:p>
                   </a:txBody>
@@ -12886,51 +12930,7 @@
                           <a:latin typeface="Malgun Gothic"/>
                           <a:ea typeface="Malgun Gothic"/>
                         </a:rPr>
-                        <a:t>52</a:t>
-                      </a:r>
-                    </a:p>
-                  </a:txBody>
-                  <a:tcPr marL="54864" marR="54864" marT="36576" marB="36576" anchor="ctr">
-                    <a:lnL w="6350">
-                      <a:solidFill>
-                        <a:srgbClr val="C9D2DA"/>
-                      </a:solidFill>
-                    </a:lnL>
-                    <a:lnR w="6350">
-                      <a:solidFill>
-                        <a:srgbClr val="C9D2DA"/>
-                      </a:solidFill>
-                    </a:lnR>
-                    <a:lnT w="6350">
-                      <a:solidFill>
-                        <a:srgbClr val="C9D2DA"/>
-                      </a:solidFill>
-                    </a:lnT>
-                    <a:lnB w="6350">
-                      <a:solidFill>
-                        <a:srgbClr val="C9D2DA"/>
-                      </a:solidFill>
-                    </a:lnB>
-                    <a:solidFill>
-                      <a:srgbClr val="FFFFFF"/>
-                    </a:solidFill>
-                  </a:tcPr>
-                </a:tc>
-                <a:tc>
-                  <a:txBody>
-                    <a:bodyPr/>
-                    <a:lstStyle/>
-                    <a:p>
-                      <a:pPr algn="ctr"/>
-                      <a:r>
-                        <a:rPr lang="ko-KR" sz="1100" b="1" i="0" dirty="0">
-                          <a:solidFill>
-                            <a:srgbClr val="B3261E"/>
-                          </a:solidFill>
-                          <a:latin typeface="Malgun Gothic"/>
-                          <a:ea typeface="Malgun Gothic"/>
-                        </a:rPr>
-                        <a:t>119</a:t>
+                        <a:t>112</a:t>
                       </a:r>
                     </a:p>
                   </a:txBody>
@@ -13020,7 +13020,7 @@
                           <a:latin typeface="Malgun Gothic"/>
                           <a:ea typeface="Malgun Gothic"/>
                         </a:rPr>
-                        <a:t>52</a:t>
+                        <a:t>49</a:t>
                       </a:r>
                     </a:p>
                   </a:txBody>
@@ -13145,6 +13145,50 @@
                     <a:p>
                       <a:pPr algn="ctr"/>
                       <a:r>
+                        <a:rPr lang="ko-KR" sz="1100" b="0" i="0" dirty="0">
+                          <a:solidFill>
+                            <a:srgbClr val="1D2A35"/>
+                          </a:solidFill>
+                          <a:latin typeface="Malgun Gothic"/>
+                          <a:ea typeface="Malgun Gothic"/>
+                        </a:rPr>
+                        <a:t>136</a:t>
+                      </a:r>
+                    </a:p>
+                  </a:txBody>
+                  <a:tcPr marL="54864" marR="54864" marT="36576" marB="36576" anchor="ctr">
+                    <a:lnL w="6350">
+                      <a:solidFill>
+                        <a:srgbClr val="C9D2DA"/>
+                      </a:solidFill>
+                    </a:lnL>
+                    <a:lnR w="6350">
+                      <a:solidFill>
+                        <a:srgbClr val="C9D2DA"/>
+                      </a:solidFill>
+                    </a:lnR>
+                    <a:lnT w="6350">
+                      <a:solidFill>
+                        <a:srgbClr val="C9D2DA"/>
+                      </a:solidFill>
+                    </a:lnT>
+                    <a:lnB w="6350">
+                      <a:solidFill>
+                        <a:srgbClr val="C9D2DA"/>
+                      </a:solidFill>
+                    </a:lnB>
+                    <a:solidFill>
+                      <a:srgbClr val="F3F6F8"/>
+                    </a:solidFill>
+                  </a:tcPr>
+                </a:tc>
+                <a:tc>
+                  <a:txBody>
+                    <a:bodyPr/>
+                    <a:lstStyle/>
+                    <a:p>
+                      <a:pPr algn="ctr"/>
+                      <a:r>
                         <a:rPr lang="ko-KR" sz="1100" b="1" i="0" dirty="0">
                           <a:solidFill>
                             <a:srgbClr val="B3261E"/>
@@ -13152,7 +13196,7 @@
                           <a:latin typeface="Malgun Gothic"/>
                           <a:ea typeface="Malgun Gothic"/>
                         </a:rPr>
-                        <a:t>16</a:t>
+                        <a:t>331</a:t>
                       </a:r>
                     </a:p>
                   </a:txBody>
@@ -13189,14 +13233,14 @@
                     <a:p>
                       <a:pPr algn="ctr"/>
                       <a:r>
-                        <a:rPr lang="ko-KR" sz="1100" b="1" i="0" dirty="0">
-                          <a:solidFill>
-                            <a:srgbClr val="B3261E"/>
-                          </a:solidFill>
-                          <a:latin typeface="Malgun Gothic"/>
-                          <a:ea typeface="Malgun Gothic"/>
-                        </a:rPr>
-                        <a:t>431</a:t>
+                        <a:rPr lang="ko-KR" sz="1100" b="0" i="0" dirty="0">
+                          <a:solidFill>
+                            <a:srgbClr val="1D2A35"/>
+                          </a:solidFill>
+                          <a:latin typeface="Malgun Gothic"/>
+                          <a:ea typeface="Malgun Gothic"/>
+                        </a:rPr>
+                        <a:t>19</a:t>
                       </a:r>
                     </a:p>
                   </a:txBody>
@@ -13240,51 +13284,7 @@
                           <a:latin typeface="Malgun Gothic"/>
                           <a:ea typeface="Malgun Gothic"/>
                         </a:rPr>
-                        <a:t>20</a:t>
-                      </a:r>
-                    </a:p>
-                  </a:txBody>
-                  <a:tcPr marL="54864" marR="54864" marT="36576" marB="36576" anchor="ctr">
-                    <a:lnL w="6350">
-                      <a:solidFill>
-                        <a:srgbClr val="C9D2DA"/>
-                      </a:solidFill>
-                    </a:lnL>
-                    <a:lnR w="6350">
-                      <a:solidFill>
-                        <a:srgbClr val="C9D2DA"/>
-                      </a:solidFill>
-                    </a:lnR>
-                    <a:lnT w="6350">
-                      <a:solidFill>
-                        <a:srgbClr val="C9D2DA"/>
-                      </a:solidFill>
-                    </a:lnT>
-                    <a:lnB w="6350">
-                      <a:solidFill>
-                        <a:srgbClr val="C9D2DA"/>
-                      </a:solidFill>
-                    </a:lnB>
-                    <a:solidFill>
-                      <a:srgbClr val="F3F6F8"/>
-                    </a:solidFill>
-                  </a:tcPr>
-                </a:tc>
-                <a:tc>
-                  <a:txBody>
-                    <a:bodyPr/>
-                    <a:lstStyle/>
-                    <a:p>
-                      <a:pPr algn="ctr"/>
-                      <a:r>
-                        <a:rPr lang="ko-KR" sz="1100" b="0" i="0" dirty="0">
-                          <a:solidFill>
-                            <a:srgbClr val="1D2A35"/>
-                          </a:solidFill>
-                          <a:latin typeface="Malgun Gothic"/>
-                          <a:ea typeface="Malgun Gothic"/>
-                        </a:rPr>
-                        <a:t>465</a:t>
+                        <a:t>497</a:t>
                       </a:r>
                     </a:p>
                   </a:txBody>
@@ -13355,7 +13355,7 @@
                 <a:latin typeface="Malgun Gothic"/>
                 <a:ea typeface="Malgun Gothic"/>
               </a:rPr>
-              <a:t>전체 평균: 교전 시작까지 222 → 215초(seed 30·31도 229 → 218 · 232 → 225초) · 격추까지 263 → 252초 · 생성→탐지는 탄도·공중 모두 발사·이륙 원점 기준</a:t>
+              <a:t>전체 평균: 교전 시작까지 222 → 220초(seed 30·31도 229 → 224 · 232 → 223초) · 격추까지 263 → 255초 · 생성→탐지는 탄도·공중 모두 발사·이륙 원점 기준</a:t>
             </a:r>
           </a:p>
         </p:txBody>
@@ -13511,7 +13511,7 @@
                 <a:latin typeface="Malgun Gothic"/>
                 <a:ea typeface="Malgun Gothic"/>
               </a:rPr>
-              <a:t>K-JAMDS 효과척도 분석 결과서 6판(2026-10-04) · SC3 복합 동시 포화 · 한반도 본 배치(지휘소 96 · 포대 84) · 위협 228개 · seed 29 · 모든 수치는 공개자료 기반 정책연구용 개념값</a:t>
+              <a:t>K-JAMDS 효과척도 분석 결과서 7판(2026-10-05) · SC3 복합 동시 포화 · 한반도 본 배치(지휘소 96 · 포대 84) · 위협 228개 · seed 29 · 모든 수치는 공개자료 기반 정책연구용 개념값</a:t>
             </a:r>
           </a:p>
         </p:txBody>
@@ -13583,7 +13583,7 @@
                 <a:latin typeface="Malgun Gothic"/>
                 <a:ea typeface="Malgun Gothic"/>
               </a:rPr>
-              <a:t>58 → 20초</a:t>
+              <a:t>78 → 40초</a:t>
             </a:r>
           </a:p>
         </p:txBody>
@@ -13695,12 +13695,12 @@
             <a:r>
               <a:rPr lang="ko-KR" sz="3000" b="1" i="0" dirty="0">
                 <a:solidFill>
-                  <a:srgbClr val="143D5C"/>
+                  <a:srgbClr val="5B6B7A"/>
                 </a:solidFill>
                 <a:latin typeface="Malgun Gothic"/>
                 <a:ea typeface="Malgun Gothic"/>
               </a:rPr>
-              <a:t>84 → 16초</a:t>
+              <a:t>133 → 136초</a:t>
             </a:r>
           </a:p>
         </p:txBody>
@@ -13745,7 +13745,7 @@
                 <a:ea typeface="Malgun Gothic"/>
               </a:rPr>
               <a:t>소형 무인기 · 접수→결심
-(이중 왕복 제거)</a:t>
+(같음 — 천마 지정은 예측 시각에 걸림)</a:t>
             </a:r>
           </a:p>
         </p:txBody>
@@ -13817,7 +13817,7 @@
                 <a:latin typeface="Malgun Gothic"/>
                 <a:ea typeface="Malgun Gothic"/>
               </a:rPr>
-              <a:t>53 → 15초</a:t>
+              <a:t>53 → 27초</a:t>
             </a:r>
           </a:p>
         </p:txBody>
@@ -13862,7 +13862,7 @@
                 <a:ea typeface="Malgun Gothic"/>
               </a:rPr>
               <a:t>전투기 · 접수→결심
-(탐지→명중 164 → 119초)</a:t>
+(탐지→명중 164 → 112초)</a:t>
             </a:r>
           </a:p>
         </p:txBody>
@@ -13934,7 +13934,7 @@
                 <a:latin typeface="Malgun Gothic"/>
                 <a:ea typeface="Malgun Gothic"/>
               </a:rPr>
-              <a:t>32 → 3초</a:t>
+              <a:t>32 → 7초</a:t>
             </a:r>
           </a:p>
         </p:txBody>
@@ -13979,7 +13979,7 @@
                 <a:ea typeface="Malgun Gothic"/>
               </a:rPr>
               <a:t>순항미사일 · 접수→결심
-(탐지→명중 107 → 87초)</a:t>
+(탐지→명중 107 → 91초)</a:t>
             </a:r>
           </a:p>
         </p:txBody>
@@ -13992,8 +13992,8 @@
         </p:nvSpPr>
         <p:spPr>
           <a:xfrm>
-            <a:off x="548640" y="2880360"/>
-            <a:ext cx="5394960" cy="2743200"/>
+            <a:off x="548640" y="2834640"/>
+            <a:ext cx="5394960" cy="3200400"/>
           </a:xfrm>
           <a:prstGeom prst="roundRect">
             <a:avLst>
@@ -14023,7 +14023,7 @@
         </p:nvSpPr>
         <p:spPr>
           <a:xfrm>
-            <a:off x="685800" y="2971800"/>
+            <a:off x="685800" y="2926080"/>
             <a:ext cx="5120640" cy="320040"/>
           </a:xfrm>
           <a:prstGeom prst="rect">
@@ -14064,169 +14064,8 @@
         </p:nvSpPr>
         <p:spPr>
           <a:xfrm>
-            <a:off x="685800" y="3319272"/>
-            <a:ext cx="5120640" cy="2212848"/>
-          </a:xfrm>
-          <a:prstGeom prst="rect">
-            <a:avLst/>
-          </a:prstGeom>
-          <a:noFill/>
-          <a:ln>
-            <a:noFill/>
-          </a:ln>
-        </p:spPr>
-        <p:txBody>
-          <a:bodyPr wrap="square" lIns="0" tIns="0" rIns="0" bIns="0" anchor="t" rtlCol="0">
-            <a:normAutofit/>
-          </a:bodyPr>
-          <a:lstStyle/>
-          <a:p>
-            <a:pPr algn="l" marL="228600" indent="-228600">
-              <a:lnSpc>
-                <a:spcPct val="114999"/>
-              </a:lnSpc>
-              <a:spcAft>
-                <a:spcPts val="400"/>
-              </a:spcAft>
-              <a:buChar char="•"/>
-            </a:pPr>
-            <a:r>
-              <a:rPr lang="ko-KR" sz="1100" b="0" i="0" dirty="0">
-                <a:solidFill>
-                  <a:srgbClr val="1D2A35"/>
-                </a:solidFill>
-                <a:latin typeface="Malgun Gothic"/>
-                <a:ea typeface="Malgun Gothic"/>
-              </a:rPr>
-              <a:t>모든 위협에서 「접수→결심」이 To-Be에서 짧다. 사라진 것은 음성 협조 왕복(평균 20초 × 2), 방공여단 통제소 인가(9초), 중앙방공통제소 ⇄ 군단 방공의 채팅·음성 이중 왕복(50초 안팎).</a:t>
-            </a:r>
-          </a:p>
-          <a:p>
-            <a:pPr algn="l" marL="228600" indent="-228600">
-              <a:lnSpc>
-                <a:spcPct val="114999"/>
-              </a:lnSpc>
-              <a:spcAft>
-                <a:spcPts val="400"/>
-              </a:spcAft>
-              <a:buChar char="•"/>
-            </a:pPr>
-            <a:r>
-              <a:rPr lang="ko-KR" sz="1100" b="0" i="0" dirty="0">
-                <a:solidFill>
-                  <a:srgbClr val="1D2A35"/>
-                </a:solidFill>
-                <a:latin typeface="Malgun Gothic"/>
-                <a:ea typeface="Malgun Gothic"/>
-              </a:rPr>
-              <a:t>방사포는 76 → 58초. Patriot 협조 음성 21초와 방공여단 중계가 빠진 몫이며, 요격 창이 좁아 이 18초가 「지휘 시한 초과」 누수(7 대 3)와 격추 수(51 대 64)로 이어진다 — 두 체계 격추 차이 +14의 거의 전부.</a:t>
-            </a:r>
-          </a:p>
-          <a:p>
-            <a:pPr algn="l" marL="228600" indent="-228600">
-              <a:lnSpc>
-                <a:spcPct val="114999"/>
-              </a:lnSpc>
-              <a:spcAft>
-                <a:spcPts val="400"/>
-              </a:spcAft>
-              <a:buChar char="•"/>
-            </a:pPr>
-            <a:r>
-              <a:rPr lang="ko-KR" sz="1100" b="0" i="0" dirty="0">
-                <a:solidFill>
-                  <a:srgbClr val="1D2A35"/>
-                </a:solidFill>
-                <a:latin typeface="Malgun Gothic"/>
-                <a:ea typeface="Malgun Gothic"/>
-              </a:rPr>
-              <a:t>같은 탄도탄 srbm#3: As-Is는 음성 제안이 엇갈려 두 지휘소가 각자 사수를 지정(한미 중복) → 둘째 발이 명중, To-Be는 1초 만에 한 곳이 지정 → 그 한 발이 빗나가 누수. 같은 결심 구조에서 명중 추첨이 결과를 가른 예.</a:t>
-            </a:r>
-          </a:p>
-        </p:txBody>
-      </p:sp>
-      <p:sp>
-        <p:nvSpPr>
-          <p:cNvPr id="20" name="Shape 20"/>
-          <p:cNvSpPr/>
-          <p:nvPr/>
-        </p:nvSpPr>
-        <p:spPr>
-          <a:xfrm>
-            <a:off x="6217920" y="2880360"/>
-            <a:ext cx="5394960" cy="2743200"/>
-          </a:xfrm>
-          <a:prstGeom prst="roundRect">
-            <a:avLst>
-              <a:gd name="adj" fmla="val 12000"/>
-            </a:avLst>
-          </a:prstGeom>
-          <a:solidFill>
-            <a:srgbClr val="F3F6F8"/>
-          </a:solidFill>
-          <a:ln>
-            <a:noFill/>
-          </a:ln>
-        </p:spPr>
-        <p:txBody>
-          <a:bodyPr/>
-          <a:lstStyle/>
-          <a:p>
-            <a:endParaRPr lang="ko-KR"/>
-          </a:p>
-        </p:txBody>
-      </p:sp>
-      <p:sp>
-        <p:nvSpPr>
-          <p:cNvPr id="21" name="Text 21"/>
-          <p:cNvSpPr txBox="1"/>
-          <p:nvPr/>
-        </p:nvSpPr>
-        <p:spPr>
-          <a:xfrm>
-            <a:off x="6355080" y="2971800"/>
-            <a:ext cx="5120640" cy="320040"/>
-          </a:xfrm>
-          <a:prstGeom prst="rect">
-            <a:avLst/>
-          </a:prstGeom>
-          <a:noFill/>
-          <a:ln>
-            <a:noFill/>
-          </a:ln>
-        </p:spPr>
-        <p:txBody>
-          <a:bodyPr wrap="square" lIns="0" tIns="0" rIns="0" bIns="0" anchor="t" rtlCol="0">
-            <a:normAutofit/>
-          </a:bodyPr>
-          <a:lstStyle/>
-          <a:p>
-            <a:pPr algn="l">
-              <a:buNone/>
-            </a:pPr>
-            <a:r>
-              <a:rPr lang="ko-KR" sz="1300" b="1" i="0" dirty="0">
-                <a:solidFill>
-                  <a:srgbClr val="143D5C"/>
-                </a:solidFill>
-                <a:latin typeface="Malgun Gothic"/>
-                <a:ea typeface="Malgun Gothic"/>
-              </a:rPr>
-              <a:t>결심 단축이 총 시간으로 이어지는가 — 세 갈래</a:t>
-            </a:r>
-          </a:p>
-        </p:txBody>
-      </p:sp>
-      <p:sp>
-        <p:nvSpPr>
-          <p:cNvPr id="22" name="Text 22"/>
-          <p:cNvSpPr txBox="1"/>
-          <p:nvPr/>
-        </p:nvSpPr>
-        <p:spPr>
-          <a:xfrm>
-            <a:off x="6355080" y="3319272"/>
-            <a:ext cx="5120640" cy="2212848"/>
+            <a:off x="685800" y="3273552"/>
+            <a:ext cx="5120640" cy="2670048"/>
           </a:xfrm>
           <a:prstGeom prst="rect">
             <a:avLst/>
@@ -14259,7 +14098,7 @@
                 <a:latin typeface="Malgun Gothic"/>
                 <a:ea typeface="Malgun Gothic"/>
               </a:rPr>
-              <a:t>총 시간 그대로(탄도탄 286 대 282 · 소형 무인기 449 대 465): 결심이 빨라진 만큼 「결심→발사」 사수 대기가 늘어난다. THAAD가 고도 150 km 아래로 들어오는 시점, 천마 사거리 9 km에 드는 시점을 지휘 구조가 바꾸지 못한다 — 요격 창이 열리는 시각은 물리가 정한다.</a:t>
+              <a:t>탄도탄·방사포·순항·전투기에서 「접수→결심」이 To-Be에서 짧다. 사라진 것은 음성 협조 왕복(평균 20초 × 2), 방공여단 통제소 인가(9초), 중앙방공통제소 ⇄ 군단 방공의 채팅·음성 이중 왕복(50초 안팎). 소형 무인기는 7판에서 차이가 사라졌다 — 실제 사수(천마)의 지정은 무인기가 사거리에 가까워져 「언제 쏠 수 있나」가 예측될 때 나므로, 승인 왕복이 데이터링크로 바뀌어도 결심 시각이 같다.</a:t>
             </a:r>
           </a:p>
           <a:p>
@@ -14280,7 +14119,7 @@
                 <a:latin typeface="Malgun Gothic"/>
                 <a:ea typeface="Malgun Gothic"/>
               </a:rPr>
-              <a:t>총 시간 단축(전투기 164 → 119초 · 순항 107 → 87초): 창이 이미 열려 있어 결심이 빨라진 만큼 발사·명중도 당겨진다. 창이 넓어 격추 수는 같다(15 대 15 · 16 대 16). 순항의 결심→발사 48 → 56초·발사→명중 24 → 26초 증가는 늦어진 것이 아니다(생성→발사 83 → 62초) — 결심이 30초 당겨진 만큼 Patriot 창까지의 대기가 늘고, 사수가 한국군 포대 8건(천궁-II·L-SAM · 비행 평균 20초)에서 Patriot 14건(28초)으로 바뀐 결과.</a:t>
+              <a:t>방사포는 77 → 58초. Patriot 협조 음성 21초와 방공여단 중계가 빠진 몫이며, 요격 창이 좁아 이 19초가 「지휘 시한 초과」 누수(7 대 2)와 격추 수(51 대 64)로 이어진다 — 두 체계 격추 차이 +12의 전부(나머지 위협은 같거나 To-Be가 1 적음).</a:t>
             </a:r>
           </a:p>
           <a:p>
@@ -14301,7 +14140,168 @@
                 <a:latin typeface="Malgun Gothic"/>
                 <a:ea typeface="Malgun Gothic"/>
               </a:rPr>
-              <a:t>격추 수로 전환(방사포 51 → 64): 창이 좁아 18초 늦은 명령이 창을 넘긴다. 지휘 구조의 효과가 격추로 바뀌는 유일한 유형.</a:t>
+              <a:t>같은 탄도탄 srbm#3: As-Is는 음성 제안이 엇갈려 두 지휘소가 각자 사수를 지정(한미 중복) → 둘째 발이 명중, To-Be는 1초 만에 한 곳이 지정 → 그 한 발이 빗나가 누수. 같은 결심 구조에서 명중 추첨이 결과를 가른 예.</a:t>
+            </a:r>
+          </a:p>
+        </p:txBody>
+      </p:sp>
+      <p:sp>
+        <p:nvSpPr>
+          <p:cNvPr id="20" name="Shape 20"/>
+          <p:cNvSpPr/>
+          <p:nvPr/>
+        </p:nvSpPr>
+        <p:spPr>
+          <a:xfrm>
+            <a:off x="6217920" y="2834640"/>
+            <a:ext cx="5394960" cy="3200400"/>
+          </a:xfrm>
+          <a:prstGeom prst="roundRect">
+            <a:avLst>
+              <a:gd name="adj" fmla="val 12000"/>
+            </a:avLst>
+          </a:prstGeom>
+          <a:solidFill>
+            <a:srgbClr val="F3F6F8"/>
+          </a:solidFill>
+          <a:ln>
+            <a:noFill/>
+          </a:ln>
+        </p:spPr>
+        <p:txBody>
+          <a:bodyPr/>
+          <a:lstStyle/>
+          <a:p>
+            <a:endParaRPr lang="ko-KR"/>
+          </a:p>
+        </p:txBody>
+      </p:sp>
+      <p:sp>
+        <p:nvSpPr>
+          <p:cNvPr id="21" name="Text 21"/>
+          <p:cNvSpPr txBox="1"/>
+          <p:nvPr/>
+        </p:nvSpPr>
+        <p:spPr>
+          <a:xfrm>
+            <a:off x="6355080" y="2926080"/>
+            <a:ext cx="5120640" cy="320040"/>
+          </a:xfrm>
+          <a:prstGeom prst="rect">
+            <a:avLst/>
+          </a:prstGeom>
+          <a:noFill/>
+          <a:ln>
+            <a:noFill/>
+          </a:ln>
+        </p:spPr>
+        <p:txBody>
+          <a:bodyPr wrap="square" lIns="0" tIns="0" rIns="0" bIns="0" anchor="t" rtlCol="0">
+            <a:normAutofit/>
+          </a:bodyPr>
+          <a:lstStyle/>
+          <a:p>
+            <a:pPr algn="l">
+              <a:buNone/>
+            </a:pPr>
+            <a:r>
+              <a:rPr lang="ko-KR" sz="1300" b="1" i="0" dirty="0">
+                <a:solidFill>
+                  <a:srgbClr val="143D5C"/>
+                </a:solidFill>
+                <a:latin typeface="Malgun Gothic"/>
+                <a:ea typeface="Malgun Gothic"/>
+              </a:rPr>
+              <a:t>결심 단축이 총 시간으로 이어지는가 — 세 갈래</a:t>
+            </a:r>
+          </a:p>
+        </p:txBody>
+      </p:sp>
+      <p:sp>
+        <p:nvSpPr>
+          <p:cNvPr id="22" name="Text 22"/>
+          <p:cNvSpPr txBox="1"/>
+          <p:nvPr/>
+        </p:nvSpPr>
+        <p:spPr>
+          <a:xfrm>
+            <a:off x="6355080" y="3273552"/>
+            <a:ext cx="5120640" cy="2670048"/>
+          </a:xfrm>
+          <a:prstGeom prst="rect">
+            <a:avLst/>
+          </a:prstGeom>
+          <a:noFill/>
+          <a:ln>
+            <a:noFill/>
+          </a:ln>
+        </p:spPr>
+        <p:txBody>
+          <a:bodyPr wrap="square" lIns="0" tIns="0" rIns="0" bIns="0" anchor="t" rtlCol="0">
+            <a:normAutofit/>
+          </a:bodyPr>
+          <a:lstStyle/>
+          <a:p>
+            <a:pPr algn="l" marL="228600" indent="-228600">
+              <a:lnSpc>
+                <a:spcPct val="114999"/>
+              </a:lnSpc>
+              <a:spcAft>
+                <a:spcPts val="400"/>
+              </a:spcAft>
+              <a:buChar char="•"/>
+            </a:pPr>
+            <a:r>
+              <a:rPr lang="ko-KR" sz="1050" b="0" i="0" dirty="0">
+                <a:solidFill>
+                  <a:srgbClr val="1D2A35"/>
+                </a:solidFill>
+                <a:latin typeface="Malgun Gothic"/>
+                <a:ea typeface="Malgun Gothic"/>
+              </a:rPr>
+              <a:t>총 시간 그대로(탄도탄 286 대 278 · 소형 무인기 449 대 497): 결심이 빨라진 만큼 「결심→발사」 사수 대기가 늘어난다. THAAD가 고도 150 km 아래로 들어오는 시점, 천마 사거리 9 km에 드는 시점을 지휘 구조가 바꾸지 못한다 — 요격 창이 열리는 시각은 물리가 정한다.</a:t>
+            </a:r>
+          </a:p>
+          <a:p>
+            <a:pPr algn="l" marL="228600" indent="-228600">
+              <a:lnSpc>
+                <a:spcPct val="114999"/>
+              </a:lnSpc>
+              <a:spcAft>
+                <a:spcPts val="400"/>
+              </a:spcAft>
+              <a:buChar char="•"/>
+            </a:pPr>
+            <a:r>
+              <a:rPr lang="ko-KR" sz="1050" b="0" i="0" dirty="0">
+                <a:solidFill>
+                  <a:srgbClr val="1D2A35"/>
+                </a:solidFill>
+                <a:latin typeface="Malgun Gothic"/>
+                <a:ea typeface="Malgun Gothic"/>
+              </a:rPr>
+              <a:t>총 시간 단축(전투기 164 → 112초 · 순항 107 → 91초): 창이 이미 열려 있어 결심이 빨라진 만큼 발사·명중도 당겨진다. 창이 넓어 격추 수는 같다(15 대 15 · 16 대 16). 순항의 결심→발사 48 → 55초·발사→명중 24 → 26초 증가는 늦어진 것이 아니다(생성→발사 83 → 62초) — 결심이 25초 당겨진 만큼 Patriot 창까지의 대기가 늘고, 사수가 한국군 포대 8건(천궁-II·L-SAM · 비행 평균 20초)에서 Patriot 14건(28초)으로 바뀐 결과.</a:t>
+            </a:r>
+          </a:p>
+          <a:p>
+            <a:pPr algn="l" marL="228600" indent="-228600">
+              <a:lnSpc>
+                <a:spcPct val="114999"/>
+              </a:lnSpc>
+              <a:spcAft>
+                <a:spcPts val="400"/>
+              </a:spcAft>
+              <a:buChar char="•"/>
+            </a:pPr>
+            <a:r>
+              <a:rPr lang="ko-KR" sz="1050" b="0" i="0" dirty="0">
+                <a:solidFill>
+                  <a:srgbClr val="1D2A35"/>
+                </a:solidFill>
+                <a:latin typeface="Malgun Gothic"/>
+                <a:ea typeface="Malgun Gothic"/>
+              </a:rPr>
+              <a:t>격추 수로 전환(방사포 51 → 64): 창이 좁아 19초 늦은 명령이 창을 넘긴다. 지휘 구조의 효과가 격추로 바뀌는 유일한 유형.</a:t>
             </a:r>
           </a:p>
         </p:txBody>
@@ -14457,7 +14457,7 @@
                 <a:latin typeface="Malgun Gothic"/>
                 <a:ea typeface="Malgun Gothic"/>
               </a:rPr>
-              <a:t>K-JAMDS 효과척도 분석 결과서 6판(2026-10-04) · SC3 복합 동시 포화 · 한반도 본 배치(지휘소 96 · 포대 84) · 위협 228개 · seed 29 · 모든 수치는 공개자료 기반 정책연구용 개념값</a:t>
+              <a:t>K-JAMDS 효과척도 분석 결과서 7판(2026-10-05) · SC3 복합 동시 포화 · 한반도 본 배치(지휘소 96 · 포대 84) · 위협 228개 · seed 29 · 모든 수치는 공개자료 기반 정책연구용 개념값</a:t>
             </a:r>
           </a:p>
         </p:txBody>
@@ -14529,7 +14529,7 @@
                 <a:latin typeface="Malgun Gothic"/>
                 <a:ea typeface="Malgun Gothic"/>
               </a:rPr>
-              <a:t>0.51 / 0.45</a:t>
+              <a:t>0.51 / 0.49</a:t>
             </a:r>
           </a:p>
         </p:txBody>
@@ -14691,7 +14691,7 @@
                 <a:ea typeface="Malgun Gothic"/>
               </a:rPr>
               <a:t>THAAD 동시교전 채널
-(차단 26 · 24건 — 두 체계 같음)</a:t>
+(차단 26 · 27건 — 두 체계 같음)</a:t>
             </a:r>
           </a:p>
         </p:txBody>
@@ -14763,7 +14763,7 @@
                 <a:latin typeface="Malgun Gothic"/>
                 <a:ea typeface="Malgun Gothic"/>
               </a:rPr>
-              <a:t>19 → 13건</a:t>
+              <a:t>19 → 12건</a:t>
             </a:r>
           </a:p>
         </p:txBody>
@@ -15233,7 +15233,7 @@
                           <a:latin typeface="Malgun Gothic"/>
                           <a:ea typeface="Malgun Gothic"/>
                         </a:rPr>
-                        <a:t>최대 0.45 · 통합공중작전통제소 0.20</a:t>
+                        <a:t>최대 0.49 · 통합공중작전통제소 0.24(군단 방공 승인 포함)</a:t>
                       </a:r>
                     </a:p>
                   </a:txBody>
@@ -15767,7 +15767,7 @@
                           <a:latin typeface="Malgun Gothic"/>
                           <a:ea typeface="Malgun Gothic"/>
                         </a:rPr>
-                        <a:t>THAAD 6/6 포화 · 차단 24건</a:t>
+                        <a:t>THAAD 6/6 포화 · 차단 27건</a:t>
                       </a:r>
                     </a:p>
                   </a:txBody>
@@ -15945,7 +15945,7 @@
                           <a:latin typeface="Malgun Gothic"/>
                           <a:ea typeface="Malgun Gothic"/>
                         </a:rPr>
-                        <a:t>13건 · 45%</a:t>
+                        <a:t>12건 · 45%</a:t>
                       </a:r>
                     </a:p>
                   </a:txBody>
@@ -16356,7 +16356,7 @@
                 <a:latin typeface="Malgun Gothic"/>
                 <a:ea typeface="Malgun Gothic"/>
               </a:rPr>
-              <a:t>K-JAMDS 효과척도 분석 결과서 6판(2026-10-04) · SC3 복합 동시 포화 · 한반도 본 배치(지휘소 96 · 포대 84) · 위협 228개 · seed 29 · 모든 수치는 공개자료 기반 정책연구용 개념값</a:t>
+              <a:t>K-JAMDS 효과척도 분석 결과서 7판(2026-10-05) · SC3 복합 동시 포화 · 한반도 본 배치(지휘소 96 · 포대 84) · 위협 228개 · seed 29 · 모든 수치는 공개자료 기반 정책연구용 개념값</a:t>
             </a:r>
           </a:p>
         </p:txBody>
@@ -16616,7 +16616,7 @@
         <p:spPr>
           <a:xfrm>
             <a:off x="2286000" y="1920240"/>
-            <a:ext cx="1604772" cy="182880"/>
+            <a:ext cx="1747418" cy="182880"/>
           </a:xfrm>
           <a:prstGeom prst="rect">
             <a:avLst/>
@@ -16644,7 +16644,7 @@
         </p:nvSpPr>
         <p:spPr>
           <a:xfrm>
-            <a:off x="3936492" y="1874520"/>
+            <a:off x="4079138" y="1874520"/>
             <a:ext cx="731520" cy="274320"/>
           </a:xfrm>
           <a:prstGeom prst="rect">
@@ -16672,7 +16672,7 @@
                 <a:latin typeface="Malgun Gothic"/>
                 <a:ea typeface="Malgun Gothic"/>
               </a:rPr>
-              <a:t>0.45</a:t>
+              <a:t>0.49</a:t>
             </a:r>
           </a:p>
         </p:txBody>
@@ -16797,7 +16797,7 @@
         <p:spPr>
           <a:xfrm>
             <a:off x="2286000" y="2487168"/>
-            <a:ext cx="606247" cy="182880"/>
+            <a:ext cx="641909" cy="182880"/>
           </a:xfrm>
           <a:prstGeom prst="rect">
             <a:avLst/>
@@ -16825,7 +16825,7 @@
         </p:nvSpPr>
         <p:spPr>
           <a:xfrm>
-            <a:off x="2937967" y="2441448"/>
+            <a:off x="2973629" y="2441448"/>
             <a:ext cx="731520" cy="274320"/>
           </a:xfrm>
           <a:prstGeom prst="rect">
@@ -16853,7 +16853,7 @@
                 <a:latin typeface="Malgun Gothic"/>
                 <a:ea typeface="Malgun Gothic"/>
               </a:rPr>
-              <a:t>0.17</a:t>
+              <a:t>0.18</a:t>
             </a:r>
           </a:p>
         </p:txBody>
@@ -16949,7 +16949,7 @@
         <p:spPr>
           <a:xfrm>
             <a:off x="2286000" y="3054096"/>
-            <a:ext cx="713232" cy="182880"/>
+            <a:ext cx="855878" cy="182880"/>
           </a:xfrm>
           <a:prstGeom prst="rect">
             <a:avLst/>
@@ -16977,7 +16977,7 @@
         </p:nvSpPr>
         <p:spPr>
           <a:xfrm>
-            <a:off x="3044952" y="3008376"/>
+            <a:off x="3187598" y="3008376"/>
             <a:ext cx="731520" cy="274320"/>
           </a:xfrm>
           <a:prstGeom prst="rect">
@@ -17005,7 +17005,7 @@
                 <a:latin typeface="Malgun Gothic"/>
                 <a:ea typeface="Malgun Gothic"/>
               </a:rPr>
-              <a:t>0.20</a:t>
+              <a:t>0.24</a:t>
             </a:r>
           </a:p>
         </p:txBody>
@@ -17703,7 +17703,7 @@
                 <a:latin typeface="Malgun Gothic"/>
                 <a:ea typeface="Malgun Gothic"/>
               </a:rPr>
-              <a:t>방공여단 통제소는 두 체계 모두 편제에 있지만, To-Be는 통합공중작전통제소가 포대 사격통제소로 바로 명령하므로 교전 명령이 지나지 않는다(도착 0건). 지휘소 포화는 위협 3배부터이며, 거기서 To-Be 우위는 +14 → +117(5배)로 커진다.</a:t>
+              <a:t>방공여단 통제소는 두 체계 모두 편제에 있지만, To-Be는 통합공중작전통제소가 포대 사격통제소로 바로 명령하므로 교전 명령이 지나지 않는다(도착 0건). 지휘소 포화는 위협 3배부터이며, 거기서 To-Be 우위는 +12 → +101(5배)로 커진다.</a:t>
             </a:r>
           </a:p>
         </p:txBody>
@@ -17843,7 +17843,7 @@
                 <a:latin typeface="Malgun Gothic"/>
                 <a:ea typeface="Malgun Gothic"/>
               </a:rPr>
-              <a:t>막히는 곳은 포대: THAAD 채널 6/6 포화(차단 26·24건)와 상층 L-SAM 24발 소진(누수 19·13건). 요격 창이 겹치는 물리와 보유탄의 문제라 두 체계가 같다.</a:t>
+              <a:t>막히는 곳은 포대: THAAD 채널 6/6 포화(차단 26·27건)와 상층 L-SAM 24발 소진(누수 19·12건). 요격 창이 겹치는 물리와 보유탄의 문제라 두 체계가 같다.</a:t>
             </a:r>
           </a:p>
           <a:p>
